--- a/default/soldier weapon.pptx
+++ b/default/soldier weapon.pptx
@@ -8,10 +8,14 @@
     <p:sldId id="260" r:id="rId2"/>
     <p:sldId id="261" r:id="rId3"/>
     <p:sldId id="262" r:id="rId4"/>
-    <p:sldId id="258" r:id="rId5"/>
-    <p:sldId id="263" r:id="rId6"/>
-    <p:sldId id="265" r:id="rId7"/>
-    <p:sldId id="264" r:id="rId8"/>
+    <p:sldId id="266" r:id="rId5"/>
+    <p:sldId id="268" r:id="rId6"/>
+    <p:sldId id="258" r:id="rId7"/>
+    <p:sldId id="263" r:id="rId8"/>
+    <p:sldId id="265" r:id="rId9"/>
+    <p:sldId id="264" r:id="rId10"/>
+    <p:sldId id="267" r:id="rId11"/>
+    <p:sldId id="269" r:id="rId12"/>
   </p:sldIdLst>
   <p:sldSz cx="12192000" cy="6858000"/>
   <p:notesSz cx="6858000" cy="9144000"/>
@@ -247,7 +251,7 @@
           <a:p>
             <a:fld id="{0E085FA6-3BB9-47BA-8D81-299A75D1B58A}" type="datetimeFigureOut">
               <a:rPr kumimoji="1" lang="ja-JP" altLang="en-US" smtClean="0"/>
-              <a:t>2025/8/4</a:t>
+              <a:t>2025/10/14</a:t>
             </a:fld>
             <a:endParaRPr kumimoji="1" lang="ja-JP" altLang="en-US"/>
           </a:p>
@@ -447,7 +451,7 @@
           <a:p>
             <a:fld id="{0E085FA6-3BB9-47BA-8D81-299A75D1B58A}" type="datetimeFigureOut">
               <a:rPr kumimoji="1" lang="ja-JP" altLang="en-US" smtClean="0"/>
-              <a:t>2025/8/4</a:t>
+              <a:t>2025/10/14</a:t>
             </a:fld>
             <a:endParaRPr kumimoji="1" lang="ja-JP" altLang="en-US"/>
           </a:p>
@@ -657,7 +661,7 @@
           <a:p>
             <a:fld id="{0E085FA6-3BB9-47BA-8D81-299A75D1B58A}" type="datetimeFigureOut">
               <a:rPr kumimoji="1" lang="ja-JP" altLang="en-US" smtClean="0"/>
-              <a:t>2025/8/4</a:t>
+              <a:t>2025/10/14</a:t>
             </a:fld>
             <a:endParaRPr kumimoji="1" lang="ja-JP" altLang="en-US"/>
           </a:p>
@@ -857,7 +861,7 @@
           <a:p>
             <a:fld id="{0E085FA6-3BB9-47BA-8D81-299A75D1B58A}" type="datetimeFigureOut">
               <a:rPr kumimoji="1" lang="ja-JP" altLang="en-US" smtClean="0"/>
-              <a:t>2025/8/4</a:t>
+              <a:t>2025/10/14</a:t>
             </a:fld>
             <a:endParaRPr kumimoji="1" lang="ja-JP" altLang="en-US"/>
           </a:p>
@@ -1102,7 +1106,7 @@
           <a:p>
             <a:fld id="{0E085FA6-3BB9-47BA-8D81-299A75D1B58A}" type="datetimeFigureOut">
               <a:rPr kumimoji="1" lang="ja-JP" altLang="en-US" smtClean="0"/>
-              <a:t>2025/8/4</a:t>
+              <a:t>2025/10/14</a:t>
             </a:fld>
             <a:endParaRPr kumimoji="1" lang="ja-JP" altLang="en-US"/>
           </a:p>
@@ -1395,7 +1399,7 @@
           <a:p>
             <a:fld id="{0E085FA6-3BB9-47BA-8D81-299A75D1B58A}" type="datetimeFigureOut">
               <a:rPr kumimoji="1" lang="ja-JP" altLang="en-US" smtClean="0"/>
-              <a:t>2025/8/4</a:t>
+              <a:t>2025/10/14</a:t>
             </a:fld>
             <a:endParaRPr kumimoji="1" lang="ja-JP" altLang="en-US"/>
           </a:p>
@@ -1823,7 +1827,7 @@
           <a:p>
             <a:fld id="{0E085FA6-3BB9-47BA-8D81-299A75D1B58A}" type="datetimeFigureOut">
               <a:rPr kumimoji="1" lang="ja-JP" altLang="en-US" smtClean="0"/>
-              <a:t>2025/8/4</a:t>
+              <a:t>2025/10/14</a:t>
             </a:fld>
             <a:endParaRPr kumimoji="1" lang="ja-JP" altLang="en-US"/>
           </a:p>
@@ -1940,7 +1944,7 @@
           <a:p>
             <a:fld id="{0E085FA6-3BB9-47BA-8D81-299A75D1B58A}" type="datetimeFigureOut">
               <a:rPr kumimoji="1" lang="ja-JP" altLang="en-US" smtClean="0"/>
-              <a:t>2025/8/4</a:t>
+              <a:t>2025/10/14</a:t>
             </a:fld>
             <a:endParaRPr kumimoji="1" lang="ja-JP" altLang="en-US"/>
           </a:p>
@@ -2035,7 +2039,7 @@
           <a:p>
             <a:fld id="{0E085FA6-3BB9-47BA-8D81-299A75D1B58A}" type="datetimeFigureOut">
               <a:rPr kumimoji="1" lang="ja-JP" altLang="en-US" smtClean="0"/>
-              <a:t>2025/8/4</a:t>
+              <a:t>2025/10/14</a:t>
             </a:fld>
             <a:endParaRPr kumimoji="1" lang="ja-JP" altLang="en-US"/>
           </a:p>
@@ -2342,7 +2346,7 @@
           <a:p>
             <a:fld id="{0E085FA6-3BB9-47BA-8D81-299A75D1B58A}" type="datetimeFigureOut">
               <a:rPr kumimoji="1" lang="ja-JP" altLang="en-US" smtClean="0"/>
-              <a:t>2025/8/4</a:t>
+              <a:t>2025/10/14</a:t>
             </a:fld>
             <a:endParaRPr kumimoji="1" lang="ja-JP" altLang="en-US"/>
           </a:p>
@@ -2594,7 +2598,7 @@
           <a:p>
             <a:fld id="{0E085FA6-3BB9-47BA-8D81-299A75D1B58A}" type="datetimeFigureOut">
               <a:rPr kumimoji="1" lang="ja-JP" altLang="en-US" smtClean="0"/>
-              <a:t>2025/8/4</a:t>
+              <a:t>2025/10/14</a:t>
             </a:fld>
             <a:endParaRPr kumimoji="1" lang="ja-JP" altLang="en-US"/>
           </a:p>
@@ -2837,7 +2841,7 @@
           <a:p>
             <a:fld id="{0E085FA6-3BB9-47BA-8D81-299A75D1B58A}" type="datetimeFigureOut">
               <a:rPr kumimoji="1" lang="ja-JP" altLang="en-US" smtClean="0"/>
-              <a:t>2025/8/4</a:t>
+              <a:t>2025/10/14</a:t>
             </a:fld>
             <a:endParaRPr kumimoji="1" lang="ja-JP" altLang="en-US"/>
           </a:p>
@@ -4389,6 +4393,540 @@
 </p:sld>
 </file>
 
+<file path=ppt/slides/slide10.xml><?xml version="1.0" encoding="utf-8"?>
+<p:sld xmlns:a="http://schemas.openxmlformats.org/drawingml/2006/main" xmlns:r="http://schemas.openxmlformats.org/officeDocument/2006/relationships" xmlns:p="http://schemas.openxmlformats.org/presentationml/2006/main">
+  <p:cSld>
+    <p:spTree>
+      <p:nvGrpSpPr>
+        <p:cNvPr id="1" name=""/>
+        <p:cNvGrpSpPr/>
+        <p:nvPr/>
+      </p:nvGrpSpPr>
+      <p:grpSpPr>
+        <a:xfrm>
+          <a:off x="0" y="0"/>
+          <a:ext cx="0" cy="0"/>
+          <a:chOff x="0" y="0"/>
+          <a:chExt cx="0" cy="0"/>
+        </a:xfrm>
+      </p:grpSpPr>
+      <p:sp>
+        <p:nvSpPr>
+          <p:cNvPr id="3" name="楕円 2">
+            <a:extLst>
+              <a:ext uri="{FF2B5EF4-FFF2-40B4-BE49-F238E27FC236}">
+                <a16:creationId xmlns:a16="http://schemas.microsoft.com/office/drawing/2014/main" id="{80B3CB2B-BA9C-1AE8-4763-37208C69AF60}"/>
+              </a:ext>
+            </a:extLst>
+          </p:cNvPr>
+          <p:cNvSpPr/>
+          <p:nvPr/>
+        </p:nvSpPr>
+        <p:spPr>
+          <a:xfrm>
+            <a:off x="1504950" y="1866900"/>
+            <a:ext cx="2821538" cy="3444118"/>
+          </a:xfrm>
+          <a:prstGeom prst="ellipse">
+            <a:avLst/>
+          </a:prstGeom>
+          <a:gradFill flip="none" rotWithShape="1">
+            <a:gsLst>
+              <a:gs pos="0">
+                <a:schemeClr val="bg1">
+                  <a:lumMod val="65000"/>
+                  <a:shade val="30000"/>
+                  <a:satMod val="115000"/>
+                </a:schemeClr>
+              </a:gs>
+              <a:gs pos="50000">
+                <a:schemeClr val="bg1">
+                  <a:lumMod val="65000"/>
+                  <a:shade val="67500"/>
+                  <a:satMod val="115000"/>
+                </a:schemeClr>
+              </a:gs>
+              <a:gs pos="100000">
+                <a:schemeClr val="bg1">
+                  <a:lumMod val="65000"/>
+                  <a:shade val="100000"/>
+                  <a:satMod val="115000"/>
+                </a:schemeClr>
+              </a:gs>
+            </a:gsLst>
+            <a:lin ang="10800000" scaled="1"/>
+            <a:tileRect/>
+          </a:gradFill>
+          <a:ln>
+            <a:noFill/>
+          </a:ln>
+          <a:effectLst/>
+          <a:scene3d>
+            <a:camera prst="orthographicFront">
+              <a:rot lat="0" lon="0" rev="0"/>
+            </a:camera>
+            <a:lightRig rig="balanced" dir="t">
+              <a:rot lat="0" lon="0" rev="7200000"/>
+            </a:lightRig>
+          </a:scene3d>
+          <a:sp3d>
+            <a:bevelT w="596900" h="133350"/>
+          </a:sp3d>
+        </p:spPr>
+        <p:style>
+          <a:lnRef idx="2">
+            <a:schemeClr val="accent1">
+              <a:shade val="15000"/>
+            </a:schemeClr>
+          </a:lnRef>
+          <a:fillRef idx="1">
+            <a:schemeClr val="accent1"/>
+          </a:fillRef>
+          <a:effectRef idx="0">
+            <a:schemeClr val="accent1"/>
+          </a:effectRef>
+          <a:fontRef idx="minor">
+            <a:schemeClr val="lt1"/>
+          </a:fontRef>
+        </p:style>
+        <p:txBody>
+          <a:bodyPr rtlCol="0" anchor="ctr"/>
+          <a:lstStyle/>
+          <a:p>
+            <a:pPr algn="ctr"/>
+            <a:endParaRPr kumimoji="1" lang="ja-JP" altLang="en-US"/>
+          </a:p>
+        </p:txBody>
+      </p:sp>
+      <p:sp>
+        <p:nvSpPr>
+          <p:cNvPr id="13" name="アーチ 12">
+            <a:extLst>
+              <a:ext uri="{FF2B5EF4-FFF2-40B4-BE49-F238E27FC236}">
+                <a16:creationId xmlns:a16="http://schemas.microsoft.com/office/drawing/2014/main" id="{C32F9F54-8C43-BB63-6B44-57E17923784B}"/>
+              </a:ext>
+            </a:extLst>
+          </p:cNvPr>
+          <p:cNvSpPr/>
+          <p:nvPr/>
+        </p:nvSpPr>
+        <p:spPr>
+          <a:xfrm rot="10800000">
+            <a:off x="1504950" y="3171825"/>
+            <a:ext cx="2821538" cy="704850"/>
+          </a:xfrm>
+          <a:prstGeom prst="blockArc">
+            <a:avLst>
+              <a:gd name="adj1" fmla="val 10800000"/>
+              <a:gd name="adj2" fmla="val 40561"/>
+              <a:gd name="adj3" fmla="val 4714"/>
+            </a:avLst>
+          </a:prstGeom>
+          <a:gradFill>
+            <a:gsLst>
+              <a:gs pos="0">
+                <a:schemeClr val="tx1">
+                  <a:lumMod val="50000"/>
+                  <a:lumOff val="50000"/>
+                </a:schemeClr>
+              </a:gs>
+              <a:gs pos="47000">
+                <a:schemeClr val="tx1">
+                  <a:lumMod val="75000"/>
+                  <a:lumOff val="25000"/>
+                </a:schemeClr>
+              </a:gs>
+              <a:gs pos="100000">
+                <a:schemeClr val="tx1">
+                  <a:lumMod val="95000"/>
+                  <a:lumOff val="5000"/>
+                </a:schemeClr>
+              </a:gs>
+            </a:gsLst>
+            <a:lin ang="10800000" scaled="0"/>
+          </a:gradFill>
+          <a:ln>
+            <a:noFill/>
+          </a:ln>
+        </p:spPr>
+        <p:style>
+          <a:lnRef idx="2">
+            <a:schemeClr val="accent1">
+              <a:shade val="15000"/>
+            </a:schemeClr>
+          </a:lnRef>
+          <a:fillRef idx="1">
+            <a:schemeClr val="accent1"/>
+          </a:fillRef>
+          <a:effectRef idx="0">
+            <a:schemeClr val="accent1"/>
+          </a:effectRef>
+          <a:fontRef idx="minor">
+            <a:schemeClr val="lt1"/>
+          </a:fontRef>
+        </p:style>
+        <p:txBody>
+          <a:bodyPr rtlCol="0" anchor="ctr"/>
+          <a:lstStyle/>
+          <a:p>
+            <a:pPr algn="ctr"/>
+            <a:endParaRPr kumimoji="1" lang="ja-JP" altLang="en-US">
+              <a:solidFill>
+                <a:schemeClr val="tx1"/>
+              </a:solidFill>
+            </a:endParaRPr>
+          </a:p>
+        </p:txBody>
+      </p:sp>
+      <p:sp>
+        <p:nvSpPr>
+          <p:cNvPr id="14" name="アーチ 13">
+            <a:extLst>
+              <a:ext uri="{FF2B5EF4-FFF2-40B4-BE49-F238E27FC236}">
+                <a16:creationId xmlns:a16="http://schemas.microsoft.com/office/drawing/2014/main" id="{B8BE7002-A5F3-FEBF-0F26-BF84A687FE05}"/>
+              </a:ext>
+            </a:extLst>
+          </p:cNvPr>
+          <p:cNvSpPr/>
+          <p:nvPr/>
+        </p:nvSpPr>
+        <p:spPr>
+          <a:xfrm rot="16200000">
+            <a:off x="1193659" y="3236534"/>
+            <a:ext cx="3444118" cy="704850"/>
+          </a:xfrm>
+          <a:prstGeom prst="blockArc">
+            <a:avLst>
+              <a:gd name="adj1" fmla="val 10800000"/>
+              <a:gd name="adj2" fmla="val 40561"/>
+              <a:gd name="adj3" fmla="val 4714"/>
+            </a:avLst>
+          </a:prstGeom>
+          <a:gradFill>
+            <a:gsLst>
+              <a:gs pos="0">
+                <a:schemeClr val="tx1">
+                  <a:lumMod val="50000"/>
+                  <a:lumOff val="50000"/>
+                </a:schemeClr>
+              </a:gs>
+              <a:gs pos="75000">
+                <a:schemeClr val="tx1">
+                  <a:lumMod val="75000"/>
+                  <a:lumOff val="25000"/>
+                </a:schemeClr>
+              </a:gs>
+              <a:gs pos="100000">
+                <a:schemeClr val="tx1">
+                  <a:lumMod val="95000"/>
+                  <a:lumOff val="5000"/>
+                </a:schemeClr>
+              </a:gs>
+            </a:gsLst>
+            <a:lin ang="10800000" scaled="0"/>
+          </a:gradFill>
+          <a:ln>
+            <a:noFill/>
+          </a:ln>
+        </p:spPr>
+        <p:style>
+          <a:lnRef idx="2">
+            <a:schemeClr val="accent1">
+              <a:shade val="15000"/>
+            </a:schemeClr>
+          </a:lnRef>
+          <a:fillRef idx="1">
+            <a:schemeClr val="accent1"/>
+          </a:fillRef>
+          <a:effectRef idx="0">
+            <a:schemeClr val="accent1"/>
+          </a:effectRef>
+          <a:fontRef idx="minor">
+            <a:schemeClr val="lt1"/>
+          </a:fontRef>
+        </p:style>
+        <p:txBody>
+          <a:bodyPr rtlCol="0" anchor="ctr"/>
+          <a:lstStyle/>
+          <a:p>
+            <a:pPr algn="ctr"/>
+            <a:endParaRPr kumimoji="1" lang="ja-JP" altLang="en-US">
+              <a:solidFill>
+                <a:schemeClr val="tx1"/>
+              </a:solidFill>
+            </a:endParaRPr>
+          </a:p>
+        </p:txBody>
+      </p:sp>
+      <p:sp>
+        <p:nvSpPr>
+          <p:cNvPr id="15" name="楕円 14">
+            <a:extLst>
+              <a:ext uri="{FF2B5EF4-FFF2-40B4-BE49-F238E27FC236}">
+                <a16:creationId xmlns:a16="http://schemas.microsoft.com/office/drawing/2014/main" id="{DA578434-7A69-61F0-BCD0-565700EC76C7}"/>
+              </a:ext>
+            </a:extLst>
+          </p:cNvPr>
+          <p:cNvSpPr/>
+          <p:nvPr/>
+        </p:nvSpPr>
+        <p:spPr>
+          <a:xfrm>
+            <a:off x="6633210" y="1866900"/>
+            <a:ext cx="2821538" cy="3444118"/>
+          </a:xfrm>
+          <a:prstGeom prst="ellipse">
+            <a:avLst/>
+          </a:prstGeom>
+          <a:gradFill>
+            <a:gsLst>
+              <a:gs pos="0">
+                <a:schemeClr val="bg1">
+                  <a:lumMod val="65000"/>
+                  <a:shade val="30000"/>
+                  <a:satMod val="115000"/>
+                </a:schemeClr>
+              </a:gs>
+              <a:gs pos="50000">
+                <a:schemeClr val="bg1">
+                  <a:lumMod val="65000"/>
+                  <a:shade val="67500"/>
+                  <a:satMod val="115000"/>
+                </a:schemeClr>
+              </a:gs>
+              <a:gs pos="100000">
+                <a:schemeClr val="bg1">
+                  <a:lumMod val="65000"/>
+                  <a:shade val="100000"/>
+                  <a:satMod val="115000"/>
+                </a:schemeClr>
+              </a:gs>
+            </a:gsLst>
+            <a:lin ang="10800000" scaled="1"/>
+          </a:gradFill>
+          <a:ln>
+            <a:noFill/>
+          </a:ln>
+          <a:effectLst/>
+          <a:scene3d>
+            <a:camera prst="orthographicFront">
+              <a:rot lat="0" lon="0" rev="0"/>
+            </a:camera>
+            <a:lightRig rig="balanced" dir="t">
+              <a:rot lat="0" lon="0" rev="7200000"/>
+            </a:lightRig>
+          </a:scene3d>
+          <a:sp3d>
+            <a:bevelT w="965200" h="177800" prst="softRound"/>
+            <a:bevelB w="209550" h="260350"/>
+          </a:sp3d>
+        </p:spPr>
+        <p:style>
+          <a:lnRef idx="2">
+            <a:schemeClr val="accent1">
+              <a:shade val="15000"/>
+            </a:schemeClr>
+          </a:lnRef>
+          <a:fillRef idx="1">
+            <a:schemeClr val="accent1"/>
+          </a:fillRef>
+          <a:effectRef idx="0">
+            <a:schemeClr val="accent1"/>
+          </a:effectRef>
+          <a:fontRef idx="minor">
+            <a:schemeClr val="lt1"/>
+          </a:fontRef>
+        </p:style>
+        <p:txBody>
+          <a:bodyPr rtlCol="0" anchor="ctr"/>
+          <a:lstStyle/>
+          <a:p>
+            <a:pPr algn="ctr"/>
+            <a:endParaRPr kumimoji="1" lang="ja-JP" altLang="en-US"/>
+          </a:p>
+        </p:txBody>
+      </p:sp>
+      <p:sp>
+        <p:nvSpPr>
+          <p:cNvPr id="17" name="楕円 16">
+            <a:extLst>
+              <a:ext uri="{FF2B5EF4-FFF2-40B4-BE49-F238E27FC236}">
+                <a16:creationId xmlns:a16="http://schemas.microsoft.com/office/drawing/2014/main" id="{B37C7C43-1FF5-EF5A-0ED3-EFBD50F98153}"/>
+              </a:ext>
+            </a:extLst>
+          </p:cNvPr>
+          <p:cNvSpPr/>
+          <p:nvPr/>
+        </p:nvSpPr>
+        <p:spPr>
+          <a:xfrm>
+            <a:off x="6786679" y="2000188"/>
+            <a:ext cx="2514600" cy="3177540"/>
+          </a:xfrm>
+          <a:prstGeom prst="ellipse">
+            <a:avLst/>
+          </a:prstGeom>
+          <a:solidFill>
+            <a:schemeClr val="accent2">
+              <a:lumMod val="50000"/>
+            </a:schemeClr>
+          </a:solidFill>
+          <a:ln>
+            <a:noFill/>
+          </a:ln>
+          <a:scene3d>
+            <a:camera prst="orthographicFront"/>
+            <a:lightRig rig="threePt" dir="t">
+              <a:rot lat="0" lon="0" rev="2400000"/>
+            </a:lightRig>
+          </a:scene3d>
+          <a:sp3d>
+            <a:bevelT w="501650" h="273050" prst="softRound"/>
+            <a:bevelB w="0" h="0"/>
+          </a:sp3d>
+        </p:spPr>
+        <p:style>
+          <a:lnRef idx="2">
+            <a:schemeClr val="accent1">
+              <a:shade val="15000"/>
+            </a:schemeClr>
+          </a:lnRef>
+          <a:fillRef idx="1">
+            <a:schemeClr val="accent1"/>
+          </a:fillRef>
+          <a:effectRef idx="0">
+            <a:schemeClr val="accent1"/>
+          </a:effectRef>
+          <a:fontRef idx="minor">
+            <a:schemeClr val="lt1"/>
+          </a:fontRef>
+        </p:style>
+        <p:txBody>
+          <a:bodyPr rtlCol="0" anchor="ctr"/>
+          <a:lstStyle/>
+          <a:p>
+            <a:pPr algn="ctr"/>
+            <a:endParaRPr kumimoji="1" lang="ja-JP" altLang="en-US"/>
+          </a:p>
+        </p:txBody>
+      </p:sp>
+      <p:sp>
+        <p:nvSpPr>
+          <p:cNvPr id="18" name="アーチ 17">
+            <a:extLst>
+              <a:ext uri="{FF2B5EF4-FFF2-40B4-BE49-F238E27FC236}">
+                <a16:creationId xmlns:a16="http://schemas.microsoft.com/office/drawing/2014/main" id="{0250EA4D-EFCC-3CA0-142D-2AF673661F3C}"/>
+              </a:ext>
+            </a:extLst>
+          </p:cNvPr>
+          <p:cNvSpPr/>
+          <p:nvPr/>
+        </p:nvSpPr>
+        <p:spPr>
+          <a:xfrm rot="5400000">
+            <a:off x="7459678" y="3399829"/>
+            <a:ext cx="1168601" cy="378257"/>
+          </a:xfrm>
+          <a:prstGeom prst="blockArc">
+            <a:avLst>
+              <a:gd name="adj1" fmla="val 10800000"/>
+              <a:gd name="adj2" fmla="val 3"/>
+              <a:gd name="adj3" fmla="val 22482"/>
+            </a:avLst>
+          </a:prstGeom>
+          <a:solidFill>
+            <a:srgbClr val="672F09"/>
+          </a:solidFill>
+          <a:ln>
+            <a:noFill/>
+          </a:ln>
+          <a:effectLst>
+            <a:outerShdw blurRad="76200" sx="111000" sy="111000" algn="l" rotWithShape="0">
+              <a:prstClr val="black">
+                <a:alpha val="52000"/>
+              </a:prstClr>
+            </a:outerShdw>
+          </a:effectLst>
+          <a:scene3d>
+            <a:camera prst="orthographicFront"/>
+            <a:lightRig rig="threePt" dir="t"/>
+          </a:scene3d>
+          <a:sp3d>
+            <a:bevelT/>
+          </a:sp3d>
+        </p:spPr>
+        <p:style>
+          <a:lnRef idx="2">
+            <a:schemeClr val="accent1">
+              <a:shade val="15000"/>
+            </a:schemeClr>
+          </a:lnRef>
+          <a:fillRef idx="1">
+            <a:schemeClr val="accent1"/>
+          </a:fillRef>
+          <a:effectRef idx="0">
+            <a:schemeClr val="accent1"/>
+          </a:effectRef>
+          <a:fontRef idx="minor">
+            <a:schemeClr val="lt1"/>
+          </a:fontRef>
+        </p:style>
+        <p:txBody>
+          <a:bodyPr rtlCol="0" anchor="ctr"/>
+          <a:lstStyle/>
+          <a:p>
+            <a:pPr algn="ctr"/>
+            <a:endParaRPr kumimoji="1" lang="ja-JP" altLang="en-US">
+              <a:solidFill>
+                <a:schemeClr val="tx1"/>
+              </a:solidFill>
+            </a:endParaRPr>
+          </a:p>
+        </p:txBody>
+      </p:sp>
+    </p:spTree>
+    <p:extLst>
+      <p:ext uri="{BB962C8B-B14F-4D97-AF65-F5344CB8AC3E}">
+        <p14:creationId xmlns:p14="http://schemas.microsoft.com/office/powerpoint/2010/main" val="3658393341"/>
+      </p:ext>
+    </p:extLst>
+  </p:cSld>
+  <p:clrMapOvr>
+    <a:masterClrMapping/>
+  </p:clrMapOvr>
+</p:sld>
+</file>
+
+<file path=ppt/slides/slide11.xml><?xml version="1.0" encoding="utf-8"?>
+<p:sld xmlns:a="http://schemas.openxmlformats.org/drawingml/2006/main" xmlns:r="http://schemas.openxmlformats.org/officeDocument/2006/relationships" xmlns:p="http://schemas.openxmlformats.org/presentationml/2006/main">
+  <p:cSld>
+    <p:spTree>
+      <p:nvGrpSpPr>
+        <p:cNvPr id="1" name=""/>
+        <p:cNvGrpSpPr/>
+        <p:nvPr/>
+      </p:nvGrpSpPr>
+      <p:grpSpPr>
+        <a:xfrm>
+          <a:off x="0" y="0"/>
+          <a:ext cx="0" cy="0"/>
+          <a:chOff x="0" y="0"/>
+          <a:chExt cx="0" cy="0"/>
+        </a:xfrm>
+      </p:grpSpPr>
+    </p:spTree>
+    <p:extLst>
+      <p:ext uri="{BB962C8B-B14F-4D97-AF65-F5344CB8AC3E}">
+        <p14:creationId xmlns:p14="http://schemas.microsoft.com/office/powerpoint/2010/main" val="3948783979"/>
+      </p:ext>
+    </p:extLst>
+  </p:cSld>
+  <p:clrMapOvr>
+    <a:masterClrMapping/>
+  </p:clrMapOvr>
+</p:sld>
+</file>
+
 <file path=ppt/slides/slide2.xml><?xml version="1.0" encoding="utf-8"?>
 <p:sld xmlns:a="http://schemas.openxmlformats.org/drawingml/2006/main" xmlns:r="http://schemas.openxmlformats.org/officeDocument/2006/relationships" xmlns:p="http://schemas.openxmlformats.org/presentationml/2006/main">
   <p:cSld>
@@ -7240,7 +7778,13 @@
   <p:cSld>
     <p:spTree>
       <p:nvGrpSpPr>
-        <p:cNvPr id="1" name=""/>
+        <p:cNvPr id="1" name="">
+          <a:extLst>
+            <a:ext uri="{FF2B5EF4-FFF2-40B4-BE49-F238E27FC236}">
+              <a16:creationId xmlns:a16="http://schemas.microsoft.com/office/drawing/2014/main" id="{D94EE818-E25C-BB65-3570-CD76692F3748}"/>
+            </a:ext>
+          </a:extLst>
+        </p:cNvPr>
         <p:cNvGrpSpPr/>
         <p:nvPr/>
       </p:nvGrpSpPr>
@@ -7252,670 +7796,1018 @@
           <a:chExt cx="0" cy="0"/>
         </a:xfrm>
       </p:grpSpPr>
+      <p:sp>
+        <p:nvSpPr>
+          <p:cNvPr id="27" name="正方形/長方形 26">
+            <a:extLst>
+              <a:ext uri="{FF2B5EF4-FFF2-40B4-BE49-F238E27FC236}">
+                <a16:creationId xmlns:a16="http://schemas.microsoft.com/office/drawing/2014/main" id="{F53F3D15-170F-7052-46CB-59F9F98447AB}"/>
+              </a:ext>
+            </a:extLst>
+          </p:cNvPr>
+          <p:cNvSpPr/>
+          <p:nvPr/>
+        </p:nvSpPr>
+        <p:spPr>
+          <a:xfrm>
+            <a:off x="327381" y="542400"/>
+            <a:ext cx="2152505" cy="2152505"/>
+          </a:xfrm>
+          <a:prstGeom prst="rect">
+            <a:avLst/>
+          </a:prstGeom>
+          <a:solidFill>
+            <a:schemeClr val="bg1"/>
+          </a:solidFill>
+          <a:ln>
+            <a:solidFill>
+              <a:schemeClr val="tx1"/>
+            </a:solidFill>
+          </a:ln>
+        </p:spPr>
+        <p:style>
+          <a:lnRef idx="2">
+            <a:schemeClr val="accent1">
+              <a:shade val="50000"/>
+            </a:schemeClr>
+          </a:lnRef>
+          <a:fillRef idx="1">
+            <a:schemeClr val="accent1"/>
+          </a:fillRef>
+          <a:effectRef idx="0">
+            <a:schemeClr val="accent1"/>
+          </a:effectRef>
+          <a:fontRef idx="minor">
+            <a:schemeClr val="lt1"/>
+          </a:fontRef>
+        </p:style>
+        <p:txBody>
+          <a:bodyPr rtlCol="0" anchor="ctr"/>
+          <a:lstStyle/>
+          <a:p>
+            <a:pPr algn="ctr"/>
+            <a:endParaRPr kumimoji="1" lang="ja-JP" altLang="en-US"/>
+          </a:p>
+        </p:txBody>
+      </p:sp>
+      <p:sp>
+        <p:nvSpPr>
+          <p:cNvPr id="40" name="正方形/長方形 39">
+            <a:extLst>
+              <a:ext uri="{FF2B5EF4-FFF2-40B4-BE49-F238E27FC236}">
+                <a16:creationId xmlns:a16="http://schemas.microsoft.com/office/drawing/2014/main" id="{5BC2AD70-772F-4352-7B28-4CF57ADC3FD2}"/>
+              </a:ext>
+            </a:extLst>
+          </p:cNvPr>
+          <p:cNvSpPr/>
+          <p:nvPr/>
+        </p:nvSpPr>
+        <p:spPr>
+          <a:xfrm>
+            <a:off x="2497015" y="542400"/>
+            <a:ext cx="2152505" cy="2152505"/>
+          </a:xfrm>
+          <a:prstGeom prst="rect">
+            <a:avLst/>
+          </a:prstGeom>
+          <a:solidFill>
+            <a:schemeClr val="bg1"/>
+          </a:solidFill>
+          <a:ln>
+            <a:solidFill>
+              <a:schemeClr val="tx1"/>
+            </a:solidFill>
+          </a:ln>
+        </p:spPr>
+        <p:style>
+          <a:lnRef idx="2">
+            <a:schemeClr val="accent1">
+              <a:shade val="50000"/>
+            </a:schemeClr>
+          </a:lnRef>
+          <a:fillRef idx="1">
+            <a:schemeClr val="accent1"/>
+          </a:fillRef>
+          <a:effectRef idx="0">
+            <a:schemeClr val="accent1"/>
+          </a:effectRef>
+          <a:fontRef idx="minor">
+            <a:schemeClr val="lt1"/>
+          </a:fontRef>
+        </p:style>
+        <p:txBody>
+          <a:bodyPr rtlCol="0" anchor="ctr"/>
+          <a:lstStyle/>
+          <a:p>
+            <a:pPr algn="ctr"/>
+            <a:endParaRPr kumimoji="1" lang="ja-JP" altLang="en-US"/>
+          </a:p>
+        </p:txBody>
+      </p:sp>
+      <p:sp>
+        <p:nvSpPr>
+          <p:cNvPr id="41" name="正方形/長方形 40">
+            <a:extLst>
+              <a:ext uri="{FF2B5EF4-FFF2-40B4-BE49-F238E27FC236}">
+                <a16:creationId xmlns:a16="http://schemas.microsoft.com/office/drawing/2014/main" id="{2D14CF4E-E93D-A7D3-A4B8-8BCA61E6B7C1}"/>
+              </a:ext>
+            </a:extLst>
+          </p:cNvPr>
+          <p:cNvSpPr/>
+          <p:nvPr/>
+        </p:nvSpPr>
+        <p:spPr>
+          <a:xfrm>
+            <a:off x="327381" y="2706587"/>
+            <a:ext cx="2152505" cy="2152505"/>
+          </a:xfrm>
+          <a:prstGeom prst="rect">
+            <a:avLst/>
+          </a:prstGeom>
+          <a:solidFill>
+            <a:schemeClr val="bg1"/>
+          </a:solidFill>
+          <a:ln>
+            <a:solidFill>
+              <a:schemeClr val="tx1"/>
+            </a:solidFill>
+          </a:ln>
+        </p:spPr>
+        <p:style>
+          <a:lnRef idx="2">
+            <a:schemeClr val="accent1">
+              <a:shade val="50000"/>
+            </a:schemeClr>
+          </a:lnRef>
+          <a:fillRef idx="1">
+            <a:schemeClr val="accent1"/>
+          </a:fillRef>
+          <a:effectRef idx="0">
+            <a:schemeClr val="accent1"/>
+          </a:effectRef>
+          <a:fontRef idx="minor">
+            <a:schemeClr val="lt1"/>
+          </a:fontRef>
+        </p:style>
+        <p:txBody>
+          <a:bodyPr rtlCol="0" anchor="ctr"/>
+          <a:lstStyle/>
+          <a:p>
+            <a:pPr algn="ctr"/>
+            <a:endParaRPr kumimoji="1" lang="ja-JP" altLang="en-US"/>
+          </a:p>
+        </p:txBody>
+      </p:sp>
+      <p:sp>
+        <p:nvSpPr>
+          <p:cNvPr id="42" name="正方形/長方形 41">
+            <a:extLst>
+              <a:ext uri="{FF2B5EF4-FFF2-40B4-BE49-F238E27FC236}">
+                <a16:creationId xmlns:a16="http://schemas.microsoft.com/office/drawing/2014/main" id="{1E038822-59BD-2CFE-3ADB-3AD1BD903D43}"/>
+              </a:ext>
+            </a:extLst>
+          </p:cNvPr>
+          <p:cNvSpPr/>
+          <p:nvPr/>
+        </p:nvSpPr>
+        <p:spPr>
+          <a:xfrm>
+            <a:off x="2497015" y="2706587"/>
+            <a:ext cx="2152505" cy="2152505"/>
+          </a:xfrm>
+          <a:prstGeom prst="rect">
+            <a:avLst/>
+          </a:prstGeom>
+          <a:solidFill>
+            <a:schemeClr val="bg1"/>
+          </a:solidFill>
+          <a:ln>
+            <a:solidFill>
+              <a:schemeClr val="tx1"/>
+            </a:solidFill>
+          </a:ln>
+        </p:spPr>
+        <p:style>
+          <a:lnRef idx="2">
+            <a:schemeClr val="accent1">
+              <a:shade val="50000"/>
+            </a:schemeClr>
+          </a:lnRef>
+          <a:fillRef idx="1">
+            <a:schemeClr val="accent1"/>
+          </a:fillRef>
+          <a:effectRef idx="0">
+            <a:schemeClr val="accent1"/>
+          </a:effectRef>
+          <a:fontRef idx="minor">
+            <a:schemeClr val="lt1"/>
+          </a:fontRef>
+        </p:style>
+        <p:txBody>
+          <a:bodyPr rtlCol="0" anchor="ctr"/>
+          <a:lstStyle/>
+          <a:p>
+            <a:pPr algn="ctr"/>
+            <a:endParaRPr kumimoji="1" lang="ja-JP" altLang="en-US"/>
+          </a:p>
+        </p:txBody>
+      </p:sp>
+      <p:sp>
+        <p:nvSpPr>
+          <p:cNvPr id="43" name="正方形/長方形 42">
+            <a:extLst>
+              <a:ext uri="{FF2B5EF4-FFF2-40B4-BE49-F238E27FC236}">
+                <a16:creationId xmlns:a16="http://schemas.microsoft.com/office/drawing/2014/main" id="{71DF4263-488A-C170-41F9-8169215A71D1}"/>
+              </a:ext>
+            </a:extLst>
+          </p:cNvPr>
+          <p:cNvSpPr/>
+          <p:nvPr/>
+        </p:nvSpPr>
+        <p:spPr>
+          <a:xfrm>
+            <a:off x="327381" y="4870595"/>
+            <a:ext cx="2152505" cy="2152505"/>
+          </a:xfrm>
+          <a:prstGeom prst="rect">
+            <a:avLst/>
+          </a:prstGeom>
+          <a:solidFill>
+            <a:schemeClr val="bg1"/>
+          </a:solidFill>
+          <a:ln>
+            <a:solidFill>
+              <a:schemeClr val="tx1"/>
+            </a:solidFill>
+          </a:ln>
+        </p:spPr>
+        <p:style>
+          <a:lnRef idx="2">
+            <a:schemeClr val="accent1">
+              <a:shade val="50000"/>
+            </a:schemeClr>
+          </a:lnRef>
+          <a:fillRef idx="1">
+            <a:schemeClr val="accent1"/>
+          </a:fillRef>
+          <a:effectRef idx="0">
+            <a:schemeClr val="accent1"/>
+          </a:effectRef>
+          <a:fontRef idx="minor">
+            <a:schemeClr val="lt1"/>
+          </a:fontRef>
+        </p:style>
+        <p:txBody>
+          <a:bodyPr rtlCol="0" anchor="ctr"/>
+          <a:lstStyle/>
+          <a:p>
+            <a:pPr algn="ctr"/>
+            <a:endParaRPr kumimoji="1" lang="ja-JP" altLang="en-US"/>
+          </a:p>
+        </p:txBody>
+      </p:sp>
+      <p:sp>
+        <p:nvSpPr>
+          <p:cNvPr id="44" name="正方形/長方形 43">
+            <a:extLst>
+              <a:ext uri="{FF2B5EF4-FFF2-40B4-BE49-F238E27FC236}">
+                <a16:creationId xmlns:a16="http://schemas.microsoft.com/office/drawing/2014/main" id="{7C2EF972-D632-3F46-837D-1468CBF08DC7}"/>
+              </a:ext>
+            </a:extLst>
+          </p:cNvPr>
+          <p:cNvSpPr/>
+          <p:nvPr/>
+        </p:nvSpPr>
+        <p:spPr>
+          <a:xfrm>
+            <a:off x="2497015" y="4870595"/>
+            <a:ext cx="2152505" cy="2152505"/>
+          </a:xfrm>
+          <a:prstGeom prst="rect">
+            <a:avLst/>
+          </a:prstGeom>
+          <a:solidFill>
+            <a:schemeClr val="bg1"/>
+          </a:solidFill>
+          <a:ln>
+            <a:solidFill>
+              <a:schemeClr val="tx1"/>
+            </a:solidFill>
+          </a:ln>
+        </p:spPr>
+        <p:style>
+          <a:lnRef idx="2">
+            <a:schemeClr val="accent1">
+              <a:shade val="50000"/>
+            </a:schemeClr>
+          </a:lnRef>
+          <a:fillRef idx="1">
+            <a:schemeClr val="accent1"/>
+          </a:fillRef>
+          <a:effectRef idx="0">
+            <a:schemeClr val="accent1"/>
+          </a:effectRef>
+          <a:fontRef idx="minor">
+            <a:schemeClr val="lt1"/>
+          </a:fontRef>
+        </p:style>
+        <p:txBody>
+          <a:bodyPr rtlCol="0" anchor="ctr"/>
+          <a:lstStyle/>
+          <a:p>
+            <a:pPr algn="ctr"/>
+            <a:endParaRPr kumimoji="1" lang="ja-JP" altLang="en-US"/>
+          </a:p>
+        </p:txBody>
+      </p:sp>
+      <p:sp>
+        <p:nvSpPr>
+          <p:cNvPr id="47" name="正方形/長方形 46">
+            <a:extLst>
+              <a:ext uri="{FF2B5EF4-FFF2-40B4-BE49-F238E27FC236}">
+                <a16:creationId xmlns:a16="http://schemas.microsoft.com/office/drawing/2014/main" id="{00633738-8716-0DB2-66AB-D10736633CEE}"/>
+              </a:ext>
+            </a:extLst>
+          </p:cNvPr>
+          <p:cNvSpPr/>
+          <p:nvPr/>
+        </p:nvSpPr>
+        <p:spPr>
+          <a:xfrm>
+            <a:off x="4666649" y="2706587"/>
+            <a:ext cx="2152505" cy="2152505"/>
+          </a:xfrm>
+          <a:prstGeom prst="rect">
+            <a:avLst/>
+          </a:prstGeom>
+          <a:solidFill>
+            <a:schemeClr val="bg1"/>
+          </a:solidFill>
+          <a:ln>
+            <a:solidFill>
+              <a:schemeClr val="tx1"/>
+            </a:solidFill>
+          </a:ln>
+        </p:spPr>
+        <p:style>
+          <a:lnRef idx="2">
+            <a:schemeClr val="accent1">
+              <a:shade val="50000"/>
+            </a:schemeClr>
+          </a:lnRef>
+          <a:fillRef idx="1">
+            <a:schemeClr val="accent1"/>
+          </a:fillRef>
+          <a:effectRef idx="0">
+            <a:schemeClr val="accent1"/>
+          </a:effectRef>
+          <a:fontRef idx="minor">
+            <a:schemeClr val="lt1"/>
+          </a:fontRef>
+        </p:style>
+        <p:txBody>
+          <a:bodyPr rtlCol="0" anchor="ctr"/>
+          <a:lstStyle/>
+          <a:p>
+            <a:pPr algn="ctr"/>
+            <a:endParaRPr kumimoji="1" lang="ja-JP" altLang="en-US"/>
+          </a:p>
+        </p:txBody>
+      </p:sp>
+      <p:sp>
+        <p:nvSpPr>
+          <p:cNvPr id="48" name="正方形/長方形 47">
+            <a:extLst>
+              <a:ext uri="{FF2B5EF4-FFF2-40B4-BE49-F238E27FC236}">
+                <a16:creationId xmlns:a16="http://schemas.microsoft.com/office/drawing/2014/main" id="{B93B4B65-AE00-F42A-F42A-0FFF29992A43}"/>
+              </a:ext>
+            </a:extLst>
+          </p:cNvPr>
+          <p:cNvSpPr/>
+          <p:nvPr/>
+        </p:nvSpPr>
+        <p:spPr>
+          <a:xfrm>
+            <a:off x="6823583" y="2706587"/>
+            <a:ext cx="2152505" cy="2152505"/>
+          </a:xfrm>
+          <a:prstGeom prst="rect">
+            <a:avLst/>
+          </a:prstGeom>
+          <a:solidFill>
+            <a:schemeClr val="bg1"/>
+          </a:solidFill>
+          <a:ln>
+            <a:solidFill>
+              <a:schemeClr val="tx1"/>
+            </a:solidFill>
+          </a:ln>
+        </p:spPr>
+        <p:style>
+          <a:lnRef idx="2">
+            <a:schemeClr val="accent1">
+              <a:shade val="50000"/>
+            </a:schemeClr>
+          </a:lnRef>
+          <a:fillRef idx="1">
+            <a:schemeClr val="accent1"/>
+          </a:fillRef>
+          <a:effectRef idx="0">
+            <a:schemeClr val="accent1"/>
+          </a:effectRef>
+          <a:fontRef idx="minor">
+            <a:schemeClr val="lt1"/>
+          </a:fontRef>
+        </p:style>
+        <p:txBody>
+          <a:bodyPr rtlCol="0" anchor="ctr"/>
+          <a:lstStyle/>
+          <a:p>
+            <a:pPr algn="ctr"/>
+            <a:endParaRPr kumimoji="1" lang="ja-JP" altLang="en-US"/>
+          </a:p>
+        </p:txBody>
+      </p:sp>
+      <p:sp>
+        <p:nvSpPr>
+          <p:cNvPr id="53" name="正方形/長方形 52">
+            <a:extLst>
+              <a:ext uri="{FF2B5EF4-FFF2-40B4-BE49-F238E27FC236}">
+                <a16:creationId xmlns:a16="http://schemas.microsoft.com/office/drawing/2014/main" id="{EFB87467-19BD-EE09-729D-7C481F0A72A2}"/>
+              </a:ext>
+            </a:extLst>
+          </p:cNvPr>
+          <p:cNvSpPr/>
+          <p:nvPr/>
+        </p:nvSpPr>
+        <p:spPr>
+          <a:xfrm>
+            <a:off x="4666649" y="4870595"/>
+            <a:ext cx="2152505" cy="2152505"/>
+          </a:xfrm>
+          <a:prstGeom prst="rect">
+            <a:avLst/>
+          </a:prstGeom>
+          <a:solidFill>
+            <a:schemeClr val="bg1"/>
+          </a:solidFill>
+          <a:ln>
+            <a:solidFill>
+              <a:schemeClr val="tx1"/>
+            </a:solidFill>
+          </a:ln>
+        </p:spPr>
+        <p:style>
+          <a:lnRef idx="2">
+            <a:schemeClr val="accent1">
+              <a:shade val="50000"/>
+            </a:schemeClr>
+          </a:lnRef>
+          <a:fillRef idx="1">
+            <a:schemeClr val="accent1"/>
+          </a:fillRef>
+          <a:effectRef idx="0">
+            <a:schemeClr val="accent1"/>
+          </a:effectRef>
+          <a:fontRef idx="minor">
+            <a:schemeClr val="lt1"/>
+          </a:fontRef>
+        </p:style>
+        <p:txBody>
+          <a:bodyPr rtlCol="0" anchor="ctr"/>
+          <a:lstStyle/>
+          <a:p>
+            <a:pPr algn="ctr"/>
+            <a:endParaRPr kumimoji="1" lang="ja-JP" altLang="en-US"/>
+          </a:p>
+        </p:txBody>
+      </p:sp>
+      <p:sp>
+        <p:nvSpPr>
+          <p:cNvPr id="56" name="正方形/長方形 55">
+            <a:extLst>
+              <a:ext uri="{FF2B5EF4-FFF2-40B4-BE49-F238E27FC236}">
+                <a16:creationId xmlns:a16="http://schemas.microsoft.com/office/drawing/2014/main" id="{68CBDC09-61F0-D608-15D2-ED0571C64294}"/>
+              </a:ext>
+            </a:extLst>
+          </p:cNvPr>
+          <p:cNvSpPr/>
+          <p:nvPr/>
+        </p:nvSpPr>
+        <p:spPr>
+          <a:xfrm>
+            <a:off x="6823583" y="4870595"/>
+            <a:ext cx="2152505" cy="2152505"/>
+          </a:xfrm>
+          <a:prstGeom prst="rect">
+            <a:avLst/>
+          </a:prstGeom>
+          <a:solidFill>
+            <a:schemeClr val="bg1"/>
+          </a:solidFill>
+          <a:ln>
+            <a:solidFill>
+              <a:schemeClr val="tx1"/>
+            </a:solidFill>
+          </a:ln>
+        </p:spPr>
+        <p:style>
+          <a:lnRef idx="2">
+            <a:schemeClr val="accent1">
+              <a:shade val="50000"/>
+            </a:schemeClr>
+          </a:lnRef>
+          <a:fillRef idx="1">
+            <a:schemeClr val="accent1"/>
+          </a:fillRef>
+          <a:effectRef idx="0">
+            <a:schemeClr val="accent1"/>
+          </a:effectRef>
+          <a:fontRef idx="minor">
+            <a:schemeClr val="lt1"/>
+          </a:fontRef>
+        </p:style>
+        <p:txBody>
+          <a:bodyPr rtlCol="0" anchor="ctr"/>
+          <a:lstStyle/>
+          <a:p>
+            <a:pPr algn="ctr"/>
+            <a:endParaRPr kumimoji="1" lang="ja-JP" altLang="en-US"/>
+          </a:p>
+        </p:txBody>
+      </p:sp>
+      <p:sp>
+        <p:nvSpPr>
+          <p:cNvPr id="58" name="正方形/長方形 57">
+            <a:extLst>
+              <a:ext uri="{FF2B5EF4-FFF2-40B4-BE49-F238E27FC236}">
+                <a16:creationId xmlns:a16="http://schemas.microsoft.com/office/drawing/2014/main" id="{8C12D728-7481-6704-2876-381F46E10481}"/>
+              </a:ext>
+            </a:extLst>
+          </p:cNvPr>
+          <p:cNvSpPr/>
+          <p:nvPr/>
+        </p:nvSpPr>
+        <p:spPr>
+          <a:xfrm>
+            <a:off x="8980517" y="2706587"/>
+            <a:ext cx="2152505" cy="2152505"/>
+          </a:xfrm>
+          <a:prstGeom prst="rect">
+            <a:avLst/>
+          </a:prstGeom>
+          <a:solidFill>
+            <a:schemeClr val="bg1"/>
+          </a:solidFill>
+          <a:ln>
+            <a:solidFill>
+              <a:schemeClr val="tx1"/>
+            </a:solidFill>
+          </a:ln>
+        </p:spPr>
+        <p:style>
+          <a:lnRef idx="2">
+            <a:schemeClr val="accent1">
+              <a:shade val="50000"/>
+            </a:schemeClr>
+          </a:lnRef>
+          <a:fillRef idx="1">
+            <a:schemeClr val="accent1"/>
+          </a:fillRef>
+          <a:effectRef idx="0">
+            <a:schemeClr val="accent1"/>
+          </a:effectRef>
+          <a:fontRef idx="minor">
+            <a:schemeClr val="lt1"/>
+          </a:fontRef>
+        </p:style>
+        <p:txBody>
+          <a:bodyPr rtlCol="0" anchor="ctr"/>
+          <a:lstStyle/>
+          <a:p>
+            <a:pPr algn="ctr"/>
+            <a:endParaRPr kumimoji="1" lang="ja-JP" altLang="en-US"/>
+          </a:p>
+        </p:txBody>
+      </p:sp>
+      <p:sp>
+        <p:nvSpPr>
+          <p:cNvPr id="59" name="正方形/長方形 58">
+            <a:extLst>
+              <a:ext uri="{FF2B5EF4-FFF2-40B4-BE49-F238E27FC236}">
+                <a16:creationId xmlns:a16="http://schemas.microsoft.com/office/drawing/2014/main" id="{4475A027-C139-FE9C-70EB-8F7F35DEEF83}"/>
+              </a:ext>
+            </a:extLst>
+          </p:cNvPr>
+          <p:cNvSpPr/>
+          <p:nvPr/>
+        </p:nvSpPr>
+        <p:spPr>
+          <a:xfrm>
+            <a:off x="8980517" y="4870595"/>
+            <a:ext cx="2152505" cy="2152505"/>
+          </a:xfrm>
+          <a:prstGeom prst="rect">
+            <a:avLst/>
+          </a:prstGeom>
+          <a:solidFill>
+            <a:schemeClr val="bg1"/>
+          </a:solidFill>
+          <a:ln>
+            <a:solidFill>
+              <a:schemeClr val="tx1"/>
+            </a:solidFill>
+          </a:ln>
+        </p:spPr>
+        <p:style>
+          <a:lnRef idx="2">
+            <a:schemeClr val="accent1">
+              <a:shade val="50000"/>
+            </a:schemeClr>
+          </a:lnRef>
+          <a:fillRef idx="1">
+            <a:schemeClr val="accent1"/>
+          </a:fillRef>
+          <a:effectRef idx="0">
+            <a:schemeClr val="accent1"/>
+          </a:effectRef>
+          <a:fontRef idx="minor">
+            <a:schemeClr val="lt1"/>
+          </a:fontRef>
+        </p:style>
+        <p:txBody>
+          <a:bodyPr rtlCol="0" anchor="ctr"/>
+          <a:lstStyle/>
+          <a:p>
+            <a:pPr algn="ctr"/>
+            <a:endParaRPr kumimoji="1" lang="ja-JP" altLang="en-US"/>
+          </a:p>
+        </p:txBody>
+      </p:sp>
+      <p:sp>
+        <p:nvSpPr>
+          <p:cNvPr id="2" name="正方形/長方形 1">
+            <a:extLst>
+              <a:ext uri="{FF2B5EF4-FFF2-40B4-BE49-F238E27FC236}">
+                <a16:creationId xmlns:a16="http://schemas.microsoft.com/office/drawing/2014/main" id="{794004E5-6CF2-13A8-AD41-45FE2B3FC81B}"/>
+              </a:ext>
+            </a:extLst>
+          </p:cNvPr>
+          <p:cNvSpPr/>
+          <p:nvPr/>
+        </p:nvSpPr>
+        <p:spPr>
+          <a:xfrm>
+            <a:off x="5196168" y="1122960"/>
+            <a:ext cx="1069260" cy="1069260"/>
+          </a:xfrm>
+          <a:prstGeom prst="rect">
+            <a:avLst/>
+          </a:prstGeom>
+          <a:solidFill>
+            <a:schemeClr val="bg1"/>
+          </a:solidFill>
+          <a:ln>
+            <a:solidFill>
+              <a:schemeClr val="tx1"/>
+            </a:solidFill>
+          </a:ln>
+        </p:spPr>
+        <p:style>
+          <a:lnRef idx="2">
+            <a:schemeClr val="accent1">
+              <a:shade val="50000"/>
+            </a:schemeClr>
+          </a:lnRef>
+          <a:fillRef idx="1">
+            <a:schemeClr val="accent1"/>
+          </a:fillRef>
+          <a:effectRef idx="0">
+            <a:schemeClr val="accent1"/>
+          </a:effectRef>
+          <a:fontRef idx="minor">
+            <a:schemeClr val="lt1"/>
+          </a:fontRef>
+        </p:style>
+        <p:txBody>
+          <a:bodyPr rtlCol="0" anchor="ctr"/>
+          <a:lstStyle/>
+          <a:p>
+            <a:pPr algn="ctr"/>
+            <a:endParaRPr kumimoji="1" lang="ja-JP" altLang="en-US"/>
+          </a:p>
+        </p:txBody>
+      </p:sp>
+      <p:sp>
+        <p:nvSpPr>
+          <p:cNvPr id="3" name="正方形/長方形 2">
+            <a:extLst>
+              <a:ext uri="{FF2B5EF4-FFF2-40B4-BE49-F238E27FC236}">
+                <a16:creationId xmlns:a16="http://schemas.microsoft.com/office/drawing/2014/main" id="{66EB7453-240E-7B84-F7A9-3F5A946E2910}"/>
+              </a:ext>
+            </a:extLst>
+          </p:cNvPr>
+          <p:cNvSpPr/>
+          <p:nvPr/>
+        </p:nvSpPr>
+        <p:spPr>
+          <a:xfrm>
+            <a:off x="6645353" y="1122960"/>
+            <a:ext cx="1069260" cy="1069260"/>
+          </a:xfrm>
+          <a:prstGeom prst="rect">
+            <a:avLst/>
+          </a:prstGeom>
+          <a:solidFill>
+            <a:schemeClr val="bg1"/>
+          </a:solidFill>
+          <a:ln>
+            <a:solidFill>
+              <a:schemeClr val="tx1"/>
+            </a:solidFill>
+          </a:ln>
+        </p:spPr>
+        <p:style>
+          <a:lnRef idx="2">
+            <a:schemeClr val="accent1">
+              <a:shade val="50000"/>
+            </a:schemeClr>
+          </a:lnRef>
+          <a:fillRef idx="1">
+            <a:schemeClr val="accent1"/>
+          </a:fillRef>
+          <a:effectRef idx="0">
+            <a:schemeClr val="accent1"/>
+          </a:effectRef>
+          <a:fontRef idx="minor">
+            <a:schemeClr val="lt1"/>
+          </a:fontRef>
+        </p:style>
+        <p:txBody>
+          <a:bodyPr rtlCol="0" anchor="ctr"/>
+          <a:lstStyle/>
+          <a:p>
+            <a:pPr algn="ctr"/>
+            <a:endParaRPr kumimoji="1" lang="ja-JP" altLang="en-US"/>
+          </a:p>
+        </p:txBody>
+      </p:sp>
+      <p:sp>
+        <p:nvSpPr>
+          <p:cNvPr id="4" name="正方形/長方形 3">
+            <a:extLst>
+              <a:ext uri="{FF2B5EF4-FFF2-40B4-BE49-F238E27FC236}">
+                <a16:creationId xmlns:a16="http://schemas.microsoft.com/office/drawing/2014/main" id="{072915A1-69A4-3FCF-5C36-AC44839FAB3A}"/>
+              </a:ext>
+            </a:extLst>
+          </p:cNvPr>
+          <p:cNvSpPr/>
+          <p:nvPr/>
+        </p:nvSpPr>
+        <p:spPr>
+          <a:xfrm>
+            <a:off x="8075194" y="1122960"/>
+            <a:ext cx="1069260" cy="1069260"/>
+          </a:xfrm>
+          <a:prstGeom prst="rect">
+            <a:avLst/>
+          </a:prstGeom>
+          <a:solidFill>
+            <a:schemeClr val="bg1"/>
+          </a:solidFill>
+          <a:ln>
+            <a:solidFill>
+              <a:schemeClr val="tx1"/>
+            </a:solidFill>
+          </a:ln>
+        </p:spPr>
+        <p:style>
+          <a:lnRef idx="2">
+            <a:schemeClr val="accent1">
+              <a:shade val="50000"/>
+            </a:schemeClr>
+          </a:lnRef>
+          <a:fillRef idx="1">
+            <a:schemeClr val="accent1"/>
+          </a:fillRef>
+          <a:effectRef idx="0">
+            <a:schemeClr val="accent1"/>
+          </a:effectRef>
+          <a:fontRef idx="minor">
+            <a:schemeClr val="lt1"/>
+          </a:fontRef>
+        </p:style>
+        <p:txBody>
+          <a:bodyPr rtlCol="0" anchor="ctr"/>
+          <a:lstStyle/>
+          <a:p>
+            <a:pPr algn="ctr"/>
+            <a:endParaRPr kumimoji="1" lang="ja-JP" altLang="en-US"/>
+          </a:p>
+        </p:txBody>
+      </p:sp>
+      <p:sp>
+        <p:nvSpPr>
+          <p:cNvPr id="5" name="正方形/長方形 4">
+            <a:extLst>
+              <a:ext uri="{FF2B5EF4-FFF2-40B4-BE49-F238E27FC236}">
+                <a16:creationId xmlns:a16="http://schemas.microsoft.com/office/drawing/2014/main" id="{0F57B1AC-6372-2FC9-5AC0-BE34491F6C92}"/>
+              </a:ext>
+            </a:extLst>
+          </p:cNvPr>
+          <p:cNvSpPr/>
+          <p:nvPr/>
+        </p:nvSpPr>
+        <p:spPr>
+          <a:xfrm>
+            <a:off x="9155958" y="1122960"/>
+            <a:ext cx="1069260" cy="1069260"/>
+          </a:xfrm>
+          <a:prstGeom prst="rect">
+            <a:avLst/>
+          </a:prstGeom>
+          <a:solidFill>
+            <a:schemeClr val="bg1"/>
+          </a:solidFill>
+          <a:ln>
+            <a:solidFill>
+              <a:schemeClr val="tx1"/>
+            </a:solidFill>
+          </a:ln>
+        </p:spPr>
+        <p:style>
+          <a:lnRef idx="2">
+            <a:schemeClr val="accent1">
+              <a:shade val="50000"/>
+            </a:schemeClr>
+          </a:lnRef>
+          <a:fillRef idx="1">
+            <a:schemeClr val="accent1"/>
+          </a:fillRef>
+          <a:effectRef idx="0">
+            <a:schemeClr val="accent1"/>
+          </a:effectRef>
+          <a:fontRef idx="minor">
+            <a:schemeClr val="lt1"/>
+          </a:fontRef>
+        </p:style>
+        <p:txBody>
+          <a:bodyPr rtlCol="0" anchor="ctr"/>
+          <a:lstStyle/>
+          <a:p>
+            <a:pPr algn="ctr"/>
+            <a:endParaRPr kumimoji="1" lang="ja-JP" altLang="en-US"/>
+          </a:p>
+        </p:txBody>
+      </p:sp>
+      <p:sp>
+        <p:nvSpPr>
+          <p:cNvPr id="6" name="正方形/長方形 5">
+            <a:extLst>
+              <a:ext uri="{FF2B5EF4-FFF2-40B4-BE49-F238E27FC236}">
+                <a16:creationId xmlns:a16="http://schemas.microsoft.com/office/drawing/2014/main" id="{E6654A85-620E-AFFE-CE1B-7DF3E2DDF668}"/>
+              </a:ext>
+            </a:extLst>
+          </p:cNvPr>
+          <p:cNvSpPr/>
+          <p:nvPr/>
+        </p:nvSpPr>
+        <p:spPr>
+          <a:xfrm>
+            <a:off x="10236721" y="1122960"/>
+            <a:ext cx="1069260" cy="1069260"/>
+          </a:xfrm>
+          <a:prstGeom prst="rect">
+            <a:avLst/>
+          </a:prstGeom>
+          <a:solidFill>
+            <a:schemeClr val="bg1"/>
+          </a:solidFill>
+          <a:ln>
+            <a:solidFill>
+              <a:schemeClr val="tx1"/>
+            </a:solidFill>
+          </a:ln>
+        </p:spPr>
+        <p:style>
+          <a:lnRef idx="2">
+            <a:schemeClr val="accent1">
+              <a:shade val="50000"/>
+            </a:schemeClr>
+          </a:lnRef>
+          <a:fillRef idx="1">
+            <a:schemeClr val="accent1"/>
+          </a:fillRef>
+          <a:effectRef idx="0">
+            <a:schemeClr val="accent1"/>
+          </a:effectRef>
+          <a:fontRef idx="minor">
+            <a:schemeClr val="lt1"/>
+          </a:fontRef>
+        </p:style>
+        <p:txBody>
+          <a:bodyPr rtlCol="0" anchor="ctr"/>
+          <a:lstStyle/>
+          <a:p>
+            <a:pPr algn="ctr"/>
+            <a:endParaRPr kumimoji="1" lang="ja-JP" altLang="en-US"/>
+          </a:p>
+        </p:txBody>
+      </p:sp>
       <p:pic>
         <p:nvPicPr>
-          <p:cNvPr id="7" name="図 6"/>
+          <p:cNvPr id="7" name="図 6">
+            <a:extLst>
+              <a:ext uri="{FF2B5EF4-FFF2-40B4-BE49-F238E27FC236}">
+                <a16:creationId xmlns:a16="http://schemas.microsoft.com/office/drawing/2014/main" id="{24821853-F58E-6334-546F-44B8B6026D77}"/>
+              </a:ext>
+            </a:extLst>
+          </p:cNvPr>
           <p:cNvPicPr>
             <a:picLocks noChangeAspect="1"/>
           </p:cNvPicPr>
           <p:nvPr/>
         </p:nvPicPr>
-        <p:blipFill rotWithShape="1">
+        <p:blipFill>
           <a:blip r:embed="rId2"/>
-          <a:srcRect b="28075"/>
-          <a:stretch/>
+          <a:stretch>
+            <a:fillRect/>
+          </a:stretch>
         </p:blipFill>
         <p:spPr>
-          <a:xfrm rot="18736250">
-            <a:off x="3259751" y="-52734"/>
-            <a:ext cx="753461" cy="4932608"/>
+          <a:xfrm>
+            <a:off x="1310828" y="1598211"/>
+            <a:ext cx="392827" cy="478444"/>
           </a:xfrm>
           <a:prstGeom prst="rect">
             <a:avLst/>
           </a:prstGeom>
         </p:spPr>
       </p:pic>
-      <p:sp>
-        <p:nvSpPr>
-          <p:cNvPr id="8" name="円柱 7"/>
-          <p:cNvSpPr/>
-          <p:nvPr/>
-        </p:nvSpPr>
-        <p:spPr>
-          <a:xfrm rot="7636004">
-            <a:off x="5225026" y="4066379"/>
-            <a:ext cx="430361" cy="251549"/>
-          </a:xfrm>
-          <a:prstGeom prst="can">
-            <a:avLst>
-              <a:gd name="adj" fmla="val 11415"/>
-            </a:avLst>
-          </a:prstGeom>
-          <a:solidFill>
-            <a:schemeClr val="tx1">
-              <a:lumMod val="75000"/>
-              <a:lumOff val="25000"/>
-            </a:schemeClr>
-          </a:solidFill>
-          <a:ln>
-            <a:noFill/>
-          </a:ln>
-        </p:spPr>
-        <p:style>
-          <a:lnRef idx="2">
-            <a:schemeClr val="accent1">
-              <a:shade val="50000"/>
-            </a:schemeClr>
-          </a:lnRef>
-          <a:fillRef idx="1">
-            <a:schemeClr val="accent1"/>
-          </a:fillRef>
-          <a:effectRef idx="0">
-            <a:schemeClr val="accent1"/>
-          </a:effectRef>
-          <a:fontRef idx="minor">
-            <a:schemeClr val="lt1"/>
-          </a:fontRef>
-        </p:style>
-        <p:txBody>
-          <a:bodyPr rtlCol="0" anchor="ctr"/>
-          <a:lstStyle/>
-          <a:p>
-            <a:pPr algn="ctr"/>
-            <a:endParaRPr kumimoji="1" lang="ja-JP" altLang="en-US"/>
-          </a:p>
-        </p:txBody>
-      </p:sp>
-      <p:sp>
-        <p:nvSpPr>
-          <p:cNvPr id="10" name="円柱 9"/>
-          <p:cNvSpPr/>
-          <p:nvPr/>
-        </p:nvSpPr>
-        <p:spPr>
-          <a:xfrm rot="7636004">
-            <a:off x="4968028" y="4188442"/>
-            <a:ext cx="1127405" cy="196858"/>
-          </a:xfrm>
-          <a:prstGeom prst="can">
-            <a:avLst>
-              <a:gd name="adj" fmla="val 50000"/>
-            </a:avLst>
-          </a:prstGeom>
-          <a:solidFill>
-            <a:schemeClr val="tx1">
-              <a:lumMod val="75000"/>
-              <a:lumOff val="25000"/>
-            </a:schemeClr>
-          </a:solidFill>
-          <a:ln>
-            <a:noFill/>
-          </a:ln>
-        </p:spPr>
-        <p:style>
-          <a:lnRef idx="2">
-            <a:schemeClr val="accent1">
-              <a:shade val="50000"/>
-            </a:schemeClr>
-          </a:lnRef>
-          <a:fillRef idx="1">
-            <a:schemeClr val="accent1"/>
-          </a:fillRef>
-          <a:effectRef idx="0">
-            <a:schemeClr val="accent1"/>
-          </a:effectRef>
-          <a:fontRef idx="minor">
-            <a:schemeClr val="lt1"/>
-          </a:fontRef>
-        </p:style>
-        <p:txBody>
-          <a:bodyPr rtlCol="0" anchor="ctr"/>
-          <a:lstStyle/>
-          <a:p>
-            <a:pPr algn="ctr"/>
-            <a:endParaRPr kumimoji="1" lang="ja-JP" altLang="en-US"/>
-          </a:p>
-        </p:txBody>
-      </p:sp>
-      <p:sp>
-        <p:nvSpPr>
-          <p:cNvPr id="3" name="月 2"/>
-          <p:cNvSpPr/>
-          <p:nvPr/>
-        </p:nvSpPr>
-        <p:spPr>
-          <a:xfrm>
-            <a:off x="0" y="12879"/>
-            <a:ext cx="1223493" cy="6858000"/>
-          </a:xfrm>
-          <a:prstGeom prst="moon">
-            <a:avLst>
-              <a:gd name="adj" fmla="val 54424"/>
-            </a:avLst>
-          </a:prstGeom>
-          <a:solidFill>
-            <a:schemeClr val="bg1">
-              <a:lumMod val="65000"/>
-            </a:schemeClr>
-          </a:solidFill>
-          <a:ln>
-            <a:noFill/>
-          </a:ln>
-        </p:spPr>
-        <p:style>
-          <a:lnRef idx="2">
-            <a:schemeClr val="accent1">
-              <a:shade val="50000"/>
-            </a:schemeClr>
-          </a:lnRef>
-          <a:fillRef idx="1">
-            <a:schemeClr val="accent1"/>
-          </a:fillRef>
-          <a:effectRef idx="0">
-            <a:schemeClr val="accent1"/>
-          </a:effectRef>
-          <a:fontRef idx="minor">
-            <a:schemeClr val="lt1"/>
-          </a:fontRef>
-        </p:style>
-        <p:txBody>
-          <a:bodyPr rtlCol="0" anchor="ctr"/>
-          <a:lstStyle/>
-          <a:p>
-            <a:pPr algn="ctr"/>
-            <a:endParaRPr kumimoji="1" lang="ja-JP" altLang="en-US"/>
-          </a:p>
-        </p:txBody>
-      </p:sp>
-      <p:sp>
-        <p:nvSpPr>
-          <p:cNvPr id="4" name="月 3"/>
-          <p:cNvSpPr/>
-          <p:nvPr/>
-        </p:nvSpPr>
-        <p:spPr>
-          <a:xfrm>
-            <a:off x="360608" y="13058"/>
-            <a:ext cx="875764" cy="6858000"/>
-          </a:xfrm>
-          <a:prstGeom prst="moon">
-            <a:avLst>
-              <a:gd name="adj" fmla="val 35610"/>
-            </a:avLst>
-          </a:prstGeom>
-          <a:solidFill>
-            <a:schemeClr val="bg1">
-              <a:lumMod val="50000"/>
-            </a:schemeClr>
-          </a:solidFill>
-          <a:ln>
-            <a:noFill/>
-          </a:ln>
-        </p:spPr>
-        <p:style>
-          <a:lnRef idx="2">
-            <a:schemeClr val="accent1">
-              <a:shade val="50000"/>
-            </a:schemeClr>
-          </a:lnRef>
-          <a:fillRef idx="1">
-            <a:schemeClr val="accent1"/>
-          </a:fillRef>
-          <a:effectRef idx="0">
-            <a:schemeClr val="accent1"/>
-          </a:effectRef>
-          <a:fontRef idx="minor">
-            <a:schemeClr val="lt1"/>
-          </a:fontRef>
-        </p:style>
-        <p:txBody>
-          <a:bodyPr rtlCol="0" anchor="ctr"/>
-          <a:lstStyle/>
-          <a:p>
-            <a:pPr algn="ctr"/>
-            <a:endParaRPr kumimoji="1" lang="ja-JP" altLang="en-US"/>
-          </a:p>
-        </p:txBody>
-      </p:sp>
-      <p:sp>
-        <p:nvSpPr>
-          <p:cNvPr id="16" name="円柱 15"/>
-          <p:cNvSpPr/>
-          <p:nvPr/>
-        </p:nvSpPr>
-        <p:spPr>
-          <a:xfrm rot="7636004">
-            <a:off x="6018529" y="3962507"/>
-            <a:ext cx="430361" cy="1666811"/>
-          </a:xfrm>
-          <a:prstGeom prst="can">
-            <a:avLst>
-              <a:gd name="adj" fmla="val 11415"/>
-            </a:avLst>
-          </a:prstGeom>
-          <a:solidFill>
-            <a:schemeClr val="tx1">
-              <a:lumMod val="85000"/>
-              <a:lumOff val="15000"/>
-            </a:schemeClr>
-          </a:solidFill>
-          <a:ln>
-            <a:noFill/>
-          </a:ln>
-        </p:spPr>
-        <p:style>
-          <a:lnRef idx="2">
-            <a:schemeClr val="accent1">
-              <a:shade val="50000"/>
-            </a:schemeClr>
-          </a:lnRef>
-          <a:fillRef idx="1">
-            <a:schemeClr val="accent1"/>
-          </a:fillRef>
-          <a:effectRef idx="0">
-            <a:schemeClr val="accent1"/>
-          </a:effectRef>
-          <a:fontRef idx="minor">
-            <a:schemeClr val="lt1"/>
-          </a:fontRef>
-        </p:style>
-        <p:txBody>
-          <a:bodyPr rtlCol="0" anchor="ctr"/>
-          <a:lstStyle/>
-          <a:p>
-            <a:pPr algn="ctr"/>
-            <a:endParaRPr kumimoji="1" lang="ja-JP" altLang="en-US"/>
-          </a:p>
-        </p:txBody>
-      </p:sp>
-      <p:sp>
-        <p:nvSpPr>
-          <p:cNvPr id="12" name="ひし形 11"/>
-          <p:cNvSpPr/>
-          <p:nvPr/>
-        </p:nvSpPr>
-        <p:spPr>
-          <a:xfrm rot="18217126">
-            <a:off x="5616210" y="4343212"/>
-            <a:ext cx="238125" cy="122166"/>
-          </a:xfrm>
-          <a:prstGeom prst="diamond">
-            <a:avLst/>
-          </a:prstGeom>
-          <a:solidFill>
-            <a:schemeClr val="bg1">
-              <a:lumMod val="65000"/>
-            </a:schemeClr>
-          </a:solidFill>
-          <a:ln>
-            <a:noFill/>
-          </a:ln>
-        </p:spPr>
-        <p:style>
-          <a:lnRef idx="2">
-            <a:schemeClr val="accent1">
-              <a:shade val="50000"/>
-            </a:schemeClr>
-          </a:lnRef>
-          <a:fillRef idx="1">
-            <a:schemeClr val="accent1"/>
-          </a:fillRef>
-          <a:effectRef idx="0">
-            <a:schemeClr val="accent1"/>
-          </a:effectRef>
-          <a:fontRef idx="minor">
-            <a:schemeClr val="lt1"/>
-          </a:fontRef>
-        </p:style>
-        <p:txBody>
-          <a:bodyPr rtlCol="0" anchor="ctr"/>
-          <a:lstStyle/>
-          <a:p>
-            <a:pPr algn="ctr"/>
-            <a:endParaRPr kumimoji="1" lang="ja-JP" altLang="en-US"/>
-          </a:p>
-        </p:txBody>
-      </p:sp>
-      <p:sp>
-        <p:nvSpPr>
-          <p:cNvPr id="13" name="ひし形 12"/>
-          <p:cNvSpPr/>
-          <p:nvPr/>
-        </p:nvSpPr>
-        <p:spPr>
-          <a:xfrm rot="18217126">
-            <a:off x="5761172" y="4447993"/>
-            <a:ext cx="238125" cy="122166"/>
-          </a:xfrm>
-          <a:prstGeom prst="diamond">
-            <a:avLst/>
-          </a:prstGeom>
-          <a:solidFill>
-            <a:schemeClr val="bg1">
-              <a:lumMod val="65000"/>
-            </a:schemeClr>
-          </a:solidFill>
-          <a:ln>
-            <a:noFill/>
-          </a:ln>
-        </p:spPr>
-        <p:style>
-          <a:lnRef idx="2">
-            <a:schemeClr val="accent1">
-              <a:shade val="50000"/>
-            </a:schemeClr>
-          </a:lnRef>
-          <a:fillRef idx="1">
-            <a:schemeClr val="accent1"/>
-          </a:fillRef>
-          <a:effectRef idx="0">
-            <a:schemeClr val="accent1"/>
-          </a:effectRef>
-          <a:fontRef idx="minor">
-            <a:schemeClr val="lt1"/>
-          </a:fontRef>
-        </p:style>
-        <p:txBody>
-          <a:bodyPr rtlCol="0" anchor="ctr"/>
-          <a:lstStyle/>
-          <a:p>
-            <a:pPr algn="ctr"/>
-            <a:endParaRPr kumimoji="1" lang="ja-JP" altLang="en-US"/>
-          </a:p>
-        </p:txBody>
-      </p:sp>
-      <p:sp>
-        <p:nvSpPr>
-          <p:cNvPr id="14" name="ひし形 13"/>
-          <p:cNvSpPr/>
-          <p:nvPr/>
-        </p:nvSpPr>
-        <p:spPr>
-          <a:xfrm rot="18217126">
-            <a:off x="5906134" y="4557534"/>
-            <a:ext cx="238125" cy="122166"/>
-          </a:xfrm>
-          <a:prstGeom prst="diamond">
-            <a:avLst/>
-          </a:prstGeom>
-          <a:solidFill>
-            <a:schemeClr val="bg1">
-              <a:lumMod val="65000"/>
-            </a:schemeClr>
-          </a:solidFill>
-          <a:ln>
-            <a:noFill/>
-          </a:ln>
-        </p:spPr>
-        <p:style>
-          <a:lnRef idx="2">
-            <a:schemeClr val="accent1">
-              <a:shade val="50000"/>
-            </a:schemeClr>
-          </a:lnRef>
-          <a:fillRef idx="1">
-            <a:schemeClr val="accent1"/>
-          </a:fillRef>
-          <a:effectRef idx="0">
-            <a:schemeClr val="accent1"/>
-          </a:effectRef>
-          <a:fontRef idx="minor">
-            <a:schemeClr val="lt1"/>
-          </a:fontRef>
-        </p:style>
-        <p:txBody>
-          <a:bodyPr rtlCol="0" anchor="ctr"/>
-          <a:lstStyle/>
-          <a:p>
-            <a:pPr algn="ctr"/>
-            <a:endParaRPr kumimoji="1" lang="ja-JP" altLang="en-US"/>
-          </a:p>
-        </p:txBody>
-      </p:sp>
-      <p:sp>
-        <p:nvSpPr>
-          <p:cNvPr id="15" name="ひし形 14"/>
-          <p:cNvSpPr/>
-          <p:nvPr/>
-        </p:nvSpPr>
-        <p:spPr>
-          <a:xfrm rot="18217126">
-            <a:off x="6051096" y="4662312"/>
-            <a:ext cx="238125" cy="122166"/>
-          </a:xfrm>
-          <a:prstGeom prst="diamond">
-            <a:avLst/>
-          </a:prstGeom>
-          <a:solidFill>
-            <a:schemeClr val="bg1">
-              <a:lumMod val="65000"/>
-            </a:schemeClr>
-          </a:solidFill>
-          <a:ln>
-            <a:noFill/>
-          </a:ln>
-        </p:spPr>
-        <p:style>
-          <a:lnRef idx="2">
-            <a:schemeClr val="accent1">
-              <a:shade val="50000"/>
-            </a:schemeClr>
-          </a:lnRef>
-          <a:fillRef idx="1">
-            <a:schemeClr val="accent1"/>
-          </a:fillRef>
-          <a:effectRef idx="0">
-            <a:schemeClr val="accent1"/>
-          </a:effectRef>
-          <a:fontRef idx="minor">
-            <a:schemeClr val="lt1"/>
-          </a:fontRef>
-        </p:style>
-        <p:txBody>
-          <a:bodyPr rtlCol="0" anchor="ctr"/>
-          <a:lstStyle/>
-          <a:p>
-            <a:pPr algn="ctr"/>
-            <a:endParaRPr kumimoji="1" lang="ja-JP" altLang="en-US"/>
-          </a:p>
-        </p:txBody>
-      </p:sp>
-      <p:sp>
-        <p:nvSpPr>
-          <p:cNvPr id="17" name="ひし形 16"/>
-          <p:cNvSpPr/>
-          <p:nvPr/>
-        </p:nvSpPr>
-        <p:spPr>
-          <a:xfrm rot="18217126">
-            <a:off x="6196058" y="4781381"/>
-            <a:ext cx="238125" cy="122166"/>
-          </a:xfrm>
-          <a:prstGeom prst="diamond">
-            <a:avLst/>
-          </a:prstGeom>
-          <a:solidFill>
-            <a:schemeClr val="bg1">
-              <a:lumMod val="65000"/>
-            </a:schemeClr>
-          </a:solidFill>
-          <a:ln>
-            <a:noFill/>
-          </a:ln>
-        </p:spPr>
-        <p:style>
-          <a:lnRef idx="2">
-            <a:schemeClr val="accent1">
-              <a:shade val="50000"/>
-            </a:schemeClr>
-          </a:lnRef>
-          <a:fillRef idx="1">
-            <a:schemeClr val="accent1"/>
-          </a:fillRef>
-          <a:effectRef idx="0">
-            <a:schemeClr val="accent1"/>
-          </a:effectRef>
-          <a:fontRef idx="minor">
-            <a:schemeClr val="lt1"/>
-          </a:fontRef>
-        </p:style>
-        <p:txBody>
-          <a:bodyPr rtlCol="0" anchor="ctr"/>
-          <a:lstStyle/>
-          <a:p>
-            <a:pPr algn="ctr"/>
-            <a:endParaRPr kumimoji="1" lang="ja-JP" altLang="en-US"/>
-          </a:p>
-        </p:txBody>
-      </p:sp>
-      <p:sp>
-        <p:nvSpPr>
-          <p:cNvPr id="18" name="ひし形 17"/>
-          <p:cNvSpPr/>
-          <p:nvPr/>
-        </p:nvSpPr>
-        <p:spPr>
-          <a:xfrm rot="18217126">
-            <a:off x="6341020" y="4890924"/>
-            <a:ext cx="238125" cy="122166"/>
-          </a:xfrm>
-          <a:prstGeom prst="diamond">
-            <a:avLst/>
-          </a:prstGeom>
-          <a:solidFill>
-            <a:schemeClr val="bg1">
-              <a:lumMod val="65000"/>
-            </a:schemeClr>
-          </a:solidFill>
-          <a:ln>
-            <a:noFill/>
-          </a:ln>
-        </p:spPr>
-        <p:style>
-          <a:lnRef idx="2">
-            <a:schemeClr val="accent1">
-              <a:shade val="50000"/>
-            </a:schemeClr>
-          </a:lnRef>
-          <a:fillRef idx="1">
-            <a:schemeClr val="accent1"/>
-          </a:fillRef>
-          <a:effectRef idx="0">
-            <a:schemeClr val="accent1"/>
-          </a:effectRef>
-          <a:fontRef idx="minor">
-            <a:schemeClr val="lt1"/>
-          </a:fontRef>
-        </p:style>
-        <p:txBody>
-          <a:bodyPr rtlCol="0" anchor="ctr"/>
-          <a:lstStyle/>
-          <a:p>
-            <a:pPr algn="ctr"/>
-            <a:endParaRPr kumimoji="1" lang="ja-JP" altLang="en-US"/>
-          </a:p>
-        </p:txBody>
-      </p:sp>
-      <p:sp>
-        <p:nvSpPr>
-          <p:cNvPr id="19" name="ひし形 18"/>
-          <p:cNvSpPr/>
-          <p:nvPr/>
-        </p:nvSpPr>
-        <p:spPr>
-          <a:xfrm rot="18217126">
-            <a:off x="6485982" y="5000468"/>
-            <a:ext cx="238125" cy="122166"/>
-          </a:xfrm>
-          <a:prstGeom prst="diamond">
-            <a:avLst/>
-          </a:prstGeom>
-          <a:solidFill>
-            <a:schemeClr val="bg1">
-              <a:lumMod val="65000"/>
-            </a:schemeClr>
-          </a:solidFill>
-          <a:ln>
-            <a:noFill/>
-          </a:ln>
-        </p:spPr>
-        <p:style>
-          <a:lnRef idx="2">
-            <a:schemeClr val="accent1">
-              <a:shade val="50000"/>
-            </a:schemeClr>
-          </a:lnRef>
-          <a:fillRef idx="1">
-            <a:schemeClr val="accent1"/>
-          </a:fillRef>
-          <a:effectRef idx="0">
-            <a:schemeClr val="accent1"/>
-          </a:effectRef>
-          <a:fontRef idx="minor">
-            <a:schemeClr val="lt1"/>
-          </a:fontRef>
-        </p:style>
-        <p:txBody>
-          <a:bodyPr rtlCol="0" anchor="ctr"/>
-          <a:lstStyle/>
-          <a:p>
-            <a:pPr algn="ctr"/>
-            <a:endParaRPr kumimoji="1" lang="ja-JP" altLang="en-US"/>
-          </a:p>
-        </p:txBody>
-      </p:sp>
-      <p:sp>
-        <p:nvSpPr>
-          <p:cNvPr id="20" name="ひし形 19"/>
-          <p:cNvSpPr/>
-          <p:nvPr/>
-        </p:nvSpPr>
-        <p:spPr>
-          <a:xfrm rot="18217126">
-            <a:off x="6630946" y="5114773"/>
-            <a:ext cx="238125" cy="122166"/>
-          </a:xfrm>
-          <a:prstGeom prst="diamond">
-            <a:avLst/>
-          </a:prstGeom>
-          <a:solidFill>
-            <a:schemeClr val="bg1">
-              <a:lumMod val="65000"/>
-            </a:schemeClr>
-          </a:solidFill>
-          <a:ln>
-            <a:noFill/>
-          </a:ln>
-        </p:spPr>
-        <p:style>
-          <a:lnRef idx="2">
-            <a:schemeClr val="accent1">
-              <a:shade val="50000"/>
-            </a:schemeClr>
-          </a:lnRef>
-          <a:fillRef idx="1">
-            <a:schemeClr val="accent1"/>
-          </a:fillRef>
-          <a:effectRef idx="0">
-            <a:schemeClr val="accent1"/>
-          </a:effectRef>
-          <a:fontRef idx="minor">
-            <a:schemeClr val="lt1"/>
-          </a:fontRef>
-        </p:style>
-        <p:txBody>
-          <a:bodyPr rtlCol="0" anchor="ctr"/>
-          <a:lstStyle/>
-          <a:p>
-            <a:pPr algn="ctr"/>
-            <a:endParaRPr kumimoji="1" lang="ja-JP" altLang="en-US"/>
-          </a:p>
-        </p:txBody>
-      </p:sp>
+      <p:pic>
+        <p:nvPicPr>
+          <p:cNvPr id="8" name="図 7">
+            <a:extLst>
+              <a:ext uri="{FF2B5EF4-FFF2-40B4-BE49-F238E27FC236}">
+                <a16:creationId xmlns:a16="http://schemas.microsoft.com/office/drawing/2014/main" id="{6D2246A6-E747-1485-93FD-5DD02D2528FC}"/>
+              </a:ext>
+            </a:extLst>
+          </p:cNvPr>
+          <p:cNvPicPr>
+            <a:picLocks noChangeAspect="1"/>
+          </p:cNvPicPr>
+          <p:nvPr/>
+        </p:nvPicPr>
+        <p:blipFill>
+          <a:blip r:embed="rId3"/>
+          <a:stretch>
+            <a:fillRect/>
+          </a:stretch>
+        </p:blipFill>
+        <p:spPr>
+          <a:xfrm>
+            <a:off x="3095974" y="1153440"/>
+            <a:ext cx="391988" cy="478443"/>
+          </a:xfrm>
+          <a:prstGeom prst="rect">
+            <a:avLst/>
+          </a:prstGeom>
+        </p:spPr>
+      </p:pic>
+      <p:pic>
+        <p:nvPicPr>
+          <p:cNvPr id="9" name="図 8">
+            <a:extLst>
+              <a:ext uri="{FF2B5EF4-FFF2-40B4-BE49-F238E27FC236}">
+                <a16:creationId xmlns:a16="http://schemas.microsoft.com/office/drawing/2014/main" id="{17E589E8-48AA-DE04-E1A1-46555591C165}"/>
+              </a:ext>
+            </a:extLst>
+          </p:cNvPr>
+          <p:cNvPicPr>
+            <a:picLocks noChangeAspect="1"/>
+          </p:cNvPicPr>
+          <p:nvPr/>
+        </p:nvPicPr>
+        <p:blipFill>
+          <a:blip r:embed="rId2"/>
+          <a:stretch>
+            <a:fillRect/>
+          </a:stretch>
+        </p:blipFill>
+        <p:spPr>
+          <a:xfrm>
+            <a:off x="5534385" y="1418368"/>
+            <a:ext cx="392827" cy="478444"/>
+          </a:xfrm>
+          <a:prstGeom prst="rect">
+            <a:avLst/>
+          </a:prstGeom>
+        </p:spPr>
+      </p:pic>
     </p:spTree>
     <p:extLst>
       <p:ext uri="{BB962C8B-B14F-4D97-AF65-F5344CB8AC3E}">
-        <p14:creationId xmlns:p14="http://schemas.microsoft.com/office/powerpoint/2010/main" val="4000206588"/>
+        <p14:creationId xmlns:p14="http://schemas.microsoft.com/office/powerpoint/2010/main" val="248095591"/>
       </p:ext>
     </p:extLst>
   </p:cSld>
@@ -7930,7 +8822,13 @@
   <p:cSld>
     <p:spTree>
       <p:nvGrpSpPr>
-        <p:cNvPr id="1" name=""/>
+        <p:cNvPr id="1" name="">
+          <a:extLst>
+            <a:ext uri="{FF2B5EF4-FFF2-40B4-BE49-F238E27FC236}">
+              <a16:creationId xmlns:a16="http://schemas.microsoft.com/office/drawing/2014/main" id="{0B74E700-9832-24CA-C7F1-0D6833667717}"/>
+            </a:ext>
+          </a:extLst>
+        </p:cNvPr>
         <p:cNvGrpSpPr/>
         <p:nvPr/>
       </p:nvGrpSpPr>
@@ -7942,85 +8840,34 @@
           <a:chExt cx="0" cy="0"/>
         </a:xfrm>
       </p:grpSpPr>
-      <p:cxnSp>
-        <p:nvCxnSpPr>
-          <p:cNvPr id="33" name="直線コネクタ 32"/>
-          <p:cNvCxnSpPr/>
-          <p:nvPr/>
-        </p:nvCxnSpPr>
-        <p:spPr>
-          <a:xfrm rot="21000000" flipH="1">
-            <a:off x="12038558" y="572251"/>
-            <a:ext cx="9525" cy="2492062"/>
-          </a:xfrm>
-          <a:prstGeom prst="line">
-            <a:avLst/>
-          </a:prstGeom>
-          <a:ln w="38100">
+      <p:sp>
+        <p:nvSpPr>
+          <p:cNvPr id="27" name="正方形/長方形 26">
+            <a:extLst>
+              <a:ext uri="{FF2B5EF4-FFF2-40B4-BE49-F238E27FC236}">
+                <a16:creationId xmlns:a16="http://schemas.microsoft.com/office/drawing/2014/main" id="{EFB1F7B1-9364-0197-1A77-EF7779F973CE}"/>
+              </a:ext>
+            </a:extLst>
+          </p:cNvPr>
+          <p:cNvSpPr/>
+          <p:nvPr/>
+        </p:nvSpPr>
+        <p:spPr>
+          <a:xfrm>
+            <a:off x="327381" y="542400"/>
+            <a:ext cx="2152505" cy="2152505"/>
+          </a:xfrm>
+          <a:prstGeom prst="rect">
+            <a:avLst/>
+          </a:prstGeom>
+          <a:solidFill>
+            <a:schemeClr val="bg1"/>
+          </a:solidFill>
+          <a:ln>
             <a:solidFill>
-              <a:schemeClr val="bg1">
-                <a:lumMod val="65000"/>
-              </a:schemeClr>
+              <a:schemeClr val="tx1"/>
             </a:solidFill>
           </a:ln>
-        </p:spPr>
-        <p:style>
-          <a:lnRef idx="1">
-            <a:schemeClr val="accent1"/>
-          </a:lnRef>
-          <a:fillRef idx="0">
-            <a:schemeClr val="accent1"/>
-          </a:fillRef>
-          <a:effectRef idx="0">
-            <a:schemeClr val="accent1"/>
-          </a:effectRef>
-          <a:fontRef idx="minor">
-            <a:schemeClr val="tx1"/>
-          </a:fontRef>
-        </p:style>
-      </p:cxnSp>
-      <p:sp>
-        <p:nvSpPr>
-          <p:cNvPr id="2" name="月 1"/>
-          <p:cNvSpPr/>
-          <p:nvPr/>
-        </p:nvSpPr>
-        <p:spPr>
-          <a:xfrm>
-            <a:off x="2422919" y="554149"/>
-            <a:ext cx="1004105" cy="4984124"/>
-          </a:xfrm>
-          <a:prstGeom prst="moon">
-            <a:avLst>
-              <a:gd name="adj" fmla="val 21698"/>
-            </a:avLst>
-          </a:prstGeom>
-          <a:solidFill>
-            <a:schemeClr val="accent4">
-              <a:lumMod val="75000"/>
-            </a:schemeClr>
-          </a:solidFill>
-          <a:ln>
-            <a:noFill/>
-          </a:ln>
-          <a:effectLst>
-            <a:outerShdw blurRad="44450" dist="27940" dir="5400000" algn="ctr">
-              <a:srgbClr val="000000">
-                <a:alpha val="32000"/>
-              </a:srgbClr>
-            </a:outerShdw>
-          </a:effectLst>
-          <a:scene3d>
-            <a:camera prst="orthographicFront">
-              <a:rot lat="0" lon="0" rev="0"/>
-            </a:camera>
-            <a:lightRig rig="balanced" dir="t">
-              <a:rot lat="0" lon="0" rev="8700000"/>
-            </a:lightRig>
-          </a:scene3d>
-          <a:sp3d>
-            <a:bevelT w="190500" h="38100"/>
-          </a:sp3d>
         </p:spPr>
         <p:style>
           <a:lnRef idx="2">
@@ -8049,46 +8896,32 @@
       </p:sp>
       <p:sp>
         <p:nvSpPr>
-          <p:cNvPr id="3" name="月 2"/>
+          <p:cNvPr id="40" name="正方形/長方形 39">
+            <a:extLst>
+              <a:ext uri="{FF2B5EF4-FFF2-40B4-BE49-F238E27FC236}">
+                <a16:creationId xmlns:a16="http://schemas.microsoft.com/office/drawing/2014/main" id="{78FF1111-C481-2C33-254B-B1DA203D712A}"/>
+              </a:ext>
+            </a:extLst>
+          </p:cNvPr>
           <p:cNvSpPr/>
           <p:nvPr/>
         </p:nvSpPr>
         <p:spPr>
           <a:xfrm>
-            <a:off x="2604188" y="554149"/>
-            <a:ext cx="841886" cy="4984124"/>
-          </a:xfrm>
-          <a:prstGeom prst="moon">
-            <a:avLst>
-              <a:gd name="adj" fmla="val 13325"/>
-            </a:avLst>
-          </a:prstGeom>
-          <a:solidFill>
-            <a:schemeClr val="accent4">
-              <a:lumMod val="50000"/>
-            </a:schemeClr>
+            <a:off x="2497015" y="542400"/>
+            <a:ext cx="2152505" cy="2152505"/>
+          </a:xfrm>
+          <a:prstGeom prst="rect">
+            <a:avLst/>
+          </a:prstGeom>
+          <a:solidFill>
+            <a:schemeClr val="bg1"/>
           </a:solidFill>
           <a:ln>
-            <a:noFill/>
-          </a:ln>
-          <a:effectLst>
-            <a:outerShdw blurRad="44450" dist="27940" dir="5400000" algn="ctr">
-              <a:srgbClr val="000000">
-                <a:alpha val="32000"/>
-              </a:srgbClr>
-            </a:outerShdw>
-          </a:effectLst>
-          <a:scene3d>
-            <a:camera prst="orthographicFront">
-              <a:rot lat="0" lon="0" rev="0"/>
-            </a:camera>
-            <a:lightRig rig="balanced" dir="t">
-              <a:rot lat="0" lon="0" rev="8700000"/>
-            </a:lightRig>
-          </a:scene3d>
-          <a:sp3d>
-            <a:bevelT w="190500" h="38100"/>
-          </a:sp3d>
+            <a:solidFill>
+              <a:schemeClr val="tx1"/>
+            </a:solidFill>
+          </a:ln>
         </p:spPr>
         <p:style>
           <a:lnRef idx="2">
@@ -8115,87 +8948,34 @@
           </a:p>
         </p:txBody>
       </p:sp>
-      <p:cxnSp>
-        <p:nvCxnSpPr>
-          <p:cNvPr id="5" name="直線コネクタ 4"/>
-          <p:cNvCxnSpPr>
-            <a:stCxn id="3" idx="0"/>
-            <a:endCxn id="2" idx="2"/>
-          </p:cNvCxnSpPr>
-          <p:nvPr/>
-        </p:nvCxnSpPr>
-        <p:spPr>
-          <a:xfrm flipH="1">
-            <a:off x="3427024" y="554149"/>
-            <a:ext cx="19050" cy="4984124"/>
-          </a:xfrm>
-          <a:prstGeom prst="line">
-            <a:avLst/>
-          </a:prstGeom>
-          <a:ln w="38100">
+      <p:sp>
+        <p:nvSpPr>
+          <p:cNvPr id="41" name="正方形/長方形 40">
+            <a:extLst>
+              <a:ext uri="{FF2B5EF4-FFF2-40B4-BE49-F238E27FC236}">
+                <a16:creationId xmlns:a16="http://schemas.microsoft.com/office/drawing/2014/main" id="{386688E5-6E94-9EA9-F54B-28C57FC2CEC4}"/>
+              </a:ext>
+            </a:extLst>
+          </p:cNvPr>
+          <p:cNvSpPr/>
+          <p:nvPr/>
+        </p:nvSpPr>
+        <p:spPr>
+          <a:xfrm>
+            <a:off x="327381" y="2706587"/>
+            <a:ext cx="2152505" cy="2152505"/>
+          </a:xfrm>
+          <a:prstGeom prst="rect">
+            <a:avLst/>
+          </a:prstGeom>
+          <a:solidFill>
+            <a:schemeClr val="bg1"/>
+          </a:solidFill>
+          <a:ln>
             <a:solidFill>
-              <a:schemeClr val="bg1">
-                <a:lumMod val="65000"/>
-              </a:schemeClr>
+              <a:schemeClr val="tx1"/>
             </a:solidFill>
           </a:ln>
-        </p:spPr>
-        <p:style>
-          <a:lnRef idx="1">
-            <a:schemeClr val="accent1"/>
-          </a:lnRef>
-          <a:fillRef idx="0">
-            <a:schemeClr val="accent1"/>
-          </a:fillRef>
-          <a:effectRef idx="0">
-            <a:schemeClr val="accent1"/>
-          </a:effectRef>
-          <a:fontRef idx="minor">
-            <a:schemeClr val="tx1"/>
-          </a:fontRef>
-        </p:style>
-      </p:cxnSp>
-      <p:sp>
-        <p:nvSpPr>
-          <p:cNvPr id="7" name="正方形/長方形 6"/>
-          <p:cNvSpPr/>
-          <p:nvPr/>
-        </p:nvSpPr>
-        <p:spPr>
-          <a:xfrm>
-            <a:off x="622300" y="3001056"/>
-            <a:ext cx="4493019" cy="97744"/>
-          </a:xfrm>
-          <a:prstGeom prst="rect">
-            <a:avLst/>
-          </a:prstGeom>
-          <a:solidFill>
-            <a:schemeClr val="accent4">
-              <a:lumMod val="60000"/>
-              <a:lumOff val="40000"/>
-            </a:schemeClr>
-          </a:solidFill>
-          <a:ln>
-            <a:noFill/>
-          </a:ln>
-          <a:effectLst>
-            <a:outerShdw blurRad="44450" dist="27940" dir="5400000" algn="ctr">
-              <a:srgbClr val="000000">
-                <a:alpha val="32000"/>
-              </a:srgbClr>
-            </a:outerShdw>
-          </a:effectLst>
-          <a:scene3d>
-            <a:camera prst="orthographicFront">
-              <a:rot lat="0" lon="0" rev="0"/>
-            </a:camera>
-            <a:lightRig rig="balanced" dir="t">
-              <a:rot lat="0" lon="0" rev="8700000"/>
-            </a:lightRig>
-          </a:scene3d>
-          <a:sp3d>
-            <a:bevelT w="190500" h="38100"/>
-          </a:sp3d>
         </p:spPr>
         <p:style>
           <a:lnRef idx="2">
@@ -8224,44 +9004,32 @@
       </p:sp>
       <p:sp>
         <p:nvSpPr>
-          <p:cNvPr id="8" name="二等辺三角形 7"/>
+          <p:cNvPr id="42" name="正方形/長方形 41">
+            <a:extLst>
+              <a:ext uri="{FF2B5EF4-FFF2-40B4-BE49-F238E27FC236}">
+                <a16:creationId xmlns:a16="http://schemas.microsoft.com/office/drawing/2014/main" id="{5E4E2FE5-780F-C5FE-ECA2-4AF92945B5F2}"/>
+              </a:ext>
+            </a:extLst>
+          </p:cNvPr>
           <p:cNvSpPr/>
           <p:nvPr/>
         </p:nvSpPr>
         <p:spPr>
-          <a:xfrm rot="16200000">
-            <a:off x="171450" y="2735061"/>
-            <a:ext cx="279400" cy="622300"/>
-          </a:xfrm>
-          <a:prstGeom prst="triangle">
-            <a:avLst/>
-          </a:prstGeom>
-          <a:solidFill>
-            <a:schemeClr val="bg1">
-              <a:lumMod val="65000"/>
-            </a:schemeClr>
+          <a:xfrm>
+            <a:off x="2497015" y="2706587"/>
+            <a:ext cx="2152505" cy="2152505"/>
+          </a:xfrm>
+          <a:prstGeom prst="rect">
+            <a:avLst/>
+          </a:prstGeom>
+          <a:solidFill>
+            <a:schemeClr val="bg1"/>
           </a:solidFill>
           <a:ln>
-            <a:noFill/>
-          </a:ln>
-          <a:effectLst>
-            <a:outerShdw blurRad="44450" dist="27940" dir="5400000" algn="ctr">
-              <a:srgbClr val="000000">
-                <a:alpha val="32000"/>
-              </a:srgbClr>
-            </a:outerShdw>
-          </a:effectLst>
-          <a:scene3d>
-            <a:camera prst="orthographicFront">
-              <a:rot lat="0" lon="0" rev="0"/>
-            </a:camera>
-            <a:lightRig rig="balanced" dir="t">
-              <a:rot lat="0" lon="0" rev="8700000"/>
-            </a:lightRig>
-          </a:scene3d>
-          <a:sp3d>
-            <a:bevelT w="190500" h="38100"/>
-          </a:sp3d>
+            <a:solidFill>
+              <a:schemeClr val="tx1"/>
+            </a:solidFill>
+          </a:ln>
         </p:spPr>
         <p:style>
           <a:lnRef idx="2">
@@ -8290,47 +9058,32 @@
       </p:sp>
       <p:sp>
         <p:nvSpPr>
-          <p:cNvPr id="15" name="平行四辺形 14"/>
+          <p:cNvPr id="43" name="正方形/長方形 42">
+            <a:extLst>
+              <a:ext uri="{FF2B5EF4-FFF2-40B4-BE49-F238E27FC236}">
+                <a16:creationId xmlns:a16="http://schemas.microsoft.com/office/drawing/2014/main" id="{09BE9776-7CC4-9F38-9069-EB0A6DABB2BE}"/>
+              </a:ext>
+            </a:extLst>
+          </p:cNvPr>
           <p:cNvSpPr/>
           <p:nvPr/>
         </p:nvSpPr>
         <p:spPr>
           <a:xfrm>
-            <a:off x="5098656" y="2812345"/>
-            <a:ext cx="289319" cy="236336"/>
-          </a:xfrm>
-          <a:prstGeom prst="parallelogram">
-            <a:avLst>
-              <a:gd name="adj" fmla="val 48046"/>
-            </a:avLst>
-          </a:prstGeom>
-          <a:solidFill>
-            <a:schemeClr val="accent2">
-              <a:lumMod val="60000"/>
-              <a:lumOff val="40000"/>
-            </a:schemeClr>
+            <a:off x="327381" y="4870595"/>
+            <a:ext cx="2152505" cy="2152505"/>
+          </a:xfrm>
+          <a:prstGeom prst="rect">
+            <a:avLst/>
+          </a:prstGeom>
+          <a:solidFill>
+            <a:schemeClr val="bg1"/>
           </a:solidFill>
           <a:ln>
-            <a:noFill/>
-          </a:ln>
-          <a:effectLst>
-            <a:outerShdw blurRad="44450" dist="27940" dir="5400000" algn="ctr">
-              <a:srgbClr val="000000">
-                <a:alpha val="32000"/>
-              </a:srgbClr>
-            </a:outerShdw>
-          </a:effectLst>
-          <a:scene3d>
-            <a:camera prst="orthographicFront">
-              <a:rot lat="0" lon="0" rev="0"/>
-            </a:camera>
-            <a:lightRig rig="balanced" dir="t">
-              <a:rot lat="0" lon="0" rev="8700000"/>
-            </a:lightRig>
-          </a:scene3d>
-          <a:sp3d>
-            <a:bevelT w="190500" h="38100"/>
-          </a:sp3d>
+            <a:solidFill>
+              <a:schemeClr val="tx1"/>
+            </a:solidFill>
+          </a:ln>
         </p:spPr>
         <p:style>
           <a:lnRef idx="2">
@@ -8359,47 +9112,32 @@
       </p:sp>
       <p:sp>
         <p:nvSpPr>
-          <p:cNvPr id="16" name="平行四辺形 15"/>
+          <p:cNvPr id="44" name="正方形/長方形 43">
+            <a:extLst>
+              <a:ext uri="{FF2B5EF4-FFF2-40B4-BE49-F238E27FC236}">
+                <a16:creationId xmlns:a16="http://schemas.microsoft.com/office/drawing/2014/main" id="{FAF4708B-8A74-4900-7F2C-57F595A12FC7}"/>
+              </a:ext>
+            </a:extLst>
+          </p:cNvPr>
           <p:cNvSpPr/>
           <p:nvPr/>
         </p:nvSpPr>
         <p:spPr>
           <a:xfrm>
-            <a:off x="5274363" y="2812345"/>
-            <a:ext cx="289319" cy="236336"/>
-          </a:xfrm>
-          <a:prstGeom prst="parallelogram">
-            <a:avLst>
-              <a:gd name="adj" fmla="val 48046"/>
-            </a:avLst>
-          </a:prstGeom>
-          <a:solidFill>
-            <a:schemeClr val="accent2">
-              <a:lumMod val="60000"/>
-              <a:lumOff val="40000"/>
-            </a:schemeClr>
+            <a:off x="2497015" y="4870595"/>
+            <a:ext cx="2152505" cy="2152505"/>
+          </a:xfrm>
+          <a:prstGeom prst="rect">
+            <a:avLst/>
+          </a:prstGeom>
+          <a:solidFill>
+            <a:schemeClr val="bg1"/>
           </a:solidFill>
           <a:ln>
-            <a:noFill/>
-          </a:ln>
-          <a:effectLst>
-            <a:outerShdw blurRad="44450" dist="27940" dir="5400000" algn="ctr">
-              <a:srgbClr val="000000">
-                <a:alpha val="32000"/>
-              </a:srgbClr>
-            </a:outerShdw>
-          </a:effectLst>
-          <a:scene3d>
-            <a:camera prst="orthographicFront">
-              <a:rot lat="0" lon="0" rev="0"/>
-            </a:camera>
-            <a:lightRig rig="balanced" dir="t">
-              <a:rot lat="0" lon="0" rev="8700000"/>
-            </a:lightRig>
-          </a:scene3d>
-          <a:sp3d>
-            <a:bevelT w="190500" h="38100"/>
-          </a:sp3d>
+            <a:solidFill>
+              <a:schemeClr val="tx1"/>
+            </a:solidFill>
+          </a:ln>
         </p:spPr>
         <p:style>
           <a:lnRef idx="2">
@@ -8428,47 +9166,32 @@
       </p:sp>
       <p:sp>
         <p:nvSpPr>
-          <p:cNvPr id="17" name="平行四辺形 16"/>
+          <p:cNvPr id="47" name="正方形/長方形 46">
+            <a:extLst>
+              <a:ext uri="{FF2B5EF4-FFF2-40B4-BE49-F238E27FC236}">
+                <a16:creationId xmlns:a16="http://schemas.microsoft.com/office/drawing/2014/main" id="{9B479A5E-157D-9A81-14EC-0E6B9C402B3D}"/>
+              </a:ext>
+            </a:extLst>
+          </p:cNvPr>
           <p:cNvSpPr/>
           <p:nvPr/>
         </p:nvSpPr>
         <p:spPr>
           <a:xfrm>
-            <a:off x="5453291" y="2812345"/>
-            <a:ext cx="289319" cy="236336"/>
-          </a:xfrm>
-          <a:prstGeom prst="parallelogram">
-            <a:avLst>
-              <a:gd name="adj" fmla="val 48046"/>
-            </a:avLst>
-          </a:prstGeom>
-          <a:solidFill>
-            <a:schemeClr val="accent2">
-              <a:lumMod val="60000"/>
-              <a:lumOff val="40000"/>
-            </a:schemeClr>
+            <a:off x="4666649" y="2706587"/>
+            <a:ext cx="2152505" cy="2152505"/>
+          </a:xfrm>
+          <a:prstGeom prst="rect">
+            <a:avLst/>
+          </a:prstGeom>
+          <a:solidFill>
+            <a:schemeClr val="bg1"/>
           </a:solidFill>
           <a:ln>
-            <a:noFill/>
-          </a:ln>
-          <a:effectLst>
-            <a:outerShdw blurRad="44450" dist="27940" dir="5400000" algn="ctr">
-              <a:srgbClr val="000000">
-                <a:alpha val="32000"/>
-              </a:srgbClr>
-            </a:outerShdw>
-          </a:effectLst>
-          <a:scene3d>
-            <a:camera prst="orthographicFront">
-              <a:rot lat="0" lon="0" rev="0"/>
-            </a:camera>
-            <a:lightRig rig="balanced" dir="t">
-              <a:rot lat="0" lon="0" rev="8700000"/>
-            </a:lightRig>
-          </a:scene3d>
-          <a:sp3d>
-            <a:bevelT w="190500" h="38100"/>
-          </a:sp3d>
+            <a:solidFill>
+              <a:schemeClr val="tx1"/>
+            </a:solidFill>
+          </a:ln>
         </p:spPr>
         <p:style>
           <a:lnRef idx="2">
@@ -8497,47 +9220,32 @@
       </p:sp>
       <p:sp>
         <p:nvSpPr>
-          <p:cNvPr id="18" name="平行四辺形 17"/>
+          <p:cNvPr id="48" name="正方形/長方形 47">
+            <a:extLst>
+              <a:ext uri="{FF2B5EF4-FFF2-40B4-BE49-F238E27FC236}">
+                <a16:creationId xmlns:a16="http://schemas.microsoft.com/office/drawing/2014/main" id="{B4639F8B-5E6D-9CD5-E6CC-E26C5301FD86}"/>
+              </a:ext>
+            </a:extLst>
+          </p:cNvPr>
           <p:cNvSpPr/>
           <p:nvPr/>
         </p:nvSpPr>
         <p:spPr>
           <a:xfrm>
-            <a:off x="5628998" y="2812345"/>
-            <a:ext cx="289319" cy="236336"/>
-          </a:xfrm>
-          <a:prstGeom prst="parallelogram">
-            <a:avLst>
-              <a:gd name="adj" fmla="val 48046"/>
-            </a:avLst>
-          </a:prstGeom>
-          <a:solidFill>
-            <a:schemeClr val="accent2">
-              <a:lumMod val="60000"/>
-              <a:lumOff val="40000"/>
-            </a:schemeClr>
+            <a:off x="6823583" y="2706587"/>
+            <a:ext cx="2152505" cy="2152505"/>
+          </a:xfrm>
+          <a:prstGeom prst="rect">
+            <a:avLst/>
+          </a:prstGeom>
+          <a:solidFill>
+            <a:schemeClr val="bg1"/>
           </a:solidFill>
           <a:ln>
-            <a:noFill/>
-          </a:ln>
-          <a:effectLst>
-            <a:outerShdw blurRad="44450" dist="27940" dir="5400000" algn="ctr">
-              <a:srgbClr val="000000">
-                <a:alpha val="32000"/>
-              </a:srgbClr>
-            </a:outerShdw>
-          </a:effectLst>
-          <a:scene3d>
-            <a:camera prst="orthographicFront">
-              <a:rot lat="0" lon="0" rev="0"/>
-            </a:camera>
-            <a:lightRig rig="balanced" dir="t">
-              <a:rot lat="0" lon="0" rev="8700000"/>
-            </a:lightRig>
-          </a:scene3d>
-          <a:sp3d>
-            <a:bevelT w="190500" h="38100"/>
-          </a:sp3d>
+            <a:solidFill>
+              <a:schemeClr val="tx1"/>
+            </a:solidFill>
+          </a:ln>
         </p:spPr>
         <p:style>
           <a:lnRef idx="2">
@@ -8566,47 +9274,32 @@
       </p:sp>
       <p:sp>
         <p:nvSpPr>
-          <p:cNvPr id="19" name="平行四辺形 18"/>
+          <p:cNvPr id="53" name="正方形/長方形 52">
+            <a:extLst>
+              <a:ext uri="{FF2B5EF4-FFF2-40B4-BE49-F238E27FC236}">
+                <a16:creationId xmlns:a16="http://schemas.microsoft.com/office/drawing/2014/main" id="{2ECA1043-868E-5130-C7B0-8CFCD6546DCC}"/>
+              </a:ext>
+            </a:extLst>
+          </p:cNvPr>
           <p:cNvSpPr/>
           <p:nvPr/>
         </p:nvSpPr>
         <p:spPr>
-          <a:xfrm flipV="1">
-            <a:off x="5098656" y="3048681"/>
-            <a:ext cx="289319" cy="236336"/>
-          </a:xfrm>
-          <a:prstGeom prst="parallelogram">
-            <a:avLst>
-              <a:gd name="adj" fmla="val 48046"/>
-            </a:avLst>
-          </a:prstGeom>
-          <a:solidFill>
-            <a:schemeClr val="accent2">
-              <a:lumMod val="60000"/>
-              <a:lumOff val="40000"/>
-            </a:schemeClr>
+          <a:xfrm>
+            <a:off x="4666649" y="4870595"/>
+            <a:ext cx="2152505" cy="2152505"/>
+          </a:xfrm>
+          <a:prstGeom prst="rect">
+            <a:avLst/>
+          </a:prstGeom>
+          <a:solidFill>
+            <a:schemeClr val="bg1"/>
           </a:solidFill>
           <a:ln>
-            <a:noFill/>
-          </a:ln>
-          <a:effectLst>
-            <a:outerShdw blurRad="44450" dist="27940" dir="5400000" algn="ctr">
-              <a:srgbClr val="000000">
-                <a:alpha val="32000"/>
-              </a:srgbClr>
-            </a:outerShdw>
-          </a:effectLst>
-          <a:scene3d>
-            <a:camera prst="orthographicFront">
-              <a:rot lat="0" lon="0" rev="0"/>
-            </a:camera>
-            <a:lightRig rig="balanced" dir="t">
-              <a:rot lat="0" lon="0" rev="8700000"/>
-            </a:lightRig>
-          </a:scene3d>
-          <a:sp3d>
-            <a:bevelT w="190500" h="38100"/>
-          </a:sp3d>
+            <a:solidFill>
+              <a:schemeClr val="tx1"/>
+            </a:solidFill>
+          </a:ln>
         </p:spPr>
         <p:style>
           <a:lnRef idx="2">
@@ -8635,47 +9328,32 @@
       </p:sp>
       <p:sp>
         <p:nvSpPr>
-          <p:cNvPr id="20" name="平行四辺形 19"/>
+          <p:cNvPr id="56" name="正方形/長方形 55">
+            <a:extLst>
+              <a:ext uri="{FF2B5EF4-FFF2-40B4-BE49-F238E27FC236}">
+                <a16:creationId xmlns:a16="http://schemas.microsoft.com/office/drawing/2014/main" id="{DD7F8452-1636-A949-248C-71FDA4A8F480}"/>
+              </a:ext>
+            </a:extLst>
+          </p:cNvPr>
           <p:cNvSpPr/>
           <p:nvPr/>
         </p:nvSpPr>
         <p:spPr>
-          <a:xfrm flipV="1">
-            <a:off x="5274363" y="3048681"/>
-            <a:ext cx="289319" cy="236336"/>
-          </a:xfrm>
-          <a:prstGeom prst="parallelogram">
-            <a:avLst>
-              <a:gd name="adj" fmla="val 48046"/>
-            </a:avLst>
-          </a:prstGeom>
-          <a:solidFill>
-            <a:schemeClr val="accent2">
-              <a:lumMod val="60000"/>
-              <a:lumOff val="40000"/>
-            </a:schemeClr>
+          <a:xfrm>
+            <a:off x="6823583" y="4870595"/>
+            <a:ext cx="2152505" cy="2152505"/>
+          </a:xfrm>
+          <a:prstGeom prst="rect">
+            <a:avLst/>
+          </a:prstGeom>
+          <a:solidFill>
+            <a:schemeClr val="bg1"/>
           </a:solidFill>
           <a:ln>
-            <a:noFill/>
-          </a:ln>
-          <a:effectLst>
-            <a:outerShdw blurRad="44450" dist="27940" dir="5400000" algn="ctr">
-              <a:srgbClr val="000000">
-                <a:alpha val="32000"/>
-              </a:srgbClr>
-            </a:outerShdw>
-          </a:effectLst>
-          <a:scene3d>
-            <a:camera prst="orthographicFront">
-              <a:rot lat="0" lon="0" rev="0"/>
-            </a:camera>
-            <a:lightRig rig="balanced" dir="t">
-              <a:rot lat="0" lon="0" rev="8700000"/>
-            </a:lightRig>
-          </a:scene3d>
-          <a:sp3d>
-            <a:bevelT w="190500" h="38100"/>
-          </a:sp3d>
+            <a:solidFill>
+              <a:schemeClr val="tx1"/>
+            </a:solidFill>
+          </a:ln>
         </p:spPr>
         <p:style>
           <a:lnRef idx="2">
@@ -8704,47 +9382,32 @@
       </p:sp>
       <p:sp>
         <p:nvSpPr>
-          <p:cNvPr id="21" name="平行四辺形 20"/>
+          <p:cNvPr id="58" name="正方形/長方形 57">
+            <a:extLst>
+              <a:ext uri="{FF2B5EF4-FFF2-40B4-BE49-F238E27FC236}">
+                <a16:creationId xmlns:a16="http://schemas.microsoft.com/office/drawing/2014/main" id="{2933C56B-8A12-581B-8ED4-630AF4A60809}"/>
+              </a:ext>
+            </a:extLst>
+          </p:cNvPr>
           <p:cNvSpPr/>
           <p:nvPr/>
         </p:nvSpPr>
         <p:spPr>
-          <a:xfrm flipV="1">
-            <a:off x="5453291" y="3048681"/>
-            <a:ext cx="289319" cy="236336"/>
-          </a:xfrm>
-          <a:prstGeom prst="parallelogram">
-            <a:avLst>
-              <a:gd name="adj" fmla="val 48046"/>
-            </a:avLst>
-          </a:prstGeom>
-          <a:solidFill>
-            <a:schemeClr val="accent2">
-              <a:lumMod val="60000"/>
-              <a:lumOff val="40000"/>
-            </a:schemeClr>
+          <a:xfrm>
+            <a:off x="8980517" y="2706587"/>
+            <a:ext cx="2152505" cy="2152505"/>
+          </a:xfrm>
+          <a:prstGeom prst="rect">
+            <a:avLst/>
+          </a:prstGeom>
+          <a:solidFill>
+            <a:schemeClr val="bg1"/>
           </a:solidFill>
           <a:ln>
-            <a:noFill/>
-          </a:ln>
-          <a:effectLst>
-            <a:outerShdw blurRad="44450" dist="27940" dir="5400000" algn="ctr">
-              <a:srgbClr val="000000">
-                <a:alpha val="32000"/>
-              </a:srgbClr>
-            </a:outerShdw>
-          </a:effectLst>
-          <a:scene3d>
-            <a:camera prst="orthographicFront">
-              <a:rot lat="0" lon="0" rev="0"/>
-            </a:camera>
-            <a:lightRig rig="balanced" dir="t">
-              <a:rot lat="0" lon="0" rev="8700000"/>
-            </a:lightRig>
-          </a:scene3d>
-          <a:sp3d>
-            <a:bevelT w="190500" h="38100"/>
-          </a:sp3d>
+            <a:solidFill>
+              <a:schemeClr val="tx1"/>
+            </a:solidFill>
+          </a:ln>
         </p:spPr>
         <p:style>
           <a:lnRef idx="2">
@@ -8773,47 +9436,32 @@
       </p:sp>
       <p:sp>
         <p:nvSpPr>
-          <p:cNvPr id="22" name="平行四辺形 21"/>
+          <p:cNvPr id="59" name="正方形/長方形 58">
+            <a:extLst>
+              <a:ext uri="{FF2B5EF4-FFF2-40B4-BE49-F238E27FC236}">
+                <a16:creationId xmlns:a16="http://schemas.microsoft.com/office/drawing/2014/main" id="{0B666585-0370-1B53-AA1D-267FD3E0B31F}"/>
+              </a:ext>
+            </a:extLst>
+          </p:cNvPr>
           <p:cNvSpPr/>
           <p:nvPr/>
         </p:nvSpPr>
         <p:spPr>
-          <a:xfrm flipV="1">
-            <a:off x="5628998" y="3048681"/>
-            <a:ext cx="289319" cy="236336"/>
-          </a:xfrm>
-          <a:prstGeom prst="parallelogram">
-            <a:avLst>
-              <a:gd name="adj" fmla="val 48046"/>
-            </a:avLst>
-          </a:prstGeom>
-          <a:solidFill>
-            <a:schemeClr val="accent2">
-              <a:lumMod val="60000"/>
-              <a:lumOff val="40000"/>
-            </a:schemeClr>
+          <a:xfrm>
+            <a:off x="8980517" y="4870595"/>
+            <a:ext cx="2152505" cy="2152505"/>
+          </a:xfrm>
+          <a:prstGeom prst="rect">
+            <a:avLst/>
+          </a:prstGeom>
+          <a:solidFill>
+            <a:schemeClr val="bg1"/>
           </a:solidFill>
           <a:ln>
-            <a:noFill/>
-          </a:ln>
-          <a:effectLst>
-            <a:outerShdw blurRad="44450" dist="27940" dir="5400000" algn="ctr">
-              <a:srgbClr val="000000">
-                <a:alpha val="32000"/>
-              </a:srgbClr>
-            </a:outerShdw>
-          </a:effectLst>
-          <a:scene3d>
-            <a:camera prst="orthographicFront">
-              <a:rot lat="0" lon="0" rev="0"/>
-            </a:camera>
-            <a:lightRig rig="balanced" dir="t">
-              <a:rot lat="0" lon="0" rev="8700000"/>
-            </a:lightRig>
-          </a:scene3d>
-          <a:sp3d>
-            <a:bevelT w="190500" h="38100"/>
-          </a:sp3d>
+            <a:solidFill>
+              <a:schemeClr val="tx1"/>
+            </a:solidFill>
+          </a:ln>
         </p:spPr>
         <p:style>
           <a:lnRef idx="2">
@@ -8842,9 +9490,15 @@
       </p:sp>
       <p:pic>
         <p:nvPicPr>
-          <p:cNvPr id="23" name="図 22"/>
+          <p:cNvPr id="35" name="図 34">
+            <a:extLst>
+              <a:ext uri="{FF2B5EF4-FFF2-40B4-BE49-F238E27FC236}">
+                <a16:creationId xmlns:a16="http://schemas.microsoft.com/office/drawing/2014/main" id="{4D25D586-4673-0519-0082-209A313BD6F8}"/>
+              </a:ext>
+            </a:extLst>
+          </p:cNvPr>
           <p:cNvPicPr>
-            <a:picLocks/>
+            <a:picLocks noChangeAspect="1"/>
           </p:cNvPicPr>
           <p:nvPr/>
         </p:nvPicPr>
@@ -8856,8 +9510,8 @@
         </p:blipFill>
         <p:spPr>
           <a:xfrm>
-            <a:off x="10672168" y="554149"/>
-            <a:ext cx="1224000" cy="5022000"/>
+            <a:off x="1056828" y="5585285"/>
+            <a:ext cx="725339" cy="725339"/>
           </a:xfrm>
           <a:prstGeom prst="rect">
             <a:avLst/>
@@ -8866,69 +9520,608 @@
       </p:pic>
       <p:pic>
         <p:nvPicPr>
-          <p:cNvPr id="24" name="図 23"/>
+          <p:cNvPr id="36" name="図 35">
+            <a:extLst>
+              <a:ext uri="{FF2B5EF4-FFF2-40B4-BE49-F238E27FC236}">
+                <a16:creationId xmlns:a16="http://schemas.microsoft.com/office/drawing/2014/main" id="{8404B56B-0CFF-E5D1-682E-A415DEB47A62}"/>
+              </a:ext>
+            </a:extLst>
+          </p:cNvPr>
           <p:cNvPicPr>
             <a:picLocks noChangeAspect="1"/>
           </p:cNvPicPr>
           <p:nvPr/>
         </p:nvPicPr>
         <p:blipFill>
-          <a:blip r:embed="rId3"/>
+          <a:blip r:embed="rId2"/>
           <a:stretch>
             <a:fillRect/>
           </a:stretch>
         </p:blipFill>
         <p:spPr>
           <a:xfrm>
-            <a:off x="6417811" y="2777964"/>
-            <a:ext cx="6011177" cy="536494"/>
+            <a:off x="7535775" y="5585285"/>
+            <a:ext cx="725339" cy="725339"/>
           </a:xfrm>
           <a:prstGeom prst="rect">
             <a:avLst/>
           </a:prstGeom>
         </p:spPr>
       </p:pic>
-      <p:cxnSp>
-        <p:nvCxnSpPr>
-          <p:cNvPr id="34" name="直線コネクタ 33"/>
-          <p:cNvCxnSpPr/>
-          <p:nvPr/>
-        </p:nvCxnSpPr>
-        <p:spPr>
-          <a:xfrm rot="600000" flipH="1">
-            <a:off x="12026954" y="3031272"/>
-            <a:ext cx="9513" cy="2488875"/>
-          </a:xfrm>
-          <a:prstGeom prst="line">
-            <a:avLst/>
-          </a:prstGeom>
-          <a:ln w="38100">
+      <p:pic>
+        <p:nvPicPr>
+          <p:cNvPr id="37" name="図 36">
+            <a:extLst>
+              <a:ext uri="{FF2B5EF4-FFF2-40B4-BE49-F238E27FC236}">
+                <a16:creationId xmlns:a16="http://schemas.microsoft.com/office/drawing/2014/main" id="{CB0C6BA0-65FD-2F4D-BEC4-F3175A135AF1}"/>
+              </a:ext>
+            </a:extLst>
+          </p:cNvPr>
+          <p:cNvPicPr>
+            <a:picLocks noChangeAspect="1"/>
+          </p:cNvPicPr>
+          <p:nvPr/>
+        </p:nvPicPr>
+        <p:blipFill>
+          <a:blip r:embed="rId2"/>
+          <a:stretch>
+            <a:fillRect/>
+          </a:stretch>
+        </p:blipFill>
+        <p:spPr>
+          <a:xfrm>
+            <a:off x="9695426" y="5585285"/>
+            <a:ext cx="725339" cy="725339"/>
+          </a:xfrm>
+          <a:prstGeom prst="rect">
+            <a:avLst/>
+          </a:prstGeom>
+        </p:spPr>
+      </p:pic>
+      <p:pic>
+        <p:nvPicPr>
+          <p:cNvPr id="38" name="図 37">
+            <a:extLst>
+              <a:ext uri="{FF2B5EF4-FFF2-40B4-BE49-F238E27FC236}">
+                <a16:creationId xmlns:a16="http://schemas.microsoft.com/office/drawing/2014/main" id="{807AF7CF-24C8-F268-7939-DE9013C84BDB}"/>
+              </a:ext>
+            </a:extLst>
+          </p:cNvPr>
+          <p:cNvPicPr>
+            <a:picLocks noChangeAspect="1"/>
+          </p:cNvPicPr>
+          <p:nvPr/>
+        </p:nvPicPr>
+        <p:blipFill>
+          <a:blip r:embed="rId2"/>
+          <a:stretch>
+            <a:fillRect/>
+          </a:stretch>
+        </p:blipFill>
+        <p:spPr>
+          <a:xfrm>
+            <a:off x="3216477" y="5585285"/>
+            <a:ext cx="725339" cy="725339"/>
+          </a:xfrm>
+          <a:prstGeom prst="rect">
+            <a:avLst/>
+          </a:prstGeom>
+        </p:spPr>
+      </p:pic>
+      <p:pic>
+        <p:nvPicPr>
+          <p:cNvPr id="39" name="図 38">
+            <a:extLst>
+              <a:ext uri="{FF2B5EF4-FFF2-40B4-BE49-F238E27FC236}">
+                <a16:creationId xmlns:a16="http://schemas.microsoft.com/office/drawing/2014/main" id="{F37C8F70-0B16-A1D5-3DE6-8020E2246AB6}"/>
+              </a:ext>
+            </a:extLst>
+          </p:cNvPr>
+          <p:cNvPicPr>
+            <a:picLocks noChangeAspect="1"/>
+          </p:cNvPicPr>
+          <p:nvPr/>
+        </p:nvPicPr>
+        <p:blipFill>
+          <a:blip r:embed="rId2"/>
+          <a:stretch>
+            <a:fillRect/>
+          </a:stretch>
+        </p:blipFill>
+        <p:spPr>
+          <a:xfrm>
+            <a:off x="5376126" y="5585285"/>
+            <a:ext cx="725339" cy="725339"/>
+          </a:xfrm>
+          <a:prstGeom prst="rect">
+            <a:avLst/>
+          </a:prstGeom>
+        </p:spPr>
+      </p:pic>
+      <p:pic>
+        <p:nvPicPr>
+          <p:cNvPr id="26" name="図 25">
+            <a:extLst>
+              <a:ext uri="{FF2B5EF4-FFF2-40B4-BE49-F238E27FC236}">
+                <a16:creationId xmlns:a16="http://schemas.microsoft.com/office/drawing/2014/main" id="{CC9FFE2F-6B60-FAC9-D9C6-211920DBB91D}"/>
+              </a:ext>
+            </a:extLst>
+          </p:cNvPr>
+          <p:cNvPicPr>
+            <a:picLocks noChangeAspect="1"/>
+          </p:cNvPicPr>
+          <p:nvPr/>
+        </p:nvPicPr>
+        <p:blipFill>
+          <a:blip r:embed="rId2"/>
+          <a:stretch>
+            <a:fillRect/>
+          </a:stretch>
+        </p:blipFill>
+        <p:spPr>
+          <a:xfrm>
+            <a:off x="3216477" y="1268773"/>
+            <a:ext cx="725339" cy="725339"/>
+          </a:xfrm>
+          <a:prstGeom prst="rect">
+            <a:avLst/>
+          </a:prstGeom>
+        </p:spPr>
+      </p:pic>
+      <p:pic>
+        <p:nvPicPr>
+          <p:cNvPr id="28" name="図 27">
+            <a:extLst>
+              <a:ext uri="{FF2B5EF4-FFF2-40B4-BE49-F238E27FC236}">
+                <a16:creationId xmlns:a16="http://schemas.microsoft.com/office/drawing/2014/main" id="{46FF5D6C-7F50-63D8-8BC7-1B09B24D45A8}"/>
+              </a:ext>
+            </a:extLst>
+          </p:cNvPr>
+          <p:cNvPicPr>
+            <a:picLocks noChangeAspect="1"/>
+          </p:cNvPicPr>
+          <p:nvPr/>
+        </p:nvPicPr>
+        <p:blipFill>
+          <a:blip r:embed="rId2"/>
+          <a:stretch>
+            <a:fillRect/>
+          </a:stretch>
+        </p:blipFill>
+        <p:spPr>
+          <a:xfrm>
+            <a:off x="1056828" y="3432780"/>
+            <a:ext cx="725339" cy="725339"/>
+          </a:xfrm>
+          <a:prstGeom prst="rect">
+            <a:avLst/>
+          </a:prstGeom>
+        </p:spPr>
+      </p:pic>
+      <p:pic>
+        <p:nvPicPr>
+          <p:cNvPr id="31" name="図 30">
+            <a:extLst>
+              <a:ext uri="{FF2B5EF4-FFF2-40B4-BE49-F238E27FC236}">
+                <a16:creationId xmlns:a16="http://schemas.microsoft.com/office/drawing/2014/main" id="{0F8BC0CC-641E-2336-E696-FBA91D58244C}"/>
+              </a:ext>
+            </a:extLst>
+          </p:cNvPr>
+          <p:cNvPicPr>
+            <a:picLocks noChangeAspect="1"/>
+          </p:cNvPicPr>
+          <p:nvPr/>
+        </p:nvPicPr>
+        <p:blipFill>
+          <a:blip r:embed="rId2"/>
+          <a:stretch>
+            <a:fillRect/>
+          </a:stretch>
+        </p:blipFill>
+        <p:spPr>
+          <a:xfrm>
+            <a:off x="7535775" y="3432780"/>
+            <a:ext cx="725339" cy="725339"/>
+          </a:xfrm>
+          <a:prstGeom prst="rect">
+            <a:avLst/>
+          </a:prstGeom>
+        </p:spPr>
+      </p:pic>
+      <p:pic>
+        <p:nvPicPr>
+          <p:cNvPr id="32" name="図 31">
+            <a:extLst>
+              <a:ext uri="{FF2B5EF4-FFF2-40B4-BE49-F238E27FC236}">
+                <a16:creationId xmlns:a16="http://schemas.microsoft.com/office/drawing/2014/main" id="{80885748-88AB-E974-41C2-EA9108BA6904}"/>
+              </a:ext>
+            </a:extLst>
+          </p:cNvPr>
+          <p:cNvPicPr>
+            <a:picLocks noChangeAspect="1"/>
+          </p:cNvPicPr>
+          <p:nvPr/>
+        </p:nvPicPr>
+        <p:blipFill>
+          <a:blip r:embed="rId2"/>
+          <a:stretch>
+            <a:fillRect/>
+          </a:stretch>
+        </p:blipFill>
+        <p:spPr>
+          <a:xfrm>
+            <a:off x="9695426" y="3432780"/>
+            <a:ext cx="725339" cy="725339"/>
+          </a:xfrm>
+          <a:prstGeom prst="rect">
+            <a:avLst/>
+          </a:prstGeom>
+        </p:spPr>
+      </p:pic>
+      <p:pic>
+        <p:nvPicPr>
+          <p:cNvPr id="33" name="図 32">
+            <a:extLst>
+              <a:ext uri="{FF2B5EF4-FFF2-40B4-BE49-F238E27FC236}">
+                <a16:creationId xmlns:a16="http://schemas.microsoft.com/office/drawing/2014/main" id="{DFAD4664-EC4D-1FCE-FB6C-457EDDAC96BC}"/>
+              </a:ext>
+            </a:extLst>
+          </p:cNvPr>
+          <p:cNvPicPr>
+            <a:picLocks noChangeAspect="1"/>
+          </p:cNvPicPr>
+          <p:nvPr/>
+        </p:nvPicPr>
+        <p:blipFill>
+          <a:blip r:embed="rId2"/>
+          <a:stretch>
+            <a:fillRect/>
+          </a:stretch>
+        </p:blipFill>
+        <p:spPr>
+          <a:xfrm>
+            <a:off x="3216477" y="3432780"/>
+            <a:ext cx="725339" cy="725339"/>
+          </a:xfrm>
+          <a:prstGeom prst="rect">
+            <a:avLst/>
+          </a:prstGeom>
+        </p:spPr>
+      </p:pic>
+      <p:pic>
+        <p:nvPicPr>
+          <p:cNvPr id="34" name="図 33">
+            <a:extLst>
+              <a:ext uri="{FF2B5EF4-FFF2-40B4-BE49-F238E27FC236}">
+                <a16:creationId xmlns:a16="http://schemas.microsoft.com/office/drawing/2014/main" id="{2F0BC8CC-892F-BB72-49AD-4FFEF8DDB062}"/>
+              </a:ext>
+            </a:extLst>
+          </p:cNvPr>
+          <p:cNvPicPr>
+            <a:picLocks noChangeAspect="1"/>
+          </p:cNvPicPr>
+          <p:nvPr/>
+        </p:nvPicPr>
+        <p:blipFill>
+          <a:blip r:embed="rId2"/>
+          <a:stretch>
+            <a:fillRect/>
+          </a:stretch>
+        </p:blipFill>
+        <p:spPr>
+          <a:xfrm>
+            <a:off x="5376126" y="3432780"/>
+            <a:ext cx="725339" cy="725339"/>
+          </a:xfrm>
+          <a:prstGeom prst="rect">
+            <a:avLst/>
+          </a:prstGeom>
+        </p:spPr>
+      </p:pic>
+      <p:pic>
+        <p:nvPicPr>
+          <p:cNvPr id="23" name="図 22">
+            <a:extLst>
+              <a:ext uri="{FF2B5EF4-FFF2-40B4-BE49-F238E27FC236}">
+                <a16:creationId xmlns:a16="http://schemas.microsoft.com/office/drawing/2014/main" id="{80F2CD32-982F-63AC-1B84-472A306A3363}"/>
+              </a:ext>
+            </a:extLst>
+          </p:cNvPr>
+          <p:cNvPicPr>
+            <a:picLocks noChangeAspect="1"/>
+          </p:cNvPicPr>
+          <p:nvPr/>
+        </p:nvPicPr>
+        <p:blipFill>
+          <a:blip r:embed="rId2"/>
+          <a:stretch>
+            <a:fillRect/>
+          </a:stretch>
+        </p:blipFill>
+        <p:spPr>
+          <a:xfrm>
+            <a:off x="1056828" y="1268773"/>
+            <a:ext cx="725339" cy="725339"/>
+          </a:xfrm>
+          <a:prstGeom prst="rect">
+            <a:avLst/>
+          </a:prstGeom>
+        </p:spPr>
+      </p:pic>
+      <p:sp>
+        <p:nvSpPr>
+          <p:cNvPr id="2" name="正方形/長方形 1">
+            <a:extLst>
+              <a:ext uri="{FF2B5EF4-FFF2-40B4-BE49-F238E27FC236}">
+                <a16:creationId xmlns:a16="http://schemas.microsoft.com/office/drawing/2014/main" id="{B07F1DE8-07A2-9690-2E40-F6CF7AF07A6B}"/>
+              </a:ext>
+            </a:extLst>
+          </p:cNvPr>
+          <p:cNvSpPr/>
+          <p:nvPr/>
+        </p:nvSpPr>
+        <p:spPr>
+          <a:xfrm>
+            <a:off x="5196168" y="1122960"/>
+            <a:ext cx="1069260" cy="1069260"/>
+          </a:xfrm>
+          <a:prstGeom prst="rect">
+            <a:avLst/>
+          </a:prstGeom>
+          <a:solidFill>
+            <a:schemeClr val="bg1"/>
+          </a:solidFill>
+          <a:ln>
             <a:solidFill>
-              <a:schemeClr val="bg1">
-                <a:lumMod val="65000"/>
-              </a:schemeClr>
+              <a:schemeClr val="tx1"/>
             </a:solidFill>
           </a:ln>
         </p:spPr>
         <p:style>
-          <a:lnRef idx="1">
-            <a:schemeClr val="accent1"/>
-          </a:lnRef>
-          <a:fillRef idx="0">
-            <a:schemeClr val="accent1"/>
-          </a:fillRef>
-          <a:effectRef idx="0">
-            <a:schemeClr val="accent1"/>
-          </a:effectRef>
-          <a:fontRef idx="minor">
-            <a:schemeClr val="tx1"/>
-          </a:fontRef>
-        </p:style>
-      </p:cxnSp>
+          <a:lnRef idx="2">
+            <a:schemeClr val="accent1">
+              <a:shade val="50000"/>
+            </a:schemeClr>
+          </a:lnRef>
+          <a:fillRef idx="1">
+            <a:schemeClr val="accent1"/>
+          </a:fillRef>
+          <a:effectRef idx="0">
+            <a:schemeClr val="accent1"/>
+          </a:effectRef>
+          <a:fontRef idx="minor">
+            <a:schemeClr val="lt1"/>
+          </a:fontRef>
+        </p:style>
+        <p:txBody>
+          <a:bodyPr rtlCol="0" anchor="ctr"/>
+          <a:lstStyle/>
+          <a:p>
+            <a:pPr algn="ctr"/>
+            <a:endParaRPr kumimoji="1" lang="ja-JP" altLang="en-US"/>
+          </a:p>
+        </p:txBody>
+      </p:sp>
+      <p:sp>
+        <p:nvSpPr>
+          <p:cNvPr id="3" name="正方形/長方形 2">
+            <a:extLst>
+              <a:ext uri="{FF2B5EF4-FFF2-40B4-BE49-F238E27FC236}">
+                <a16:creationId xmlns:a16="http://schemas.microsoft.com/office/drawing/2014/main" id="{19D9CF8B-B4A9-7F5F-FD39-224B29C0AE83}"/>
+              </a:ext>
+            </a:extLst>
+          </p:cNvPr>
+          <p:cNvSpPr/>
+          <p:nvPr/>
+        </p:nvSpPr>
+        <p:spPr>
+          <a:xfrm>
+            <a:off x="6645353" y="1122960"/>
+            <a:ext cx="1069260" cy="1069260"/>
+          </a:xfrm>
+          <a:prstGeom prst="rect">
+            <a:avLst/>
+          </a:prstGeom>
+          <a:solidFill>
+            <a:schemeClr val="bg1"/>
+          </a:solidFill>
+          <a:ln>
+            <a:solidFill>
+              <a:schemeClr val="tx1"/>
+            </a:solidFill>
+          </a:ln>
+        </p:spPr>
+        <p:style>
+          <a:lnRef idx="2">
+            <a:schemeClr val="accent1">
+              <a:shade val="50000"/>
+            </a:schemeClr>
+          </a:lnRef>
+          <a:fillRef idx="1">
+            <a:schemeClr val="accent1"/>
+          </a:fillRef>
+          <a:effectRef idx="0">
+            <a:schemeClr val="accent1"/>
+          </a:effectRef>
+          <a:fontRef idx="minor">
+            <a:schemeClr val="lt1"/>
+          </a:fontRef>
+        </p:style>
+        <p:txBody>
+          <a:bodyPr rtlCol="0" anchor="ctr"/>
+          <a:lstStyle/>
+          <a:p>
+            <a:pPr algn="ctr"/>
+            <a:endParaRPr kumimoji="1" lang="ja-JP" altLang="en-US"/>
+          </a:p>
+        </p:txBody>
+      </p:sp>
+      <p:sp>
+        <p:nvSpPr>
+          <p:cNvPr id="4" name="正方形/長方形 3">
+            <a:extLst>
+              <a:ext uri="{FF2B5EF4-FFF2-40B4-BE49-F238E27FC236}">
+                <a16:creationId xmlns:a16="http://schemas.microsoft.com/office/drawing/2014/main" id="{1746BB52-42D5-E27C-269C-342C16BA71EC}"/>
+              </a:ext>
+            </a:extLst>
+          </p:cNvPr>
+          <p:cNvSpPr/>
+          <p:nvPr/>
+        </p:nvSpPr>
+        <p:spPr>
+          <a:xfrm>
+            <a:off x="8075194" y="1122960"/>
+            <a:ext cx="1069260" cy="1069260"/>
+          </a:xfrm>
+          <a:prstGeom prst="rect">
+            <a:avLst/>
+          </a:prstGeom>
+          <a:solidFill>
+            <a:schemeClr val="bg1"/>
+          </a:solidFill>
+          <a:ln>
+            <a:solidFill>
+              <a:schemeClr val="tx1"/>
+            </a:solidFill>
+          </a:ln>
+        </p:spPr>
+        <p:style>
+          <a:lnRef idx="2">
+            <a:schemeClr val="accent1">
+              <a:shade val="50000"/>
+            </a:schemeClr>
+          </a:lnRef>
+          <a:fillRef idx="1">
+            <a:schemeClr val="accent1"/>
+          </a:fillRef>
+          <a:effectRef idx="0">
+            <a:schemeClr val="accent1"/>
+          </a:effectRef>
+          <a:fontRef idx="minor">
+            <a:schemeClr val="lt1"/>
+          </a:fontRef>
+        </p:style>
+        <p:txBody>
+          <a:bodyPr rtlCol="0" anchor="ctr"/>
+          <a:lstStyle/>
+          <a:p>
+            <a:pPr algn="ctr"/>
+            <a:endParaRPr kumimoji="1" lang="ja-JP" altLang="en-US"/>
+          </a:p>
+        </p:txBody>
+      </p:sp>
+      <p:sp>
+        <p:nvSpPr>
+          <p:cNvPr id="5" name="正方形/長方形 4">
+            <a:extLst>
+              <a:ext uri="{FF2B5EF4-FFF2-40B4-BE49-F238E27FC236}">
+                <a16:creationId xmlns:a16="http://schemas.microsoft.com/office/drawing/2014/main" id="{6E47CB9E-FB60-4D24-2A05-F390FEADEA74}"/>
+              </a:ext>
+            </a:extLst>
+          </p:cNvPr>
+          <p:cNvSpPr/>
+          <p:nvPr/>
+        </p:nvSpPr>
+        <p:spPr>
+          <a:xfrm>
+            <a:off x="9155958" y="1122960"/>
+            <a:ext cx="1069260" cy="1069260"/>
+          </a:xfrm>
+          <a:prstGeom prst="rect">
+            <a:avLst/>
+          </a:prstGeom>
+          <a:solidFill>
+            <a:schemeClr val="bg1"/>
+          </a:solidFill>
+          <a:ln>
+            <a:solidFill>
+              <a:schemeClr val="tx1"/>
+            </a:solidFill>
+          </a:ln>
+        </p:spPr>
+        <p:style>
+          <a:lnRef idx="2">
+            <a:schemeClr val="accent1">
+              <a:shade val="50000"/>
+            </a:schemeClr>
+          </a:lnRef>
+          <a:fillRef idx="1">
+            <a:schemeClr val="accent1"/>
+          </a:fillRef>
+          <a:effectRef idx="0">
+            <a:schemeClr val="accent1"/>
+          </a:effectRef>
+          <a:fontRef idx="minor">
+            <a:schemeClr val="lt1"/>
+          </a:fontRef>
+        </p:style>
+        <p:txBody>
+          <a:bodyPr rtlCol="0" anchor="ctr"/>
+          <a:lstStyle/>
+          <a:p>
+            <a:pPr algn="ctr"/>
+            <a:endParaRPr kumimoji="1" lang="ja-JP" altLang="en-US"/>
+          </a:p>
+        </p:txBody>
+      </p:sp>
+      <p:sp>
+        <p:nvSpPr>
+          <p:cNvPr id="6" name="正方形/長方形 5">
+            <a:extLst>
+              <a:ext uri="{FF2B5EF4-FFF2-40B4-BE49-F238E27FC236}">
+                <a16:creationId xmlns:a16="http://schemas.microsoft.com/office/drawing/2014/main" id="{AB8D9B2B-1628-649F-7934-3F39F02DA3E9}"/>
+              </a:ext>
+            </a:extLst>
+          </p:cNvPr>
+          <p:cNvSpPr/>
+          <p:nvPr/>
+        </p:nvSpPr>
+        <p:spPr>
+          <a:xfrm>
+            <a:off x="10236721" y="1122960"/>
+            <a:ext cx="1069260" cy="1069260"/>
+          </a:xfrm>
+          <a:prstGeom prst="rect">
+            <a:avLst/>
+          </a:prstGeom>
+          <a:solidFill>
+            <a:schemeClr val="bg1"/>
+          </a:solidFill>
+          <a:ln>
+            <a:solidFill>
+              <a:schemeClr val="tx1"/>
+            </a:solidFill>
+          </a:ln>
+        </p:spPr>
+        <p:style>
+          <a:lnRef idx="2">
+            <a:schemeClr val="accent1">
+              <a:shade val="50000"/>
+            </a:schemeClr>
+          </a:lnRef>
+          <a:fillRef idx="1">
+            <a:schemeClr val="accent1"/>
+          </a:fillRef>
+          <a:effectRef idx="0">
+            <a:schemeClr val="accent1"/>
+          </a:effectRef>
+          <a:fontRef idx="minor">
+            <a:schemeClr val="lt1"/>
+          </a:fontRef>
+        </p:style>
+        <p:txBody>
+          <a:bodyPr rtlCol="0" anchor="ctr"/>
+          <a:lstStyle/>
+          <a:p>
+            <a:pPr algn="ctr"/>
+            <a:endParaRPr kumimoji="1" lang="ja-JP" altLang="en-US"/>
+          </a:p>
+        </p:txBody>
+      </p:sp>
     </p:spTree>
     <p:extLst>
       <p:ext uri="{BB962C8B-B14F-4D97-AF65-F5344CB8AC3E}">
-        <p14:creationId xmlns:p14="http://schemas.microsoft.com/office/powerpoint/2010/main" val="327202912"/>
+        <p14:creationId xmlns:p14="http://schemas.microsoft.com/office/powerpoint/2010/main" val="4118832542"/>
       </p:ext>
     </p:extLst>
   </p:cSld>
@@ -8955,6 +10148,1709 @@
           <a:chExt cx="0" cy="0"/>
         </a:xfrm>
       </p:grpSpPr>
+      <p:pic>
+        <p:nvPicPr>
+          <p:cNvPr id="7" name="図 6"/>
+          <p:cNvPicPr>
+            <a:picLocks noChangeAspect="1"/>
+          </p:cNvPicPr>
+          <p:nvPr/>
+        </p:nvPicPr>
+        <p:blipFill rotWithShape="1">
+          <a:blip r:embed="rId2"/>
+          <a:srcRect b="28075"/>
+          <a:stretch/>
+        </p:blipFill>
+        <p:spPr>
+          <a:xfrm rot="18736250">
+            <a:off x="3259751" y="-52734"/>
+            <a:ext cx="753461" cy="4932608"/>
+          </a:xfrm>
+          <a:prstGeom prst="rect">
+            <a:avLst/>
+          </a:prstGeom>
+        </p:spPr>
+      </p:pic>
+      <p:sp>
+        <p:nvSpPr>
+          <p:cNvPr id="8" name="円柱 7"/>
+          <p:cNvSpPr/>
+          <p:nvPr/>
+        </p:nvSpPr>
+        <p:spPr>
+          <a:xfrm rot="7636004">
+            <a:off x="5225026" y="4066379"/>
+            <a:ext cx="430361" cy="251549"/>
+          </a:xfrm>
+          <a:prstGeom prst="can">
+            <a:avLst>
+              <a:gd name="adj" fmla="val 11415"/>
+            </a:avLst>
+          </a:prstGeom>
+          <a:solidFill>
+            <a:schemeClr val="tx1">
+              <a:lumMod val="75000"/>
+              <a:lumOff val="25000"/>
+            </a:schemeClr>
+          </a:solidFill>
+          <a:ln>
+            <a:noFill/>
+          </a:ln>
+        </p:spPr>
+        <p:style>
+          <a:lnRef idx="2">
+            <a:schemeClr val="accent1">
+              <a:shade val="50000"/>
+            </a:schemeClr>
+          </a:lnRef>
+          <a:fillRef idx="1">
+            <a:schemeClr val="accent1"/>
+          </a:fillRef>
+          <a:effectRef idx="0">
+            <a:schemeClr val="accent1"/>
+          </a:effectRef>
+          <a:fontRef idx="minor">
+            <a:schemeClr val="lt1"/>
+          </a:fontRef>
+        </p:style>
+        <p:txBody>
+          <a:bodyPr rtlCol="0" anchor="ctr"/>
+          <a:lstStyle/>
+          <a:p>
+            <a:pPr algn="ctr"/>
+            <a:endParaRPr kumimoji="1" lang="ja-JP" altLang="en-US"/>
+          </a:p>
+        </p:txBody>
+      </p:sp>
+      <p:sp>
+        <p:nvSpPr>
+          <p:cNvPr id="10" name="円柱 9"/>
+          <p:cNvSpPr/>
+          <p:nvPr/>
+        </p:nvSpPr>
+        <p:spPr>
+          <a:xfrm rot="7636004">
+            <a:off x="4968028" y="4188442"/>
+            <a:ext cx="1127405" cy="196858"/>
+          </a:xfrm>
+          <a:prstGeom prst="can">
+            <a:avLst>
+              <a:gd name="adj" fmla="val 50000"/>
+            </a:avLst>
+          </a:prstGeom>
+          <a:solidFill>
+            <a:schemeClr val="tx1">
+              <a:lumMod val="75000"/>
+              <a:lumOff val="25000"/>
+            </a:schemeClr>
+          </a:solidFill>
+          <a:ln>
+            <a:noFill/>
+          </a:ln>
+        </p:spPr>
+        <p:style>
+          <a:lnRef idx="2">
+            <a:schemeClr val="accent1">
+              <a:shade val="50000"/>
+            </a:schemeClr>
+          </a:lnRef>
+          <a:fillRef idx="1">
+            <a:schemeClr val="accent1"/>
+          </a:fillRef>
+          <a:effectRef idx="0">
+            <a:schemeClr val="accent1"/>
+          </a:effectRef>
+          <a:fontRef idx="minor">
+            <a:schemeClr val="lt1"/>
+          </a:fontRef>
+        </p:style>
+        <p:txBody>
+          <a:bodyPr rtlCol="0" anchor="ctr"/>
+          <a:lstStyle/>
+          <a:p>
+            <a:pPr algn="ctr"/>
+            <a:endParaRPr kumimoji="1" lang="ja-JP" altLang="en-US"/>
+          </a:p>
+        </p:txBody>
+      </p:sp>
+      <p:sp>
+        <p:nvSpPr>
+          <p:cNvPr id="3" name="月 2"/>
+          <p:cNvSpPr/>
+          <p:nvPr/>
+        </p:nvSpPr>
+        <p:spPr>
+          <a:xfrm>
+            <a:off x="0" y="12879"/>
+            <a:ext cx="1223493" cy="6858000"/>
+          </a:xfrm>
+          <a:prstGeom prst="moon">
+            <a:avLst>
+              <a:gd name="adj" fmla="val 54424"/>
+            </a:avLst>
+          </a:prstGeom>
+          <a:solidFill>
+            <a:schemeClr val="bg1">
+              <a:lumMod val="65000"/>
+            </a:schemeClr>
+          </a:solidFill>
+          <a:ln>
+            <a:noFill/>
+          </a:ln>
+        </p:spPr>
+        <p:style>
+          <a:lnRef idx="2">
+            <a:schemeClr val="accent1">
+              <a:shade val="50000"/>
+            </a:schemeClr>
+          </a:lnRef>
+          <a:fillRef idx="1">
+            <a:schemeClr val="accent1"/>
+          </a:fillRef>
+          <a:effectRef idx="0">
+            <a:schemeClr val="accent1"/>
+          </a:effectRef>
+          <a:fontRef idx="minor">
+            <a:schemeClr val="lt1"/>
+          </a:fontRef>
+        </p:style>
+        <p:txBody>
+          <a:bodyPr rtlCol="0" anchor="ctr"/>
+          <a:lstStyle/>
+          <a:p>
+            <a:pPr algn="ctr"/>
+            <a:endParaRPr kumimoji="1" lang="ja-JP" altLang="en-US"/>
+          </a:p>
+        </p:txBody>
+      </p:sp>
+      <p:sp>
+        <p:nvSpPr>
+          <p:cNvPr id="4" name="月 3"/>
+          <p:cNvSpPr/>
+          <p:nvPr/>
+        </p:nvSpPr>
+        <p:spPr>
+          <a:xfrm>
+            <a:off x="360608" y="13058"/>
+            <a:ext cx="875764" cy="6858000"/>
+          </a:xfrm>
+          <a:prstGeom prst="moon">
+            <a:avLst>
+              <a:gd name="adj" fmla="val 35610"/>
+            </a:avLst>
+          </a:prstGeom>
+          <a:solidFill>
+            <a:schemeClr val="bg1">
+              <a:lumMod val="50000"/>
+            </a:schemeClr>
+          </a:solidFill>
+          <a:ln>
+            <a:noFill/>
+          </a:ln>
+        </p:spPr>
+        <p:style>
+          <a:lnRef idx="2">
+            <a:schemeClr val="accent1">
+              <a:shade val="50000"/>
+            </a:schemeClr>
+          </a:lnRef>
+          <a:fillRef idx="1">
+            <a:schemeClr val="accent1"/>
+          </a:fillRef>
+          <a:effectRef idx="0">
+            <a:schemeClr val="accent1"/>
+          </a:effectRef>
+          <a:fontRef idx="minor">
+            <a:schemeClr val="lt1"/>
+          </a:fontRef>
+        </p:style>
+        <p:txBody>
+          <a:bodyPr rtlCol="0" anchor="ctr"/>
+          <a:lstStyle/>
+          <a:p>
+            <a:pPr algn="ctr"/>
+            <a:endParaRPr kumimoji="1" lang="ja-JP" altLang="en-US"/>
+          </a:p>
+        </p:txBody>
+      </p:sp>
+      <p:sp>
+        <p:nvSpPr>
+          <p:cNvPr id="16" name="円柱 15"/>
+          <p:cNvSpPr/>
+          <p:nvPr/>
+        </p:nvSpPr>
+        <p:spPr>
+          <a:xfrm rot="7636004">
+            <a:off x="6018529" y="3962507"/>
+            <a:ext cx="430361" cy="1666811"/>
+          </a:xfrm>
+          <a:prstGeom prst="can">
+            <a:avLst>
+              <a:gd name="adj" fmla="val 11415"/>
+            </a:avLst>
+          </a:prstGeom>
+          <a:solidFill>
+            <a:schemeClr val="tx1">
+              <a:lumMod val="85000"/>
+              <a:lumOff val="15000"/>
+            </a:schemeClr>
+          </a:solidFill>
+          <a:ln>
+            <a:noFill/>
+          </a:ln>
+        </p:spPr>
+        <p:style>
+          <a:lnRef idx="2">
+            <a:schemeClr val="accent1">
+              <a:shade val="50000"/>
+            </a:schemeClr>
+          </a:lnRef>
+          <a:fillRef idx="1">
+            <a:schemeClr val="accent1"/>
+          </a:fillRef>
+          <a:effectRef idx="0">
+            <a:schemeClr val="accent1"/>
+          </a:effectRef>
+          <a:fontRef idx="minor">
+            <a:schemeClr val="lt1"/>
+          </a:fontRef>
+        </p:style>
+        <p:txBody>
+          <a:bodyPr rtlCol="0" anchor="ctr"/>
+          <a:lstStyle/>
+          <a:p>
+            <a:pPr algn="ctr"/>
+            <a:endParaRPr kumimoji="1" lang="ja-JP" altLang="en-US"/>
+          </a:p>
+        </p:txBody>
+      </p:sp>
+      <p:sp>
+        <p:nvSpPr>
+          <p:cNvPr id="12" name="ひし形 11"/>
+          <p:cNvSpPr/>
+          <p:nvPr/>
+        </p:nvSpPr>
+        <p:spPr>
+          <a:xfrm rot="18217126">
+            <a:off x="5616210" y="4343212"/>
+            <a:ext cx="238125" cy="122166"/>
+          </a:xfrm>
+          <a:prstGeom prst="diamond">
+            <a:avLst/>
+          </a:prstGeom>
+          <a:solidFill>
+            <a:schemeClr val="bg1">
+              <a:lumMod val="65000"/>
+            </a:schemeClr>
+          </a:solidFill>
+          <a:ln>
+            <a:noFill/>
+          </a:ln>
+        </p:spPr>
+        <p:style>
+          <a:lnRef idx="2">
+            <a:schemeClr val="accent1">
+              <a:shade val="50000"/>
+            </a:schemeClr>
+          </a:lnRef>
+          <a:fillRef idx="1">
+            <a:schemeClr val="accent1"/>
+          </a:fillRef>
+          <a:effectRef idx="0">
+            <a:schemeClr val="accent1"/>
+          </a:effectRef>
+          <a:fontRef idx="minor">
+            <a:schemeClr val="lt1"/>
+          </a:fontRef>
+        </p:style>
+        <p:txBody>
+          <a:bodyPr rtlCol="0" anchor="ctr"/>
+          <a:lstStyle/>
+          <a:p>
+            <a:pPr algn="ctr"/>
+            <a:endParaRPr kumimoji="1" lang="ja-JP" altLang="en-US"/>
+          </a:p>
+        </p:txBody>
+      </p:sp>
+      <p:sp>
+        <p:nvSpPr>
+          <p:cNvPr id="13" name="ひし形 12"/>
+          <p:cNvSpPr/>
+          <p:nvPr/>
+        </p:nvSpPr>
+        <p:spPr>
+          <a:xfrm rot="18217126">
+            <a:off x="5761172" y="4447993"/>
+            <a:ext cx="238125" cy="122166"/>
+          </a:xfrm>
+          <a:prstGeom prst="diamond">
+            <a:avLst/>
+          </a:prstGeom>
+          <a:solidFill>
+            <a:schemeClr val="bg1">
+              <a:lumMod val="65000"/>
+            </a:schemeClr>
+          </a:solidFill>
+          <a:ln>
+            <a:noFill/>
+          </a:ln>
+        </p:spPr>
+        <p:style>
+          <a:lnRef idx="2">
+            <a:schemeClr val="accent1">
+              <a:shade val="50000"/>
+            </a:schemeClr>
+          </a:lnRef>
+          <a:fillRef idx="1">
+            <a:schemeClr val="accent1"/>
+          </a:fillRef>
+          <a:effectRef idx="0">
+            <a:schemeClr val="accent1"/>
+          </a:effectRef>
+          <a:fontRef idx="minor">
+            <a:schemeClr val="lt1"/>
+          </a:fontRef>
+        </p:style>
+        <p:txBody>
+          <a:bodyPr rtlCol="0" anchor="ctr"/>
+          <a:lstStyle/>
+          <a:p>
+            <a:pPr algn="ctr"/>
+            <a:endParaRPr kumimoji="1" lang="ja-JP" altLang="en-US"/>
+          </a:p>
+        </p:txBody>
+      </p:sp>
+      <p:sp>
+        <p:nvSpPr>
+          <p:cNvPr id="14" name="ひし形 13"/>
+          <p:cNvSpPr/>
+          <p:nvPr/>
+        </p:nvSpPr>
+        <p:spPr>
+          <a:xfrm rot="18217126">
+            <a:off x="5906134" y="4557534"/>
+            <a:ext cx="238125" cy="122166"/>
+          </a:xfrm>
+          <a:prstGeom prst="diamond">
+            <a:avLst/>
+          </a:prstGeom>
+          <a:solidFill>
+            <a:schemeClr val="bg1">
+              <a:lumMod val="65000"/>
+            </a:schemeClr>
+          </a:solidFill>
+          <a:ln>
+            <a:noFill/>
+          </a:ln>
+        </p:spPr>
+        <p:style>
+          <a:lnRef idx="2">
+            <a:schemeClr val="accent1">
+              <a:shade val="50000"/>
+            </a:schemeClr>
+          </a:lnRef>
+          <a:fillRef idx="1">
+            <a:schemeClr val="accent1"/>
+          </a:fillRef>
+          <a:effectRef idx="0">
+            <a:schemeClr val="accent1"/>
+          </a:effectRef>
+          <a:fontRef idx="minor">
+            <a:schemeClr val="lt1"/>
+          </a:fontRef>
+        </p:style>
+        <p:txBody>
+          <a:bodyPr rtlCol="0" anchor="ctr"/>
+          <a:lstStyle/>
+          <a:p>
+            <a:pPr algn="ctr"/>
+            <a:endParaRPr kumimoji="1" lang="ja-JP" altLang="en-US"/>
+          </a:p>
+        </p:txBody>
+      </p:sp>
+      <p:sp>
+        <p:nvSpPr>
+          <p:cNvPr id="15" name="ひし形 14"/>
+          <p:cNvSpPr/>
+          <p:nvPr/>
+        </p:nvSpPr>
+        <p:spPr>
+          <a:xfrm rot="18217126">
+            <a:off x="6051096" y="4662312"/>
+            <a:ext cx="238125" cy="122166"/>
+          </a:xfrm>
+          <a:prstGeom prst="diamond">
+            <a:avLst/>
+          </a:prstGeom>
+          <a:solidFill>
+            <a:schemeClr val="bg1">
+              <a:lumMod val="65000"/>
+            </a:schemeClr>
+          </a:solidFill>
+          <a:ln>
+            <a:noFill/>
+          </a:ln>
+        </p:spPr>
+        <p:style>
+          <a:lnRef idx="2">
+            <a:schemeClr val="accent1">
+              <a:shade val="50000"/>
+            </a:schemeClr>
+          </a:lnRef>
+          <a:fillRef idx="1">
+            <a:schemeClr val="accent1"/>
+          </a:fillRef>
+          <a:effectRef idx="0">
+            <a:schemeClr val="accent1"/>
+          </a:effectRef>
+          <a:fontRef idx="minor">
+            <a:schemeClr val="lt1"/>
+          </a:fontRef>
+        </p:style>
+        <p:txBody>
+          <a:bodyPr rtlCol="0" anchor="ctr"/>
+          <a:lstStyle/>
+          <a:p>
+            <a:pPr algn="ctr"/>
+            <a:endParaRPr kumimoji="1" lang="ja-JP" altLang="en-US"/>
+          </a:p>
+        </p:txBody>
+      </p:sp>
+      <p:sp>
+        <p:nvSpPr>
+          <p:cNvPr id="17" name="ひし形 16"/>
+          <p:cNvSpPr/>
+          <p:nvPr/>
+        </p:nvSpPr>
+        <p:spPr>
+          <a:xfrm rot="18217126">
+            <a:off x="6196058" y="4781381"/>
+            <a:ext cx="238125" cy="122166"/>
+          </a:xfrm>
+          <a:prstGeom prst="diamond">
+            <a:avLst/>
+          </a:prstGeom>
+          <a:solidFill>
+            <a:schemeClr val="bg1">
+              <a:lumMod val="65000"/>
+            </a:schemeClr>
+          </a:solidFill>
+          <a:ln>
+            <a:noFill/>
+          </a:ln>
+        </p:spPr>
+        <p:style>
+          <a:lnRef idx="2">
+            <a:schemeClr val="accent1">
+              <a:shade val="50000"/>
+            </a:schemeClr>
+          </a:lnRef>
+          <a:fillRef idx="1">
+            <a:schemeClr val="accent1"/>
+          </a:fillRef>
+          <a:effectRef idx="0">
+            <a:schemeClr val="accent1"/>
+          </a:effectRef>
+          <a:fontRef idx="minor">
+            <a:schemeClr val="lt1"/>
+          </a:fontRef>
+        </p:style>
+        <p:txBody>
+          <a:bodyPr rtlCol="0" anchor="ctr"/>
+          <a:lstStyle/>
+          <a:p>
+            <a:pPr algn="ctr"/>
+            <a:endParaRPr kumimoji="1" lang="ja-JP" altLang="en-US"/>
+          </a:p>
+        </p:txBody>
+      </p:sp>
+      <p:sp>
+        <p:nvSpPr>
+          <p:cNvPr id="18" name="ひし形 17"/>
+          <p:cNvSpPr/>
+          <p:nvPr/>
+        </p:nvSpPr>
+        <p:spPr>
+          <a:xfrm rot="18217126">
+            <a:off x="6341020" y="4890924"/>
+            <a:ext cx="238125" cy="122166"/>
+          </a:xfrm>
+          <a:prstGeom prst="diamond">
+            <a:avLst/>
+          </a:prstGeom>
+          <a:solidFill>
+            <a:schemeClr val="bg1">
+              <a:lumMod val="65000"/>
+            </a:schemeClr>
+          </a:solidFill>
+          <a:ln>
+            <a:noFill/>
+          </a:ln>
+        </p:spPr>
+        <p:style>
+          <a:lnRef idx="2">
+            <a:schemeClr val="accent1">
+              <a:shade val="50000"/>
+            </a:schemeClr>
+          </a:lnRef>
+          <a:fillRef idx="1">
+            <a:schemeClr val="accent1"/>
+          </a:fillRef>
+          <a:effectRef idx="0">
+            <a:schemeClr val="accent1"/>
+          </a:effectRef>
+          <a:fontRef idx="minor">
+            <a:schemeClr val="lt1"/>
+          </a:fontRef>
+        </p:style>
+        <p:txBody>
+          <a:bodyPr rtlCol="0" anchor="ctr"/>
+          <a:lstStyle/>
+          <a:p>
+            <a:pPr algn="ctr"/>
+            <a:endParaRPr kumimoji="1" lang="ja-JP" altLang="en-US"/>
+          </a:p>
+        </p:txBody>
+      </p:sp>
+      <p:sp>
+        <p:nvSpPr>
+          <p:cNvPr id="19" name="ひし形 18"/>
+          <p:cNvSpPr/>
+          <p:nvPr/>
+        </p:nvSpPr>
+        <p:spPr>
+          <a:xfrm rot="18217126">
+            <a:off x="6485982" y="5000468"/>
+            <a:ext cx="238125" cy="122166"/>
+          </a:xfrm>
+          <a:prstGeom prst="diamond">
+            <a:avLst/>
+          </a:prstGeom>
+          <a:solidFill>
+            <a:schemeClr val="bg1">
+              <a:lumMod val="65000"/>
+            </a:schemeClr>
+          </a:solidFill>
+          <a:ln>
+            <a:noFill/>
+          </a:ln>
+        </p:spPr>
+        <p:style>
+          <a:lnRef idx="2">
+            <a:schemeClr val="accent1">
+              <a:shade val="50000"/>
+            </a:schemeClr>
+          </a:lnRef>
+          <a:fillRef idx="1">
+            <a:schemeClr val="accent1"/>
+          </a:fillRef>
+          <a:effectRef idx="0">
+            <a:schemeClr val="accent1"/>
+          </a:effectRef>
+          <a:fontRef idx="minor">
+            <a:schemeClr val="lt1"/>
+          </a:fontRef>
+        </p:style>
+        <p:txBody>
+          <a:bodyPr rtlCol="0" anchor="ctr"/>
+          <a:lstStyle/>
+          <a:p>
+            <a:pPr algn="ctr"/>
+            <a:endParaRPr kumimoji="1" lang="ja-JP" altLang="en-US"/>
+          </a:p>
+        </p:txBody>
+      </p:sp>
+      <p:sp>
+        <p:nvSpPr>
+          <p:cNvPr id="20" name="ひし形 19"/>
+          <p:cNvSpPr/>
+          <p:nvPr/>
+        </p:nvSpPr>
+        <p:spPr>
+          <a:xfrm rot="18217126">
+            <a:off x="6630946" y="5114773"/>
+            <a:ext cx="238125" cy="122166"/>
+          </a:xfrm>
+          <a:prstGeom prst="diamond">
+            <a:avLst/>
+          </a:prstGeom>
+          <a:solidFill>
+            <a:schemeClr val="bg1">
+              <a:lumMod val="65000"/>
+            </a:schemeClr>
+          </a:solidFill>
+          <a:ln>
+            <a:noFill/>
+          </a:ln>
+        </p:spPr>
+        <p:style>
+          <a:lnRef idx="2">
+            <a:schemeClr val="accent1">
+              <a:shade val="50000"/>
+            </a:schemeClr>
+          </a:lnRef>
+          <a:fillRef idx="1">
+            <a:schemeClr val="accent1"/>
+          </a:fillRef>
+          <a:effectRef idx="0">
+            <a:schemeClr val="accent1"/>
+          </a:effectRef>
+          <a:fontRef idx="minor">
+            <a:schemeClr val="lt1"/>
+          </a:fontRef>
+        </p:style>
+        <p:txBody>
+          <a:bodyPr rtlCol="0" anchor="ctr"/>
+          <a:lstStyle/>
+          <a:p>
+            <a:pPr algn="ctr"/>
+            <a:endParaRPr kumimoji="1" lang="ja-JP" altLang="en-US"/>
+          </a:p>
+        </p:txBody>
+      </p:sp>
+    </p:spTree>
+    <p:extLst>
+      <p:ext uri="{BB962C8B-B14F-4D97-AF65-F5344CB8AC3E}">
+        <p14:creationId xmlns:p14="http://schemas.microsoft.com/office/powerpoint/2010/main" val="4000206588"/>
+      </p:ext>
+    </p:extLst>
+  </p:cSld>
+  <p:clrMapOvr>
+    <a:masterClrMapping/>
+  </p:clrMapOvr>
+</p:sld>
+</file>
+
+<file path=ppt/slides/slide7.xml><?xml version="1.0" encoding="utf-8"?>
+<p:sld xmlns:a="http://schemas.openxmlformats.org/drawingml/2006/main" xmlns:r="http://schemas.openxmlformats.org/officeDocument/2006/relationships" xmlns:p="http://schemas.openxmlformats.org/presentationml/2006/main">
+  <p:cSld>
+    <p:spTree>
+      <p:nvGrpSpPr>
+        <p:cNvPr id="1" name=""/>
+        <p:cNvGrpSpPr/>
+        <p:nvPr/>
+      </p:nvGrpSpPr>
+      <p:grpSpPr>
+        <a:xfrm>
+          <a:off x="0" y="0"/>
+          <a:ext cx="0" cy="0"/>
+          <a:chOff x="0" y="0"/>
+          <a:chExt cx="0" cy="0"/>
+        </a:xfrm>
+      </p:grpSpPr>
+      <p:cxnSp>
+        <p:nvCxnSpPr>
+          <p:cNvPr id="33" name="直線コネクタ 32"/>
+          <p:cNvCxnSpPr/>
+          <p:nvPr/>
+        </p:nvCxnSpPr>
+        <p:spPr>
+          <a:xfrm rot="21000000" flipH="1">
+            <a:off x="12038558" y="572251"/>
+            <a:ext cx="9525" cy="2492062"/>
+          </a:xfrm>
+          <a:prstGeom prst="line">
+            <a:avLst/>
+          </a:prstGeom>
+          <a:ln w="38100">
+            <a:solidFill>
+              <a:schemeClr val="bg1">
+                <a:lumMod val="65000"/>
+              </a:schemeClr>
+            </a:solidFill>
+          </a:ln>
+        </p:spPr>
+        <p:style>
+          <a:lnRef idx="1">
+            <a:schemeClr val="accent1"/>
+          </a:lnRef>
+          <a:fillRef idx="0">
+            <a:schemeClr val="accent1"/>
+          </a:fillRef>
+          <a:effectRef idx="0">
+            <a:schemeClr val="accent1"/>
+          </a:effectRef>
+          <a:fontRef idx="minor">
+            <a:schemeClr val="tx1"/>
+          </a:fontRef>
+        </p:style>
+      </p:cxnSp>
+      <p:sp>
+        <p:nvSpPr>
+          <p:cNvPr id="2" name="月 1"/>
+          <p:cNvSpPr/>
+          <p:nvPr/>
+        </p:nvSpPr>
+        <p:spPr>
+          <a:xfrm>
+            <a:off x="2422919" y="554149"/>
+            <a:ext cx="1004105" cy="4984124"/>
+          </a:xfrm>
+          <a:prstGeom prst="moon">
+            <a:avLst>
+              <a:gd name="adj" fmla="val 21698"/>
+            </a:avLst>
+          </a:prstGeom>
+          <a:solidFill>
+            <a:schemeClr val="accent4">
+              <a:lumMod val="75000"/>
+            </a:schemeClr>
+          </a:solidFill>
+          <a:ln>
+            <a:noFill/>
+          </a:ln>
+          <a:effectLst>
+            <a:outerShdw blurRad="44450" dist="27940" dir="5400000" algn="ctr">
+              <a:srgbClr val="000000">
+                <a:alpha val="32000"/>
+              </a:srgbClr>
+            </a:outerShdw>
+          </a:effectLst>
+          <a:scene3d>
+            <a:camera prst="orthographicFront">
+              <a:rot lat="0" lon="0" rev="0"/>
+            </a:camera>
+            <a:lightRig rig="balanced" dir="t">
+              <a:rot lat="0" lon="0" rev="8700000"/>
+            </a:lightRig>
+          </a:scene3d>
+          <a:sp3d>
+            <a:bevelT w="190500" h="38100"/>
+          </a:sp3d>
+        </p:spPr>
+        <p:style>
+          <a:lnRef idx="2">
+            <a:schemeClr val="accent1">
+              <a:shade val="50000"/>
+            </a:schemeClr>
+          </a:lnRef>
+          <a:fillRef idx="1">
+            <a:schemeClr val="accent1"/>
+          </a:fillRef>
+          <a:effectRef idx="0">
+            <a:schemeClr val="accent1"/>
+          </a:effectRef>
+          <a:fontRef idx="minor">
+            <a:schemeClr val="lt1"/>
+          </a:fontRef>
+        </p:style>
+        <p:txBody>
+          <a:bodyPr rtlCol="0" anchor="ctr"/>
+          <a:lstStyle/>
+          <a:p>
+            <a:pPr algn="ctr"/>
+            <a:endParaRPr kumimoji="1" lang="ja-JP" altLang="en-US"/>
+          </a:p>
+        </p:txBody>
+      </p:sp>
+      <p:sp>
+        <p:nvSpPr>
+          <p:cNvPr id="3" name="月 2"/>
+          <p:cNvSpPr/>
+          <p:nvPr/>
+        </p:nvSpPr>
+        <p:spPr>
+          <a:xfrm>
+            <a:off x="2604188" y="554149"/>
+            <a:ext cx="841886" cy="4984124"/>
+          </a:xfrm>
+          <a:prstGeom prst="moon">
+            <a:avLst>
+              <a:gd name="adj" fmla="val 13325"/>
+            </a:avLst>
+          </a:prstGeom>
+          <a:solidFill>
+            <a:schemeClr val="accent4">
+              <a:lumMod val="50000"/>
+            </a:schemeClr>
+          </a:solidFill>
+          <a:ln>
+            <a:noFill/>
+          </a:ln>
+          <a:effectLst>
+            <a:outerShdw blurRad="44450" dist="27940" dir="5400000" algn="ctr">
+              <a:srgbClr val="000000">
+                <a:alpha val="32000"/>
+              </a:srgbClr>
+            </a:outerShdw>
+          </a:effectLst>
+          <a:scene3d>
+            <a:camera prst="orthographicFront">
+              <a:rot lat="0" lon="0" rev="0"/>
+            </a:camera>
+            <a:lightRig rig="balanced" dir="t">
+              <a:rot lat="0" lon="0" rev="8700000"/>
+            </a:lightRig>
+          </a:scene3d>
+          <a:sp3d>
+            <a:bevelT w="190500" h="38100"/>
+          </a:sp3d>
+        </p:spPr>
+        <p:style>
+          <a:lnRef idx="2">
+            <a:schemeClr val="accent1">
+              <a:shade val="50000"/>
+            </a:schemeClr>
+          </a:lnRef>
+          <a:fillRef idx="1">
+            <a:schemeClr val="accent1"/>
+          </a:fillRef>
+          <a:effectRef idx="0">
+            <a:schemeClr val="accent1"/>
+          </a:effectRef>
+          <a:fontRef idx="minor">
+            <a:schemeClr val="lt1"/>
+          </a:fontRef>
+        </p:style>
+        <p:txBody>
+          <a:bodyPr rtlCol="0" anchor="ctr"/>
+          <a:lstStyle/>
+          <a:p>
+            <a:pPr algn="ctr"/>
+            <a:endParaRPr kumimoji="1" lang="ja-JP" altLang="en-US"/>
+          </a:p>
+        </p:txBody>
+      </p:sp>
+      <p:cxnSp>
+        <p:nvCxnSpPr>
+          <p:cNvPr id="5" name="直線コネクタ 4"/>
+          <p:cNvCxnSpPr>
+            <a:stCxn id="3" idx="0"/>
+            <a:endCxn id="2" idx="2"/>
+          </p:cNvCxnSpPr>
+          <p:nvPr/>
+        </p:nvCxnSpPr>
+        <p:spPr>
+          <a:xfrm flipH="1">
+            <a:off x="3427024" y="554149"/>
+            <a:ext cx="19050" cy="4984124"/>
+          </a:xfrm>
+          <a:prstGeom prst="line">
+            <a:avLst/>
+          </a:prstGeom>
+          <a:ln w="38100">
+            <a:solidFill>
+              <a:schemeClr val="bg1">
+                <a:lumMod val="65000"/>
+              </a:schemeClr>
+            </a:solidFill>
+          </a:ln>
+        </p:spPr>
+        <p:style>
+          <a:lnRef idx="1">
+            <a:schemeClr val="accent1"/>
+          </a:lnRef>
+          <a:fillRef idx="0">
+            <a:schemeClr val="accent1"/>
+          </a:fillRef>
+          <a:effectRef idx="0">
+            <a:schemeClr val="accent1"/>
+          </a:effectRef>
+          <a:fontRef idx="minor">
+            <a:schemeClr val="tx1"/>
+          </a:fontRef>
+        </p:style>
+      </p:cxnSp>
+      <p:sp>
+        <p:nvSpPr>
+          <p:cNvPr id="7" name="正方形/長方形 6"/>
+          <p:cNvSpPr/>
+          <p:nvPr/>
+        </p:nvSpPr>
+        <p:spPr>
+          <a:xfrm>
+            <a:off x="622300" y="3001056"/>
+            <a:ext cx="4493019" cy="97744"/>
+          </a:xfrm>
+          <a:prstGeom prst="rect">
+            <a:avLst/>
+          </a:prstGeom>
+          <a:solidFill>
+            <a:schemeClr val="accent4">
+              <a:lumMod val="60000"/>
+              <a:lumOff val="40000"/>
+            </a:schemeClr>
+          </a:solidFill>
+          <a:ln>
+            <a:noFill/>
+          </a:ln>
+          <a:effectLst>
+            <a:outerShdw blurRad="44450" dist="27940" dir="5400000" algn="ctr">
+              <a:srgbClr val="000000">
+                <a:alpha val="32000"/>
+              </a:srgbClr>
+            </a:outerShdw>
+          </a:effectLst>
+          <a:scene3d>
+            <a:camera prst="orthographicFront">
+              <a:rot lat="0" lon="0" rev="0"/>
+            </a:camera>
+            <a:lightRig rig="balanced" dir="t">
+              <a:rot lat="0" lon="0" rev="8700000"/>
+            </a:lightRig>
+          </a:scene3d>
+          <a:sp3d>
+            <a:bevelT w="190500" h="38100"/>
+          </a:sp3d>
+        </p:spPr>
+        <p:style>
+          <a:lnRef idx="2">
+            <a:schemeClr val="accent1">
+              <a:shade val="50000"/>
+            </a:schemeClr>
+          </a:lnRef>
+          <a:fillRef idx="1">
+            <a:schemeClr val="accent1"/>
+          </a:fillRef>
+          <a:effectRef idx="0">
+            <a:schemeClr val="accent1"/>
+          </a:effectRef>
+          <a:fontRef idx="minor">
+            <a:schemeClr val="lt1"/>
+          </a:fontRef>
+        </p:style>
+        <p:txBody>
+          <a:bodyPr rtlCol="0" anchor="ctr"/>
+          <a:lstStyle/>
+          <a:p>
+            <a:pPr algn="ctr"/>
+            <a:endParaRPr kumimoji="1" lang="ja-JP" altLang="en-US"/>
+          </a:p>
+        </p:txBody>
+      </p:sp>
+      <p:sp>
+        <p:nvSpPr>
+          <p:cNvPr id="8" name="二等辺三角形 7"/>
+          <p:cNvSpPr/>
+          <p:nvPr/>
+        </p:nvSpPr>
+        <p:spPr>
+          <a:xfrm rot="16200000">
+            <a:off x="171450" y="2735061"/>
+            <a:ext cx="279400" cy="622300"/>
+          </a:xfrm>
+          <a:prstGeom prst="triangle">
+            <a:avLst/>
+          </a:prstGeom>
+          <a:solidFill>
+            <a:schemeClr val="bg1">
+              <a:lumMod val="65000"/>
+            </a:schemeClr>
+          </a:solidFill>
+          <a:ln>
+            <a:noFill/>
+          </a:ln>
+          <a:effectLst>
+            <a:outerShdw blurRad="44450" dist="27940" dir="5400000" algn="ctr">
+              <a:srgbClr val="000000">
+                <a:alpha val="32000"/>
+              </a:srgbClr>
+            </a:outerShdw>
+          </a:effectLst>
+          <a:scene3d>
+            <a:camera prst="orthographicFront">
+              <a:rot lat="0" lon="0" rev="0"/>
+            </a:camera>
+            <a:lightRig rig="balanced" dir="t">
+              <a:rot lat="0" lon="0" rev="8700000"/>
+            </a:lightRig>
+          </a:scene3d>
+          <a:sp3d>
+            <a:bevelT w="190500" h="38100"/>
+          </a:sp3d>
+        </p:spPr>
+        <p:style>
+          <a:lnRef idx="2">
+            <a:schemeClr val="accent1">
+              <a:shade val="50000"/>
+            </a:schemeClr>
+          </a:lnRef>
+          <a:fillRef idx="1">
+            <a:schemeClr val="accent1"/>
+          </a:fillRef>
+          <a:effectRef idx="0">
+            <a:schemeClr val="accent1"/>
+          </a:effectRef>
+          <a:fontRef idx="minor">
+            <a:schemeClr val="lt1"/>
+          </a:fontRef>
+        </p:style>
+        <p:txBody>
+          <a:bodyPr rtlCol="0" anchor="ctr"/>
+          <a:lstStyle/>
+          <a:p>
+            <a:pPr algn="ctr"/>
+            <a:endParaRPr kumimoji="1" lang="ja-JP" altLang="en-US"/>
+          </a:p>
+        </p:txBody>
+      </p:sp>
+      <p:sp>
+        <p:nvSpPr>
+          <p:cNvPr id="15" name="平行四辺形 14"/>
+          <p:cNvSpPr/>
+          <p:nvPr/>
+        </p:nvSpPr>
+        <p:spPr>
+          <a:xfrm>
+            <a:off x="5098656" y="2812345"/>
+            <a:ext cx="289319" cy="236336"/>
+          </a:xfrm>
+          <a:prstGeom prst="parallelogram">
+            <a:avLst>
+              <a:gd name="adj" fmla="val 48046"/>
+            </a:avLst>
+          </a:prstGeom>
+          <a:solidFill>
+            <a:schemeClr val="accent2">
+              <a:lumMod val="60000"/>
+              <a:lumOff val="40000"/>
+            </a:schemeClr>
+          </a:solidFill>
+          <a:ln>
+            <a:noFill/>
+          </a:ln>
+          <a:effectLst>
+            <a:outerShdw blurRad="44450" dist="27940" dir="5400000" algn="ctr">
+              <a:srgbClr val="000000">
+                <a:alpha val="32000"/>
+              </a:srgbClr>
+            </a:outerShdw>
+          </a:effectLst>
+          <a:scene3d>
+            <a:camera prst="orthographicFront">
+              <a:rot lat="0" lon="0" rev="0"/>
+            </a:camera>
+            <a:lightRig rig="balanced" dir="t">
+              <a:rot lat="0" lon="0" rev="8700000"/>
+            </a:lightRig>
+          </a:scene3d>
+          <a:sp3d>
+            <a:bevelT w="190500" h="38100"/>
+          </a:sp3d>
+        </p:spPr>
+        <p:style>
+          <a:lnRef idx="2">
+            <a:schemeClr val="accent1">
+              <a:shade val="50000"/>
+            </a:schemeClr>
+          </a:lnRef>
+          <a:fillRef idx="1">
+            <a:schemeClr val="accent1"/>
+          </a:fillRef>
+          <a:effectRef idx="0">
+            <a:schemeClr val="accent1"/>
+          </a:effectRef>
+          <a:fontRef idx="minor">
+            <a:schemeClr val="lt1"/>
+          </a:fontRef>
+        </p:style>
+        <p:txBody>
+          <a:bodyPr rtlCol="0" anchor="ctr"/>
+          <a:lstStyle/>
+          <a:p>
+            <a:pPr algn="ctr"/>
+            <a:endParaRPr kumimoji="1" lang="ja-JP" altLang="en-US"/>
+          </a:p>
+        </p:txBody>
+      </p:sp>
+      <p:sp>
+        <p:nvSpPr>
+          <p:cNvPr id="16" name="平行四辺形 15"/>
+          <p:cNvSpPr/>
+          <p:nvPr/>
+        </p:nvSpPr>
+        <p:spPr>
+          <a:xfrm>
+            <a:off x="5274363" y="2812345"/>
+            <a:ext cx="289319" cy="236336"/>
+          </a:xfrm>
+          <a:prstGeom prst="parallelogram">
+            <a:avLst>
+              <a:gd name="adj" fmla="val 48046"/>
+            </a:avLst>
+          </a:prstGeom>
+          <a:solidFill>
+            <a:schemeClr val="accent2">
+              <a:lumMod val="60000"/>
+              <a:lumOff val="40000"/>
+            </a:schemeClr>
+          </a:solidFill>
+          <a:ln>
+            <a:noFill/>
+          </a:ln>
+          <a:effectLst>
+            <a:outerShdw blurRad="44450" dist="27940" dir="5400000" algn="ctr">
+              <a:srgbClr val="000000">
+                <a:alpha val="32000"/>
+              </a:srgbClr>
+            </a:outerShdw>
+          </a:effectLst>
+          <a:scene3d>
+            <a:camera prst="orthographicFront">
+              <a:rot lat="0" lon="0" rev="0"/>
+            </a:camera>
+            <a:lightRig rig="balanced" dir="t">
+              <a:rot lat="0" lon="0" rev="8700000"/>
+            </a:lightRig>
+          </a:scene3d>
+          <a:sp3d>
+            <a:bevelT w="190500" h="38100"/>
+          </a:sp3d>
+        </p:spPr>
+        <p:style>
+          <a:lnRef idx="2">
+            <a:schemeClr val="accent1">
+              <a:shade val="50000"/>
+            </a:schemeClr>
+          </a:lnRef>
+          <a:fillRef idx="1">
+            <a:schemeClr val="accent1"/>
+          </a:fillRef>
+          <a:effectRef idx="0">
+            <a:schemeClr val="accent1"/>
+          </a:effectRef>
+          <a:fontRef idx="minor">
+            <a:schemeClr val="lt1"/>
+          </a:fontRef>
+        </p:style>
+        <p:txBody>
+          <a:bodyPr rtlCol="0" anchor="ctr"/>
+          <a:lstStyle/>
+          <a:p>
+            <a:pPr algn="ctr"/>
+            <a:endParaRPr kumimoji="1" lang="ja-JP" altLang="en-US"/>
+          </a:p>
+        </p:txBody>
+      </p:sp>
+      <p:sp>
+        <p:nvSpPr>
+          <p:cNvPr id="17" name="平行四辺形 16"/>
+          <p:cNvSpPr/>
+          <p:nvPr/>
+        </p:nvSpPr>
+        <p:spPr>
+          <a:xfrm>
+            <a:off x="5453291" y="2812345"/>
+            <a:ext cx="289319" cy="236336"/>
+          </a:xfrm>
+          <a:prstGeom prst="parallelogram">
+            <a:avLst>
+              <a:gd name="adj" fmla="val 48046"/>
+            </a:avLst>
+          </a:prstGeom>
+          <a:solidFill>
+            <a:schemeClr val="accent2">
+              <a:lumMod val="60000"/>
+              <a:lumOff val="40000"/>
+            </a:schemeClr>
+          </a:solidFill>
+          <a:ln>
+            <a:noFill/>
+          </a:ln>
+          <a:effectLst>
+            <a:outerShdw blurRad="44450" dist="27940" dir="5400000" algn="ctr">
+              <a:srgbClr val="000000">
+                <a:alpha val="32000"/>
+              </a:srgbClr>
+            </a:outerShdw>
+          </a:effectLst>
+          <a:scene3d>
+            <a:camera prst="orthographicFront">
+              <a:rot lat="0" lon="0" rev="0"/>
+            </a:camera>
+            <a:lightRig rig="balanced" dir="t">
+              <a:rot lat="0" lon="0" rev="8700000"/>
+            </a:lightRig>
+          </a:scene3d>
+          <a:sp3d>
+            <a:bevelT w="190500" h="38100"/>
+          </a:sp3d>
+        </p:spPr>
+        <p:style>
+          <a:lnRef idx="2">
+            <a:schemeClr val="accent1">
+              <a:shade val="50000"/>
+            </a:schemeClr>
+          </a:lnRef>
+          <a:fillRef idx="1">
+            <a:schemeClr val="accent1"/>
+          </a:fillRef>
+          <a:effectRef idx="0">
+            <a:schemeClr val="accent1"/>
+          </a:effectRef>
+          <a:fontRef idx="minor">
+            <a:schemeClr val="lt1"/>
+          </a:fontRef>
+        </p:style>
+        <p:txBody>
+          <a:bodyPr rtlCol="0" anchor="ctr"/>
+          <a:lstStyle/>
+          <a:p>
+            <a:pPr algn="ctr"/>
+            <a:endParaRPr kumimoji="1" lang="ja-JP" altLang="en-US"/>
+          </a:p>
+        </p:txBody>
+      </p:sp>
+      <p:sp>
+        <p:nvSpPr>
+          <p:cNvPr id="18" name="平行四辺形 17"/>
+          <p:cNvSpPr/>
+          <p:nvPr/>
+        </p:nvSpPr>
+        <p:spPr>
+          <a:xfrm>
+            <a:off x="5628998" y="2812345"/>
+            <a:ext cx="289319" cy="236336"/>
+          </a:xfrm>
+          <a:prstGeom prst="parallelogram">
+            <a:avLst>
+              <a:gd name="adj" fmla="val 48046"/>
+            </a:avLst>
+          </a:prstGeom>
+          <a:solidFill>
+            <a:schemeClr val="accent2">
+              <a:lumMod val="60000"/>
+              <a:lumOff val="40000"/>
+            </a:schemeClr>
+          </a:solidFill>
+          <a:ln>
+            <a:noFill/>
+          </a:ln>
+          <a:effectLst>
+            <a:outerShdw blurRad="44450" dist="27940" dir="5400000" algn="ctr">
+              <a:srgbClr val="000000">
+                <a:alpha val="32000"/>
+              </a:srgbClr>
+            </a:outerShdw>
+          </a:effectLst>
+          <a:scene3d>
+            <a:camera prst="orthographicFront">
+              <a:rot lat="0" lon="0" rev="0"/>
+            </a:camera>
+            <a:lightRig rig="balanced" dir="t">
+              <a:rot lat="0" lon="0" rev="8700000"/>
+            </a:lightRig>
+          </a:scene3d>
+          <a:sp3d>
+            <a:bevelT w="190500" h="38100"/>
+          </a:sp3d>
+        </p:spPr>
+        <p:style>
+          <a:lnRef idx="2">
+            <a:schemeClr val="accent1">
+              <a:shade val="50000"/>
+            </a:schemeClr>
+          </a:lnRef>
+          <a:fillRef idx="1">
+            <a:schemeClr val="accent1"/>
+          </a:fillRef>
+          <a:effectRef idx="0">
+            <a:schemeClr val="accent1"/>
+          </a:effectRef>
+          <a:fontRef idx="minor">
+            <a:schemeClr val="lt1"/>
+          </a:fontRef>
+        </p:style>
+        <p:txBody>
+          <a:bodyPr rtlCol="0" anchor="ctr"/>
+          <a:lstStyle/>
+          <a:p>
+            <a:pPr algn="ctr"/>
+            <a:endParaRPr kumimoji="1" lang="ja-JP" altLang="en-US"/>
+          </a:p>
+        </p:txBody>
+      </p:sp>
+      <p:sp>
+        <p:nvSpPr>
+          <p:cNvPr id="19" name="平行四辺形 18"/>
+          <p:cNvSpPr/>
+          <p:nvPr/>
+        </p:nvSpPr>
+        <p:spPr>
+          <a:xfrm flipV="1">
+            <a:off x="5098656" y="3048681"/>
+            <a:ext cx="289319" cy="236336"/>
+          </a:xfrm>
+          <a:prstGeom prst="parallelogram">
+            <a:avLst>
+              <a:gd name="adj" fmla="val 48046"/>
+            </a:avLst>
+          </a:prstGeom>
+          <a:solidFill>
+            <a:schemeClr val="accent2">
+              <a:lumMod val="60000"/>
+              <a:lumOff val="40000"/>
+            </a:schemeClr>
+          </a:solidFill>
+          <a:ln>
+            <a:noFill/>
+          </a:ln>
+          <a:effectLst>
+            <a:outerShdw blurRad="44450" dist="27940" dir="5400000" algn="ctr">
+              <a:srgbClr val="000000">
+                <a:alpha val="32000"/>
+              </a:srgbClr>
+            </a:outerShdw>
+          </a:effectLst>
+          <a:scene3d>
+            <a:camera prst="orthographicFront">
+              <a:rot lat="0" lon="0" rev="0"/>
+            </a:camera>
+            <a:lightRig rig="balanced" dir="t">
+              <a:rot lat="0" lon="0" rev="8700000"/>
+            </a:lightRig>
+          </a:scene3d>
+          <a:sp3d>
+            <a:bevelT w="190500" h="38100"/>
+          </a:sp3d>
+        </p:spPr>
+        <p:style>
+          <a:lnRef idx="2">
+            <a:schemeClr val="accent1">
+              <a:shade val="50000"/>
+            </a:schemeClr>
+          </a:lnRef>
+          <a:fillRef idx="1">
+            <a:schemeClr val="accent1"/>
+          </a:fillRef>
+          <a:effectRef idx="0">
+            <a:schemeClr val="accent1"/>
+          </a:effectRef>
+          <a:fontRef idx="minor">
+            <a:schemeClr val="lt1"/>
+          </a:fontRef>
+        </p:style>
+        <p:txBody>
+          <a:bodyPr rtlCol="0" anchor="ctr"/>
+          <a:lstStyle/>
+          <a:p>
+            <a:pPr algn="ctr"/>
+            <a:endParaRPr kumimoji="1" lang="ja-JP" altLang="en-US"/>
+          </a:p>
+        </p:txBody>
+      </p:sp>
+      <p:sp>
+        <p:nvSpPr>
+          <p:cNvPr id="20" name="平行四辺形 19"/>
+          <p:cNvSpPr/>
+          <p:nvPr/>
+        </p:nvSpPr>
+        <p:spPr>
+          <a:xfrm flipV="1">
+            <a:off x="5274363" y="3048681"/>
+            <a:ext cx="289319" cy="236336"/>
+          </a:xfrm>
+          <a:prstGeom prst="parallelogram">
+            <a:avLst>
+              <a:gd name="adj" fmla="val 48046"/>
+            </a:avLst>
+          </a:prstGeom>
+          <a:solidFill>
+            <a:schemeClr val="accent2">
+              <a:lumMod val="60000"/>
+              <a:lumOff val="40000"/>
+            </a:schemeClr>
+          </a:solidFill>
+          <a:ln>
+            <a:noFill/>
+          </a:ln>
+          <a:effectLst>
+            <a:outerShdw blurRad="44450" dist="27940" dir="5400000" algn="ctr">
+              <a:srgbClr val="000000">
+                <a:alpha val="32000"/>
+              </a:srgbClr>
+            </a:outerShdw>
+          </a:effectLst>
+          <a:scene3d>
+            <a:camera prst="orthographicFront">
+              <a:rot lat="0" lon="0" rev="0"/>
+            </a:camera>
+            <a:lightRig rig="balanced" dir="t">
+              <a:rot lat="0" lon="0" rev="8700000"/>
+            </a:lightRig>
+          </a:scene3d>
+          <a:sp3d>
+            <a:bevelT w="190500" h="38100"/>
+          </a:sp3d>
+        </p:spPr>
+        <p:style>
+          <a:lnRef idx="2">
+            <a:schemeClr val="accent1">
+              <a:shade val="50000"/>
+            </a:schemeClr>
+          </a:lnRef>
+          <a:fillRef idx="1">
+            <a:schemeClr val="accent1"/>
+          </a:fillRef>
+          <a:effectRef idx="0">
+            <a:schemeClr val="accent1"/>
+          </a:effectRef>
+          <a:fontRef idx="minor">
+            <a:schemeClr val="lt1"/>
+          </a:fontRef>
+        </p:style>
+        <p:txBody>
+          <a:bodyPr rtlCol="0" anchor="ctr"/>
+          <a:lstStyle/>
+          <a:p>
+            <a:pPr algn="ctr"/>
+            <a:endParaRPr kumimoji="1" lang="ja-JP" altLang="en-US"/>
+          </a:p>
+        </p:txBody>
+      </p:sp>
+      <p:sp>
+        <p:nvSpPr>
+          <p:cNvPr id="21" name="平行四辺形 20"/>
+          <p:cNvSpPr/>
+          <p:nvPr/>
+        </p:nvSpPr>
+        <p:spPr>
+          <a:xfrm flipV="1">
+            <a:off x="5453291" y="3048681"/>
+            <a:ext cx="289319" cy="236336"/>
+          </a:xfrm>
+          <a:prstGeom prst="parallelogram">
+            <a:avLst>
+              <a:gd name="adj" fmla="val 48046"/>
+            </a:avLst>
+          </a:prstGeom>
+          <a:solidFill>
+            <a:schemeClr val="accent2">
+              <a:lumMod val="60000"/>
+              <a:lumOff val="40000"/>
+            </a:schemeClr>
+          </a:solidFill>
+          <a:ln>
+            <a:noFill/>
+          </a:ln>
+          <a:effectLst>
+            <a:outerShdw blurRad="44450" dist="27940" dir="5400000" algn="ctr">
+              <a:srgbClr val="000000">
+                <a:alpha val="32000"/>
+              </a:srgbClr>
+            </a:outerShdw>
+          </a:effectLst>
+          <a:scene3d>
+            <a:camera prst="orthographicFront">
+              <a:rot lat="0" lon="0" rev="0"/>
+            </a:camera>
+            <a:lightRig rig="balanced" dir="t">
+              <a:rot lat="0" lon="0" rev="8700000"/>
+            </a:lightRig>
+          </a:scene3d>
+          <a:sp3d>
+            <a:bevelT w="190500" h="38100"/>
+          </a:sp3d>
+        </p:spPr>
+        <p:style>
+          <a:lnRef idx="2">
+            <a:schemeClr val="accent1">
+              <a:shade val="50000"/>
+            </a:schemeClr>
+          </a:lnRef>
+          <a:fillRef idx="1">
+            <a:schemeClr val="accent1"/>
+          </a:fillRef>
+          <a:effectRef idx="0">
+            <a:schemeClr val="accent1"/>
+          </a:effectRef>
+          <a:fontRef idx="minor">
+            <a:schemeClr val="lt1"/>
+          </a:fontRef>
+        </p:style>
+        <p:txBody>
+          <a:bodyPr rtlCol="0" anchor="ctr"/>
+          <a:lstStyle/>
+          <a:p>
+            <a:pPr algn="ctr"/>
+            <a:endParaRPr kumimoji="1" lang="ja-JP" altLang="en-US"/>
+          </a:p>
+        </p:txBody>
+      </p:sp>
+      <p:sp>
+        <p:nvSpPr>
+          <p:cNvPr id="22" name="平行四辺形 21"/>
+          <p:cNvSpPr/>
+          <p:nvPr/>
+        </p:nvSpPr>
+        <p:spPr>
+          <a:xfrm flipV="1">
+            <a:off x="5628998" y="3048681"/>
+            <a:ext cx="289319" cy="236336"/>
+          </a:xfrm>
+          <a:prstGeom prst="parallelogram">
+            <a:avLst>
+              <a:gd name="adj" fmla="val 48046"/>
+            </a:avLst>
+          </a:prstGeom>
+          <a:solidFill>
+            <a:schemeClr val="accent2">
+              <a:lumMod val="60000"/>
+              <a:lumOff val="40000"/>
+            </a:schemeClr>
+          </a:solidFill>
+          <a:ln>
+            <a:noFill/>
+          </a:ln>
+          <a:effectLst>
+            <a:outerShdw blurRad="44450" dist="27940" dir="5400000" algn="ctr">
+              <a:srgbClr val="000000">
+                <a:alpha val="32000"/>
+              </a:srgbClr>
+            </a:outerShdw>
+          </a:effectLst>
+          <a:scene3d>
+            <a:camera prst="orthographicFront">
+              <a:rot lat="0" lon="0" rev="0"/>
+            </a:camera>
+            <a:lightRig rig="balanced" dir="t">
+              <a:rot lat="0" lon="0" rev="8700000"/>
+            </a:lightRig>
+          </a:scene3d>
+          <a:sp3d>
+            <a:bevelT w="190500" h="38100"/>
+          </a:sp3d>
+        </p:spPr>
+        <p:style>
+          <a:lnRef idx="2">
+            <a:schemeClr val="accent1">
+              <a:shade val="50000"/>
+            </a:schemeClr>
+          </a:lnRef>
+          <a:fillRef idx="1">
+            <a:schemeClr val="accent1"/>
+          </a:fillRef>
+          <a:effectRef idx="0">
+            <a:schemeClr val="accent1"/>
+          </a:effectRef>
+          <a:fontRef idx="minor">
+            <a:schemeClr val="lt1"/>
+          </a:fontRef>
+        </p:style>
+        <p:txBody>
+          <a:bodyPr rtlCol="0" anchor="ctr"/>
+          <a:lstStyle/>
+          <a:p>
+            <a:pPr algn="ctr"/>
+            <a:endParaRPr kumimoji="1" lang="ja-JP" altLang="en-US"/>
+          </a:p>
+        </p:txBody>
+      </p:sp>
+      <p:pic>
+        <p:nvPicPr>
+          <p:cNvPr id="23" name="図 22"/>
+          <p:cNvPicPr>
+            <a:picLocks/>
+          </p:cNvPicPr>
+          <p:nvPr/>
+        </p:nvPicPr>
+        <p:blipFill>
+          <a:blip r:embed="rId2"/>
+          <a:stretch>
+            <a:fillRect/>
+          </a:stretch>
+        </p:blipFill>
+        <p:spPr>
+          <a:xfrm>
+            <a:off x="10672168" y="554149"/>
+            <a:ext cx="1224000" cy="5022000"/>
+          </a:xfrm>
+          <a:prstGeom prst="rect">
+            <a:avLst/>
+          </a:prstGeom>
+        </p:spPr>
+      </p:pic>
+      <p:pic>
+        <p:nvPicPr>
+          <p:cNvPr id="24" name="図 23"/>
+          <p:cNvPicPr>
+            <a:picLocks noChangeAspect="1"/>
+          </p:cNvPicPr>
+          <p:nvPr/>
+        </p:nvPicPr>
+        <p:blipFill>
+          <a:blip r:embed="rId3"/>
+          <a:stretch>
+            <a:fillRect/>
+          </a:stretch>
+        </p:blipFill>
+        <p:spPr>
+          <a:xfrm>
+            <a:off x="6417811" y="2777964"/>
+            <a:ext cx="6011177" cy="536494"/>
+          </a:xfrm>
+          <a:prstGeom prst="rect">
+            <a:avLst/>
+          </a:prstGeom>
+        </p:spPr>
+      </p:pic>
+      <p:cxnSp>
+        <p:nvCxnSpPr>
+          <p:cNvPr id="34" name="直線コネクタ 33"/>
+          <p:cNvCxnSpPr/>
+          <p:nvPr/>
+        </p:nvCxnSpPr>
+        <p:spPr>
+          <a:xfrm rot="600000" flipH="1">
+            <a:off x="12026954" y="3031272"/>
+            <a:ext cx="9513" cy="2488875"/>
+          </a:xfrm>
+          <a:prstGeom prst="line">
+            <a:avLst/>
+          </a:prstGeom>
+          <a:ln w="38100">
+            <a:solidFill>
+              <a:schemeClr val="bg1">
+                <a:lumMod val="65000"/>
+              </a:schemeClr>
+            </a:solidFill>
+          </a:ln>
+        </p:spPr>
+        <p:style>
+          <a:lnRef idx="1">
+            <a:schemeClr val="accent1"/>
+          </a:lnRef>
+          <a:fillRef idx="0">
+            <a:schemeClr val="accent1"/>
+          </a:fillRef>
+          <a:effectRef idx="0">
+            <a:schemeClr val="accent1"/>
+          </a:effectRef>
+          <a:fontRef idx="minor">
+            <a:schemeClr val="tx1"/>
+          </a:fontRef>
+        </p:style>
+      </p:cxnSp>
+    </p:spTree>
+    <p:extLst>
+      <p:ext uri="{BB962C8B-B14F-4D97-AF65-F5344CB8AC3E}">
+        <p14:creationId xmlns:p14="http://schemas.microsoft.com/office/powerpoint/2010/main" val="327202912"/>
+      </p:ext>
+    </p:extLst>
+  </p:cSld>
+  <p:clrMapOvr>
+    <a:masterClrMapping/>
+  </p:clrMapOvr>
+</p:sld>
+</file>
+
+<file path=ppt/slides/slide8.xml><?xml version="1.0" encoding="utf-8"?>
+<p:sld xmlns:a="http://schemas.openxmlformats.org/drawingml/2006/main" xmlns:r="http://schemas.openxmlformats.org/officeDocument/2006/relationships" xmlns:p="http://schemas.openxmlformats.org/presentationml/2006/main">
+  <p:cSld>
+    <p:spTree>
+      <p:nvGrpSpPr>
+        <p:cNvPr id="1" name=""/>
+        <p:cNvGrpSpPr/>
+        <p:nvPr/>
+      </p:nvGrpSpPr>
+      <p:grpSpPr>
+        <a:xfrm>
+          <a:off x="0" y="0"/>
+          <a:ext cx="0" cy="0"/>
+          <a:chOff x="0" y="0"/>
+          <a:chExt cx="0" cy="0"/>
+        </a:xfrm>
+      </p:grpSpPr>
       <p:cxnSp>
         <p:nvCxnSpPr>
           <p:cNvPr id="33" name="直線コネクタ 32"/>
@@ -9212,7 +12108,7 @@
 </p:sld>
 </file>
 
-<file path=ppt/slides/slide7.xml><?xml version="1.0" encoding="utf-8"?>
+<file path=ppt/slides/slide9.xml><?xml version="1.0" encoding="utf-8"?>
 <p:sld xmlns:a="http://schemas.openxmlformats.org/drawingml/2006/main" xmlns:r="http://schemas.openxmlformats.org/officeDocument/2006/relationships" xmlns:p="http://schemas.openxmlformats.org/presentationml/2006/main">
   <p:cSld>
     <p:spTree>

--- a/default/soldier weapon.pptx
+++ b/default/soldier weapon.pptx
@@ -15,7 +15,10 @@
     <p:sldId id="265" r:id="rId9"/>
     <p:sldId id="264" r:id="rId10"/>
     <p:sldId id="267" r:id="rId11"/>
-    <p:sldId id="269" r:id="rId12"/>
+    <p:sldId id="270" r:id="rId12"/>
+    <p:sldId id="269" r:id="rId13"/>
+    <p:sldId id="271" r:id="rId14"/>
+    <p:sldId id="272" r:id="rId15"/>
   </p:sldIdLst>
   <p:sldSz cx="12192000" cy="6858000"/>
   <p:notesSz cx="6858000" cy="9144000"/>
@@ -251,7 +254,7 @@
           <a:p>
             <a:fld id="{0E085FA6-3BB9-47BA-8D81-299A75D1B58A}" type="datetimeFigureOut">
               <a:rPr kumimoji="1" lang="ja-JP" altLang="en-US" smtClean="0"/>
-              <a:t>2025/10/14</a:t>
+              <a:t>2025/10/15</a:t>
             </a:fld>
             <a:endParaRPr kumimoji="1" lang="ja-JP" altLang="en-US"/>
           </a:p>
@@ -451,7 +454,7 @@
           <a:p>
             <a:fld id="{0E085FA6-3BB9-47BA-8D81-299A75D1B58A}" type="datetimeFigureOut">
               <a:rPr kumimoji="1" lang="ja-JP" altLang="en-US" smtClean="0"/>
-              <a:t>2025/10/14</a:t>
+              <a:t>2025/10/15</a:t>
             </a:fld>
             <a:endParaRPr kumimoji="1" lang="ja-JP" altLang="en-US"/>
           </a:p>
@@ -661,7 +664,7 @@
           <a:p>
             <a:fld id="{0E085FA6-3BB9-47BA-8D81-299A75D1B58A}" type="datetimeFigureOut">
               <a:rPr kumimoji="1" lang="ja-JP" altLang="en-US" smtClean="0"/>
-              <a:t>2025/10/14</a:t>
+              <a:t>2025/10/15</a:t>
             </a:fld>
             <a:endParaRPr kumimoji="1" lang="ja-JP" altLang="en-US"/>
           </a:p>
@@ -861,7 +864,7 @@
           <a:p>
             <a:fld id="{0E085FA6-3BB9-47BA-8D81-299A75D1B58A}" type="datetimeFigureOut">
               <a:rPr kumimoji="1" lang="ja-JP" altLang="en-US" smtClean="0"/>
-              <a:t>2025/10/14</a:t>
+              <a:t>2025/10/15</a:t>
             </a:fld>
             <a:endParaRPr kumimoji="1" lang="ja-JP" altLang="en-US"/>
           </a:p>
@@ -1106,7 +1109,7 @@
           <a:p>
             <a:fld id="{0E085FA6-3BB9-47BA-8D81-299A75D1B58A}" type="datetimeFigureOut">
               <a:rPr kumimoji="1" lang="ja-JP" altLang="en-US" smtClean="0"/>
-              <a:t>2025/10/14</a:t>
+              <a:t>2025/10/15</a:t>
             </a:fld>
             <a:endParaRPr kumimoji="1" lang="ja-JP" altLang="en-US"/>
           </a:p>
@@ -1399,7 +1402,7 @@
           <a:p>
             <a:fld id="{0E085FA6-3BB9-47BA-8D81-299A75D1B58A}" type="datetimeFigureOut">
               <a:rPr kumimoji="1" lang="ja-JP" altLang="en-US" smtClean="0"/>
-              <a:t>2025/10/14</a:t>
+              <a:t>2025/10/15</a:t>
             </a:fld>
             <a:endParaRPr kumimoji="1" lang="ja-JP" altLang="en-US"/>
           </a:p>
@@ -1827,7 +1830,7 @@
           <a:p>
             <a:fld id="{0E085FA6-3BB9-47BA-8D81-299A75D1B58A}" type="datetimeFigureOut">
               <a:rPr kumimoji="1" lang="ja-JP" altLang="en-US" smtClean="0"/>
-              <a:t>2025/10/14</a:t>
+              <a:t>2025/10/15</a:t>
             </a:fld>
             <a:endParaRPr kumimoji="1" lang="ja-JP" altLang="en-US"/>
           </a:p>
@@ -1944,7 +1947,7 @@
           <a:p>
             <a:fld id="{0E085FA6-3BB9-47BA-8D81-299A75D1B58A}" type="datetimeFigureOut">
               <a:rPr kumimoji="1" lang="ja-JP" altLang="en-US" smtClean="0"/>
-              <a:t>2025/10/14</a:t>
+              <a:t>2025/10/15</a:t>
             </a:fld>
             <a:endParaRPr kumimoji="1" lang="ja-JP" altLang="en-US"/>
           </a:p>
@@ -2039,7 +2042,7 @@
           <a:p>
             <a:fld id="{0E085FA6-3BB9-47BA-8D81-299A75D1B58A}" type="datetimeFigureOut">
               <a:rPr kumimoji="1" lang="ja-JP" altLang="en-US" smtClean="0"/>
-              <a:t>2025/10/14</a:t>
+              <a:t>2025/10/15</a:t>
             </a:fld>
             <a:endParaRPr kumimoji="1" lang="ja-JP" altLang="en-US"/>
           </a:p>
@@ -2346,7 +2349,7 @@
           <a:p>
             <a:fld id="{0E085FA6-3BB9-47BA-8D81-299A75D1B58A}" type="datetimeFigureOut">
               <a:rPr kumimoji="1" lang="ja-JP" altLang="en-US" smtClean="0"/>
-              <a:t>2025/10/14</a:t>
+              <a:t>2025/10/15</a:t>
             </a:fld>
             <a:endParaRPr kumimoji="1" lang="ja-JP" altLang="en-US"/>
           </a:p>
@@ -2598,7 +2601,7 @@
           <a:p>
             <a:fld id="{0E085FA6-3BB9-47BA-8D81-299A75D1B58A}" type="datetimeFigureOut">
               <a:rPr kumimoji="1" lang="ja-JP" altLang="en-US" smtClean="0"/>
-              <a:t>2025/10/14</a:t>
+              <a:t>2025/10/15</a:t>
             </a:fld>
             <a:endParaRPr kumimoji="1" lang="ja-JP" altLang="en-US"/>
           </a:p>
@@ -2841,7 +2844,7 @@
           <a:p>
             <a:fld id="{0E085FA6-3BB9-47BA-8D81-299A75D1B58A}" type="datetimeFigureOut">
               <a:rPr kumimoji="1" lang="ja-JP" altLang="en-US" smtClean="0"/>
-              <a:t>2025/10/14</a:t>
+              <a:t>2025/10/15</a:t>
             </a:fld>
             <a:endParaRPr kumimoji="1" lang="ja-JP" altLang="en-US"/>
           </a:p>
@@ -4902,6 +4905,604 @@
   <p:cSld>
     <p:spTree>
       <p:nvGrpSpPr>
+        <p:cNvPr id="1" name="">
+          <a:extLst>
+            <a:ext uri="{FF2B5EF4-FFF2-40B4-BE49-F238E27FC236}">
+              <a16:creationId xmlns:a16="http://schemas.microsoft.com/office/drawing/2014/main" id="{2302F42F-386A-6B3E-CD60-A1D441795E99}"/>
+            </a:ext>
+          </a:extLst>
+        </p:cNvPr>
+        <p:cNvGrpSpPr/>
+        <p:nvPr/>
+      </p:nvGrpSpPr>
+      <p:grpSpPr>
+        <a:xfrm>
+          <a:off x="0" y="0"/>
+          <a:ext cx="0" cy="0"/>
+          <a:chOff x="0" y="0"/>
+          <a:chExt cx="0" cy="0"/>
+        </a:xfrm>
+      </p:grpSpPr>
+      <p:sp>
+        <p:nvSpPr>
+          <p:cNvPr id="15" name="円柱 14">
+            <a:extLst>
+              <a:ext uri="{FF2B5EF4-FFF2-40B4-BE49-F238E27FC236}">
+                <a16:creationId xmlns:a16="http://schemas.microsoft.com/office/drawing/2014/main" id="{0D038A14-24B1-76A7-7759-8ABF1E4A7257}"/>
+              </a:ext>
+            </a:extLst>
+          </p:cNvPr>
+          <p:cNvSpPr/>
+          <p:nvPr/>
+        </p:nvSpPr>
+        <p:spPr>
+          <a:xfrm rot="3041377">
+            <a:off x="937053" y="1513434"/>
+            <a:ext cx="970384" cy="2481943"/>
+          </a:xfrm>
+          <a:prstGeom prst="can">
+            <a:avLst/>
+          </a:prstGeom>
+          <a:solidFill>
+            <a:schemeClr val="bg1">
+              <a:lumMod val="95000"/>
+            </a:schemeClr>
+          </a:solidFill>
+          <a:ln>
+            <a:noFill/>
+          </a:ln>
+          <a:effectLst>
+            <a:innerShdw blurRad="254000" dist="228600" dir="20400000">
+              <a:prstClr val="black">
+                <a:alpha val="40000"/>
+              </a:prstClr>
+            </a:innerShdw>
+          </a:effectLst>
+        </p:spPr>
+        <p:style>
+          <a:lnRef idx="2">
+            <a:schemeClr val="accent1">
+              <a:shade val="15000"/>
+            </a:schemeClr>
+          </a:lnRef>
+          <a:fillRef idx="1">
+            <a:schemeClr val="accent1"/>
+          </a:fillRef>
+          <a:effectRef idx="0">
+            <a:schemeClr val="accent1"/>
+          </a:effectRef>
+          <a:fontRef idx="minor">
+            <a:schemeClr val="lt1"/>
+          </a:fontRef>
+        </p:style>
+        <p:txBody>
+          <a:bodyPr rtlCol="0" anchor="ctr"/>
+          <a:lstStyle/>
+          <a:p>
+            <a:pPr algn="ctr"/>
+            <a:endParaRPr kumimoji="1" lang="ja-JP" altLang="en-US"/>
+          </a:p>
+        </p:txBody>
+      </p:sp>
+      <p:sp>
+        <p:nvSpPr>
+          <p:cNvPr id="16" name="平行四辺形 15">
+            <a:extLst>
+              <a:ext uri="{FF2B5EF4-FFF2-40B4-BE49-F238E27FC236}">
+                <a16:creationId xmlns:a16="http://schemas.microsoft.com/office/drawing/2014/main" id="{9169DDF3-643B-A6E2-6D24-E40B060D8C5A}"/>
+              </a:ext>
+            </a:extLst>
+          </p:cNvPr>
+          <p:cNvSpPr/>
+          <p:nvPr/>
+        </p:nvSpPr>
+        <p:spPr>
+          <a:xfrm rot="19269654">
+            <a:off x="322672" y="2798407"/>
+            <a:ext cx="2511247" cy="1166327"/>
+          </a:xfrm>
+          <a:prstGeom prst="parallelogram">
+            <a:avLst/>
+          </a:prstGeom>
+          <a:solidFill>
+            <a:schemeClr val="bg1">
+              <a:lumMod val="95000"/>
+            </a:schemeClr>
+          </a:solidFill>
+          <a:ln>
+            <a:noFill/>
+          </a:ln>
+          <a:effectLst>
+            <a:innerShdw blurRad="304800" dist="165100" dir="8100000">
+              <a:prstClr val="black">
+                <a:alpha val="30000"/>
+              </a:prstClr>
+            </a:innerShdw>
+          </a:effectLst>
+        </p:spPr>
+        <p:style>
+          <a:lnRef idx="2">
+            <a:schemeClr val="accent1">
+              <a:shade val="15000"/>
+            </a:schemeClr>
+          </a:lnRef>
+          <a:fillRef idx="1">
+            <a:schemeClr val="accent1"/>
+          </a:fillRef>
+          <a:effectRef idx="0">
+            <a:schemeClr val="accent1"/>
+          </a:effectRef>
+          <a:fontRef idx="minor">
+            <a:schemeClr val="lt1"/>
+          </a:fontRef>
+        </p:style>
+        <p:txBody>
+          <a:bodyPr rtlCol="0" anchor="ctr"/>
+          <a:lstStyle/>
+          <a:p>
+            <a:pPr algn="ctr"/>
+            <a:endParaRPr kumimoji="1" lang="ja-JP" altLang="en-US"/>
+          </a:p>
+        </p:txBody>
+      </p:sp>
+      <p:sp>
+        <p:nvSpPr>
+          <p:cNvPr id="19" name="弦 18">
+            <a:extLst>
+              <a:ext uri="{FF2B5EF4-FFF2-40B4-BE49-F238E27FC236}">
+                <a16:creationId xmlns:a16="http://schemas.microsoft.com/office/drawing/2014/main" id="{0DB71D8B-7676-84DF-2740-55F45E63CC9A}"/>
+              </a:ext>
+            </a:extLst>
+          </p:cNvPr>
+          <p:cNvSpPr/>
+          <p:nvPr/>
+        </p:nvSpPr>
+        <p:spPr>
+          <a:xfrm rot="5400000">
+            <a:off x="1726645" y="3067478"/>
+            <a:ext cx="5658944" cy="2276669"/>
+          </a:xfrm>
+          <a:prstGeom prst="chord">
+            <a:avLst>
+              <a:gd name="adj1" fmla="val 5392430"/>
+              <a:gd name="adj2" fmla="val 16200000"/>
+            </a:avLst>
+          </a:prstGeom>
+          <a:solidFill>
+            <a:schemeClr val="bg1">
+              <a:lumMod val="95000"/>
+            </a:schemeClr>
+          </a:solidFill>
+          <a:ln>
+            <a:noFill/>
+          </a:ln>
+          <a:effectLst>
+            <a:innerShdw blurRad="177800" dist="50800" dir="19800000">
+              <a:prstClr val="black">
+                <a:alpha val="50000"/>
+              </a:prstClr>
+            </a:innerShdw>
+          </a:effectLst>
+        </p:spPr>
+        <p:style>
+          <a:lnRef idx="2">
+            <a:schemeClr val="accent1">
+              <a:shade val="15000"/>
+            </a:schemeClr>
+          </a:lnRef>
+          <a:fillRef idx="1">
+            <a:schemeClr val="accent1"/>
+          </a:fillRef>
+          <a:effectRef idx="0">
+            <a:schemeClr val="accent1"/>
+          </a:effectRef>
+          <a:fontRef idx="minor">
+            <a:schemeClr val="lt1"/>
+          </a:fontRef>
+        </p:style>
+        <p:txBody>
+          <a:bodyPr rtlCol="0" anchor="ctr"/>
+          <a:lstStyle/>
+          <a:p>
+            <a:pPr algn="ctr"/>
+            <a:endParaRPr kumimoji="1" lang="ja-JP" altLang="en-US"/>
+          </a:p>
+        </p:txBody>
+      </p:sp>
+      <p:sp>
+        <p:nvSpPr>
+          <p:cNvPr id="20" name="弦 19">
+            <a:extLst>
+              <a:ext uri="{FF2B5EF4-FFF2-40B4-BE49-F238E27FC236}">
+                <a16:creationId xmlns:a16="http://schemas.microsoft.com/office/drawing/2014/main" id="{5F0BF55A-E40D-362D-BC72-8555EDCF2762}"/>
+              </a:ext>
+            </a:extLst>
+          </p:cNvPr>
+          <p:cNvSpPr/>
+          <p:nvPr/>
+        </p:nvSpPr>
+        <p:spPr>
+          <a:xfrm rot="5400000">
+            <a:off x="3432520" y="3045709"/>
+            <a:ext cx="2262746" cy="2292222"/>
+          </a:xfrm>
+          <a:prstGeom prst="chord">
+            <a:avLst>
+              <a:gd name="adj1" fmla="val 2906992"/>
+              <a:gd name="adj2" fmla="val 18767179"/>
+            </a:avLst>
+          </a:prstGeom>
+          <a:solidFill>
+            <a:schemeClr val="bg1">
+              <a:lumMod val="95000"/>
+            </a:schemeClr>
+          </a:solidFill>
+          <a:ln>
+            <a:noFill/>
+          </a:ln>
+          <a:effectLst>
+            <a:innerShdw blurRad="114300" dist="165100" dir="20400000">
+              <a:prstClr val="black">
+                <a:alpha val="26000"/>
+              </a:prstClr>
+            </a:innerShdw>
+          </a:effectLst>
+        </p:spPr>
+        <p:style>
+          <a:lnRef idx="2">
+            <a:schemeClr val="accent1">
+              <a:shade val="15000"/>
+            </a:schemeClr>
+          </a:lnRef>
+          <a:fillRef idx="1">
+            <a:schemeClr val="accent1"/>
+          </a:fillRef>
+          <a:effectRef idx="0">
+            <a:schemeClr val="accent1"/>
+          </a:effectRef>
+          <a:fontRef idx="minor">
+            <a:schemeClr val="lt1"/>
+          </a:fontRef>
+        </p:style>
+        <p:txBody>
+          <a:bodyPr rtlCol="0" anchor="ctr"/>
+          <a:lstStyle/>
+          <a:p>
+            <a:pPr algn="ctr"/>
+            <a:endParaRPr kumimoji="1" lang="ja-JP" altLang="en-US"/>
+          </a:p>
+        </p:txBody>
+      </p:sp>
+      <p:sp>
+        <p:nvSpPr>
+          <p:cNvPr id="21" name="四角形: 角を丸くする 20">
+            <a:extLst>
+              <a:ext uri="{FF2B5EF4-FFF2-40B4-BE49-F238E27FC236}">
+                <a16:creationId xmlns:a16="http://schemas.microsoft.com/office/drawing/2014/main" id="{3D2580D4-B771-43F2-09B7-B0FDD1FAA1FD}"/>
+              </a:ext>
+            </a:extLst>
+          </p:cNvPr>
+          <p:cNvSpPr/>
+          <p:nvPr/>
+        </p:nvSpPr>
+        <p:spPr>
+          <a:xfrm>
+            <a:off x="4125354" y="1219200"/>
+            <a:ext cx="892629" cy="441978"/>
+          </a:xfrm>
+          <a:prstGeom prst="roundRect">
+            <a:avLst/>
+          </a:prstGeom>
+          <a:solidFill>
+            <a:schemeClr val="accent1">
+              <a:lumMod val="40000"/>
+              <a:lumOff val="60000"/>
+            </a:schemeClr>
+          </a:solidFill>
+          <a:ln>
+            <a:noFill/>
+          </a:ln>
+          <a:effectLst>
+            <a:innerShdw blurRad="152400" dist="76200" dir="2400000">
+              <a:prstClr val="black">
+                <a:alpha val="50000"/>
+              </a:prstClr>
+            </a:innerShdw>
+          </a:effectLst>
+        </p:spPr>
+        <p:style>
+          <a:lnRef idx="2">
+            <a:schemeClr val="accent1">
+              <a:shade val="15000"/>
+            </a:schemeClr>
+          </a:lnRef>
+          <a:fillRef idx="1">
+            <a:schemeClr val="accent1"/>
+          </a:fillRef>
+          <a:effectRef idx="0">
+            <a:schemeClr val="accent1"/>
+          </a:effectRef>
+          <a:fontRef idx="minor">
+            <a:schemeClr val="lt1"/>
+          </a:fontRef>
+        </p:style>
+        <p:txBody>
+          <a:bodyPr rtlCol="0" anchor="ctr"/>
+          <a:lstStyle/>
+          <a:p>
+            <a:pPr algn="ctr"/>
+            <a:endParaRPr kumimoji="1" lang="ja-JP" altLang="en-US"/>
+          </a:p>
+        </p:txBody>
+      </p:sp>
+      <p:sp>
+        <p:nvSpPr>
+          <p:cNvPr id="22" name="四角形: 角を丸くする 21">
+            <a:extLst>
+              <a:ext uri="{FF2B5EF4-FFF2-40B4-BE49-F238E27FC236}">
+                <a16:creationId xmlns:a16="http://schemas.microsoft.com/office/drawing/2014/main" id="{1C942BE8-3DC1-B3EE-EF19-AFA225DA0D77}"/>
+              </a:ext>
+            </a:extLst>
+          </p:cNvPr>
+          <p:cNvSpPr/>
+          <p:nvPr/>
+        </p:nvSpPr>
+        <p:spPr>
+          <a:xfrm>
+            <a:off x="4125353" y="923261"/>
+            <a:ext cx="892629" cy="368960"/>
+          </a:xfrm>
+          <a:prstGeom prst="roundRect">
+            <a:avLst>
+              <a:gd name="adj" fmla="val 29312"/>
+            </a:avLst>
+          </a:prstGeom>
+          <a:solidFill>
+            <a:schemeClr val="accent1">
+              <a:lumMod val="40000"/>
+              <a:lumOff val="60000"/>
+            </a:schemeClr>
+          </a:solidFill>
+          <a:ln>
+            <a:noFill/>
+          </a:ln>
+          <a:effectLst>
+            <a:innerShdw blurRad="152400" dist="76200" dir="2400000">
+              <a:prstClr val="black">
+                <a:alpha val="50000"/>
+              </a:prstClr>
+            </a:innerShdw>
+          </a:effectLst>
+        </p:spPr>
+        <p:style>
+          <a:lnRef idx="2">
+            <a:schemeClr val="accent1">
+              <a:shade val="15000"/>
+            </a:schemeClr>
+          </a:lnRef>
+          <a:fillRef idx="1">
+            <a:schemeClr val="accent1"/>
+          </a:fillRef>
+          <a:effectRef idx="0">
+            <a:schemeClr val="accent1"/>
+          </a:effectRef>
+          <a:fontRef idx="minor">
+            <a:schemeClr val="lt1"/>
+          </a:fontRef>
+        </p:style>
+        <p:txBody>
+          <a:bodyPr rtlCol="0" anchor="ctr"/>
+          <a:lstStyle/>
+          <a:p>
+            <a:pPr algn="ctr"/>
+            <a:endParaRPr kumimoji="1" lang="ja-JP" altLang="en-US"/>
+          </a:p>
+        </p:txBody>
+      </p:sp>
+      <p:sp>
+        <p:nvSpPr>
+          <p:cNvPr id="23" name="四角形: 角を丸くする 22">
+            <a:extLst>
+              <a:ext uri="{FF2B5EF4-FFF2-40B4-BE49-F238E27FC236}">
+                <a16:creationId xmlns:a16="http://schemas.microsoft.com/office/drawing/2014/main" id="{513D8051-C736-E8EC-D76A-4F7D9D7C7715}"/>
+              </a:ext>
+            </a:extLst>
+          </p:cNvPr>
+          <p:cNvSpPr/>
+          <p:nvPr/>
+        </p:nvSpPr>
+        <p:spPr>
+          <a:xfrm>
+            <a:off x="7287209" y="1525487"/>
+            <a:ext cx="909735" cy="3331029"/>
+          </a:xfrm>
+          <a:prstGeom prst="roundRect">
+            <a:avLst>
+              <a:gd name="adj" fmla="val 50000"/>
+            </a:avLst>
+          </a:prstGeom>
+          <a:solidFill>
+            <a:schemeClr val="accent2">
+              <a:lumMod val="40000"/>
+              <a:lumOff val="60000"/>
+            </a:schemeClr>
+          </a:solidFill>
+          <a:ln>
+            <a:noFill/>
+          </a:ln>
+          <a:effectLst>
+            <a:innerShdw blurRad="177800" dist="76200" dir="2700000">
+              <a:prstClr val="black">
+                <a:alpha val="50000"/>
+              </a:prstClr>
+            </a:innerShdw>
+          </a:effectLst>
+        </p:spPr>
+        <p:style>
+          <a:lnRef idx="2">
+            <a:schemeClr val="accent1">
+              <a:shade val="15000"/>
+            </a:schemeClr>
+          </a:lnRef>
+          <a:fillRef idx="1">
+            <a:schemeClr val="accent1"/>
+          </a:fillRef>
+          <a:effectRef idx="0">
+            <a:schemeClr val="accent1"/>
+          </a:effectRef>
+          <a:fontRef idx="minor">
+            <a:schemeClr val="lt1"/>
+          </a:fontRef>
+        </p:style>
+        <p:txBody>
+          <a:bodyPr rtlCol="0" anchor="ctr"/>
+          <a:lstStyle/>
+          <a:p>
+            <a:pPr algn="ctr"/>
+            <a:endParaRPr kumimoji="1" lang="ja-JP" altLang="en-US"/>
+          </a:p>
+        </p:txBody>
+      </p:sp>
+      <p:sp>
+        <p:nvSpPr>
+          <p:cNvPr id="24" name="四角形: 角を丸くする 23">
+            <a:extLst>
+              <a:ext uri="{FF2B5EF4-FFF2-40B4-BE49-F238E27FC236}">
+                <a16:creationId xmlns:a16="http://schemas.microsoft.com/office/drawing/2014/main" id="{C4275EB8-4D79-4912-6697-D436A284F786}"/>
+              </a:ext>
+            </a:extLst>
+          </p:cNvPr>
+          <p:cNvSpPr/>
+          <p:nvPr/>
+        </p:nvSpPr>
+        <p:spPr>
+          <a:xfrm>
+            <a:off x="7422211" y="2739598"/>
+            <a:ext cx="639730" cy="902806"/>
+          </a:xfrm>
+          <a:prstGeom prst="roundRect">
+            <a:avLst>
+              <a:gd name="adj" fmla="val 22678"/>
+            </a:avLst>
+          </a:prstGeom>
+          <a:solidFill>
+            <a:schemeClr val="bg1">
+              <a:lumMod val="95000"/>
+            </a:schemeClr>
+          </a:solidFill>
+          <a:ln>
+            <a:noFill/>
+          </a:ln>
+          <a:scene3d>
+            <a:camera prst="orthographicFront"/>
+            <a:lightRig rig="threePt" dir="t">
+              <a:rot lat="0" lon="0" rev="20400000"/>
+            </a:lightRig>
+          </a:scene3d>
+          <a:sp3d>
+            <a:bevelT w="171450" h="101600"/>
+          </a:sp3d>
+        </p:spPr>
+        <p:style>
+          <a:lnRef idx="2">
+            <a:schemeClr val="accent1">
+              <a:shade val="15000"/>
+            </a:schemeClr>
+          </a:lnRef>
+          <a:fillRef idx="1">
+            <a:schemeClr val="accent1"/>
+          </a:fillRef>
+          <a:effectRef idx="0">
+            <a:schemeClr val="accent1"/>
+          </a:effectRef>
+          <a:fontRef idx="minor">
+            <a:schemeClr val="lt1"/>
+          </a:fontRef>
+        </p:style>
+        <p:txBody>
+          <a:bodyPr rtlCol="0" anchor="ctr"/>
+          <a:lstStyle/>
+          <a:p>
+            <a:pPr algn="ctr"/>
+            <a:endParaRPr kumimoji="1" lang="ja-JP" altLang="en-US"/>
+          </a:p>
+        </p:txBody>
+      </p:sp>
+      <p:sp>
+        <p:nvSpPr>
+          <p:cNvPr id="25" name="星: 4 pt 24">
+            <a:extLst>
+              <a:ext uri="{FF2B5EF4-FFF2-40B4-BE49-F238E27FC236}">
+                <a16:creationId xmlns:a16="http://schemas.microsoft.com/office/drawing/2014/main" id="{EA84A464-6A80-02AB-95F5-548107831004}"/>
+              </a:ext>
+            </a:extLst>
+          </p:cNvPr>
+          <p:cNvSpPr/>
+          <p:nvPr/>
+        </p:nvSpPr>
+        <p:spPr>
+          <a:xfrm>
+            <a:off x="9279294" y="1790620"/>
+            <a:ext cx="1912775" cy="2539653"/>
+          </a:xfrm>
+          <a:prstGeom prst="star4">
+            <a:avLst/>
+          </a:prstGeom>
+          <a:solidFill>
+            <a:schemeClr val="accent1">
+              <a:lumMod val="40000"/>
+              <a:lumOff val="60000"/>
+            </a:schemeClr>
+          </a:solidFill>
+          <a:ln w="76200">
+            <a:solidFill>
+              <a:srgbClr val="FFFF00"/>
+            </a:solidFill>
+          </a:ln>
+        </p:spPr>
+        <p:style>
+          <a:lnRef idx="2">
+            <a:schemeClr val="accent1">
+              <a:shade val="15000"/>
+            </a:schemeClr>
+          </a:lnRef>
+          <a:fillRef idx="1">
+            <a:schemeClr val="accent1"/>
+          </a:fillRef>
+          <a:effectRef idx="0">
+            <a:schemeClr val="accent1"/>
+          </a:effectRef>
+          <a:fontRef idx="minor">
+            <a:schemeClr val="lt1"/>
+          </a:fontRef>
+        </p:style>
+        <p:txBody>
+          <a:bodyPr rtlCol="0" anchor="ctr"/>
+          <a:lstStyle/>
+          <a:p>
+            <a:pPr algn="ctr"/>
+            <a:endParaRPr kumimoji="1" lang="ja-JP" altLang="en-US"/>
+          </a:p>
+        </p:txBody>
+      </p:sp>
+    </p:spTree>
+    <p:extLst>
+      <p:ext uri="{BB962C8B-B14F-4D97-AF65-F5344CB8AC3E}">
+        <p14:creationId xmlns:p14="http://schemas.microsoft.com/office/powerpoint/2010/main" val="110408731"/>
+      </p:ext>
+    </p:extLst>
+  </p:cSld>
+  <p:clrMapOvr>
+    <a:masterClrMapping/>
+  </p:clrMapOvr>
+</p:sld>
+</file>
+
+<file path=ppt/slides/slide12.xml><?xml version="1.0" encoding="utf-8"?>
+<p:sld xmlns:a="http://schemas.openxmlformats.org/drawingml/2006/main" xmlns:r="http://schemas.openxmlformats.org/officeDocument/2006/relationships" xmlns:p="http://schemas.openxmlformats.org/presentationml/2006/main">
+  <p:cSld>
+    <p:spTree>
+      <p:nvGrpSpPr>
         <p:cNvPr id="1" name=""/>
         <p:cNvGrpSpPr/>
         <p:nvPr/>
@@ -4914,10 +5515,3954 @@
           <a:chExt cx="0" cy="0"/>
         </a:xfrm>
       </p:grpSpPr>
+      <p:sp>
+        <p:nvSpPr>
+          <p:cNvPr id="28" name="平行四辺形 27">
+            <a:extLst>
+              <a:ext uri="{FF2B5EF4-FFF2-40B4-BE49-F238E27FC236}">
+                <a16:creationId xmlns:a16="http://schemas.microsoft.com/office/drawing/2014/main" id="{2790EDD4-764D-116A-028D-598E5C92F7E5}"/>
+              </a:ext>
+            </a:extLst>
+          </p:cNvPr>
+          <p:cNvSpPr/>
+          <p:nvPr/>
+        </p:nvSpPr>
+        <p:spPr>
+          <a:xfrm rot="5400000">
+            <a:off x="8513793" y="1319278"/>
+            <a:ext cx="2118049" cy="4243096"/>
+          </a:xfrm>
+          <a:prstGeom prst="parallelogram">
+            <a:avLst>
+              <a:gd name="adj" fmla="val 34483"/>
+            </a:avLst>
+          </a:prstGeom>
+          <a:solidFill>
+            <a:schemeClr val="bg2"/>
+          </a:solidFill>
+          <a:ln>
+            <a:noFill/>
+          </a:ln>
+          <a:scene3d>
+            <a:camera prst="orthographicFront"/>
+            <a:lightRig rig="threePt" dir="t">
+              <a:rot lat="0" lon="0" rev="12600000"/>
+            </a:lightRig>
+          </a:scene3d>
+          <a:sp3d>
+            <a:bevelT w="222250" h="120650" prst="softRound"/>
+          </a:sp3d>
+        </p:spPr>
+        <p:style>
+          <a:lnRef idx="2">
+            <a:schemeClr val="accent1">
+              <a:shade val="15000"/>
+            </a:schemeClr>
+          </a:lnRef>
+          <a:fillRef idx="1">
+            <a:schemeClr val="accent1"/>
+          </a:fillRef>
+          <a:effectRef idx="0">
+            <a:schemeClr val="accent1"/>
+          </a:effectRef>
+          <a:fontRef idx="minor">
+            <a:schemeClr val="lt1"/>
+          </a:fontRef>
+        </p:style>
+        <p:txBody>
+          <a:bodyPr rtlCol="0" anchor="ctr"/>
+          <a:lstStyle/>
+          <a:p>
+            <a:pPr algn="ctr"/>
+            <a:endParaRPr kumimoji="1" lang="ja-JP" altLang="en-US"/>
+          </a:p>
+        </p:txBody>
+      </p:sp>
+      <p:sp>
+        <p:nvSpPr>
+          <p:cNvPr id="27" name="平行四辺形 26">
+            <a:extLst>
+              <a:ext uri="{FF2B5EF4-FFF2-40B4-BE49-F238E27FC236}">
+                <a16:creationId xmlns:a16="http://schemas.microsoft.com/office/drawing/2014/main" id="{72BB623B-4F22-BF99-2796-7008CFC9C58B}"/>
+              </a:ext>
+            </a:extLst>
+          </p:cNvPr>
+          <p:cNvSpPr/>
+          <p:nvPr/>
+        </p:nvSpPr>
+        <p:spPr>
+          <a:xfrm rot="16200000" flipV="1">
+            <a:off x="6019020" y="2647725"/>
+            <a:ext cx="1698172" cy="1166328"/>
+          </a:xfrm>
+          <a:prstGeom prst="parallelogram">
+            <a:avLst/>
+          </a:prstGeom>
+          <a:solidFill>
+            <a:schemeClr val="bg2"/>
+          </a:solidFill>
+          <a:ln>
+            <a:noFill/>
+          </a:ln>
+          <a:scene3d>
+            <a:camera prst="orthographicFront"/>
+            <a:lightRig rig="threePt" dir="t">
+              <a:rot lat="0" lon="0" rev="6600000"/>
+            </a:lightRig>
+          </a:scene3d>
+          <a:sp3d>
+            <a:bevelT w="158750" h="127000" prst="softRound"/>
+          </a:sp3d>
+        </p:spPr>
+        <p:style>
+          <a:lnRef idx="2">
+            <a:schemeClr val="accent1">
+              <a:shade val="15000"/>
+            </a:schemeClr>
+          </a:lnRef>
+          <a:fillRef idx="1">
+            <a:schemeClr val="accent1"/>
+          </a:fillRef>
+          <a:effectRef idx="0">
+            <a:schemeClr val="accent1"/>
+          </a:effectRef>
+          <a:fontRef idx="minor">
+            <a:schemeClr val="lt1"/>
+          </a:fontRef>
+        </p:style>
+        <p:txBody>
+          <a:bodyPr rtlCol="0" anchor="ctr"/>
+          <a:lstStyle/>
+          <a:p>
+            <a:pPr algn="ctr"/>
+            <a:endParaRPr kumimoji="1" lang="ja-JP" altLang="en-US"/>
+          </a:p>
+        </p:txBody>
+      </p:sp>
+      <p:sp>
+        <p:nvSpPr>
+          <p:cNvPr id="6" name="平行四辺形 5">
+            <a:extLst>
+              <a:ext uri="{FF2B5EF4-FFF2-40B4-BE49-F238E27FC236}">
+                <a16:creationId xmlns:a16="http://schemas.microsoft.com/office/drawing/2014/main" id="{34B34CC3-A6C9-0172-23F0-40362DBC44E3}"/>
+              </a:ext>
+            </a:extLst>
+          </p:cNvPr>
+          <p:cNvSpPr/>
+          <p:nvPr/>
+        </p:nvSpPr>
+        <p:spPr>
+          <a:xfrm rot="5400000">
+            <a:off x="1400755" y="1634024"/>
+            <a:ext cx="2118049" cy="4243096"/>
+          </a:xfrm>
+          <a:prstGeom prst="parallelogram">
+            <a:avLst>
+              <a:gd name="adj" fmla="val 34483"/>
+            </a:avLst>
+          </a:prstGeom>
+          <a:solidFill>
+            <a:schemeClr val="bg2"/>
+          </a:solidFill>
+          <a:ln>
+            <a:noFill/>
+          </a:ln>
+          <a:scene3d>
+            <a:camera prst="orthographicFront"/>
+            <a:lightRig rig="threePt" dir="t">
+              <a:rot lat="0" lon="0" rev="0"/>
+            </a:lightRig>
+          </a:scene3d>
+          <a:sp3d>
+            <a:bevelT w="482600" h="323850" prst="coolSlant"/>
+          </a:sp3d>
+        </p:spPr>
+        <p:style>
+          <a:lnRef idx="2">
+            <a:schemeClr val="accent1">
+              <a:shade val="15000"/>
+            </a:schemeClr>
+          </a:lnRef>
+          <a:fillRef idx="1">
+            <a:schemeClr val="accent1"/>
+          </a:fillRef>
+          <a:effectRef idx="0">
+            <a:schemeClr val="accent1"/>
+          </a:effectRef>
+          <a:fontRef idx="minor">
+            <a:schemeClr val="lt1"/>
+          </a:fontRef>
+        </p:style>
+        <p:txBody>
+          <a:bodyPr rtlCol="0" anchor="ctr"/>
+          <a:lstStyle/>
+          <a:p>
+            <a:pPr algn="ctr"/>
+            <a:endParaRPr kumimoji="1" lang="ja-JP" altLang="en-US"/>
+          </a:p>
+        </p:txBody>
+      </p:sp>
+      <p:sp>
+        <p:nvSpPr>
+          <p:cNvPr id="7" name="平行四辺形 6">
+            <a:extLst>
+              <a:ext uri="{FF2B5EF4-FFF2-40B4-BE49-F238E27FC236}">
+                <a16:creationId xmlns:a16="http://schemas.microsoft.com/office/drawing/2014/main" id="{06786BDA-0831-3F9F-566D-FD8C9ABD1693}"/>
+              </a:ext>
+            </a:extLst>
+          </p:cNvPr>
+          <p:cNvSpPr/>
+          <p:nvPr/>
+        </p:nvSpPr>
+        <p:spPr>
+          <a:xfrm rot="16200000" flipV="1">
+            <a:off x="4315406" y="3382346"/>
+            <a:ext cx="1698172" cy="1166328"/>
+          </a:xfrm>
+          <a:prstGeom prst="parallelogram">
+            <a:avLst/>
+          </a:prstGeom>
+          <a:solidFill>
+            <a:schemeClr val="bg2"/>
+          </a:solidFill>
+          <a:ln>
+            <a:noFill/>
+          </a:ln>
+          <a:scene3d>
+            <a:camera prst="orthographicFront"/>
+            <a:lightRig rig="threePt" dir="t">
+              <a:rot lat="0" lon="0" rev="8400000"/>
+            </a:lightRig>
+          </a:scene3d>
+          <a:sp3d>
+            <a:bevelT w="209550" h="152400"/>
+          </a:sp3d>
+        </p:spPr>
+        <p:style>
+          <a:lnRef idx="2">
+            <a:schemeClr val="accent1">
+              <a:shade val="15000"/>
+            </a:schemeClr>
+          </a:lnRef>
+          <a:fillRef idx="1">
+            <a:schemeClr val="accent1"/>
+          </a:fillRef>
+          <a:effectRef idx="0">
+            <a:schemeClr val="accent1"/>
+          </a:effectRef>
+          <a:fontRef idx="minor">
+            <a:schemeClr val="lt1"/>
+          </a:fontRef>
+        </p:style>
+        <p:txBody>
+          <a:bodyPr rtlCol="0" anchor="ctr"/>
+          <a:lstStyle/>
+          <a:p>
+            <a:pPr algn="ctr"/>
+            <a:endParaRPr kumimoji="1" lang="ja-JP" altLang="en-US"/>
+          </a:p>
+        </p:txBody>
+      </p:sp>
+      <p:sp>
+        <p:nvSpPr>
+          <p:cNvPr id="10" name="平行四辺形 9">
+            <a:extLst>
+              <a:ext uri="{FF2B5EF4-FFF2-40B4-BE49-F238E27FC236}">
+                <a16:creationId xmlns:a16="http://schemas.microsoft.com/office/drawing/2014/main" id="{BDE1283C-B841-2C0B-32C8-3E2C9E44D4E3}"/>
+              </a:ext>
+            </a:extLst>
+          </p:cNvPr>
+          <p:cNvSpPr/>
+          <p:nvPr/>
+        </p:nvSpPr>
+        <p:spPr>
+          <a:xfrm rot="11324692">
+            <a:off x="350316" y="2053869"/>
+            <a:ext cx="5412351" cy="489542"/>
+          </a:xfrm>
+          <a:prstGeom prst="parallelogram">
+            <a:avLst>
+              <a:gd name="adj" fmla="val 223385"/>
+            </a:avLst>
+          </a:prstGeom>
+          <a:solidFill>
+            <a:schemeClr val="bg2"/>
+          </a:solidFill>
+          <a:ln>
+            <a:noFill/>
+          </a:ln>
+          <a:scene3d>
+            <a:camera prst="orthographicFront"/>
+            <a:lightRig rig="threePt" dir="t">
+              <a:rot lat="0" lon="0" rev="1200000"/>
+            </a:lightRig>
+          </a:scene3d>
+          <a:sp3d>
+            <a:bevelT w="95250" h="171450"/>
+          </a:sp3d>
+        </p:spPr>
+        <p:style>
+          <a:lnRef idx="2">
+            <a:schemeClr val="accent1">
+              <a:shade val="15000"/>
+            </a:schemeClr>
+          </a:lnRef>
+          <a:fillRef idx="1">
+            <a:schemeClr val="accent1"/>
+          </a:fillRef>
+          <a:effectRef idx="0">
+            <a:schemeClr val="accent1"/>
+          </a:effectRef>
+          <a:fontRef idx="minor">
+            <a:schemeClr val="lt1"/>
+          </a:fontRef>
+        </p:style>
+        <p:txBody>
+          <a:bodyPr rtlCol="0" anchor="ctr"/>
+          <a:lstStyle/>
+          <a:p>
+            <a:pPr algn="ctr"/>
+            <a:endParaRPr kumimoji="1" lang="ja-JP" altLang="en-US"/>
+          </a:p>
+        </p:txBody>
+      </p:sp>
+      <p:sp>
+        <p:nvSpPr>
+          <p:cNvPr id="11" name="平行四辺形 10">
+            <a:extLst>
+              <a:ext uri="{FF2B5EF4-FFF2-40B4-BE49-F238E27FC236}">
+                <a16:creationId xmlns:a16="http://schemas.microsoft.com/office/drawing/2014/main" id="{E1C43AC5-2A47-8329-1C16-DFCF7D96B2EB}"/>
+              </a:ext>
+            </a:extLst>
+          </p:cNvPr>
+          <p:cNvSpPr/>
+          <p:nvPr/>
+        </p:nvSpPr>
+        <p:spPr>
+          <a:xfrm rot="5400000">
+            <a:off x="1737144" y="698144"/>
+            <a:ext cx="1445272" cy="4243096"/>
+          </a:xfrm>
+          <a:prstGeom prst="parallelogram">
+            <a:avLst>
+              <a:gd name="adj" fmla="val 47960"/>
+            </a:avLst>
+          </a:prstGeom>
+          <a:solidFill>
+            <a:schemeClr val="bg2"/>
+          </a:solidFill>
+          <a:ln>
+            <a:noFill/>
+          </a:ln>
+          <a:scene3d>
+            <a:camera prst="orthographicFront"/>
+            <a:lightRig rig="threePt" dir="t">
+              <a:rot lat="0" lon="0" rev="0"/>
+            </a:lightRig>
+          </a:scene3d>
+          <a:sp3d>
+            <a:bevelT w="361950" h="82550" prst="coolSlant"/>
+          </a:sp3d>
+        </p:spPr>
+        <p:style>
+          <a:lnRef idx="2">
+            <a:schemeClr val="accent1">
+              <a:shade val="15000"/>
+            </a:schemeClr>
+          </a:lnRef>
+          <a:fillRef idx="1">
+            <a:schemeClr val="accent1"/>
+          </a:fillRef>
+          <a:effectRef idx="0">
+            <a:schemeClr val="accent1"/>
+          </a:effectRef>
+          <a:fontRef idx="minor">
+            <a:schemeClr val="lt1"/>
+          </a:fontRef>
+        </p:style>
+        <p:txBody>
+          <a:bodyPr rtlCol="0" anchor="ctr"/>
+          <a:lstStyle/>
+          <a:p>
+            <a:pPr algn="ctr"/>
+            <a:endParaRPr kumimoji="1" lang="ja-JP" altLang="en-US"/>
+          </a:p>
+        </p:txBody>
+      </p:sp>
+      <p:sp>
+        <p:nvSpPr>
+          <p:cNvPr id="12" name="平行四辺形 11">
+            <a:extLst>
+              <a:ext uri="{FF2B5EF4-FFF2-40B4-BE49-F238E27FC236}">
+                <a16:creationId xmlns:a16="http://schemas.microsoft.com/office/drawing/2014/main" id="{EC706755-201A-7A01-72D4-3F0293336908}"/>
+              </a:ext>
+            </a:extLst>
+          </p:cNvPr>
+          <p:cNvSpPr/>
+          <p:nvPr/>
+        </p:nvSpPr>
+        <p:spPr>
+          <a:xfrm rot="16200000" flipV="1">
+            <a:off x="4629634" y="2424306"/>
+            <a:ext cx="1069716" cy="1166328"/>
+          </a:xfrm>
+          <a:prstGeom prst="parallelogram">
+            <a:avLst>
+              <a:gd name="adj" fmla="val 31731"/>
+            </a:avLst>
+          </a:prstGeom>
+          <a:solidFill>
+            <a:schemeClr val="bg2"/>
+          </a:solidFill>
+          <a:ln>
+            <a:noFill/>
+          </a:ln>
+          <a:scene3d>
+            <a:camera prst="orthographicFront"/>
+            <a:lightRig rig="threePt" dir="t">
+              <a:rot lat="0" lon="0" rev="8400000"/>
+            </a:lightRig>
+          </a:scene3d>
+          <a:sp3d>
+            <a:bevelT w="184150" h="69850"/>
+          </a:sp3d>
+        </p:spPr>
+        <p:style>
+          <a:lnRef idx="2">
+            <a:schemeClr val="accent1">
+              <a:shade val="15000"/>
+            </a:schemeClr>
+          </a:lnRef>
+          <a:fillRef idx="1">
+            <a:schemeClr val="accent1"/>
+          </a:fillRef>
+          <a:effectRef idx="0">
+            <a:schemeClr val="accent1"/>
+          </a:effectRef>
+          <a:fontRef idx="minor">
+            <a:schemeClr val="lt1"/>
+          </a:fontRef>
+        </p:style>
+        <p:txBody>
+          <a:bodyPr rtlCol="0" anchor="ctr"/>
+          <a:lstStyle/>
+          <a:p>
+            <a:pPr algn="ctr"/>
+            <a:endParaRPr kumimoji="1" lang="ja-JP" altLang="en-US"/>
+          </a:p>
+        </p:txBody>
+      </p:sp>
+      <p:sp>
+        <p:nvSpPr>
+          <p:cNvPr id="13" name="十字形 12">
+            <a:extLst>
+              <a:ext uri="{FF2B5EF4-FFF2-40B4-BE49-F238E27FC236}">
+                <a16:creationId xmlns:a16="http://schemas.microsoft.com/office/drawing/2014/main" id="{2B25EDD8-B618-A8D4-F184-48C0937F0B25}"/>
+              </a:ext>
+            </a:extLst>
+          </p:cNvPr>
+          <p:cNvSpPr/>
+          <p:nvPr/>
+        </p:nvSpPr>
+        <p:spPr>
+          <a:xfrm rot="432750">
+            <a:off x="2158644" y="3331586"/>
+            <a:ext cx="602270" cy="602270"/>
+          </a:xfrm>
+          <a:prstGeom prst="plus">
+            <a:avLst>
+              <a:gd name="adj" fmla="val 34615"/>
+            </a:avLst>
+          </a:prstGeom>
+          <a:solidFill>
+            <a:srgbClr val="FF0000"/>
+          </a:solidFill>
+          <a:ln>
+            <a:solidFill>
+              <a:schemeClr val="tx1"/>
+            </a:solidFill>
+          </a:ln>
+        </p:spPr>
+        <p:style>
+          <a:lnRef idx="2">
+            <a:schemeClr val="accent1">
+              <a:shade val="15000"/>
+            </a:schemeClr>
+          </a:lnRef>
+          <a:fillRef idx="1">
+            <a:schemeClr val="accent1"/>
+          </a:fillRef>
+          <a:effectRef idx="0">
+            <a:schemeClr val="accent1"/>
+          </a:effectRef>
+          <a:fontRef idx="minor">
+            <a:schemeClr val="lt1"/>
+          </a:fontRef>
+        </p:style>
+        <p:txBody>
+          <a:bodyPr rtlCol="0" anchor="ctr"/>
+          <a:lstStyle/>
+          <a:p>
+            <a:pPr algn="ctr"/>
+            <a:endParaRPr kumimoji="1" lang="ja-JP" altLang="en-US"/>
+          </a:p>
+        </p:txBody>
+      </p:sp>
+      <p:pic>
+        <p:nvPicPr>
+          <p:cNvPr id="30" name="図 29">
+            <a:extLst>
+              <a:ext uri="{FF2B5EF4-FFF2-40B4-BE49-F238E27FC236}">
+                <a16:creationId xmlns:a16="http://schemas.microsoft.com/office/drawing/2014/main" id="{2B53DDBD-3911-83BD-54D3-F664F31CF871}"/>
+              </a:ext>
+            </a:extLst>
+          </p:cNvPr>
+          <p:cNvPicPr>
+            <a:picLocks noChangeAspect="1"/>
+          </p:cNvPicPr>
+          <p:nvPr/>
+        </p:nvPicPr>
+        <p:blipFill>
+          <a:blip r:embed="rId2"/>
+          <a:stretch>
+            <a:fillRect/>
+          </a:stretch>
+        </p:blipFill>
+        <p:spPr>
+          <a:xfrm rot="19800000">
+            <a:off x="7152905" y="2007665"/>
+            <a:ext cx="1322577" cy="1587092"/>
+          </a:xfrm>
+          <a:prstGeom prst="rect">
+            <a:avLst/>
+          </a:prstGeom>
+        </p:spPr>
+      </p:pic>
+      <p:pic>
+        <p:nvPicPr>
+          <p:cNvPr id="32" name="図 31">
+            <a:extLst>
+              <a:ext uri="{FF2B5EF4-FFF2-40B4-BE49-F238E27FC236}">
+                <a16:creationId xmlns:a16="http://schemas.microsoft.com/office/drawing/2014/main" id="{807695AD-8A26-8E8A-9653-61D9D6EE94B7}"/>
+              </a:ext>
+            </a:extLst>
+          </p:cNvPr>
+          <p:cNvPicPr>
+            <a:picLocks noChangeAspect="1"/>
+          </p:cNvPicPr>
+          <p:nvPr/>
+        </p:nvPicPr>
+        <p:blipFill>
+          <a:blip r:embed="rId3"/>
+          <a:stretch>
+            <a:fillRect/>
+          </a:stretch>
+        </p:blipFill>
+        <p:spPr>
+          <a:xfrm rot="913927">
+            <a:off x="8173597" y="2126327"/>
+            <a:ext cx="1029226" cy="1812748"/>
+          </a:xfrm>
+          <a:prstGeom prst="rect">
+            <a:avLst/>
+          </a:prstGeom>
+        </p:spPr>
+      </p:pic>
+      <p:pic>
+        <p:nvPicPr>
+          <p:cNvPr id="33" name="図 32">
+            <a:extLst>
+              <a:ext uri="{FF2B5EF4-FFF2-40B4-BE49-F238E27FC236}">
+                <a16:creationId xmlns:a16="http://schemas.microsoft.com/office/drawing/2014/main" id="{C4E04C69-33D1-BFBC-EF40-08749586601B}"/>
+              </a:ext>
+            </a:extLst>
+          </p:cNvPr>
+          <p:cNvPicPr>
+            <a:picLocks noChangeAspect="1"/>
+          </p:cNvPicPr>
+          <p:nvPr/>
+        </p:nvPicPr>
+        <p:blipFill>
+          <a:blip r:embed="rId4"/>
+          <a:stretch>
+            <a:fillRect/>
+          </a:stretch>
+        </p:blipFill>
+        <p:spPr>
+          <a:xfrm rot="20894075">
+            <a:off x="9646733" y="2566087"/>
+            <a:ext cx="346438" cy="1261033"/>
+          </a:xfrm>
+          <a:prstGeom prst="rect">
+            <a:avLst/>
+          </a:prstGeom>
+        </p:spPr>
+      </p:pic>
+      <p:pic>
+        <p:nvPicPr>
+          <p:cNvPr id="34" name="図 33">
+            <a:extLst>
+              <a:ext uri="{FF2B5EF4-FFF2-40B4-BE49-F238E27FC236}">
+                <a16:creationId xmlns:a16="http://schemas.microsoft.com/office/drawing/2014/main" id="{2406CBBF-6018-1B05-93C2-79C0D29BA297}"/>
+              </a:ext>
+            </a:extLst>
+          </p:cNvPr>
+          <p:cNvPicPr>
+            <a:picLocks noChangeAspect="1"/>
+          </p:cNvPicPr>
+          <p:nvPr/>
+        </p:nvPicPr>
+        <p:blipFill>
+          <a:blip r:embed="rId3"/>
+          <a:stretch>
+            <a:fillRect/>
+          </a:stretch>
+        </p:blipFill>
+        <p:spPr>
+          <a:xfrm rot="520992">
+            <a:off x="8546394" y="2461996"/>
+            <a:ext cx="1029226" cy="1812748"/>
+          </a:xfrm>
+          <a:prstGeom prst="rect">
+            <a:avLst/>
+          </a:prstGeom>
+        </p:spPr>
+      </p:pic>
+      <p:pic>
+        <p:nvPicPr>
+          <p:cNvPr id="35" name="図 34">
+            <a:extLst>
+              <a:ext uri="{FF2B5EF4-FFF2-40B4-BE49-F238E27FC236}">
+                <a16:creationId xmlns:a16="http://schemas.microsoft.com/office/drawing/2014/main" id="{195C51A2-B52C-0CC2-AE68-B4192C030D76}"/>
+              </a:ext>
+            </a:extLst>
+          </p:cNvPr>
+          <p:cNvPicPr>
+            <a:picLocks noChangeAspect="1"/>
+          </p:cNvPicPr>
+          <p:nvPr/>
+        </p:nvPicPr>
+        <p:blipFill>
+          <a:blip r:embed="rId2"/>
+          <a:stretch>
+            <a:fillRect/>
+          </a:stretch>
+        </p:blipFill>
+        <p:spPr>
+          <a:xfrm rot="19800000">
+            <a:off x="6412211" y="2193481"/>
+            <a:ext cx="1322577" cy="1587092"/>
+          </a:xfrm>
+          <a:prstGeom prst="rect">
+            <a:avLst/>
+          </a:prstGeom>
+        </p:spPr>
+      </p:pic>
+      <p:pic>
+        <p:nvPicPr>
+          <p:cNvPr id="36" name="図 35">
+            <a:extLst>
+              <a:ext uri="{FF2B5EF4-FFF2-40B4-BE49-F238E27FC236}">
+                <a16:creationId xmlns:a16="http://schemas.microsoft.com/office/drawing/2014/main" id="{2E395DA7-22F4-2370-EECD-30EDC4B70D82}"/>
+              </a:ext>
+            </a:extLst>
+          </p:cNvPr>
+          <p:cNvPicPr>
+            <a:picLocks noChangeAspect="1"/>
+          </p:cNvPicPr>
+          <p:nvPr/>
+        </p:nvPicPr>
+        <p:blipFill>
+          <a:blip r:embed="rId4"/>
+          <a:stretch>
+            <a:fillRect/>
+          </a:stretch>
+        </p:blipFill>
+        <p:spPr>
+          <a:xfrm rot="2793543">
+            <a:off x="9975781" y="2552710"/>
+            <a:ext cx="346438" cy="1261033"/>
+          </a:xfrm>
+          <a:prstGeom prst="rect">
+            <a:avLst/>
+          </a:prstGeom>
+        </p:spPr>
+      </p:pic>
+      <p:pic>
+        <p:nvPicPr>
+          <p:cNvPr id="37" name="図 36">
+            <a:extLst>
+              <a:ext uri="{FF2B5EF4-FFF2-40B4-BE49-F238E27FC236}">
+                <a16:creationId xmlns:a16="http://schemas.microsoft.com/office/drawing/2014/main" id="{140227CB-7669-1D0A-0AAB-EEB0D7DCCDFE}"/>
+              </a:ext>
+            </a:extLst>
+          </p:cNvPr>
+          <p:cNvPicPr>
+            <a:picLocks noChangeAspect="1"/>
+          </p:cNvPicPr>
+          <p:nvPr/>
+        </p:nvPicPr>
+        <p:blipFill>
+          <a:blip r:embed="rId4"/>
+          <a:stretch>
+            <a:fillRect/>
+          </a:stretch>
+        </p:blipFill>
+        <p:spPr>
+          <a:xfrm rot="1543551">
+            <a:off x="10269930" y="2886346"/>
+            <a:ext cx="346438" cy="1261033"/>
+          </a:xfrm>
+          <a:prstGeom prst="rect">
+            <a:avLst/>
+          </a:prstGeom>
+        </p:spPr>
+      </p:pic>
+      <p:sp>
+        <p:nvSpPr>
+          <p:cNvPr id="21" name="平行四辺形 20">
+            <a:extLst>
+              <a:ext uri="{FF2B5EF4-FFF2-40B4-BE49-F238E27FC236}">
+                <a16:creationId xmlns:a16="http://schemas.microsoft.com/office/drawing/2014/main" id="{8C345CFE-C589-2B80-261B-6BD897E0A804}"/>
+              </a:ext>
+            </a:extLst>
+          </p:cNvPr>
+          <p:cNvSpPr/>
+          <p:nvPr/>
+        </p:nvSpPr>
+        <p:spPr>
+          <a:xfrm rot="5400000">
+            <a:off x="7347467" y="1634023"/>
+            <a:ext cx="2118049" cy="4243096"/>
+          </a:xfrm>
+          <a:prstGeom prst="parallelogram">
+            <a:avLst>
+              <a:gd name="adj" fmla="val 34483"/>
+            </a:avLst>
+          </a:prstGeom>
+          <a:solidFill>
+            <a:schemeClr val="bg2"/>
+          </a:solidFill>
+          <a:ln>
+            <a:noFill/>
+          </a:ln>
+          <a:scene3d>
+            <a:camera prst="orthographicFront"/>
+            <a:lightRig rig="threePt" dir="t">
+              <a:rot lat="0" lon="0" rev="0"/>
+            </a:lightRig>
+          </a:scene3d>
+          <a:sp3d>
+            <a:bevelT w="482600" h="323850" prst="coolSlant"/>
+          </a:sp3d>
+        </p:spPr>
+        <p:style>
+          <a:lnRef idx="2">
+            <a:schemeClr val="accent1">
+              <a:shade val="15000"/>
+            </a:schemeClr>
+          </a:lnRef>
+          <a:fillRef idx="1">
+            <a:schemeClr val="accent1"/>
+          </a:fillRef>
+          <a:effectRef idx="0">
+            <a:schemeClr val="accent1"/>
+          </a:effectRef>
+          <a:fontRef idx="minor">
+            <a:schemeClr val="lt1"/>
+          </a:fontRef>
+        </p:style>
+        <p:txBody>
+          <a:bodyPr rtlCol="0" anchor="ctr"/>
+          <a:lstStyle/>
+          <a:p>
+            <a:pPr algn="ctr"/>
+            <a:endParaRPr kumimoji="1" lang="ja-JP" altLang="en-US"/>
+          </a:p>
+        </p:txBody>
+      </p:sp>
+      <p:sp>
+        <p:nvSpPr>
+          <p:cNvPr id="22" name="平行四辺形 21">
+            <a:extLst>
+              <a:ext uri="{FF2B5EF4-FFF2-40B4-BE49-F238E27FC236}">
+                <a16:creationId xmlns:a16="http://schemas.microsoft.com/office/drawing/2014/main" id="{4BFD8F87-DBDF-DDD7-FE59-489C5C90B7C9}"/>
+              </a:ext>
+            </a:extLst>
+          </p:cNvPr>
+          <p:cNvSpPr/>
+          <p:nvPr/>
+        </p:nvSpPr>
+        <p:spPr>
+          <a:xfrm rot="16200000" flipV="1">
+            <a:off x="10262118" y="3382345"/>
+            <a:ext cx="1698172" cy="1166328"/>
+          </a:xfrm>
+          <a:prstGeom prst="parallelogram">
+            <a:avLst/>
+          </a:prstGeom>
+          <a:solidFill>
+            <a:schemeClr val="bg2"/>
+          </a:solidFill>
+          <a:ln>
+            <a:noFill/>
+          </a:ln>
+          <a:scene3d>
+            <a:camera prst="orthographicFront"/>
+            <a:lightRig rig="threePt" dir="t">
+              <a:rot lat="0" lon="0" rev="8400000"/>
+            </a:lightRig>
+          </a:scene3d>
+          <a:sp3d>
+            <a:bevelT w="209550" h="152400"/>
+          </a:sp3d>
+        </p:spPr>
+        <p:style>
+          <a:lnRef idx="2">
+            <a:schemeClr val="accent1">
+              <a:shade val="15000"/>
+            </a:schemeClr>
+          </a:lnRef>
+          <a:fillRef idx="1">
+            <a:schemeClr val="accent1"/>
+          </a:fillRef>
+          <a:effectRef idx="0">
+            <a:schemeClr val="accent1"/>
+          </a:effectRef>
+          <a:fontRef idx="minor">
+            <a:schemeClr val="lt1"/>
+          </a:fontRef>
+        </p:style>
+        <p:txBody>
+          <a:bodyPr rtlCol="0" anchor="ctr"/>
+          <a:lstStyle/>
+          <a:p>
+            <a:pPr algn="ctr"/>
+            <a:endParaRPr kumimoji="1" lang="ja-JP" altLang="en-US"/>
+          </a:p>
+        </p:txBody>
+      </p:sp>
+      <p:sp>
+        <p:nvSpPr>
+          <p:cNvPr id="26" name="十字形 25">
+            <a:extLst>
+              <a:ext uri="{FF2B5EF4-FFF2-40B4-BE49-F238E27FC236}">
+                <a16:creationId xmlns:a16="http://schemas.microsoft.com/office/drawing/2014/main" id="{AE0336D9-73AA-DE34-463E-E6AFE0830020}"/>
+              </a:ext>
+            </a:extLst>
+          </p:cNvPr>
+          <p:cNvSpPr/>
+          <p:nvPr/>
+        </p:nvSpPr>
+        <p:spPr>
+          <a:xfrm rot="432750">
+            <a:off x="8105356" y="3331585"/>
+            <a:ext cx="602270" cy="602270"/>
+          </a:xfrm>
+          <a:prstGeom prst="plus">
+            <a:avLst>
+              <a:gd name="adj" fmla="val 34615"/>
+            </a:avLst>
+          </a:prstGeom>
+          <a:solidFill>
+            <a:srgbClr val="FF0000"/>
+          </a:solidFill>
+          <a:ln>
+            <a:solidFill>
+              <a:schemeClr val="tx1"/>
+            </a:solidFill>
+          </a:ln>
+        </p:spPr>
+        <p:style>
+          <a:lnRef idx="2">
+            <a:schemeClr val="accent1">
+              <a:shade val="15000"/>
+            </a:schemeClr>
+          </a:lnRef>
+          <a:fillRef idx="1">
+            <a:schemeClr val="accent1"/>
+          </a:fillRef>
+          <a:effectRef idx="0">
+            <a:schemeClr val="accent1"/>
+          </a:effectRef>
+          <a:fontRef idx="minor">
+            <a:schemeClr val="lt1"/>
+          </a:fontRef>
+        </p:style>
+        <p:txBody>
+          <a:bodyPr rtlCol="0" anchor="ctr"/>
+          <a:lstStyle/>
+          <a:p>
+            <a:pPr algn="ctr"/>
+            <a:endParaRPr kumimoji="1" lang="ja-JP" altLang="en-US"/>
+          </a:p>
+        </p:txBody>
+      </p:sp>
+      <p:sp>
+        <p:nvSpPr>
+          <p:cNvPr id="23" name="平行四辺形 22">
+            <a:extLst>
+              <a:ext uri="{FF2B5EF4-FFF2-40B4-BE49-F238E27FC236}">
+                <a16:creationId xmlns:a16="http://schemas.microsoft.com/office/drawing/2014/main" id="{002D2042-539B-F698-A750-8D7801157AC8}"/>
+              </a:ext>
+            </a:extLst>
+          </p:cNvPr>
+          <p:cNvSpPr/>
+          <p:nvPr/>
+        </p:nvSpPr>
+        <p:spPr>
+          <a:xfrm rot="11324692">
+            <a:off x="6297028" y="1568682"/>
+            <a:ext cx="5412351" cy="489542"/>
+          </a:xfrm>
+          <a:prstGeom prst="parallelogram">
+            <a:avLst>
+              <a:gd name="adj" fmla="val 223385"/>
+            </a:avLst>
+          </a:prstGeom>
+          <a:solidFill>
+            <a:schemeClr val="bg2"/>
+          </a:solidFill>
+          <a:ln>
+            <a:noFill/>
+          </a:ln>
+          <a:scene3d>
+            <a:camera prst="orthographicFront"/>
+            <a:lightRig rig="threePt" dir="t">
+              <a:rot lat="0" lon="0" rev="1200000"/>
+            </a:lightRig>
+          </a:scene3d>
+          <a:sp3d>
+            <a:bevelT w="95250" h="171450"/>
+          </a:sp3d>
+        </p:spPr>
+        <p:style>
+          <a:lnRef idx="2">
+            <a:schemeClr val="accent1">
+              <a:shade val="15000"/>
+            </a:schemeClr>
+          </a:lnRef>
+          <a:fillRef idx="1">
+            <a:schemeClr val="accent1"/>
+          </a:fillRef>
+          <a:effectRef idx="0">
+            <a:schemeClr val="accent1"/>
+          </a:effectRef>
+          <a:fontRef idx="minor">
+            <a:schemeClr val="lt1"/>
+          </a:fontRef>
+        </p:style>
+        <p:txBody>
+          <a:bodyPr rtlCol="0" anchor="ctr"/>
+          <a:lstStyle/>
+          <a:p>
+            <a:pPr algn="ctr"/>
+            <a:endParaRPr kumimoji="1" lang="ja-JP" altLang="en-US"/>
+          </a:p>
+        </p:txBody>
+      </p:sp>
+      <p:sp>
+        <p:nvSpPr>
+          <p:cNvPr id="24" name="平行四辺形 23">
+            <a:extLst>
+              <a:ext uri="{FF2B5EF4-FFF2-40B4-BE49-F238E27FC236}">
+                <a16:creationId xmlns:a16="http://schemas.microsoft.com/office/drawing/2014/main" id="{2E9EE941-3FC2-F023-5204-E4E335BBB3DD}"/>
+              </a:ext>
+            </a:extLst>
+          </p:cNvPr>
+          <p:cNvSpPr/>
+          <p:nvPr/>
+        </p:nvSpPr>
+        <p:spPr>
+          <a:xfrm rot="5400000">
+            <a:off x="7683856" y="212957"/>
+            <a:ext cx="1445272" cy="4243096"/>
+          </a:xfrm>
+          <a:prstGeom prst="parallelogram">
+            <a:avLst>
+              <a:gd name="adj" fmla="val 47960"/>
+            </a:avLst>
+          </a:prstGeom>
+          <a:solidFill>
+            <a:schemeClr val="bg2"/>
+          </a:solidFill>
+          <a:ln>
+            <a:noFill/>
+          </a:ln>
+          <a:scene3d>
+            <a:camera prst="orthographicFront"/>
+            <a:lightRig rig="threePt" dir="t">
+              <a:rot lat="0" lon="0" rev="0"/>
+            </a:lightRig>
+          </a:scene3d>
+          <a:sp3d>
+            <a:bevelT w="361950" h="82550" prst="coolSlant"/>
+          </a:sp3d>
+        </p:spPr>
+        <p:style>
+          <a:lnRef idx="2">
+            <a:schemeClr val="accent1">
+              <a:shade val="15000"/>
+            </a:schemeClr>
+          </a:lnRef>
+          <a:fillRef idx="1">
+            <a:schemeClr val="accent1"/>
+          </a:fillRef>
+          <a:effectRef idx="0">
+            <a:schemeClr val="accent1"/>
+          </a:effectRef>
+          <a:fontRef idx="minor">
+            <a:schemeClr val="lt1"/>
+          </a:fontRef>
+        </p:style>
+        <p:txBody>
+          <a:bodyPr rtlCol="0" anchor="ctr"/>
+          <a:lstStyle/>
+          <a:p>
+            <a:pPr algn="ctr"/>
+            <a:endParaRPr kumimoji="1" lang="ja-JP" altLang="en-US"/>
+          </a:p>
+        </p:txBody>
+      </p:sp>
+      <p:sp>
+        <p:nvSpPr>
+          <p:cNvPr id="25" name="平行四辺形 24">
+            <a:extLst>
+              <a:ext uri="{FF2B5EF4-FFF2-40B4-BE49-F238E27FC236}">
+                <a16:creationId xmlns:a16="http://schemas.microsoft.com/office/drawing/2014/main" id="{F725C588-022E-EB8C-001F-A1C8725D834F}"/>
+              </a:ext>
+            </a:extLst>
+          </p:cNvPr>
+          <p:cNvSpPr/>
+          <p:nvPr/>
+        </p:nvSpPr>
+        <p:spPr>
+          <a:xfrm rot="16200000" flipV="1">
+            <a:off x="10576346" y="1939119"/>
+            <a:ext cx="1069716" cy="1166328"/>
+          </a:xfrm>
+          <a:prstGeom prst="parallelogram">
+            <a:avLst>
+              <a:gd name="adj" fmla="val 31731"/>
+            </a:avLst>
+          </a:prstGeom>
+          <a:solidFill>
+            <a:schemeClr val="bg2"/>
+          </a:solidFill>
+          <a:ln>
+            <a:noFill/>
+          </a:ln>
+          <a:scene3d>
+            <a:camera prst="orthographicFront"/>
+            <a:lightRig rig="threePt" dir="t">
+              <a:rot lat="0" lon="0" rev="8400000"/>
+            </a:lightRig>
+          </a:scene3d>
+          <a:sp3d>
+            <a:bevelT w="184150" h="69850"/>
+          </a:sp3d>
+        </p:spPr>
+        <p:style>
+          <a:lnRef idx="2">
+            <a:schemeClr val="accent1">
+              <a:shade val="15000"/>
+            </a:schemeClr>
+          </a:lnRef>
+          <a:fillRef idx="1">
+            <a:schemeClr val="accent1"/>
+          </a:fillRef>
+          <a:effectRef idx="0">
+            <a:schemeClr val="accent1"/>
+          </a:effectRef>
+          <a:fontRef idx="minor">
+            <a:schemeClr val="lt1"/>
+          </a:fontRef>
+        </p:style>
+        <p:txBody>
+          <a:bodyPr rtlCol="0" anchor="ctr"/>
+          <a:lstStyle/>
+          <a:p>
+            <a:pPr algn="ctr"/>
+            <a:endParaRPr kumimoji="1" lang="ja-JP" altLang="en-US"/>
+          </a:p>
+        </p:txBody>
+      </p:sp>
     </p:spTree>
     <p:extLst>
       <p:ext uri="{BB962C8B-B14F-4D97-AF65-F5344CB8AC3E}">
         <p14:creationId xmlns:p14="http://schemas.microsoft.com/office/powerpoint/2010/main" val="3948783979"/>
+      </p:ext>
+    </p:extLst>
+  </p:cSld>
+  <p:clrMapOvr>
+    <a:masterClrMapping/>
+  </p:clrMapOvr>
+</p:sld>
+</file>
+
+<file path=ppt/slides/slide13.xml><?xml version="1.0" encoding="utf-8"?>
+<p:sld xmlns:a="http://schemas.openxmlformats.org/drawingml/2006/main" xmlns:r="http://schemas.openxmlformats.org/officeDocument/2006/relationships" xmlns:p="http://schemas.openxmlformats.org/presentationml/2006/main">
+  <p:cSld>
+    <p:spTree>
+      <p:nvGrpSpPr>
+        <p:cNvPr id="1" name=""/>
+        <p:cNvGrpSpPr/>
+        <p:nvPr/>
+      </p:nvGrpSpPr>
+      <p:grpSpPr>
+        <a:xfrm>
+          <a:off x="0" y="0"/>
+          <a:ext cx="0" cy="0"/>
+          <a:chOff x="0" y="0"/>
+          <a:chExt cx="0" cy="0"/>
+        </a:xfrm>
+      </p:grpSpPr>
+      <p:sp>
+        <p:nvSpPr>
+          <p:cNvPr id="2" name="平行四辺形 1">
+            <a:extLst>
+              <a:ext uri="{FF2B5EF4-FFF2-40B4-BE49-F238E27FC236}">
+                <a16:creationId xmlns:a16="http://schemas.microsoft.com/office/drawing/2014/main" id="{C38A1B21-6886-5757-2082-C343A9EBE595}"/>
+              </a:ext>
+            </a:extLst>
+          </p:cNvPr>
+          <p:cNvSpPr/>
+          <p:nvPr/>
+        </p:nvSpPr>
+        <p:spPr>
+          <a:xfrm rot="5400000">
+            <a:off x="8513793" y="1319278"/>
+            <a:ext cx="2118049" cy="4243096"/>
+          </a:xfrm>
+          <a:prstGeom prst="parallelogram">
+            <a:avLst>
+              <a:gd name="adj" fmla="val 34483"/>
+            </a:avLst>
+          </a:prstGeom>
+          <a:solidFill>
+            <a:schemeClr val="bg2"/>
+          </a:solidFill>
+          <a:ln>
+            <a:noFill/>
+          </a:ln>
+          <a:scene3d>
+            <a:camera prst="orthographicFront"/>
+            <a:lightRig rig="threePt" dir="t">
+              <a:rot lat="0" lon="0" rev="12600000"/>
+            </a:lightRig>
+          </a:scene3d>
+          <a:sp3d>
+            <a:bevelT w="222250" h="120650" prst="softRound"/>
+          </a:sp3d>
+        </p:spPr>
+        <p:style>
+          <a:lnRef idx="2">
+            <a:schemeClr val="accent1">
+              <a:shade val="15000"/>
+            </a:schemeClr>
+          </a:lnRef>
+          <a:fillRef idx="1">
+            <a:schemeClr val="accent1"/>
+          </a:fillRef>
+          <a:effectRef idx="0">
+            <a:schemeClr val="accent1"/>
+          </a:effectRef>
+          <a:fontRef idx="minor">
+            <a:schemeClr val="lt1"/>
+          </a:fontRef>
+        </p:style>
+        <p:txBody>
+          <a:bodyPr rtlCol="0" anchor="ctr"/>
+          <a:lstStyle/>
+          <a:p>
+            <a:pPr algn="ctr"/>
+            <a:endParaRPr kumimoji="1" lang="ja-JP" altLang="en-US"/>
+          </a:p>
+        </p:txBody>
+      </p:sp>
+      <p:sp>
+        <p:nvSpPr>
+          <p:cNvPr id="3" name="平行四辺形 2">
+            <a:extLst>
+              <a:ext uri="{FF2B5EF4-FFF2-40B4-BE49-F238E27FC236}">
+                <a16:creationId xmlns:a16="http://schemas.microsoft.com/office/drawing/2014/main" id="{E05FE243-6DF2-17DF-1436-4272EB2D6B51}"/>
+              </a:ext>
+            </a:extLst>
+          </p:cNvPr>
+          <p:cNvSpPr/>
+          <p:nvPr/>
+        </p:nvSpPr>
+        <p:spPr>
+          <a:xfrm rot="16200000" flipV="1">
+            <a:off x="6019020" y="2647725"/>
+            <a:ext cx="1698172" cy="1166328"/>
+          </a:xfrm>
+          <a:prstGeom prst="parallelogram">
+            <a:avLst/>
+          </a:prstGeom>
+          <a:solidFill>
+            <a:schemeClr val="bg2"/>
+          </a:solidFill>
+          <a:ln>
+            <a:noFill/>
+          </a:ln>
+          <a:scene3d>
+            <a:camera prst="orthographicFront"/>
+            <a:lightRig rig="threePt" dir="t">
+              <a:rot lat="0" lon="0" rev="6600000"/>
+            </a:lightRig>
+          </a:scene3d>
+          <a:sp3d>
+            <a:bevelT w="158750" h="127000" prst="softRound"/>
+          </a:sp3d>
+        </p:spPr>
+        <p:style>
+          <a:lnRef idx="2">
+            <a:schemeClr val="accent1">
+              <a:shade val="15000"/>
+            </a:schemeClr>
+          </a:lnRef>
+          <a:fillRef idx="1">
+            <a:schemeClr val="accent1"/>
+          </a:fillRef>
+          <a:effectRef idx="0">
+            <a:schemeClr val="accent1"/>
+          </a:effectRef>
+          <a:fontRef idx="minor">
+            <a:schemeClr val="lt1"/>
+          </a:fontRef>
+        </p:style>
+        <p:txBody>
+          <a:bodyPr rtlCol="0" anchor="ctr"/>
+          <a:lstStyle/>
+          <a:p>
+            <a:pPr algn="ctr"/>
+            <a:endParaRPr kumimoji="1" lang="ja-JP" altLang="en-US"/>
+          </a:p>
+        </p:txBody>
+      </p:sp>
+      <p:pic>
+        <p:nvPicPr>
+          <p:cNvPr id="4" name="図 3">
+            <a:extLst>
+              <a:ext uri="{FF2B5EF4-FFF2-40B4-BE49-F238E27FC236}">
+                <a16:creationId xmlns:a16="http://schemas.microsoft.com/office/drawing/2014/main" id="{92E855EA-16DB-CAD3-5A00-5DACC0D34F87}"/>
+              </a:ext>
+            </a:extLst>
+          </p:cNvPr>
+          <p:cNvPicPr>
+            <a:picLocks noChangeAspect="1"/>
+          </p:cNvPicPr>
+          <p:nvPr/>
+        </p:nvPicPr>
+        <p:blipFill>
+          <a:blip r:embed="rId2"/>
+          <a:stretch>
+            <a:fillRect/>
+          </a:stretch>
+        </p:blipFill>
+        <p:spPr>
+          <a:xfrm rot="20584898">
+            <a:off x="7096570" y="1639586"/>
+            <a:ext cx="1322577" cy="1587092"/>
+          </a:xfrm>
+          <a:prstGeom prst="rect">
+            <a:avLst/>
+          </a:prstGeom>
+        </p:spPr>
+      </p:pic>
+      <p:pic>
+        <p:nvPicPr>
+          <p:cNvPr id="5" name="図 4">
+            <a:extLst>
+              <a:ext uri="{FF2B5EF4-FFF2-40B4-BE49-F238E27FC236}">
+                <a16:creationId xmlns:a16="http://schemas.microsoft.com/office/drawing/2014/main" id="{23AD8BDD-E375-3D7C-74E4-14792258CF1F}"/>
+              </a:ext>
+            </a:extLst>
+          </p:cNvPr>
+          <p:cNvPicPr>
+            <a:picLocks noChangeAspect="1"/>
+          </p:cNvPicPr>
+          <p:nvPr/>
+        </p:nvPicPr>
+        <p:blipFill>
+          <a:blip r:embed="rId3"/>
+          <a:stretch>
+            <a:fillRect/>
+          </a:stretch>
+        </p:blipFill>
+        <p:spPr>
+          <a:xfrm>
+            <a:off x="8209999" y="1837313"/>
+            <a:ext cx="1029226" cy="1812748"/>
+          </a:xfrm>
+          <a:prstGeom prst="rect">
+            <a:avLst/>
+          </a:prstGeom>
+        </p:spPr>
+      </p:pic>
+      <p:pic>
+        <p:nvPicPr>
+          <p:cNvPr id="6" name="図 5">
+            <a:extLst>
+              <a:ext uri="{FF2B5EF4-FFF2-40B4-BE49-F238E27FC236}">
+                <a16:creationId xmlns:a16="http://schemas.microsoft.com/office/drawing/2014/main" id="{F3DE5510-F6E9-7443-762D-9B6EF95B11BE}"/>
+              </a:ext>
+            </a:extLst>
+          </p:cNvPr>
+          <p:cNvPicPr>
+            <a:picLocks noChangeAspect="1"/>
+          </p:cNvPicPr>
+          <p:nvPr/>
+        </p:nvPicPr>
+        <p:blipFill>
+          <a:blip r:embed="rId4"/>
+          <a:stretch>
+            <a:fillRect/>
+          </a:stretch>
+        </p:blipFill>
+        <p:spPr>
+          <a:xfrm rot="20894075">
+            <a:off x="9873054" y="2157719"/>
+            <a:ext cx="346438" cy="1261033"/>
+          </a:xfrm>
+          <a:prstGeom prst="rect">
+            <a:avLst/>
+          </a:prstGeom>
+        </p:spPr>
+      </p:pic>
+      <p:pic>
+        <p:nvPicPr>
+          <p:cNvPr id="7" name="図 6">
+            <a:extLst>
+              <a:ext uri="{FF2B5EF4-FFF2-40B4-BE49-F238E27FC236}">
+                <a16:creationId xmlns:a16="http://schemas.microsoft.com/office/drawing/2014/main" id="{26BAABEE-2338-5F1C-D5B9-DA70B58A692A}"/>
+              </a:ext>
+            </a:extLst>
+          </p:cNvPr>
+          <p:cNvPicPr>
+            <a:picLocks noChangeAspect="1"/>
+          </p:cNvPicPr>
+          <p:nvPr/>
+        </p:nvPicPr>
+        <p:blipFill>
+          <a:blip r:embed="rId3"/>
+          <a:stretch>
+            <a:fillRect/>
+          </a:stretch>
+        </p:blipFill>
+        <p:spPr>
+          <a:xfrm rot="520992">
+            <a:off x="8771789" y="2235026"/>
+            <a:ext cx="1029226" cy="1812748"/>
+          </a:xfrm>
+          <a:prstGeom prst="rect">
+            <a:avLst/>
+          </a:prstGeom>
+        </p:spPr>
+      </p:pic>
+      <p:pic>
+        <p:nvPicPr>
+          <p:cNvPr id="8" name="図 7">
+            <a:extLst>
+              <a:ext uri="{FF2B5EF4-FFF2-40B4-BE49-F238E27FC236}">
+                <a16:creationId xmlns:a16="http://schemas.microsoft.com/office/drawing/2014/main" id="{A166375F-80A0-2E79-8F7A-CFC8752E8195}"/>
+              </a:ext>
+            </a:extLst>
+          </p:cNvPr>
+          <p:cNvPicPr>
+            <a:picLocks noChangeAspect="1"/>
+          </p:cNvPicPr>
+          <p:nvPr/>
+        </p:nvPicPr>
+        <p:blipFill>
+          <a:blip r:embed="rId2"/>
+          <a:stretch>
+            <a:fillRect/>
+          </a:stretch>
+        </p:blipFill>
+        <p:spPr>
+          <a:xfrm rot="18600429">
+            <a:off x="6371080" y="1866682"/>
+            <a:ext cx="1322577" cy="1587092"/>
+          </a:xfrm>
+          <a:prstGeom prst="rect">
+            <a:avLst/>
+          </a:prstGeom>
+        </p:spPr>
+      </p:pic>
+      <p:pic>
+        <p:nvPicPr>
+          <p:cNvPr id="9" name="図 8">
+            <a:extLst>
+              <a:ext uri="{FF2B5EF4-FFF2-40B4-BE49-F238E27FC236}">
+                <a16:creationId xmlns:a16="http://schemas.microsoft.com/office/drawing/2014/main" id="{3E021B93-B9CE-7119-B883-30EEFF417F98}"/>
+              </a:ext>
+            </a:extLst>
+          </p:cNvPr>
+          <p:cNvPicPr>
+            <a:picLocks noChangeAspect="1"/>
+          </p:cNvPicPr>
+          <p:nvPr/>
+        </p:nvPicPr>
+        <p:blipFill>
+          <a:blip r:embed="rId4"/>
+          <a:stretch>
+            <a:fillRect/>
+          </a:stretch>
+        </p:blipFill>
+        <p:spPr>
+          <a:xfrm rot="2793543">
+            <a:off x="10245742" y="2342894"/>
+            <a:ext cx="346438" cy="1261033"/>
+          </a:xfrm>
+          <a:prstGeom prst="rect">
+            <a:avLst/>
+          </a:prstGeom>
+        </p:spPr>
+      </p:pic>
+      <p:pic>
+        <p:nvPicPr>
+          <p:cNvPr id="10" name="図 9">
+            <a:extLst>
+              <a:ext uri="{FF2B5EF4-FFF2-40B4-BE49-F238E27FC236}">
+                <a16:creationId xmlns:a16="http://schemas.microsoft.com/office/drawing/2014/main" id="{48E4D3EC-A014-C6DD-2947-DFFBEA02D7BB}"/>
+              </a:ext>
+            </a:extLst>
+          </p:cNvPr>
+          <p:cNvPicPr>
+            <a:picLocks noChangeAspect="1"/>
+          </p:cNvPicPr>
+          <p:nvPr/>
+        </p:nvPicPr>
+        <p:blipFill>
+          <a:blip r:embed="rId4"/>
+          <a:stretch>
+            <a:fillRect/>
+          </a:stretch>
+        </p:blipFill>
+        <p:spPr>
+          <a:xfrm rot="2501998">
+            <a:off x="10539891" y="2676530"/>
+            <a:ext cx="346438" cy="1261033"/>
+          </a:xfrm>
+          <a:prstGeom prst="rect">
+            <a:avLst/>
+          </a:prstGeom>
+        </p:spPr>
+      </p:pic>
+      <p:sp>
+        <p:nvSpPr>
+          <p:cNvPr id="11" name="平行四辺形 10">
+            <a:extLst>
+              <a:ext uri="{FF2B5EF4-FFF2-40B4-BE49-F238E27FC236}">
+                <a16:creationId xmlns:a16="http://schemas.microsoft.com/office/drawing/2014/main" id="{92289697-A51E-84A8-5841-46112E759E4C}"/>
+              </a:ext>
+            </a:extLst>
+          </p:cNvPr>
+          <p:cNvSpPr/>
+          <p:nvPr/>
+        </p:nvSpPr>
+        <p:spPr>
+          <a:xfrm rot="5400000">
+            <a:off x="7347467" y="1634023"/>
+            <a:ext cx="2118049" cy="4243096"/>
+          </a:xfrm>
+          <a:prstGeom prst="parallelogram">
+            <a:avLst>
+              <a:gd name="adj" fmla="val 34483"/>
+            </a:avLst>
+          </a:prstGeom>
+          <a:solidFill>
+            <a:schemeClr val="bg2"/>
+          </a:solidFill>
+          <a:ln>
+            <a:noFill/>
+          </a:ln>
+          <a:scene3d>
+            <a:camera prst="orthographicFront"/>
+            <a:lightRig rig="threePt" dir="t">
+              <a:rot lat="0" lon="0" rev="0"/>
+            </a:lightRig>
+          </a:scene3d>
+          <a:sp3d>
+            <a:bevelT w="482600" h="323850" prst="coolSlant"/>
+          </a:sp3d>
+        </p:spPr>
+        <p:style>
+          <a:lnRef idx="2">
+            <a:schemeClr val="accent1">
+              <a:shade val="15000"/>
+            </a:schemeClr>
+          </a:lnRef>
+          <a:fillRef idx="1">
+            <a:schemeClr val="accent1"/>
+          </a:fillRef>
+          <a:effectRef idx="0">
+            <a:schemeClr val="accent1"/>
+          </a:effectRef>
+          <a:fontRef idx="minor">
+            <a:schemeClr val="lt1"/>
+          </a:fontRef>
+        </p:style>
+        <p:txBody>
+          <a:bodyPr rtlCol="0" anchor="ctr"/>
+          <a:lstStyle/>
+          <a:p>
+            <a:pPr algn="ctr"/>
+            <a:endParaRPr kumimoji="1" lang="ja-JP" altLang="en-US"/>
+          </a:p>
+        </p:txBody>
+      </p:sp>
+      <p:sp>
+        <p:nvSpPr>
+          <p:cNvPr id="12" name="平行四辺形 11">
+            <a:extLst>
+              <a:ext uri="{FF2B5EF4-FFF2-40B4-BE49-F238E27FC236}">
+                <a16:creationId xmlns:a16="http://schemas.microsoft.com/office/drawing/2014/main" id="{B8057595-F801-E1AF-CF75-AA4BCEEEF466}"/>
+              </a:ext>
+            </a:extLst>
+          </p:cNvPr>
+          <p:cNvSpPr/>
+          <p:nvPr/>
+        </p:nvSpPr>
+        <p:spPr>
+          <a:xfrm rot="16200000" flipV="1">
+            <a:off x="10262118" y="3382345"/>
+            <a:ext cx="1698172" cy="1166328"/>
+          </a:xfrm>
+          <a:prstGeom prst="parallelogram">
+            <a:avLst/>
+          </a:prstGeom>
+          <a:solidFill>
+            <a:schemeClr val="bg2"/>
+          </a:solidFill>
+          <a:ln>
+            <a:noFill/>
+          </a:ln>
+          <a:scene3d>
+            <a:camera prst="orthographicFront"/>
+            <a:lightRig rig="threePt" dir="t">
+              <a:rot lat="0" lon="0" rev="8400000"/>
+            </a:lightRig>
+          </a:scene3d>
+          <a:sp3d>
+            <a:bevelT w="209550" h="152400"/>
+          </a:sp3d>
+        </p:spPr>
+        <p:style>
+          <a:lnRef idx="2">
+            <a:schemeClr val="accent1">
+              <a:shade val="15000"/>
+            </a:schemeClr>
+          </a:lnRef>
+          <a:fillRef idx="1">
+            <a:schemeClr val="accent1"/>
+          </a:fillRef>
+          <a:effectRef idx="0">
+            <a:schemeClr val="accent1"/>
+          </a:effectRef>
+          <a:fontRef idx="minor">
+            <a:schemeClr val="lt1"/>
+          </a:fontRef>
+        </p:style>
+        <p:txBody>
+          <a:bodyPr rtlCol="0" anchor="ctr"/>
+          <a:lstStyle/>
+          <a:p>
+            <a:pPr algn="ctr"/>
+            <a:endParaRPr kumimoji="1" lang="ja-JP" altLang="en-US"/>
+          </a:p>
+        </p:txBody>
+      </p:sp>
+      <p:sp>
+        <p:nvSpPr>
+          <p:cNvPr id="13" name="十字形 12">
+            <a:extLst>
+              <a:ext uri="{FF2B5EF4-FFF2-40B4-BE49-F238E27FC236}">
+                <a16:creationId xmlns:a16="http://schemas.microsoft.com/office/drawing/2014/main" id="{E823A990-9232-5E52-A6D5-9E448E138091}"/>
+              </a:ext>
+            </a:extLst>
+          </p:cNvPr>
+          <p:cNvSpPr/>
+          <p:nvPr/>
+        </p:nvSpPr>
+        <p:spPr>
+          <a:xfrm rot="432750">
+            <a:off x="8105356" y="3331585"/>
+            <a:ext cx="602270" cy="602270"/>
+          </a:xfrm>
+          <a:prstGeom prst="plus">
+            <a:avLst>
+              <a:gd name="adj" fmla="val 34615"/>
+            </a:avLst>
+          </a:prstGeom>
+          <a:solidFill>
+            <a:srgbClr val="FF0000"/>
+          </a:solidFill>
+          <a:ln>
+            <a:solidFill>
+              <a:schemeClr val="tx1"/>
+            </a:solidFill>
+          </a:ln>
+        </p:spPr>
+        <p:style>
+          <a:lnRef idx="2">
+            <a:schemeClr val="accent1">
+              <a:shade val="15000"/>
+            </a:schemeClr>
+          </a:lnRef>
+          <a:fillRef idx="1">
+            <a:schemeClr val="accent1"/>
+          </a:fillRef>
+          <a:effectRef idx="0">
+            <a:schemeClr val="accent1"/>
+          </a:effectRef>
+          <a:fontRef idx="minor">
+            <a:schemeClr val="lt1"/>
+          </a:fontRef>
+        </p:style>
+        <p:txBody>
+          <a:bodyPr rtlCol="0" anchor="ctr"/>
+          <a:lstStyle/>
+          <a:p>
+            <a:pPr algn="ctr"/>
+            <a:endParaRPr kumimoji="1" lang="ja-JP" altLang="en-US"/>
+          </a:p>
+        </p:txBody>
+      </p:sp>
+      <p:sp>
+        <p:nvSpPr>
+          <p:cNvPr id="14" name="平行四辺形 13">
+            <a:extLst>
+              <a:ext uri="{FF2B5EF4-FFF2-40B4-BE49-F238E27FC236}">
+                <a16:creationId xmlns:a16="http://schemas.microsoft.com/office/drawing/2014/main" id="{AC1C631A-09C5-6964-BF5D-3FF0D86DB488}"/>
+              </a:ext>
+            </a:extLst>
+          </p:cNvPr>
+          <p:cNvSpPr/>
+          <p:nvPr/>
+        </p:nvSpPr>
+        <p:spPr>
+          <a:xfrm rot="11324692">
+            <a:off x="6297028" y="598295"/>
+            <a:ext cx="5412351" cy="489542"/>
+          </a:xfrm>
+          <a:prstGeom prst="parallelogram">
+            <a:avLst>
+              <a:gd name="adj" fmla="val 223385"/>
+            </a:avLst>
+          </a:prstGeom>
+          <a:solidFill>
+            <a:schemeClr val="bg2"/>
+          </a:solidFill>
+          <a:ln>
+            <a:noFill/>
+          </a:ln>
+          <a:scene3d>
+            <a:camera prst="orthographicFront"/>
+            <a:lightRig rig="threePt" dir="t">
+              <a:rot lat="0" lon="0" rev="1200000"/>
+            </a:lightRig>
+          </a:scene3d>
+          <a:sp3d>
+            <a:bevelT w="95250" h="171450"/>
+          </a:sp3d>
+        </p:spPr>
+        <p:style>
+          <a:lnRef idx="2">
+            <a:schemeClr val="accent1">
+              <a:shade val="15000"/>
+            </a:schemeClr>
+          </a:lnRef>
+          <a:fillRef idx="1">
+            <a:schemeClr val="accent1"/>
+          </a:fillRef>
+          <a:effectRef idx="0">
+            <a:schemeClr val="accent1"/>
+          </a:effectRef>
+          <a:fontRef idx="minor">
+            <a:schemeClr val="lt1"/>
+          </a:fontRef>
+        </p:style>
+        <p:txBody>
+          <a:bodyPr rtlCol="0" anchor="ctr"/>
+          <a:lstStyle/>
+          <a:p>
+            <a:pPr algn="ctr"/>
+            <a:endParaRPr kumimoji="1" lang="ja-JP" altLang="en-US"/>
+          </a:p>
+        </p:txBody>
+      </p:sp>
+      <p:sp>
+        <p:nvSpPr>
+          <p:cNvPr id="15" name="平行四辺形 14">
+            <a:extLst>
+              <a:ext uri="{FF2B5EF4-FFF2-40B4-BE49-F238E27FC236}">
+                <a16:creationId xmlns:a16="http://schemas.microsoft.com/office/drawing/2014/main" id="{A9A819E8-7D84-55F6-598F-397111256526}"/>
+              </a:ext>
+            </a:extLst>
+          </p:cNvPr>
+          <p:cNvSpPr/>
+          <p:nvPr/>
+        </p:nvSpPr>
+        <p:spPr>
+          <a:xfrm rot="5400000">
+            <a:off x="7683856" y="-757430"/>
+            <a:ext cx="1445272" cy="4243096"/>
+          </a:xfrm>
+          <a:prstGeom prst="parallelogram">
+            <a:avLst>
+              <a:gd name="adj" fmla="val 47960"/>
+            </a:avLst>
+          </a:prstGeom>
+          <a:solidFill>
+            <a:schemeClr val="bg2"/>
+          </a:solidFill>
+          <a:ln>
+            <a:noFill/>
+          </a:ln>
+          <a:scene3d>
+            <a:camera prst="orthographicFront"/>
+            <a:lightRig rig="threePt" dir="t">
+              <a:rot lat="0" lon="0" rev="0"/>
+            </a:lightRig>
+          </a:scene3d>
+          <a:sp3d>
+            <a:bevelT w="361950" h="82550" prst="coolSlant"/>
+          </a:sp3d>
+        </p:spPr>
+        <p:style>
+          <a:lnRef idx="2">
+            <a:schemeClr val="accent1">
+              <a:shade val="15000"/>
+            </a:schemeClr>
+          </a:lnRef>
+          <a:fillRef idx="1">
+            <a:schemeClr val="accent1"/>
+          </a:fillRef>
+          <a:effectRef idx="0">
+            <a:schemeClr val="accent1"/>
+          </a:effectRef>
+          <a:fontRef idx="minor">
+            <a:schemeClr val="lt1"/>
+          </a:fontRef>
+        </p:style>
+        <p:txBody>
+          <a:bodyPr rtlCol="0" anchor="ctr"/>
+          <a:lstStyle/>
+          <a:p>
+            <a:pPr algn="ctr"/>
+            <a:endParaRPr kumimoji="1" lang="ja-JP" altLang="en-US"/>
+          </a:p>
+        </p:txBody>
+      </p:sp>
+      <p:sp>
+        <p:nvSpPr>
+          <p:cNvPr id="16" name="平行四辺形 15">
+            <a:extLst>
+              <a:ext uri="{FF2B5EF4-FFF2-40B4-BE49-F238E27FC236}">
+                <a16:creationId xmlns:a16="http://schemas.microsoft.com/office/drawing/2014/main" id="{79C436B6-66A5-8F6C-CF80-7AFD06B1516A}"/>
+              </a:ext>
+            </a:extLst>
+          </p:cNvPr>
+          <p:cNvSpPr/>
+          <p:nvPr/>
+        </p:nvSpPr>
+        <p:spPr>
+          <a:xfrm rot="16200000" flipV="1">
+            <a:off x="10576346" y="968732"/>
+            <a:ext cx="1069716" cy="1166328"/>
+          </a:xfrm>
+          <a:prstGeom prst="parallelogram">
+            <a:avLst>
+              <a:gd name="adj" fmla="val 31731"/>
+            </a:avLst>
+          </a:prstGeom>
+          <a:solidFill>
+            <a:schemeClr val="bg2"/>
+          </a:solidFill>
+          <a:ln>
+            <a:noFill/>
+          </a:ln>
+          <a:scene3d>
+            <a:camera prst="orthographicFront"/>
+            <a:lightRig rig="threePt" dir="t">
+              <a:rot lat="0" lon="0" rev="8400000"/>
+            </a:lightRig>
+          </a:scene3d>
+          <a:sp3d>
+            <a:bevelT w="184150" h="69850"/>
+          </a:sp3d>
+        </p:spPr>
+        <p:style>
+          <a:lnRef idx="2">
+            <a:schemeClr val="accent1">
+              <a:shade val="15000"/>
+            </a:schemeClr>
+          </a:lnRef>
+          <a:fillRef idx="1">
+            <a:schemeClr val="accent1"/>
+          </a:fillRef>
+          <a:effectRef idx="0">
+            <a:schemeClr val="accent1"/>
+          </a:effectRef>
+          <a:fontRef idx="minor">
+            <a:schemeClr val="lt1"/>
+          </a:fontRef>
+        </p:style>
+        <p:txBody>
+          <a:bodyPr rtlCol="0" anchor="ctr"/>
+          <a:lstStyle/>
+          <a:p>
+            <a:pPr algn="ctr"/>
+            <a:endParaRPr kumimoji="1" lang="ja-JP" altLang="en-US"/>
+          </a:p>
+        </p:txBody>
+      </p:sp>
+      <p:sp>
+        <p:nvSpPr>
+          <p:cNvPr id="17" name="平行四辺形 16">
+            <a:extLst>
+              <a:ext uri="{FF2B5EF4-FFF2-40B4-BE49-F238E27FC236}">
+                <a16:creationId xmlns:a16="http://schemas.microsoft.com/office/drawing/2014/main" id="{54F2498E-1237-970E-13CE-D0ADA18C8F44}"/>
+              </a:ext>
+            </a:extLst>
+          </p:cNvPr>
+          <p:cNvSpPr/>
+          <p:nvPr/>
+        </p:nvSpPr>
+        <p:spPr>
+          <a:xfrm rot="5400000">
+            <a:off x="2440442" y="1319278"/>
+            <a:ext cx="2118049" cy="4243096"/>
+          </a:xfrm>
+          <a:prstGeom prst="parallelogram">
+            <a:avLst>
+              <a:gd name="adj" fmla="val 34483"/>
+            </a:avLst>
+          </a:prstGeom>
+          <a:solidFill>
+            <a:schemeClr val="bg2"/>
+          </a:solidFill>
+          <a:ln>
+            <a:noFill/>
+          </a:ln>
+          <a:scene3d>
+            <a:camera prst="orthographicFront"/>
+            <a:lightRig rig="threePt" dir="t">
+              <a:rot lat="0" lon="0" rev="12600000"/>
+            </a:lightRig>
+          </a:scene3d>
+          <a:sp3d>
+            <a:bevelT w="222250" h="120650" prst="softRound"/>
+          </a:sp3d>
+        </p:spPr>
+        <p:style>
+          <a:lnRef idx="2">
+            <a:schemeClr val="accent1">
+              <a:shade val="15000"/>
+            </a:schemeClr>
+          </a:lnRef>
+          <a:fillRef idx="1">
+            <a:schemeClr val="accent1"/>
+          </a:fillRef>
+          <a:effectRef idx="0">
+            <a:schemeClr val="accent1"/>
+          </a:effectRef>
+          <a:fontRef idx="minor">
+            <a:schemeClr val="lt1"/>
+          </a:fontRef>
+        </p:style>
+        <p:txBody>
+          <a:bodyPr rtlCol="0" anchor="ctr"/>
+          <a:lstStyle/>
+          <a:p>
+            <a:pPr algn="ctr"/>
+            <a:endParaRPr kumimoji="1" lang="ja-JP" altLang="en-US"/>
+          </a:p>
+        </p:txBody>
+      </p:sp>
+      <p:sp>
+        <p:nvSpPr>
+          <p:cNvPr id="18" name="平行四辺形 17">
+            <a:extLst>
+              <a:ext uri="{FF2B5EF4-FFF2-40B4-BE49-F238E27FC236}">
+                <a16:creationId xmlns:a16="http://schemas.microsoft.com/office/drawing/2014/main" id="{8E069C0D-1DCB-8760-37B6-FD14DEE7604D}"/>
+              </a:ext>
+            </a:extLst>
+          </p:cNvPr>
+          <p:cNvSpPr/>
+          <p:nvPr/>
+        </p:nvSpPr>
+        <p:spPr>
+          <a:xfrm rot="16200000" flipV="1">
+            <a:off x="-54331" y="2647725"/>
+            <a:ext cx="1698172" cy="1166328"/>
+          </a:xfrm>
+          <a:prstGeom prst="parallelogram">
+            <a:avLst/>
+          </a:prstGeom>
+          <a:solidFill>
+            <a:schemeClr val="bg2"/>
+          </a:solidFill>
+          <a:ln>
+            <a:noFill/>
+          </a:ln>
+          <a:scene3d>
+            <a:camera prst="orthographicFront"/>
+            <a:lightRig rig="threePt" dir="t">
+              <a:rot lat="0" lon="0" rev="6600000"/>
+            </a:lightRig>
+          </a:scene3d>
+          <a:sp3d>
+            <a:bevelT w="158750" h="127000" prst="softRound"/>
+          </a:sp3d>
+        </p:spPr>
+        <p:style>
+          <a:lnRef idx="2">
+            <a:schemeClr val="accent1">
+              <a:shade val="15000"/>
+            </a:schemeClr>
+          </a:lnRef>
+          <a:fillRef idx="1">
+            <a:schemeClr val="accent1"/>
+          </a:fillRef>
+          <a:effectRef idx="0">
+            <a:schemeClr val="accent1"/>
+          </a:effectRef>
+          <a:fontRef idx="minor">
+            <a:schemeClr val="lt1"/>
+          </a:fontRef>
+        </p:style>
+        <p:txBody>
+          <a:bodyPr rtlCol="0" anchor="ctr"/>
+          <a:lstStyle/>
+          <a:p>
+            <a:pPr algn="ctr"/>
+            <a:endParaRPr kumimoji="1" lang="ja-JP" altLang="en-US"/>
+          </a:p>
+        </p:txBody>
+      </p:sp>
+      <p:pic>
+        <p:nvPicPr>
+          <p:cNvPr id="19" name="図 18">
+            <a:extLst>
+              <a:ext uri="{FF2B5EF4-FFF2-40B4-BE49-F238E27FC236}">
+                <a16:creationId xmlns:a16="http://schemas.microsoft.com/office/drawing/2014/main" id="{5C3408DB-1995-1014-5246-A996E92245CE}"/>
+              </a:ext>
+            </a:extLst>
+          </p:cNvPr>
+          <p:cNvPicPr>
+            <a:picLocks noChangeAspect="1"/>
+          </p:cNvPicPr>
+          <p:nvPr/>
+        </p:nvPicPr>
+        <p:blipFill>
+          <a:blip r:embed="rId2"/>
+          <a:stretch>
+            <a:fillRect/>
+          </a:stretch>
+        </p:blipFill>
+        <p:spPr>
+          <a:xfrm rot="19800000">
+            <a:off x="1079554" y="2007665"/>
+            <a:ext cx="1322577" cy="1587092"/>
+          </a:xfrm>
+          <a:prstGeom prst="rect">
+            <a:avLst/>
+          </a:prstGeom>
+        </p:spPr>
+      </p:pic>
+      <p:pic>
+        <p:nvPicPr>
+          <p:cNvPr id="20" name="図 19">
+            <a:extLst>
+              <a:ext uri="{FF2B5EF4-FFF2-40B4-BE49-F238E27FC236}">
+                <a16:creationId xmlns:a16="http://schemas.microsoft.com/office/drawing/2014/main" id="{9D94D554-B611-2446-FE53-B1720E2F7CE0}"/>
+              </a:ext>
+            </a:extLst>
+          </p:cNvPr>
+          <p:cNvPicPr>
+            <a:picLocks noChangeAspect="1"/>
+          </p:cNvPicPr>
+          <p:nvPr/>
+        </p:nvPicPr>
+        <p:blipFill>
+          <a:blip r:embed="rId3"/>
+          <a:stretch>
+            <a:fillRect/>
+          </a:stretch>
+        </p:blipFill>
+        <p:spPr>
+          <a:xfrm rot="913927">
+            <a:off x="2100246" y="2126327"/>
+            <a:ext cx="1029226" cy="1812748"/>
+          </a:xfrm>
+          <a:prstGeom prst="rect">
+            <a:avLst/>
+          </a:prstGeom>
+        </p:spPr>
+      </p:pic>
+      <p:pic>
+        <p:nvPicPr>
+          <p:cNvPr id="21" name="図 20">
+            <a:extLst>
+              <a:ext uri="{FF2B5EF4-FFF2-40B4-BE49-F238E27FC236}">
+                <a16:creationId xmlns:a16="http://schemas.microsoft.com/office/drawing/2014/main" id="{625BD4A8-078C-6657-DD1A-99A8CEB524C4}"/>
+              </a:ext>
+            </a:extLst>
+          </p:cNvPr>
+          <p:cNvPicPr>
+            <a:picLocks noChangeAspect="1"/>
+          </p:cNvPicPr>
+          <p:nvPr/>
+        </p:nvPicPr>
+        <p:blipFill>
+          <a:blip r:embed="rId4"/>
+          <a:stretch>
+            <a:fillRect/>
+          </a:stretch>
+        </p:blipFill>
+        <p:spPr>
+          <a:xfrm rot="20894075">
+            <a:off x="3573382" y="2566087"/>
+            <a:ext cx="346438" cy="1261033"/>
+          </a:xfrm>
+          <a:prstGeom prst="rect">
+            <a:avLst/>
+          </a:prstGeom>
+        </p:spPr>
+      </p:pic>
+      <p:pic>
+        <p:nvPicPr>
+          <p:cNvPr id="22" name="図 21">
+            <a:extLst>
+              <a:ext uri="{FF2B5EF4-FFF2-40B4-BE49-F238E27FC236}">
+                <a16:creationId xmlns:a16="http://schemas.microsoft.com/office/drawing/2014/main" id="{1D249AA2-3E23-9903-52ED-02639A634004}"/>
+              </a:ext>
+            </a:extLst>
+          </p:cNvPr>
+          <p:cNvPicPr>
+            <a:picLocks noChangeAspect="1"/>
+          </p:cNvPicPr>
+          <p:nvPr/>
+        </p:nvPicPr>
+        <p:blipFill>
+          <a:blip r:embed="rId3"/>
+          <a:stretch>
+            <a:fillRect/>
+          </a:stretch>
+        </p:blipFill>
+        <p:spPr>
+          <a:xfrm rot="520992">
+            <a:off x="2473043" y="2461996"/>
+            <a:ext cx="1029226" cy="1812748"/>
+          </a:xfrm>
+          <a:prstGeom prst="rect">
+            <a:avLst/>
+          </a:prstGeom>
+        </p:spPr>
+      </p:pic>
+      <p:pic>
+        <p:nvPicPr>
+          <p:cNvPr id="23" name="図 22">
+            <a:extLst>
+              <a:ext uri="{FF2B5EF4-FFF2-40B4-BE49-F238E27FC236}">
+                <a16:creationId xmlns:a16="http://schemas.microsoft.com/office/drawing/2014/main" id="{9E093717-055F-9CAD-850D-18B52D30335F}"/>
+              </a:ext>
+            </a:extLst>
+          </p:cNvPr>
+          <p:cNvPicPr>
+            <a:picLocks noChangeAspect="1"/>
+          </p:cNvPicPr>
+          <p:nvPr/>
+        </p:nvPicPr>
+        <p:blipFill>
+          <a:blip r:embed="rId2"/>
+          <a:stretch>
+            <a:fillRect/>
+          </a:stretch>
+        </p:blipFill>
+        <p:spPr>
+          <a:xfrm rot="19800000">
+            <a:off x="338860" y="2193481"/>
+            <a:ext cx="1322577" cy="1587092"/>
+          </a:xfrm>
+          <a:prstGeom prst="rect">
+            <a:avLst/>
+          </a:prstGeom>
+        </p:spPr>
+      </p:pic>
+      <p:pic>
+        <p:nvPicPr>
+          <p:cNvPr id="24" name="図 23">
+            <a:extLst>
+              <a:ext uri="{FF2B5EF4-FFF2-40B4-BE49-F238E27FC236}">
+                <a16:creationId xmlns:a16="http://schemas.microsoft.com/office/drawing/2014/main" id="{AA76D54A-EF76-53BE-4F16-36979AD66F02}"/>
+              </a:ext>
+            </a:extLst>
+          </p:cNvPr>
+          <p:cNvPicPr>
+            <a:picLocks noChangeAspect="1"/>
+          </p:cNvPicPr>
+          <p:nvPr/>
+        </p:nvPicPr>
+        <p:blipFill>
+          <a:blip r:embed="rId4"/>
+          <a:stretch>
+            <a:fillRect/>
+          </a:stretch>
+        </p:blipFill>
+        <p:spPr>
+          <a:xfrm rot="2793543">
+            <a:off x="3902430" y="2552710"/>
+            <a:ext cx="346438" cy="1261033"/>
+          </a:xfrm>
+          <a:prstGeom prst="rect">
+            <a:avLst/>
+          </a:prstGeom>
+        </p:spPr>
+      </p:pic>
+      <p:pic>
+        <p:nvPicPr>
+          <p:cNvPr id="25" name="図 24">
+            <a:extLst>
+              <a:ext uri="{FF2B5EF4-FFF2-40B4-BE49-F238E27FC236}">
+                <a16:creationId xmlns:a16="http://schemas.microsoft.com/office/drawing/2014/main" id="{36CA66DA-72C2-DC55-B17A-2FBF7CCB4442}"/>
+              </a:ext>
+            </a:extLst>
+          </p:cNvPr>
+          <p:cNvPicPr>
+            <a:picLocks noChangeAspect="1"/>
+          </p:cNvPicPr>
+          <p:nvPr/>
+        </p:nvPicPr>
+        <p:blipFill>
+          <a:blip r:embed="rId4"/>
+          <a:stretch>
+            <a:fillRect/>
+          </a:stretch>
+        </p:blipFill>
+        <p:spPr>
+          <a:xfrm rot="1543551">
+            <a:off x="4196579" y="2886346"/>
+            <a:ext cx="346438" cy="1261033"/>
+          </a:xfrm>
+          <a:prstGeom prst="rect">
+            <a:avLst/>
+          </a:prstGeom>
+        </p:spPr>
+      </p:pic>
+      <p:sp>
+        <p:nvSpPr>
+          <p:cNvPr id="26" name="平行四辺形 25">
+            <a:extLst>
+              <a:ext uri="{FF2B5EF4-FFF2-40B4-BE49-F238E27FC236}">
+                <a16:creationId xmlns:a16="http://schemas.microsoft.com/office/drawing/2014/main" id="{6E9BF6DC-D994-88F0-E0A1-5298BD870716}"/>
+              </a:ext>
+            </a:extLst>
+          </p:cNvPr>
+          <p:cNvSpPr/>
+          <p:nvPr/>
+        </p:nvSpPr>
+        <p:spPr>
+          <a:xfrm rot="5400000">
+            <a:off x="1274116" y="1634023"/>
+            <a:ext cx="2118049" cy="4243096"/>
+          </a:xfrm>
+          <a:prstGeom prst="parallelogram">
+            <a:avLst>
+              <a:gd name="adj" fmla="val 34483"/>
+            </a:avLst>
+          </a:prstGeom>
+          <a:solidFill>
+            <a:schemeClr val="bg2"/>
+          </a:solidFill>
+          <a:ln>
+            <a:noFill/>
+          </a:ln>
+          <a:scene3d>
+            <a:camera prst="orthographicFront"/>
+            <a:lightRig rig="threePt" dir="t">
+              <a:rot lat="0" lon="0" rev="0"/>
+            </a:lightRig>
+          </a:scene3d>
+          <a:sp3d>
+            <a:bevelT w="482600" h="323850" prst="coolSlant"/>
+          </a:sp3d>
+        </p:spPr>
+        <p:style>
+          <a:lnRef idx="2">
+            <a:schemeClr val="accent1">
+              <a:shade val="15000"/>
+            </a:schemeClr>
+          </a:lnRef>
+          <a:fillRef idx="1">
+            <a:schemeClr val="accent1"/>
+          </a:fillRef>
+          <a:effectRef idx="0">
+            <a:schemeClr val="accent1"/>
+          </a:effectRef>
+          <a:fontRef idx="minor">
+            <a:schemeClr val="lt1"/>
+          </a:fontRef>
+        </p:style>
+        <p:txBody>
+          <a:bodyPr rtlCol="0" anchor="ctr"/>
+          <a:lstStyle/>
+          <a:p>
+            <a:pPr algn="ctr"/>
+            <a:endParaRPr kumimoji="1" lang="ja-JP" altLang="en-US"/>
+          </a:p>
+        </p:txBody>
+      </p:sp>
+      <p:sp>
+        <p:nvSpPr>
+          <p:cNvPr id="27" name="平行四辺形 26">
+            <a:extLst>
+              <a:ext uri="{FF2B5EF4-FFF2-40B4-BE49-F238E27FC236}">
+                <a16:creationId xmlns:a16="http://schemas.microsoft.com/office/drawing/2014/main" id="{ACDDDF7B-26E9-2B9E-64AC-1357516DD564}"/>
+              </a:ext>
+            </a:extLst>
+          </p:cNvPr>
+          <p:cNvSpPr/>
+          <p:nvPr/>
+        </p:nvSpPr>
+        <p:spPr>
+          <a:xfrm rot="16200000" flipV="1">
+            <a:off x="4188767" y="3382345"/>
+            <a:ext cx="1698172" cy="1166328"/>
+          </a:xfrm>
+          <a:prstGeom prst="parallelogram">
+            <a:avLst/>
+          </a:prstGeom>
+          <a:solidFill>
+            <a:schemeClr val="bg2"/>
+          </a:solidFill>
+          <a:ln>
+            <a:noFill/>
+          </a:ln>
+          <a:scene3d>
+            <a:camera prst="orthographicFront"/>
+            <a:lightRig rig="threePt" dir="t">
+              <a:rot lat="0" lon="0" rev="8400000"/>
+            </a:lightRig>
+          </a:scene3d>
+          <a:sp3d>
+            <a:bevelT w="209550" h="152400"/>
+          </a:sp3d>
+        </p:spPr>
+        <p:style>
+          <a:lnRef idx="2">
+            <a:schemeClr val="accent1">
+              <a:shade val="15000"/>
+            </a:schemeClr>
+          </a:lnRef>
+          <a:fillRef idx="1">
+            <a:schemeClr val="accent1"/>
+          </a:fillRef>
+          <a:effectRef idx="0">
+            <a:schemeClr val="accent1"/>
+          </a:effectRef>
+          <a:fontRef idx="minor">
+            <a:schemeClr val="lt1"/>
+          </a:fontRef>
+        </p:style>
+        <p:txBody>
+          <a:bodyPr rtlCol="0" anchor="ctr"/>
+          <a:lstStyle/>
+          <a:p>
+            <a:pPr algn="ctr"/>
+            <a:endParaRPr kumimoji="1" lang="ja-JP" altLang="en-US"/>
+          </a:p>
+        </p:txBody>
+      </p:sp>
+      <p:sp>
+        <p:nvSpPr>
+          <p:cNvPr id="28" name="十字形 27">
+            <a:extLst>
+              <a:ext uri="{FF2B5EF4-FFF2-40B4-BE49-F238E27FC236}">
+                <a16:creationId xmlns:a16="http://schemas.microsoft.com/office/drawing/2014/main" id="{A0238C81-448B-2653-6D73-C74A574E0E13}"/>
+              </a:ext>
+            </a:extLst>
+          </p:cNvPr>
+          <p:cNvSpPr/>
+          <p:nvPr/>
+        </p:nvSpPr>
+        <p:spPr>
+          <a:xfrm rot="432750">
+            <a:off x="2032005" y="3331585"/>
+            <a:ext cx="602270" cy="602270"/>
+          </a:xfrm>
+          <a:prstGeom prst="plus">
+            <a:avLst>
+              <a:gd name="adj" fmla="val 34615"/>
+            </a:avLst>
+          </a:prstGeom>
+          <a:solidFill>
+            <a:srgbClr val="FF0000"/>
+          </a:solidFill>
+          <a:ln>
+            <a:solidFill>
+              <a:schemeClr val="tx1"/>
+            </a:solidFill>
+          </a:ln>
+        </p:spPr>
+        <p:style>
+          <a:lnRef idx="2">
+            <a:schemeClr val="accent1">
+              <a:shade val="15000"/>
+            </a:schemeClr>
+          </a:lnRef>
+          <a:fillRef idx="1">
+            <a:schemeClr val="accent1"/>
+          </a:fillRef>
+          <a:effectRef idx="0">
+            <a:schemeClr val="accent1"/>
+          </a:effectRef>
+          <a:fontRef idx="minor">
+            <a:schemeClr val="lt1"/>
+          </a:fontRef>
+        </p:style>
+        <p:txBody>
+          <a:bodyPr rtlCol="0" anchor="ctr"/>
+          <a:lstStyle/>
+          <a:p>
+            <a:pPr algn="ctr"/>
+            <a:endParaRPr kumimoji="1" lang="ja-JP" altLang="en-US"/>
+          </a:p>
+        </p:txBody>
+      </p:sp>
+      <p:sp>
+        <p:nvSpPr>
+          <p:cNvPr id="29" name="平行四辺形 28">
+            <a:extLst>
+              <a:ext uri="{FF2B5EF4-FFF2-40B4-BE49-F238E27FC236}">
+                <a16:creationId xmlns:a16="http://schemas.microsoft.com/office/drawing/2014/main" id="{768C6741-AF87-159C-B082-458867E647B2}"/>
+              </a:ext>
+            </a:extLst>
+          </p:cNvPr>
+          <p:cNvSpPr/>
+          <p:nvPr/>
+        </p:nvSpPr>
+        <p:spPr>
+          <a:xfrm rot="11324692">
+            <a:off x="223677" y="1139471"/>
+            <a:ext cx="5412351" cy="489542"/>
+          </a:xfrm>
+          <a:prstGeom prst="parallelogram">
+            <a:avLst>
+              <a:gd name="adj" fmla="val 223385"/>
+            </a:avLst>
+          </a:prstGeom>
+          <a:solidFill>
+            <a:schemeClr val="bg2"/>
+          </a:solidFill>
+          <a:ln>
+            <a:noFill/>
+          </a:ln>
+          <a:scene3d>
+            <a:camera prst="orthographicFront"/>
+            <a:lightRig rig="threePt" dir="t">
+              <a:rot lat="0" lon="0" rev="1200000"/>
+            </a:lightRig>
+          </a:scene3d>
+          <a:sp3d>
+            <a:bevelT w="95250" h="171450"/>
+          </a:sp3d>
+        </p:spPr>
+        <p:style>
+          <a:lnRef idx="2">
+            <a:schemeClr val="accent1">
+              <a:shade val="15000"/>
+            </a:schemeClr>
+          </a:lnRef>
+          <a:fillRef idx="1">
+            <a:schemeClr val="accent1"/>
+          </a:fillRef>
+          <a:effectRef idx="0">
+            <a:schemeClr val="accent1"/>
+          </a:effectRef>
+          <a:fontRef idx="minor">
+            <a:schemeClr val="lt1"/>
+          </a:fontRef>
+        </p:style>
+        <p:txBody>
+          <a:bodyPr rtlCol="0" anchor="ctr"/>
+          <a:lstStyle/>
+          <a:p>
+            <a:pPr algn="ctr"/>
+            <a:endParaRPr kumimoji="1" lang="ja-JP" altLang="en-US"/>
+          </a:p>
+        </p:txBody>
+      </p:sp>
+      <p:sp>
+        <p:nvSpPr>
+          <p:cNvPr id="30" name="平行四辺形 29">
+            <a:extLst>
+              <a:ext uri="{FF2B5EF4-FFF2-40B4-BE49-F238E27FC236}">
+                <a16:creationId xmlns:a16="http://schemas.microsoft.com/office/drawing/2014/main" id="{E1A92351-211A-79A8-6F4F-A43883E8FBA3}"/>
+              </a:ext>
+            </a:extLst>
+          </p:cNvPr>
+          <p:cNvSpPr/>
+          <p:nvPr/>
+        </p:nvSpPr>
+        <p:spPr>
+          <a:xfrm rot="5400000">
+            <a:off x="1610505" y="-216254"/>
+            <a:ext cx="1445272" cy="4243096"/>
+          </a:xfrm>
+          <a:prstGeom prst="parallelogram">
+            <a:avLst>
+              <a:gd name="adj" fmla="val 47960"/>
+            </a:avLst>
+          </a:prstGeom>
+          <a:solidFill>
+            <a:schemeClr val="bg2"/>
+          </a:solidFill>
+          <a:ln>
+            <a:noFill/>
+          </a:ln>
+          <a:scene3d>
+            <a:camera prst="orthographicFront"/>
+            <a:lightRig rig="threePt" dir="t">
+              <a:rot lat="0" lon="0" rev="0"/>
+            </a:lightRig>
+          </a:scene3d>
+          <a:sp3d>
+            <a:bevelT w="361950" h="82550" prst="coolSlant"/>
+          </a:sp3d>
+        </p:spPr>
+        <p:style>
+          <a:lnRef idx="2">
+            <a:schemeClr val="accent1">
+              <a:shade val="15000"/>
+            </a:schemeClr>
+          </a:lnRef>
+          <a:fillRef idx="1">
+            <a:schemeClr val="accent1"/>
+          </a:fillRef>
+          <a:effectRef idx="0">
+            <a:schemeClr val="accent1"/>
+          </a:effectRef>
+          <a:fontRef idx="minor">
+            <a:schemeClr val="lt1"/>
+          </a:fontRef>
+        </p:style>
+        <p:txBody>
+          <a:bodyPr rtlCol="0" anchor="ctr"/>
+          <a:lstStyle/>
+          <a:p>
+            <a:pPr algn="ctr"/>
+            <a:endParaRPr kumimoji="1" lang="ja-JP" altLang="en-US"/>
+          </a:p>
+        </p:txBody>
+      </p:sp>
+      <p:sp>
+        <p:nvSpPr>
+          <p:cNvPr id="31" name="平行四辺形 30">
+            <a:extLst>
+              <a:ext uri="{FF2B5EF4-FFF2-40B4-BE49-F238E27FC236}">
+                <a16:creationId xmlns:a16="http://schemas.microsoft.com/office/drawing/2014/main" id="{31CCFD79-4DD5-DDB4-883C-26C145C10B20}"/>
+              </a:ext>
+            </a:extLst>
+          </p:cNvPr>
+          <p:cNvSpPr/>
+          <p:nvPr/>
+        </p:nvSpPr>
+        <p:spPr>
+          <a:xfrm rot="16200000" flipV="1">
+            <a:off x="4502995" y="1509908"/>
+            <a:ext cx="1069716" cy="1166328"/>
+          </a:xfrm>
+          <a:prstGeom prst="parallelogram">
+            <a:avLst>
+              <a:gd name="adj" fmla="val 31731"/>
+            </a:avLst>
+          </a:prstGeom>
+          <a:solidFill>
+            <a:schemeClr val="bg2"/>
+          </a:solidFill>
+          <a:ln>
+            <a:noFill/>
+          </a:ln>
+          <a:scene3d>
+            <a:camera prst="orthographicFront"/>
+            <a:lightRig rig="threePt" dir="t">
+              <a:rot lat="0" lon="0" rev="8400000"/>
+            </a:lightRig>
+          </a:scene3d>
+          <a:sp3d>
+            <a:bevelT w="184150" h="69850"/>
+          </a:sp3d>
+        </p:spPr>
+        <p:style>
+          <a:lnRef idx="2">
+            <a:schemeClr val="accent1">
+              <a:shade val="15000"/>
+            </a:schemeClr>
+          </a:lnRef>
+          <a:fillRef idx="1">
+            <a:schemeClr val="accent1"/>
+          </a:fillRef>
+          <a:effectRef idx="0">
+            <a:schemeClr val="accent1"/>
+          </a:effectRef>
+          <a:fontRef idx="minor">
+            <a:schemeClr val="lt1"/>
+          </a:fontRef>
+        </p:style>
+        <p:txBody>
+          <a:bodyPr rtlCol="0" anchor="ctr"/>
+          <a:lstStyle/>
+          <a:p>
+            <a:pPr algn="ctr"/>
+            <a:endParaRPr kumimoji="1" lang="ja-JP" altLang="en-US"/>
+          </a:p>
+        </p:txBody>
+      </p:sp>
+    </p:spTree>
+    <p:extLst>
+      <p:ext uri="{BB962C8B-B14F-4D97-AF65-F5344CB8AC3E}">
+        <p14:creationId xmlns:p14="http://schemas.microsoft.com/office/powerpoint/2010/main" val="120758747"/>
+      </p:ext>
+    </p:extLst>
+  </p:cSld>
+  <p:clrMapOvr>
+    <a:masterClrMapping/>
+  </p:clrMapOvr>
+</p:sld>
+</file>
+
+<file path=ppt/slides/slide14.xml><?xml version="1.0" encoding="utf-8"?>
+<p:sld xmlns:a="http://schemas.openxmlformats.org/drawingml/2006/main" xmlns:r="http://schemas.openxmlformats.org/officeDocument/2006/relationships" xmlns:p="http://schemas.openxmlformats.org/presentationml/2006/main">
+  <p:cSld>
+    <p:spTree>
+      <p:nvGrpSpPr>
+        <p:cNvPr id="1" name=""/>
+        <p:cNvGrpSpPr/>
+        <p:nvPr/>
+      </p:nvGrpSpPr>
+      <p:grpSpPr>
+        <a:xfrm>
+          <a:off x="0" y="0"/>
+          <a:ext cx="0" cy="0"/>
+          <a:chOff x="0" y="0"/>
+          <a:chExt cx="0" cy="0"/>
+        </a:xfrm>
+      </p:grpSpPr>
+      <p:sp>
+        <p:nvSpPr>
+          <p:cNvPr id="2" name="平行四辺形 1">
+            <a:extLst>
+              <a:ext uri="{FF2B5EF4-FFF2-40B4-BE49-F238E27FC236}">
+                <a16:creationId xmlns:a16="http://schemas.microsoft.com/office/drawing/2014/main" id="{F287C494-1948-4F87-9619-E55764733DDD}"/>
+              </a:ext>
+            </a:extLst>
+          </p:cNvPr>
+          <p:cNvSpPr/>
+          <p:nvPr/>
+        </p:nvSpPr>
+        <p:spPr>
+          <a:xfrm rot="5400000">
+            <a:off x="9265917" y="1498435"/>
+            <a:ext cx="2118049" cy="4243096"/>
+          </a:xfrm>
+          <a:prstGeom prst="parallelogram">
+            <a:avLst>
+              <a:gd name="adj" fmla="val 34483"/>
+            </a:avLst>
+          </a:prstGeom>
+          <a:solidFill>
+            <a:schemeClr val="bg2"/>
+          </a:solidFill>
+          <a:ln>
+            <a:noFill/>
+          </a:ln>
+          <a:scene3d>
+            <a:camera prst="orthographicFront"/>
+            <a:lightRig rig="threePt" dir="t">
+              <a:rot lat="0" lon="0" rev="12600000"/>
+            </a:lightRig>
+          </a:scene3d>
+          <a:sp3d>
+            <a:bevelT w="222250" h="120650" prst="softRound"/>
+          </a:sp3d>
+        </p:spPr>
+        <p:style>
+          <a:lnRef idx="2">
+            <a:schemeClr val="accent1">
+              <a:shade val="15000"/>
+            </a:schemeClr>
+          </a:lnRef>
+          <a:fillRef idx="1">
+            <a:schemeClr val="accent1"/>
+          </a:fillRef>
+          <a:effectRef idx="0">
+            <a:schemeClr val="accent1"/>
+          </a:effectRef>
+          <a:fontRef idx="minor">
+            <a:schemeClr val="lt1"/>
+          </a:fontRef>
+        </p:style>
+        <p:txBody>
+          <a:bodyPr rtlCol="0" anchor="ctr"/>
+          <a:lstStyle/>
+          <a:p>
+            <a:pPr algn="ctr"/>
+            <a:endParaRPr kumimoji="1" lang="ja-JP" altLang="en-US"/>
+          </a:p>
+        </p:txBody>
+      </p:sp>
+      <p:sp>
+        <p:nvSpPr>
+          <p:cNvPr id="3" name="平行四辺形 2">
+            <a:extLst>
+              <a:ext uri="{FF2B5EF4-FFF2-40B4-BE49-F238E27FC236}">
+                <a16:creationId xmlns:a16="http://schemas.microsoft.com/office/drawing/2014/main" id="{3CCF4E36-946E-75D4-CA2F-435052953759}"/>
+              </a:ext>
+            </a:extLst>
+          </p:cNvPr>
+          <p:cNvSpPr/>
+          <p:nvPr/>
+        </p:nvSpPr>
+        <p:spPr>
+          <a:xfrm rot="16200000" flipV="1">
+            <a:off x="6771144" y="2826882"/>
+            <a:ext cx="1698172" cy="1166328"/>
+          </a:xfrm>
+          <a:prstGeom prst="parallelogram">
+            <a:avLst/>
+          </a:prstGeom>
+          <a:solidFill>
+            <a:schemeClr val="bg2"/>
+          </a:solidFill>
+          <a:ln>
+            <a:noFill/>
+          </a:ln>
+          <a:scene3d>
+            <a:camera prst="orthographicFront"/>
+            <a:lightRig rig="threePt" dir="t">
+              <a:rot lat="0" lon="0" rev="6600000"/>
+            </a:lightRig>
+          </a:scene3d>
+          <a:sp3d>
+            <a:bevelT w="158750" h="127000" prst="softRound"/>
+          </a:sp3d>
+        </p:spPr>
+        <p:style>
+          <a:lnRef idx="2">
+            <a:schemeClr val="accent1">
+              <a:shade val="15000"/>
+            </a:schemeClr>
+          </a:lnRef>
+          <a:fillRef idx="1">
+            <a:schemeClr val="accent1"/>
+          </a:fillRef>
+          <a:effectRef idx="0">
+            <a:schemeClr val="accent1"/>
+          </a:effectRef>
+          <a:fontRef idx="minor">
+            <a:schemeClr val="lt1"/>
+          </a:fontRef>
+        </p:style>
+        <p:txBody>
+          <a:bodyPr rtlCol="0" anchor="ctr"/>
+          <a:lstStyle/>
+          <a:p>
+            <a:pPr algn="ctr"/>
+            <a:endParaRPr kumimoji="1" lang="ja-JP" altLang="en-US"/>
+          </a:p>
+        </p:txBody>
+      </p:sp>
+      <p:pic>
+        <p:nvPicPr>
+          <p:cNvPr id="4" name="図 3">
+            <a:extLst>
+              <a:ext uri="{FF2B5EF4-FFF2-40B4-BE49-F238E27FC236}">
+                <a16:creationId xmlns:a16="http://schemas.microsoft.com/office/drawing/2014/main" id="{4B7ECD4A-B883-251B-7CC3-BD1629C689F9}"/>
+              </a:ext>
+            </a:extLst>
+          </p:cNvPr>
+          <p:cNvPicPr>
+            <a:picLocks noChangeAspect="1"/>
+          </p:cNvPicPr>
+          <p:nvPr/>
+        </p:nvPicPr>
+        <p:blipFill>
+          <a:blip r:embed="rId2"/>
+          <a:stretch>
+            <a:fillRect/>
+          </a:stretch>
+        </p:blipFill>
+        <p:spPr>
+          <a:xfrm rot="19489734">
+            <a:off x="7152349" y="1619985"/>
+            <a:ext cx="1322577" cy="1587092"/>
+          </a:xfrm>
+          <a:prstGeom prst="rect">
+            <a:avLst/>
+          </a:prstGeom>
+        </p:spPr>
+      </p:pic>
+      <p:pic>
+        <p:nvPicPr>
+          <p:cNvPr id="5" name="図 4">
+            <a:extLst>
+              <a:ext uri="{FF2B5EF4-FFF2-40B4-BE49-F238E27FC236}">
+                <a16:creationId xmlns:a16="http://schemas.microsoft.com/office/drawing/2014/main" id="{56002A38-3387-C86B-36AC-39122CBC3215}"/>
+              </a:ext>
+            </a:extLst>
+          </p:cNvPr>
+          <p:cNvPicPr>
+            <a:picLocks noChangeAspect="1"/>
+          </p:cNvPicPr>
+          <p:nvPr/>
+        </p:nvPicPr>
+        <p:blipFill>
+          <a:blip r:embed="rId3"/>
+          <a:stretch>
+            <a:fillRect/>
+          </a:stretch>
+        </p:blipFill>
+        <p:spPr>
+          <a:xfrm>
+            <a:off x="8644002" y="1724352"/>
+            <a:ext cx="1029226" cy="1812748"/>
+          </a:xfrm>
+          <a:prstGeom prst="rect">
+            <a:avLst/>
+          </a:prstGeom>
+        </p:spPr>
+      </p:pic>
+      <p:pic>
+        <p:nvPicPr>
+          <p:cNvPr id="6" name="図 5">
+            <a:extLst>
+              <a:ext uri="{FF2B5EF4-FFF2-40B4-BE49-F238E27FC236}">
+                <a16:creationId xmlns:a16="http://schemas.microsoft.com/office/drawing/2014/main" id="{A6831B5A-839C-5434-1D3A-A3F55FE019B8}"/>
+              </a:ext>
+            </a:extLst>
+          </p:cNvPr>
+          <p:cNvPicPr>
+            <a:picLocks noChangeAspect="1"/>
+          </p:cNvPicPr>
+          <p:nvPr/>
+        </p:nvPicPr>
+        <p:blipFill>
+          <a:blip r:embed="rId4"/>
+          <a:stretch>
+            <a:fillRect/>
+          </a:stretch>
+        </p:blipFill>
+        <p:spPr>
+          <a:xfrm rot="20894075">
+            <a:off x="11486758" y="2219385"/>
+            <a:ext cx="346438" cy="1261033"/>
+          </a:xfrm>
+          <a:prstGeom prst="rect">
+            <a:avLst/>
+          </a:prstGeom>
+        </p:spPr>
+      </p:pic>
+      <p:pic>
+        <p:nvPicPr>
+          <p:cNvPr id="7" name="図 6">
+            <a:extLst>
+              <a:ext uri="{FF2B5EF4-FFF2-40B4-BE49-F238E27FC236}">
+                <a16:creationId xmlns:a16="http://schemas.microsoft.com/office/drawing/2014/main" id="{E9481B0A-41AC-5059-FD3F-7357B51728E0}"/>
+              </a:ext>
+            </a:extLst>
+          </p:cNvPr>
+          <p:cNvPicPr>
+            <a:picLocks noChangeAspect="1"/>
+          </p:cNvPicPr>
+          <p:nvPr/>
+        </p:nvPicPr>
+        <p:blipFill>
+          <a:blip r:embed="rId3"/>
+          <a:stretch>
+            <a:fillRect/>
+          </a:stretch>
+        </p:blipFill>
+        <p:spPr>
+          <a:xfrm rot="520992">
+            <a:off x="10058621" y="2170594"/>
+            <a:ext cx="1029226" cy="1812748"/>
+          </a:xfrm>
+          <a:prstGeom prst="rect">
+            <a:avLst/>
+          </a:prstGeom>
+        </p:spPr>
+      </p:pic>
+      <p:pic>
+        <p:nvPicPr>
+          <p:cNvPr id="8" name="図 7">
+            <a:extLst>
+              <a:ext uri="{FF2B5EF4-FFF2-40B4-BE49-F238E27FC236}">
+                <a16:creationId xmlns:a16="http://schemas.microsoft.com/office/drawing/2014/main" id="{E9B65B2F-6302-93BC-ECBA-F2BDEC88250F}"/>
+              </a:ext>
+            </a:extLst>
+          </p:cNvPr>
+          <p:cNvPicPr>
+            <a:picLocks noChangeAspect="1"/>
+          </p:cNvPicPr>
+          <p:nvPr/>
+        </p:nvPicPr>
+        <p:blipFill>
+          <a:blip r:embed="rId2"/>
+          <a:stretch>
+            <a:fillRect/>
+          </a:stretch>
+        </p:blipFill>
+        <p:spPr>
+          <a:xfrm rot="16803805">
+            <a:off x="5865704" y="1254828"/>
+            <a:ext cx="1322577" cy="1587092"/>
+          </a:xfrm>
+          <a:prstGeom prst="rect">
+            <a:avLst/>
+          </a:prstGeom>
+        </p:spPr>
+      </p:pic>
+      <p:pic>
+        <p:nvPicPr>
+          <p:cNvPr id="9" name="図 8">
+            <a:extLst>
+              <a:ext uri="{FF2B5EF4-FFF2-40B4-BE49-F238E27FC236}">
+                <a16:creationId xmlns:a16="http://schemas.microsoft.com/office/drawing/2014/main" id="{FE5EACE1-A269-D0F0-8022-1954C95FB1C1}"/>
+              </a:ext>
+            </a:extLst>
+          </p:cNvPr>
+          <p:cNvPicPr>
+            <a:picLocks noChangeAspect="1"/>
+          </p:cNvPicPr>
+          <p:nvPr/>
+        </p:nvPicPr>
+        <p:blipFill>
+          <a:blip r:embed="rId4"/>
+          <a:stretch>
+            <a:fillRect/>
+          </a:stretch>
+        </p:blipFill>
+        <p:spPr>
+          <a:xfrm rot="1001566">
+            <a:off x="12283655" y="1799063"/>
+            <a:ext cx="346438" cy="1261033"/>
+          </a:xfrm>
+          <a:prstGeom prst="rect">
+            <a:avLst/>
+          </a:prstGeom>
+        </p:spPr>
+      </p:pic>
+      <p:pic>
+        <p:nvPicPr>
+          <p:cNvPr id="10" name="図 9">
+            <a:extLst>
+              <a:ext uri="{FF2B5EF4-FFF2-40B4-BE49-F238E27FC236}">
+                <a16:creationId xmlns:a16="http://schemas.microsoft.com/office/drawing/2014/main" id="{F2523B68-F69B-A2D3-F921-221A68CC883A}"/>
+              </a:ext>
+            </a:extLst>
+          </p:cNvPr>
+          <p:cNvPicPr>
+            <a:picLocks noChangeAspect="1"/>
+          </p:cNvPicPr>
+          <p:nvPr/>
+        </p:nvPicPr>
+        <p:blipFill>
+          <a:blip r:embed="rId4"/>
+          <a:stretch>
+            <a:fillRect/>
+          </a:stretch>
+        </p:blipFill>
+        <p:spPr>
+          <a:xfrm rot="2501998">
+            <a:off x="12788844" y="2184819"/>
+            <a:ext cx="346438" cy="1261033"/>
+          </a:xfrm>
+          <a:prstGeom prst="rect">
+            <a:avLst/>
+          </a:prstGeom>
+        </p:spPr>
+      </p:pic>
+      <p:sp>
+        <p:nvSpPr>
+          <p:cNvPr id="11" name="平行四辺形 10">
+            <a:extLst>
+              <a:ext uri="{FF2B5EF4-FFF2-40B4-BE49-F238E27FC236}">
+                <a16:creationId xmlns:a16="http://schemas.microsoft.com/office/drawing/2014/main" id="{63969C33-9529-1903-D35B-FBB30AD2E315}"/>
+              </a:ext>
+            </a:extLst>
+          </p:cNvPr>
+          <p:cNvSpPr/>
+          <p:nvPr/>
+        </p:nvSpPr>
+        <p:spPr>
+          <a:xfrm rot="5400000">
+            <a:off x="8099591" y="1813180"/>
+            <a:ext cx="2118049" cy="4243096"/>
+          </a:xfrm>
+          <a:prstGeom prst="parallelogram">
+            <a:avLst>
+              <a:gd name="adj" fmla="val 34483"/>
+            </a:avLst>
+          </a:prstGeom>
+          <a:solidFill>
+            <a:schemeClr val="bg2"/>
+          </a:solidFill>
+          <a:ln>
+            <a:noFill/>
+          </a:ln>
+          <a:scene3d>
+            <a:camera prst="orthographicFront"/>
+            <a:lightRig rig="threePt" dir="t">
+              <a:rot lat="0" lon="0" rev="0"/>
+            </a:lightRig>
+          </a:scene3d>
+          <a:sp3d>
+            <a:bevelT w="482600" h="323850" prst="coolSlant"/>
+          </a:sp3d>
+        </p:spPr>
+        <p:style>
+          <a:lnRef idx="2">
+            <a:schemeClr val="accent1">
+              <a:shade val="15000"/>
+            </a:schemeClr>
+          </a:lnRef>
+          <a:fillRef idx="1">
+            <a:schemeClr val="accent1"/>
+          </a:fillRef>
+          <a:effectRef idx="0">
+            <a:schemeClr val="accent1"/>
+          </a:effectRef>
+          <a:fontRef idx="minor">
+            <a:schemeClr val="lt1"/>
+          </a:fontRef>
+        </p:style>
+        <p:txBody>
+          <a:bodyPr rtlCol="0" anchor="ctr"/>
+          <a:lstStyle/>
+          <a:p>
+            <a:pPr algn="ctr"/>
+            <a:endParaRPr kumimoji="1" lang="ja-JP" altLang="en-US"/>
+          </a:p>
+        </p:txBody>
+      </p:sp>
+      <p:sp>
+        <p:nvSpPr>
+          <p:cNvPr id="12" name="平行四辺形 11">
+            <a:extLst>
+              <a:ext uri="{FF2B5EF4-FFF2-40B4-BE49-F238E27FC236}">
+                <a16:creationId xmlns:a16="http://schemas.microsoft.com/office/drawing/2014/main" id="{C381EEE6-AA8F-67EA-A114-21832DB28EDD}"/>
+              </a:ext>
+            </a:extLst>
+          </p:cNvPr>
+          <p:cNvSpPr/>
+          <p:nvPr/>
+        </p:nvSpPr>
+        <p:spPr>
+          <a:xfrm rot="16200000" flipV="1">
+            <a:off x="11014242" y="3561502"/>
+            <a:ext cx="1698172" cy="1166328"/>
+          </a:xfrm>
+          <a:prstGeom prst="parallelogram">
+            <a:avLst/>
+          </a:prstGeom>
+          <a:solidFill>
+            <a:schemeClr val="bg2"/>
+          </a:solidFill>
+          <a:ln>
+            <a:noFill/>
+          </a:ln>
+          <a:scene3d>
+            <a:camera prst="orthographicFront"/>
+            <a:lightRig rig="threePt" dir="t">
+              <a:rot lat="0" lon="0" rev="8400000"/>
+            </a:lightRig>
+          </a:scene3d>
+          <a:sp3d>
+            <a:bevelT w="209550" h="152400"/>
+          </a:sp3d>
+        </p:spPr>
+        <p:style>
+          <a:lnRef idx="2">
+            <a:schemeClr val="accent1">
+              <a:shade val="15000"/>
+            </a:schemeClr>
+          </a:lnRef>
+          <a:fillRef idx="1">
+            <a:schemeClr val="accent1"/>
+          </a:fillRef>
+          <a:effectRef idx="0">
+            <a:schemeClr val="accent1"/>
+          </a:effectRef>
+          <a:fontRef idx="minor">
+            <a:schemeClr val="lt1"/>
+          </a:fontRef>
+        </p:style>
+        <p:txBody>
+          <a:bodyPr rtlCol="0" anchor="ctr"/>
+          <a:lstStyle/>
+          <a:p>
+            <a:pPr algn="ctr"/>
+            <a:endParaRPr kumimoji="1" lang="ja-JP" altLang="en-US"/>
+          </a:p>
+        </p:txBody>
+      </p:sp>
+      <p:sp>
+        <p:nvSpPr>
+          <p:cNvPr id="13" name="十字形 12">
+            <a:extLst>
+              <a:ext uri="{FF2B5EF4-FFF2-40B4-BE49-F238E27FC236}">
+                <a16:creationId xmlns:a16="http://schemas.microsoft.com/office/drawing/2014/main" id="{36C050E7-F859-E250-028C-790068137C3B}"/>
+              </a:ext>
+            </a:extLst>
+          </p:cNvPr>
+          <p:cNvSpPr/>
+          <p:nvPr/>
+        </p:nvSpPr>
+        <p:spPr>
+          <a:xfrm rot="432750">
+            <a:off x="8857480" y="3510742"/>
+            <a:ext cx="602270" cy="602270"/>
+          </a:xfrm>
+          <a:prstGeom prst="plus">
+            <a:avLst>
+              <a:gd name="adj" fmla="val 34615"/>
+            </a:avLst>
+          </a:prstGeom>
+          <a:solidFill>
+            <a:srgbClr val="FF0000"/>
+          </a:solidFill>
+          <a:ln>
+            <a:solidFill>
+              <a:schemeClr val="tx1"/>
+            </a:solidFill>
+          </a:ln>
+        </p:spPr>
+        <p:style>
+          <a:lnRef idx="2">
+            <a:schemeClr val="accent1">
+              <a:shade val="15000"/>
+            </a:schemeClr>
+          </a:lnRef>
+          <a:fillRef idx="1">
+            <a:schemeClr val="accent1"/>
+          </a:fillRef>
+          <a:effectRef idx="0">
+            <a:schemeClr val="accent1"/>
+          </a:effectRef>
+          <a:fontRef idx="minor">
+            <a:schemeClr val="lt1"/>
+          </a:fontRef>
+        </p:style>
+        <p:txBody>
+          <a:bodyPr rtlCol="0" anchor="ctr"/>
+          <a:lstStyle/>
+          <a:p>
+            <a:pPr algn="ctr"/>
+            <a:endParaRPr kumimoji="1" lang="ja-JP" altLang="en-US"/>
+          </a:p>
+        </p:txBody>
+      </p:sp>
+      <p:sp>
+        <p:nvSpPr>
+          <p:cNvPr id="14" name="平行四辺形 13">
+            <a:extLst>
+              <a:ext uri="{FF2B5EF4-FFF2-40B4-BE49-F238E27FC236}">
+                <a16:creationId xmlns:a16="http://schemas.microsoft.com/office/drawing/2014/main" id="{36F34518-9ABC-6C53-7C4E-74676F78C0BD}"/>
+              </a:ext>
+            </a:extLst>
+          </p:cNvPr>
+          <p:cNvSpPr/>
+          <p:nvPr/>
+        </p:nvSpPr>
+        <p:spPr>
+          <a:xfrm rot="11324692">
+            <a:off x="7049152" y="609499"/>
+            <a:ext cx="5412351" cy="489542"/>
+          </a:xfrm>
+          <a:prstGeom prst="parallelogram">
+            <a:avLst>
+              <a:gd name="adj" fmla="val 223385"/>
+            </a:avLst>
+          </a:prstGeom>
+          <a:solidFill>
+            <a:schemeClr val="bg2"/>
+          </a:solidFill>
+          <a:ln>
+            <a:noFill/>
+          </a:ln>
+          <a:scene3d>
+            <a:camera prst="orthographicFront"/>
+            <a:lightRig rig="threePt" dir="t">
+              <a:rot lat="0" lon="0" rev="1200000"/>
+            </a:lightRig>
+          </a:scene3d>
+          <a:sp3d>
+            <a:bevelT w="95250" h="171450"/>
+          </a:sp3d>
+        </p:spPr>
+        <p:style>
+          <a:lnRef idx="2">
+            <a:schemeClr val="accent1">
+              <a:shade val="15000"/>
+            </a:schemeClr>
+          </a:lnRef>
+          <a:fillRef idx="1">
+            <a:schemeClr val="accent1"/>
+          </a:fillRef>
+          <a:effectRef idx="0">
+            <a:schemeClr val="accent1"/>
+          </a:effectRef>
+          <a:fontRef idx="minor">
+            <a:schemeClr val="lt1"/>
+          </a:fontRef>
+        </p:style>
+        <p:txBody>
+          <a:bodyPr rtlCol="0" anchor="ctr"/>
+          <a:lstStyle/>
+          <a:p>
+            <a:pPr algn="ctr"/>
+            <a:endParaRPr kumimoji="1" lang="ja-JP" altLang="en-US"/>
+          </a:p>
+        </p:txBody>
+      </p:sp>
+      <p:sp>
+        <p:nvSpPr>
+          <p:cNvPr id="15" name="平行四辺形 14">
+            <a:extLst>
+              <a:ext uri="{FF2B5EF4-FFF2-40B4-BE49-F238E27FC236}">
+                <a16:creationId xmlns:a16="http://schemas.microsoft.com/office/drawing/2014/main" id="{11B83395-B2A0-CE15-F892-B347DFD38685}"/>
+              </a:ext>
+            </a:extLst>
+          </p:cNvPr>
+          <p:cNvSpPr/>
+          <p:nvPr/>
+        </p:nvSpPr>
+        <p:spPr>
+          <a:xfrm rot="5400000">
+            <a:off x="8435980" y="-746226"/>
+            <a:ext cx="1445272" cy="4243096"/>
+          </a:xfrm>
+          <a:prstGeom prst="parallelogram">
+            <a:avLst>
+              <a:gd name="adj" fmla="val 47960"/>
+            </a:avLst>
+          </a:prstGeom>
+          <a:solidFill>
+            <a:schemeClr val="bg2"/>
+          </a:solidFill>
+          <a:ln>
+            <a:noFill/>
+          </a:ln>
+          <a:scene3d>
+            <a:camera prst="orthographicFront"/>
+            <a:lightRig rig="threePt" dir="t">
+              <a:rot lat="0" lon="0" rev="0"/>
+            </a:lightRig>
+          </a:scene3d>
+          <a:sp3d>
+            <a:bevelT w="361950" h="82550" prst="coolSlant"/>
+          </a:sp3d>
+        </p:spPr>
+        <p:style>
+          <a:lnRef idx="2">
+            <a:schemeClr val="accent1">
+              <a:shade val="15000"/>
+            </a:schemeClr>
+          </a:lnRef>
+          <a:fillRef idx="1">
+            <a:schemeClr val="accent1"/>
+          </a:fillRef>
+          <a:effectRef idx="0">
+            <a:schemeClr val="accent1"/>
+          </a:effectRef>
+          <a:fontRef idx="minor">
+            <a:schemeClr val="lt1"/>
+          </a:fontRef>
+        </p:style>
+        <p:txBody>
+          <a:bodyPr rtlCol="0" anchor="ctr"/>
+          <a:lstStyle/>
+          <a:p>
+            <a:pPr algn="ctr"/>
+            <a:endParaRPr kumimoji="1" lang="ja-JP" altLang="en-US"/>
+          </a:p>
+        </p:txBody>
+      </p:sp>
+      <p:sp>
+        <p:nvSpPr>
+          <p:cNvPr id="16" name="平行四辺形 15">
+            <a:extLst>
+              <a:ext uri="{FF2B5EF4-FFF2-40B4-BE49-F238E27FC236}">
+                <a16:creationId xmlns:a16="http://schemas.microsoft.com/office/drawing/2014/main" id="{A707397E-0779-CC5E-FC9B-C272CDCF555F}"/>
+              </a:ext>
+            </a:extLst>
+          </p:cNvPr>
+          <p:cNvSpPr/>
+          <p:nvPr/>
+        </p:nvSpPr>
+        <p:spPr>
+          <a:xfrm rot="16200000" flipV="1">
+            <a:off x="11328470" y="979936"/>
+            <a:ext cx="1069716" cy="1166328"/>
+          </a:xfrm>
+          <a:prstGeom prst="parallelogram">
+            <a:avLst>
+              <a:gd name="adj" fmla="val 31731"/>
+            </a:avLst>
+          </a:prstGeom>
+          <a:solidFill>
+            <a:schemeClr val="bg2"/>
+          </a:solidFill>
+          <a:ln>
+            <a:noFill/>
+          </a:ln>
+          <a:scene3d>
+            <a:camera prst="orthographicFront"/>
+            <a:lightRig rig="threePt" dir="t">
+              <a:rot lat="0" lon="0" rev="8400000"/>
+            </a:lightRig>
+          </a:scene3d>
+          <a:sp3d>
+            <a:bevelT w="184150" h="69850"/>
+          </a:sp3d>
+        </p:spPr>
+        <p:style>
+          <a:lnRef idx="2">
+            <a:schemeClr val="accent1">
+              <a:shade val="15000"/>
+            </a:schemeClr>
+          </a:lnRef>
+          <a:fillRef idx="1">
+            <a:schemeClr val="accent1"/>
+          </a:fillRef>
+          <a:effectRef idx="0">
+            <a:schemeClr val="accent1"/>
+          </a:effectRef>
+          <a:fontRef idx="minor">
+            <a:schemeClr val="lt1"/>
+          </a:fontRef>
+        </p:style>
+        <p:txBody>
+          <a:bodyPr rtlCol="0" anchor="ctr"/>
+          <a:lstStyle/>
+          <a:p>
+            <a:pPr algn="ctr"/>
+            <a:endParaRPr kumimoji="1" lang="ja-JP" altLang="en-US"/>
+          </a:p>
+        </p:txBody>
+      </p:sp>
+      <p:sp>
+        <p:nvSpPr>
+          <p:cNvPr id="17" name="平行四辺形 16">
+            <a:extLst>
+              <a:ext uri="{FF2B5EF4-FFF2-40B4-BE49-F238E27FC236}">
+                <a16:creationId xmlns:a16="http://schemas.microsoft.com/office/drawing/2014/main" id="{E0778535-4CED-D6BC-05D0-2DC4EC0F3E42}"/>
+              </a:ext>
+            </a:extLst>
+          </p:cNvPr>
+          <p:cNvSpPr/>
+          <p:nvPr/>
+        </p:nvSpPr>
+        <p:spPr>
+          <a:xfrm rot="5400000">
+            <a:off x="2443323" y="1319278"/>
+            <a:ext cx="2118049" cy="4243096"/>
+          </a:xfrm>
+          <a:prstGeom prst="parallelogram">
+            <a:avLst>
+              <a:gd name="adj" fmla="val 34483"/>
+            </a:avLst>
+          </a:prstGeom>
+          <a:solidFill>
+            <a:schemeClr val="bg2"/>
+          </a:solidFill>
+          <a:ln>
+            <a:noFill/>
+          </a:ln>
+          <a:scene3d>
+            <a:camera prst="orthographicFront"/>
+            <a:lightRig rig="threePt" dir="t">
+              <a:rot lat="0" lon="0" rev="12600000"/>
+            </a:lightRig>
+          </a:scene3d>
+          <a:sp3d>
+            <a:bevelT w="222250" h="120650" prst="softRound"/>
+          </a:sp3d>
+        </p:spPr>
+        <p:style>
+          <a:lnRef idx="2">
+            <a:schemeClr val="accent1">
+              <a:shade val="15000"/>
+            </a:schemeClr>
+          </a:lnRef>
+          <a:fillRef idx="1">
+            <a:schemeClr val="accent1"/>
+          </a:fillRef>
+          <a:effectRef idx="0">
+            <a:schemeClr val="accent1"/>
+          </a:effectRef>
+          <a:fontRef idx="minor">
+            <a:schemeClr val="lt1"/>
+          </a:fontRef>
+        </p:style>
+        <p:txBody>
+          <a:bodyPr rtlCol="0" anchor="ctr"/>
+          <a:lstStyle/>
+          <a:p>
+            <a:pPr algn="ctr"/>
+            <a:endParaRPr kumimoji="1" lang="ja-JP" altLang="en-US"/>
+          </a:p>
+        </p:txBody>
+      </p:sp>
+      <p:sp>
+        <p:nvSpPr>
+          <p:cNvPr id="18" name="平行四辺形 17">
+            <a:extLst>
+              <a:ext uri="{FF2B5EF4-FFF2-40B4-BE49-F238E27FC236}">
+                <a16:creationId xmlns:a16="http://schemas.microsoft.com/office/drawing/2014/main" id="{FBF081B0-9B62-F437-4C87-BC7CD7C773F8}"/>
+              </a:ext>
+            </a:extLst>
+          </p:cNvPr>
+          <p:cNvSpPr/>
+          <p:nvPr/>
+        </p:nvSpPr>
+        <p:spPr>
+          <a:xfrm rot="16200000" flipV="1">
+            <a:off x="-51450" y="2647725"/>
+            <a:ext cx="1698172" cy="1166328"/>
+          </a:xfrm>
+          <a:prstGeom prst="parallelogram">
+            <a:avLst/>
+          </a:prstGeom>
+          <a:solidFill>
+            <a:schemeClr val="bg2"/>
+          </a:solidFill>
+          <a:ln>
+            <a:noFill/>
+          </a:ln>
+          <a:scene3d>
+            <a:camera prst="orthographicFront"/>
+            <a:lightRig rig="threePt" dir="t">
+              <a:rot lat="0" lon="0" rev="6600000"/>
+            </a:lightRig>
+          </a:scene3d>
+          <a:sp3d>
+            <a:bevelT w="158750" h="127000" prst="softRound"/>
+          </a:sp3d>
+        </p:spPr>
+        <p:style>
+          <a:lnRef idx="2">
+            <a:schemeClr val="accent1">
+              <a:shade val="15000"/>
+            </a:schemeClr>
+          </a:lnRef>
+          <a:fillRef idx="1">
+            <a:schemeClr val="accent1"/>
+          </a:fillRef>
+          <a:effectRef idx="0">
+            <a:schemeClr val="accent1"/>
+          </a:effectRef>
+          <a:fontRef idx="minor">
+            <a:schemeClr val="lt1"/>
+          </a:fontRef>
+        </p:style>
+        <p:txBody>
+          <a:bodyPr rtlCol="0" anchor="ctr"/>
+          <a:lstStyle/>
+          <a:p>
+            <a:pPr algn="ctr"/>
+            <a:endParaRPr kumimoji="1" lang="ja-JP" altLang="en-US"/>
+          </a:p>
+        </p:txBody>
+      </p:sp>
+      <p:pic>
+        <p:nvPicPr>
+          <p:cNvPr id="19" name="図 18">
+            <a:extLst>
+              <a:ext uri="{FF2B5EF4-FFF2-40B4-BE49-F238E27FC236}">
+                <a16:creationId xmlns:a16="http://schemas.microsoft.com/office/drawing/2014/main" id="{8587AA40-AF60-C75F-CC7D-C6E80CA0B370}"/>
+              </a:ext>
+            </a:extLst>
+          </p:cNvPr>
+          <p:cNvPicPr>
+            <a:picLocks noChangeAspect="1"/>
+          </p:cNvPicPr>
+          <p:nvPr/>
+        </p:nvPicPr>
+        <p:blipFill>
+          <a:blip r:embed="rId2"/>
+          <a:stretch>
+            <a:fillRect/>
+          </a:stretch>
+        </p:blipFill>
+        <p:spPr>
+          <a:xfrm rot="19489734">
+            <a:off x="875857" y="1620545"/>
+            <a:ext cx="1322577" cy="1587092"/>
+          </a:xfrm>
+          <a:prstGeom prst="rect">
+            <a:avLst/>
+          </a:prstGeom>
+        </p:spPr>
+      </p:pic>
+      <p:pic>
+        <p:nvPicPr>
+          <p:cNvPr id="20" name="図 19">
+            <a:extLst>
+              <a:ext uri="{FF2B5EF4-FFF2-40B4-BE49-F238E27FC236}">
+                <a16:creationId xmlns:a16="http://schemas.microsoft.com/office/drawing/2014/main" id="{318F1E3E-0527-A45D-6EC6-48E10FEDB716}"/>
+              </a:ext>
+            </a:extLst>
+          </p:cNvPr>
+          <p:cNvPicPr>
+            <a:picLocks noChangeAspect="1"/>
+          </p:cNvPicPr>
+          <p:nvPr/>
+        </p:nvPicPr>
+        <p:blipFill>
+          <a:blip r:embed="rId3"/>
+          <a:stretch>
+            <a:fillRect/>
+          </a:stretch>
+        </p:blipFill>
+        <p:spPr>
+          <a:xfrm>
+            <a:off x="1924469" y="1719982"/>
+            <a:ext cx="1029226" cy="1812748"/>
+          </a:xfrm>
+          <a:prstGeom prst="rect">
+            <a:avLst/>
+          </a:prstGeom>
+        </p:spPr>
+      </p:pic>
+      <p:pic>
+        <p:nvPicPr>
+          <p:cNvPr id="21" name="図 20">
+            <a:extLst>
+              <a:ext uri="{FF2B5EF4-FFF2-40B4-BE49-F238E27FC236}">
+                <a16:creationId xmlns:a16="http://schemas.microsoft.com/office/drawing/2014/main" id="{2CC7C3AE-DB6B-DCB3-E96A-7ACB2BC26019}"/>
+              </a:ext>
+            </a:extLst>
+          </p:cNvPr>
+          <p:cNvPicPr>
+            <a:picLocks noChangeAspect="1"/>
+          </p:cNvPicPr>
+          <p:nvPr/>
+        </p:nvPicPr>
+        <p:blipFill>
+          <a:blip r:embed="rId4"/>
+          <a:stretch>
+            <a:fillRect/>
+          </a:stretch>
+        </p:blipFill>
+        <p:spPr>
+          <a:xfrm rot="20894075">
+            <a:off x="3879245" y="2184820"/>
+            <a:ext cx="346438" cy="1261033"/>
+          </a:xfrm>
+          <a:prstGeom prst="rect">
+            <a:avLst/>
+          </a:prstGeom>
+        </p:spPr>
+      </p:pic>
+      <p:pic>
+        <p:nvPicPr>
+          <p:cNvPr id="22" name="図 21">
+            <a:extLst>
+              <a:ext uri="{FF2B5EF4-FFF2-40B4-BE49-F238E27FC236}">
+                <a16:creationId xmlns:a16="http://schemas.microsoft.com/office/drawing/2014/main" id="{570E6A97-DE4B-119F-F73D-6D5FBA487414}"/>
+              </a:ext>
+            </a:extLst>
+          </p:cNvPr>
+          <p:cNvPicPr>
+            <a:picLocks noChangeAspect="1"/>
+          </p:cNvPicPr>
+          <p:nvPr/>
+        </p:nvPicPr>
+        <p:blipFill>
+          <a:blip r:embed="rId3"/>
+          <a:stretch>
+            <a:fillRect/>
+          </a:stretch>
+        </p:blipFill>
+        <p:spPr>
+          <a:xfrm rot="520992">
+            <a:off x="2678065" y="2115678"/>
+            <a:ext cx="1029226" cy="1812748"/>
+          </a:xfrm>
+          <a:prstGeom prst="rect">
+            <a:avLst/>
+          </a:prstGeom>
+        </p:spPr>
+      </p:pic>
+      <p:pic>
+        <p:nvPicPr>
+          <p:cNvPr id="23" name="図 22">
+            <a:extLst>
+              <a:ext uri="{FF2B5EF4-FFF2-40B4-BE49-F238E27FC236}">
+                <a16:creationId xmlns:a16="http://schemas.microsoft.com/office/drawing/2014/main" id="{64DA43B6-26DB-2CE5-5B99-75C43D654650}"/>
+              </a:ext>
+            </a:extLst>
+          </p:cNvPr>
+          <p:cNvPicPr>
+            <a:picLocks noChangeAspect="1"/>
+          </p:cNvPicPr>
+          <p:nvPr/>
+        </p:nvPicPr>
+        <p:blipFill>
+          <a:blip r:embed="rId2"/>
+          <a:stretch>
+            <a:fillRect/>
+          </a:stretch>
+        </p:blipFill>
+        <p:spPr>
+          <a:xfrm rot="16803805">
+            <a:off x="-28149" y="1533100"/>
+            <a:ext cx="1322577" cy="1587092"/>
+          </a:xfrm>
+          <a:prstGeom prst="rect">
+            <a:avLst/>
+          </a:prstGeom>
+        </p:spPr>
+      </p:pic>
+      <p:pic>
+        <p:nvPicPr>
+          <p:cNvPr id="24" name="図 23">
+            <a:extLst>
+              <a:ext uri="{FF2B5EF4-FFF2-40B4-BE49-F238E27FC236}">
+                <a16:creationId xmlns:a16="http://schemas.microsoft.com/office/drawing/2014/main" id="{3729F271-DD12-BA61-8722-BADEE9D11427}"/>
+              </a:ext>
+            </a:extLst>
+          </p:cNvPr>
+          <p:cNvPicPr>
+            <a:picLocks noChangeAspect="1"/>
+          </p:cNvPicPr>
+          <p:nvPr/>
+        </p:nvPicPr>
+        <p:blipFill>
+          <a:blip r:embed="rId4"/>
+          <a:stretch>
+            <a:fillRect/>
+          </a:stretch>
+        </p:blipFill>
+        <p:spPr>
+          <a:xfrm rot="2793543">
+            <a:off x="4609363" y="1884867"/>
+            <a:ext cx="346438" cy="1261033"/>
+          </a:xfrm>
+          <a:prstGeom prst="rect">
+            <a:avLst/>
+          </a:prstGeom>
+        </p:spPr>
+      </p:pic>
+      <p:pic>
+        <p:nvPicPr>
+          <p:cNvPr id="25" name="図 24">
+            <a:extLst>
+              <a:ext uri="{FF2B5EF4-FFF2-40B4-BE49-F238E27FC236}">
+                <a16:creationId xmlns:a16="http://schemas.microsoft.com/office/drawing/2014/main" id="{62E90FCA-E084-D00D-7EFA-61FB0C5F856E}"/>
+              </a:ext>
+            </a:extLst>
+          </p:cNvPr>
+          <p:cNvPicPr>
+            <a:picLocks noChangeAspect="1"/>
+          </p:cNvPicPr>
+          <p:nvPr/>
+        </p:nvPicPr>
+        <p:blipFill>
+          <a:blip r:embed="rId4"/>
+          <a:stretch>
+            <a:fillRect/>
+          </a:stretch>
+        </p:blipFill>
+        <p:spPr>
+          <a:xfrm rot="2501998">
+            <a:off x="4908113" y="2404913"/>
+            <a:ext cx="346438" cy="1261033"/>
+          </a:xfrm>
+          <a:prstGeom prst="rect">
+            <a:avLst/>
+          </a:prstGeom>
+        </p:spPr>
+      </p:pic>
+      <p:sp>
+        <p:nvSpPr>
+          <p:cNvPr id="26" name="平行四辺形 25">
+            <a:extLst>
+              <a:ext uri="{FF2B5EF4-FFF2-40B4-BE49-F238E27FC236}">
+                <a16:creationId xmlns:a16="http://schemas.microsoft.com/office/drawing/2014/main" id="{6CCEA79D-6D5B-C829-67BB-2E6B53E35062}"/>
+              </a:ext>
+            </a:extLst>
+          </p:cNvPr>
+          <p:cNvSpPr/>
+          <p:nvPr/>
+        </p:nvSpPr>
+        <p:spPr>
+          <a:xfrm rot="5400000">
+            <a:off x="1276997" y="1634023"/>
+            <a:ext cx="2118049" cy="4243096"/>
+          </a:xfrm>
+          <a:prstGeom prst="parallelogram">
+            <a:avLst>
+              <a:gd name="adj" fmla="val 34483"/>
+            </a:avLst>
+          </a:prstGeom>
+          <a:solidFill>
+            <a:schemeClr val="bg2"/>
+          </a:solidFill>
+          <a:ln>
+            <a:noFill/>
+          </a:ln>
+          <a:scene3d>
+            <a:camera prst="orthographicFront"/>
+            <a:lightRig rig="threePt" dir="t">
+              <a:rot lat="0" lon="0" rev="0"/>
+            </a:lightRig>
+          </a:scene3d>
+          <a:sp3d>
+            <a:bevelT w="482600" h="323850" prst="coolSlant"/>
+          </a:sp3d>
+        </p:spPr>
+        <p:style>
+          <a:lnRef idx="2">
+            <a:schemeClr val="accent1">
+              <a:shade val="15000"/>
+            </a:schemeClr>
+          </a:lnRef>
+          <a:fillRef idx="1">
+            <a:schemeClr val="accent1"/>
+          </a:fillRef>
+          <a:effectRef idx="0">
+            <a:schemeClr val="accent1"/>
+          </a:effectRef>
+          <a:fontRef idx="minor">
+            <a:schemeClr val="lt1"/>
+          </a:fontRef>
+        </p:style>
+        <p:txBody>
+          <a:bodyPr rtlCol="0" anchor="ctr"/>
+          <a:lstStyle/>
+          <a:p>
+            <a:pPr algn="ctr"/>
+            <a:endParaRPr kumimoji="1" lang="ja-JP" altLang="en-US"/>
+          </a:p>
+        </p:txBody>
+      </p:sp>
+      <p:sp>
+        <p:nvSpPr>
+          <p:cNvPr id="27" name="平行四辺形 26">
+            <a:extLst>
+              <a:ext uri="{FF2B5EF4-FFF2-40B4-BE49-F238E27FC236}">
+                <a16:creationId xmlns:a16="http://schemas.microsoft.com/office/drawing/2014/main" id="{DE272ED2-C22F-63C8-9993-C1001A703DD4}"/>
+              </a:ext>
+            </a:extLst>
+          </p:cNvPr>
+          <p:cNvSpPr/>
+          <p:nvPr/>
+        </p:nvSpPr>
+        <p:spPr>
+          <a:xfrm rot="16200000" flipV="1">
+            <a:off x="4191648" y="3382345"/>
+            <a:ext cx="1698172" cy="1166328"/>
+          </a:xfrm>
+          <a:prstGeom prst="parallelogram">
+            <a:avLst/>
+          </a:prstGeom>
+          <a:solidFill>
+            <a:schemeClr val="bg2"/>
+          </a:solidFill>
+          <a:ln>
+            <a:noFill/>
+          </a:ln>
+          <a:scene3d>
+            <a:camera prst="orthographicFront"/>
+            <a:lightRig rig="threePt" dir="t">
+              <a:rot lat="0" lon="0" rev="8400000"/>
+            </a:lightRig>
+          </a:scene3d>
+          <a:sp3d>
+            <a:bevelT w="209550" h="152400"/>
+          </a:sp3d>
+        </p:spPr>
+        <p:style>
+          <a:lnRef idx="2">
+            <a:schemeClr val="accent1">
+              <a:shade val="15000"/>
+            </a:schemeClr>
+          </a:lnRef>
+          <a:fillRef idx="1">
+            <a:schemeClr val="accent1"/>
+          </a:fillRef>
+          <a:effectRef idx="0">
+            <a:schemeClr val="accent1"/>
+          </a:effectRef>
+          <a:fontRef idx="minor">
+            <a:schemeClr val="lt1"/>
+          </a:fontRef>
+        </p:style>
+        <p:txBody>
+          <a:bodyPr rtlCol="0" anchor="ctr"/>
+          <a:lstStyle/>
+          <a:p>
+            <a:pPr algn="ctr"/>
+            <a:endParaRPr kumimoji="1" lang="ja-JP" altLang="en-US"/>
+          </a:p>
+        </p:txBody>
+      </p:sp>
+      <p:sp>
+        <p:nvSpPr>
+          <p:cNvPr id="28" name="十字形 27">
+            <a:extLst>
+              <a:ext uri="{FF2B5EF4-FFF2-40B4-BE49-F238E27FC236}">
+                <a16:creationId xmlns:a16="http://schemas.microsoft.com/office/drawing/2014/main" id="{0B12F46B-9D3C-C437-4C0B-632EDE06F1D2}"/>
+              </a:ext>
+            </a:extLst>
+          </p:cNvPr>
+          <p:cNvSpPr/>
+          <p:nvPr/>
+        </p:nvSpPr>
+        <p:spPr>
+          <a:xfrm rot="432750">
+            <a:off x="2034886" y="3331585"/>
+            <a:ext cx="602270" cy="602270"/>
+          </a:xfrm>
+          <a:prstGeom prst="plus">
+            <a:avLst>
+              <a:gd name="adj" fmla="val 34615"/>
+            </a:avLst>
+          </a:prstGeom>
+          <a:solidFill>
+            <a:srgbClr val="FF0000"/>
+          </a:solidFill>
+          <a:ln>
+            <a:solidFill>
+              <a:schemeClr val="tx1"/>
+            </a:solidFill>
+          </a:ln>
+        </p:spPr>
+        <p:style>
+          <a:lnRef idx="2">
+            <a:schemeClr val="accent1">
+              <a:shade val="15000"/>
+            </a:schemeClr>
+          </a:lnRef>
+          <a:fillRef idx="1">
+            <a:schemeClr val="accent1"/>
+          </a:fillRef>
+          <a:effectRef idx="0">
+            <a:schemeClr val="accent1"/>
+          </a:effectRef>
+          <a:fontRef idx="minor">
+            <a:schemeClr val="lt1"/>
+          </a:fontRef>
+        </p:style>
+        <p:txBody>
+          <a:bodyPr rtlCol="0" anchor="ctr"/>
+          <a:lstStyle/>
+          <a:p>
+            <a:pPr algn="ctr"/>
+            <a:endParaRPr kumimoji="1" lang="ja-JP" altLang="en-US"/>
+          </a:p>
+        </p:txBody>
+      </p:sp>
+      <p:sp>
+        <p:nvSpPr>
+          <p:cNvPr id="29" name="平行四辺形 28">
+            <a:extLst>
+              <a:ext uri="{FF2B5EF4-FFF2-40B4-BE49-F238E27FC236}">
+                <a16:creationId xmlns:a16="http://schemas.microsoft.com/office/drawing/2014/main" id="{F38BD40D-CC62-0EF8-9703-64240E30001B}"/>
+              </a:ext>
+            </a:extLst>
+          </p:cNvPr>
+          <p:cNvSpPr/>
+          <p:nvPr/>
+        </p:nvSpPr>
+        <p:spPr>
+          <a:xfrm rot="11324692">
+            <a:off x="226558" y="430342"/>
+            <a:ext cx="5412351" cy="489542"/>
+          </a:xfrm>
+          <a:prstGeom prst="parallelogram">
+            <a:avLst>
+              <a:gd name="adj" fmla="val 223385"/>
+            </a:avLst>
+          </a:prstGeom>
+          <a:solidFill>
+            <a:schemeClr val="bg2"/>
+          </a:solidFill>
+          <a:ln>
+            <a:noFill/>
+          </a:ln>
+          <a:scene3d>
+            <a:camera prst="orthographicFront"/>
+            <a:lightRig rig="threePt" dir="t">
+              <a:rot lat="0" lon="0" rev="1200000"/>
+            </a:lightRig>
+          </a:scene3d>
+          <a:sp3d>
+            <a:bevelT w="95250" h="171450"/>
+          </a:sp3d>
+        </p:spPr>
+        <p:style>
+          <a:lnRef idx="2">
+            <a:schemeClr val="accent1">
+              <a:shade val="15000"/>
+            </a:schemeClr>
+          </a:lnRef>
+          <a:fillRef idx="1">
+            <a:schemeClr val="accent1"/>
+          </a:fillRef>
+          <a:effectRef idx="0">
+            <a:schemeClr val="accent1"/>
+          </a:effectRef>
+          <a:fontRef idx="minor">
+            <a:schemeClr val="lt1"/>
+          </a:fontRef>
+        </p:style>
+        <p:txBody>
+          <a:bodyPr rtlCol="0" anchor="ctr"/>
+          <a:lstStyle/>
+          <a:p>
+            <a:pPr algn="ctr"/>
+            <a:endParaRPr kumimoji="1" lang="ja-JP" altLang="en-US"/>
+          </a:p>
+        </p:txBody>
+      </p:sp>
+      <p:sp>
+        <p:nvSpPr>
+          <p:cNvPr id="30" name="平行四辺形 29">
+            <a:extLst>
+              <a:ext uri="{FF2B5EF4-FFF2-40B4-BE49-F238E27FC236}">
+                <a16:creationId xmlns:a16="http://schemas.microsoft.com/office/drawing/2014/main" id="{CD8A8F63-B09E-CC21-B254-2B84A7D9DEC4}"/>
+              </a:ext>
+            </a:extLst>
+          </p:cNvPr>
+          <p:cNvSpPr/>
+          <p:nvPr/>
+        </p:nvSpPr>
+        <p:spPr>
+          <a:xfrm rot="5400000">
+            <a:off x="1613386" y="-925383"/>
+            <a:ext cx="1445272" cy="4243096"/>
+          </a:xfrm>
+          <a:prstGeom prst="parallelogram">
+            <a:avLst>
+              <a:gd name="adj" fmla="val 47960"/>
+            </a:avLst>
+          </a:prstGeom>
+          <a:solidFill>
+            <a:schemeClr val="bg2"/>
+          </a:solidFill>
+          <a:ln>
+            <a:noFill/>
+          </a:ln>
+          <a:scene3d>
+            <a:camera prst="orthographicFront"/>
+            <a:lightRig rig="threePt" dir="t">
+              <a:rot lat="0" lon="0" rev="0"/>
+            </a:lightRig>
+          </a:scene3d>
+          <a:sp3d>
+            <a:bevelT w="361950" h="82550" prst="coolSlant"/>
+          </a:sp3d>
+        </p:spPr>
+        <p:style>
+          <a:lnRef idx="2">
+            <a:schemeClr val="accent1">
+              <a:shade val="15000"/>
+            </a:schemeClr>
+          </a:lnRef>
+          <a:fillRef idx="1">
+            <a:schemeClr val="accent1"/>
+          </a:fillRef>
+          <a:effectRef idx="0">
+            <a:schemeClr val="accent1"/>
+          </a:effectRef>
+          <a:fontRef idx="minor">
+            <a:schemeClr val="lt1"/>
+          </a:fontRef>
+        </p:style>
+        <p:txBody>
+          <a:bodyPr rtlCol="0" anchor="ctr"/>
+          <a:lstStyle/>
+          <a:p>
+            <a:pPr algn="ctr"/>
+            <a:endParaRPr kumimoji="1" lang="ja-JP" altLang="en-US"/>
+          </a:p>
+        </p:txBody>
+      </p:sp>
+      <p:sp>
+        <p:nvSpPr>
+          <p:cNvPr id="31" name="平行四辺形 30">
+            <a:extLst>
+              <a:ext uri="{FF2B5EF4-FFF2-40B4-BE49-F238E27FC236}">
+                <a16:creationId xmlns:a16="http://schemas.microsoft.com/office/drawing/2014/main" id="{E5A4B8D7-9C8A-0C8B-0D6D-95D8152F7A53}"/>
+              </a:ext>
+            </a:extLst>
+          </p:cNvPr>
+          <p:cNvSpPr/>
+          <p:nvPr/>
+        </p:nvSpPr>
+        <p:spPr>
+          <a:xfrm rot="16200000" flipV="1">
+            <a:off x="4505876" y="800779"/>
+            <a:ext cx="1069716" cy="1166328"/>
+          </a:xfrm>
+          <a:prstGeom prst="parallelogram">
+            <a:avLst>
+              <a:gd name="adj" fmla="val 31731"/>
+            </a:avLst>
+          </a:prstGeom>
+          <a:solidFill>
+            <a:schemeClr val="bg2"/>
+          </a:solidFill>
+          <a:ln>
+            <a:noFill/>
+          </a:ln>
+          <a:scene3d>
+            <a:camera prst="orthographicFront"/>
+            <a:lightRig rig="threePt" dir="t">
+              <a:rot lat="0" lon="0" rev="8400000"/>
+            </a:lightRig>
+          </a:scene3d>
+          <a:sp3d>
+            <a:bevelT w="184150" h="69850"/>
+          </a:sp3d>
+        </p:spPr>
+        <p:style>
+          <a:lnRef idx="2">
+            <a:schemeClr val="accent1">
+              <a:shade val="15000"/>
+            </a:schemeClr>
+          </a:lnRef>
+          <a:fillRef idx="1">
+            <a:schemeClr val="accent1"/>
+          </a:fillRef>
+          <a:effectRef idx="0">
+            <a:schemeClr val="accent1"/>
+          </a:effectRef>
+          <a:fontRef idx="minor">
+            <a:schemeClr val="lt1"/>
+          </a:fontRef>
+        </p:style>
+        <p:txBody>
+          <a:bodyPr rtlCol="0" anchor="ctr"/>
+          <a:lstStyle/>
+          <a:p>
+            <a:pPr algn="ctr"/>
+            <a:endParaRPr kumimoji="1" lang="ja-JP" altLang="en-US"/>
+          </a:p>
+        </p:txBody>
+      </p:sp>
+    </p:spTree>
+    <p:extLst>
+      <p:ext uri="{BB962C8B-B14F-4D97-AF65-F5344CB8AC3E}">
+        <p14:creationId xmlns:p14="http://schemas.microsoft.com/office/powerpoint/2010/main" val="796619007"/>
       </p:ext>
     </p:extLst>
   </p:cSld>
@@ -9488,12 +14033,282 @@
           </a:p>
         </p:txBody>
       </p:sp>
+      <p:sp>
+        <p:nvSpPr>
+          <p:cNvPr id="2" name="正方形/長方形 1">
+            <a:extLst>
+              <a:ext uri="{FF2B5EF4-FFF2-40B4-BE49-F238E27FC236}">
+                <a16:creationId xmlns:a16="http://schemas.microsoft.com/office/drawing/2014/main" id="{B07F1DE8-07A2-9690-2E40-F6CF7AF07A6B}"/>
+              </a:ext>
+            </a:extLst>
+          </p:cNvPr>
+          <p:cNvSpPr/>
+          <p:nvPr/>
+        </p:nvSpPr>
+        <p:spPr>
+          <a:xfrm>
+            <a:off x="5196168" y="1122960"/>
+            <a:ext cx="1069260" cy="1069260"/>
+          </a:xfrm>
+          <a:prstGeom prst="rect">
+            <a:avLst/>
+          </a:prstGeom>
+          <a:solidFill>
+            <a:schemeClr val="bg1"/>
+          </a:solidFill>
+          <a:ln>
+            <a:solidFill>
+              <a:schemeClr val="tx1"/>
+            </a:solidFill>
+          </a:ln>
+        </p:spPr>
+        <p:style>
+          <a:lnRef idx="2">
+            <a:schemeClr val="accent1">
+              <a:shade val="50000"/>
+            </a:schemeClr>
+          </a:lnRef>
+          <a:fillRef idx="1">
+            <a:schemeClr val="accent1"/>
+          </a:fillRef>
+          <a:effectRef idx="0">
+            <a:schemeClr val="accent1"/>
+          </a:effectRef>
+          <a:fontRef idx="minor">
+            <a:schemeClr val="lt1"/>
+          </a:fontRef>
+        </p:style>
+        <p:txBody>
+          <a:bodyPr rtlCol="0" anchor="ctr"/>
+          <a:lstStyle/>
+          <a:p>
+            <a:pPr algn="ctr"/>
+            <a:endParaRPr kumimoji="1" lang="ja-JP" altLang="en-US"/>
+          </a:p>
+        </p:txBody>
+      </p:sp>
+      <p:sp>
+        <p:nvSpPr>
+          <p:cNvPr id="3" name="正方形/長方形 2">
+            <a:extLst>
+              <a:ext uri="{FF2B5EF4-FFF2-40B4-BE49-F238E27FC236}">
+                <a16:creationId xmlns:a16="http://schemas.microsoft.com/office/drawing/2014/main" id="{19D9CF8B-B4A9-7F5F-FD39-224B29C0AE83}"/>
+              </a:ext>
+            </a:extLst>
+          </p:cNvPr>
+          <p:cNvSpPr/>
+          <p:nvPr/>
+        </p:nvSpPr>
+        <p:spPr>
+          <a:xfrm>
+            <a:off x="6645353" y="1122960"/>
+            <a:ext cx="1069260" cy="1069260"/>
+          </a:xfrm>
+          <a:prstGeom prst="rect">
+            <a:avLst/>
+          </a:prstGeom>
+          <a:solidFill>
+            <a:schemeClr val="bg1"/>
+          </a:solidFill>
+          <a:ln>
+            <a:solidFill>
+              <a:schemeClr val="tx1"/>
+            </a:solidFill>
+          </a:ln>
+        </p:spPr>
+        <p:style>
+          <a:lnRef idx="2">
+            <a:schemeClr val="accent1">
+              <a:shade val="50000"/>
+            </a:schemeClr>
+          </a:lnRef>
+          <a:fillRef idx="1">
+            <a:schemeClr val="accent1"/>
+          </a:fillRef>
+          <a:effectRef idx="0">
+            <a:schemeClr val="accent1"/>
+          </a:effectRef>
+          <a:fontRef idx="minor">
+            <a:schemeClr val="lt1"/>
+          </a:fontRef>
+        </p:style>
+        <p:txBody>
+          <a:bodyPr rtlCol="0" anchor="ctr"/>
+          <a:lstStyle/>
+          <a:p>
+            <a:pPr algn="ctr"/>
+            <a:endParaRPr kumimoji="1" lang="ja-JP" altLang="en-US"/>
+          </a:p>
+        </p:txBody>
+      </p:sp>
+      <p:sp>
+        <p:nvSpPr>
+          <p:cNvPr id="4" name="正方形/長方形 3">
+            <a:extLst>
+              <a:ext uri="{FF2B5EF4-FFF2-40B4-BE49-F238E27FC236}">
+                <a16:creationId xmlns:a16="http://schemas.microsoft.com/office/drawing/2014/main" id="{1746BB52-42D5-E27C-269C-342C16BA71EC}"/>
+              </a:ext>
+            </a:extLst>
+          </p:cNvPr>
+          <p:cNvSpPr/>
+          <p:nvPr/>
+        </p:nvSpPr>
+        <p:spPr>
+          <a:xfrm>
+            <a:off x="8075194" y="1122960"/>
+            <a:ext cx="1069260" cy="1069260"/>
+          </a:xfrm>
+          <a:prstGeom prst="rect">
+            <a:avLst/>
+          </a:prstGeom>
+          <a:solidFill>
+            <a:schemeClr val="bg1"/>
+          </a:solidFill>
+          <a:ln>
+            <a:solidFill>
+              <a:schemeClr val="tx1"/>
+            </a:solidFill>
+          </a:ln>
+        </p:spPr>
+        <p:style>
+          <a:lnRef idx="2">
+            <a:schemeClr val="accent1">
+              <a:shade val="50000"/>
+            </a:schemeClr>
+          </a:lnRef>
+          <a:fillRef idx="1">
+            <a:schemeClr val="accent1"/>
+          </a:fillRef>
+          <a:effectRef idx="0">
+            <a:schemeClr val="accent1"/>
+          </a:effectRef>
+          <a:fontRef idx="minor">
+            <a:schemeClr val="lt1"/>
+          </a:fontRef>
+        </p:style>
+        <p:txBody>
+          <a:bodyPr rtlCol="0" anchor="ctr"/>
+          <a:lstStyle/>
+          <a:p>
+            <a:pPr algn="ctr"/>
+            <a:endParaRPr kumimoji="1" lang="ja-JP" altLang="en-US"/>
+          </a:p>
+        </p:txBody>
+      </p:sp>
+      <p:sp>
+        <p:nvSpPr>
+          <p:cNvPr id="5" name="正方形/長方形 4">
+            <a:extLst>
+              <a:ext uri="{FF2B5EF4-FFF2-40B4-BE49-F238E27FC236}">
+                <a16:creationId xmlns:a16="http://schemas.microsoft.com/office/drawing/2014/main" id="{6E47CB9E-FB60-4D24-2A05-F390FEADEA74}"/>
+              </a:ext>
+            </a:extLst>
+          </p:cNvPr>
+          <p:cNvSpPr/>
+          <p:nvPr/>
+        </p:nvSpPr>
+        <p:spPr>
+          <a:xfrm>
+            <a:off x="9155958" y="1122960"/>
+            <a:ext cx="1069260" cy="1069260"/>
+          </a:xfrm>
+          <a:prstGeom prst="rect">
+            <a:avLst/>
+          </a:prstGeom>
+          <a:solidFill>
+            <a:schemeClr val="bg1"/>
+          </a:solidFill>
+          <a:ln>
+            <a:solidFill>
+              <a:schemeClr val="tx1"/>
+            </a:solidFill>
+          </a:ln>
+        </p:spPr>
+        <p:style>
+          <a:lnRef idx="2">
+            <a:schemeClr val="accent1">
+              <a:shade val="50000"/>
+            </a:schemeClr>
+          </a:lnRef>
+          <a:fillRef idx="1">
+            <a:schemeClr val="accent1"/>
+          </a:fillRef>
+          <a:effectRef idx="0">
+            <a:schemeClr val="accent1"/>
+          </a:effectRef>
+          <a:fontRef idx="minor">
+            <a:schemeClr val="lt1"/>
+          </a:fontRef>
+        </p:style>
+        <p:txBody>
+          <a:bodyPr rtlCol="0" anchor="ctr"/>
+          <a:lstStyle/>
+          <a:p>
+            <a:pPr algn="ctr"/>
+            <a:endParaRPr kumimoji="1" lang="ja-JP" altLang="en-US"/>
+          </a:p>
+        </p:txBody>
+      </p:sp>
+      <p:sp>
+        <p:nvSpPr>
+          <p:cNvPr id="6" name="正方形/長方形 5">
+            <a:extLst>
+              <a:ext uri="{FF2B5EF4-FFF2-40B4-BE49-F238E27FC236}">
+                <a16:creationId xmlns:a16="http://schemas.microsoft.com/office/drawing/2014/main" id="{AB8D9B2B-1628-649F-7934-3F39F02DA3E9}"/>
+              </a:ext>
+            </a:extLst>
+          </p:cNvPr>
+          <p:cNvSpPr/>
+          <p:nvPr/>
+        </p:nvSpPr>
+        <p:spPr>
+          <a:xfrm>
+            <a:off x="10236721" y="1122960"/>
+            <a:ext cx="1069260" cy="1069260"/>
+          </a:xfrm>
+          <a:prstGeom prst="rect">
+            <a:avLst/>
+          </a:prstGeom>
+          <a:solidFill>
+            <a:schemeClr val="bg1"/>
+          </a:solidFill>
+          <a:ln>
+            <a:solidFill>
+              <a:schemeClr val="tx1"/>
+            </a:solidFill>
+          </a:ln>
+        </p:spPr>
+        <p:style>
+          <a:lnRef idx="2">
+            <a:schemeClr val="accent1">
+              <a:shade val="50000"/>
+            </a:schemeClr>
+          </a:lnRef>
+          <a:fillRef idx="1">
+            <a:schemeClr val="accent1"/>
+          </a:fillRef>
+          <a:effectRef idx="0">
+            <a:schemeClr val="accent1"/>
+          </a:effectRef>
+          <a:fontRef idx="minor">
+            <a:schemeClr val="lt1"/>
+          </a:fontRef>
+        </p:style>
+        <p:txBody>
+          <a:bodyPr rtlCol="0" anchor="ctr"/>
+          <a:lstStyle/>
+          <a:p>
+            <a:pPr algn="ctr"/>
+            <a:endParaRPr kumimoji="1" lang="ja-JP" altLang="en-US"/>
+          </a:p>
+        </p:txBody>
+      </p:sp>
       <p:pic>
         <p:nvPicPr>
-          <p:cNvPr id="35" name="図 34">
-            <a:extLst>
-              <a:ext uri="{FF2B5EF4-FFF2-40B4-BE49-F238E27FC236}">
-                <a16:creationId xmlns:a16="http://schemas.microsoft.com/office/drawing/2014/main" id="{4D25D586-4673-0519-0082-209A313BD6F8}"/>
+          <p:cNvPr id="7" name="図 6">
+            <a:extLst>
+              <a:ext uri="{FF2B5EF4-FFF2-40B4-BE49-F238E27FC236}">
+                <a16:creationId xmlns:a16="http://schemas.microsoft.com/office/drawing/2014/main" id="{BA72E354-61BF-695B-F5FD-FED96599E290}"/>
               </a:ext>
             </a:extLst>
           </p:cNvPr>
@@ -9510,8 +14325,8 @@
         </p:blipFill>
         <p:spPr>
           <a:xfrm>
-            <a:off x="1056828" y="5585285"/>
-            <a:ext cx="725339" cy="725339"/>
+            <a:off x="915256" y="1674638"/>
+            <a:ext cx="704186" cy="412609"/>
           </a:xfrm>
           <a:prstGeom prst="rect">
             <a:avLst/>
@@ -9520,10 +14335,130 @@
       </p:pic>
       <p:pic>
         <p:nvPicPr>
-          <p:cNvPr id="36" name="図 35">
-            <a:extLst>
-              <a:ext uri="{FF2B5EF4-FFF2-40B4-BE49-F238E27FC236}">
-                <a16:creationId xmlns:a16="http://schemas.microsoft.com/office/drawing/2014/main" id="{8404B56B-0CFF-E5D1-682E-A415DEB47A62}"/>
+          <p:cNvPr id="8" name="図 7">
+            <a:extLst>
+              <a:ext uri="{FF2B5EF4-FFF2-40B4-BE49-F238E27FC236}">
+                <a16:creationId xmlns:a16="http://schemas.microsoft.com/office/drawing/2014/main" id="{D2FC82BB-69AC-0B63-86BE-622D484E0E29}"/>
+              </a:ext>
+            </a:extLst>
+          </p:cNvPr>
+          <p:cNvPicPr>
+            <a:picLocks noChangeAspect="1"/>
+          </p:cNvPicPr>
+          <p:nvPr/>
+        </p:nvPicPr>
+        <p:blipFill>
+          <a:blip r:embed="rId3"/>
+          <a:stretch>
+            <a:fillRect/>
+          </a:stretch>
+        </p:blipFill>
+        <p:spPr>
+          <a:xfrm>
+            <a:off x="894036" y="5929237"/>
+            <a:ext cx="725406" cy="474697"/>
+          </a:xfrm>
+          <a:prstGeom prst="rect">
+            <a:avLst/>
+          </a:prstGeom>
+        </p:spPr>
+      </p:pic>
+      <p:pic>
+        <p:nvPicPr>
+          <p:cNvPr id="9" name="図 8">
+            <a:extLst>
+              <a:ext uri="{FF2B5EF4-FFF2-40B4-BE49-F238E27FC236}">
+                <a16:creationId xmlns:a16="http://schemas.microsoft.com/office/drawing/2014/main" id="{132A90F8-93A6-781A-9B5C-5954A5448BA8}"/>
+              </a:ext>
+            </a:extLst>
+          </p:cNvPr>
+          <p:cNvPicPr>
+            <a:picLocks noChangeAspect="1"/>
+          </p:cNvPicPr>
+          <p:nvPr/>
+        </p:nvPicPr>
+        <p:blipFill>
+          <a:blip r:embed="rId4"/>
+          <a:stretch>
+            <a:fillRect/>
+          </a:stretch>
+        </p:blipFill>
+        <p:spPr>
+          <a:xfrm>
+            <a:off x="3051852" y="5873437"/>
+            <a:ext cx="725405" cy="530497"/>
+          </a:xfrm>
+          <a:prstGeom prst="rect">
+            <a:avLst/>
+          </a:prstGeom>
+        </p:spPr>
+      </p:pic>
+      <p:pic>
+        <p:nvPicPr>
+          <p:cNvPr id="10" name="図 9">
+            <a:extLst>
+              <a:ext uri="{FF2B5EF4-FFF2-40B4-BE49-F238E27FC236}">
+                <a16:creationId xmlns:a16="http://schemas.microsoft.com/office/drawing/2014/main" id="{227450BB-0FEE-1571-7371-A6340E195CFE}"/>
+              </a:ext>
+            </a:extLst>
+          </p:cNvPr>
+          <p:cNvPicPr>
+            <a:picLocks noChangeAspect="1"/>
+          </p:cNvPicPr>
+          <p:nvPr/>
+        </p:nvPicPr>
+        <p:blipFill>
+          <a:blip r:embed="rId5"/>
+          <a:stretch>
+            <a:fillRect/>
+          </a:stretch>
+        </p:blipFill>
+        <p:spPr>
+          <a:xfrm>
+            <a:off x="5185559" y="5804276"/>
+            <a:ext cx="738767" cy="599658"/>
+          </a:xfrm>
+          <a:prstGeom prst="rect">
+            <a:avLst/>
+          </a:prstGeom>
+        </p:spPr>
+      </p:pic>
+      <p:pic>
+        <p:nvPicPr>
+          <p:cNvPr id="11" name="図 10">
+            <a:extLst>
+              <a:ext uri="{FF2B5EF4-FFF2-40B4-BE49-F238E27FC236}">
+                <a16:creationId xmlns:a16="http://schemas.microsoft.com/office/drawing/2014/main" id="{F992A33A-8525-6D27-5601-E72F35254CBA}"/>
+              </a:ext>
+            </a:extLst>
+          </p:cNvPr>
+          <p:cNvPicPr>
+            <a:picLocks noChangeAspect="1"/>
+          </p:cNvPicPr>
+          <p:nvPr/>
+        </p:nvPicPr>
+        <p:blipFill>
+          <a:blip r:embed="rId6"/>
+          <a:stretch>
+            <a:fillRect/>
+          </a:stretch>
+        </p:blipFill>
+        <p:spPr>
+          <a:xfrm>
+            <a:off x="7332655" y="5782270"/>
+            <a:ext cx="763916" cy="621664"/>
+          </a:xfrm>
+          <a:prstGeom prst="rect">
+            <a:avLst/>
+          </a:prstGeom>
+        </p:spPr>
+      </p:pic>
+      <p:pic>
+        <p:nvPicPr>
+          <p:cNvPr id="13" name="図 12">
+            <a:extLst>
+              <a:ext uri="{FF2B5EF4-FFF2-40B4-BE49-F238E27FC236}">
+                <a16:creationId xmlns:a16="http://schemas.microsoft.com/office/drawing/2014/main" id="{E9F38731-DC2D-C520-8B5F-E8CDCEFADEE9}"/>
               </a:ext>
             </a:extLst>
           </p:cNvPr>
@@ -9539,9 +14474,9 @@
           </a:stretch>
         </p:blipFill>
         <p:spPr>
-          <a:xfrm>
-            <a:off x="7535775" y="5585285"/>
-            <a:ext cx="725339" cy="725339"/>
+          <a:xfrm flipH="1">
+            <a:off x="2863296" y="1623045"/>
+            <a:ext cx="704186" cy="412609"/>
           </a:xfrm>
           <a:prstGeom prst="rect">
             <a:avLst/>
@@ -9550,10 +14485,190 @@
       </p:pic>
       <p:pic>
         <p:nvPicPr>
-          <p:cNvPr id="37" name="図 36">
-            <a:extLst>
-              <a:ext uri="{FF2B5EF4-FFF2-40B4-BE49-F238E27FC236}">
-                <a16:creationId xmlns:a16="http://schemas.microsoft.com/office/drawing/2014/main" id="{CB0C6BA0-65FD-2F4D-BEC4-F3175A135AF1}"/>
+          <p:cNvPr id="14" name="図 13">
+            <a:extLst>
+              <a:ext uri="{FF2B5EF4-FFF2-40B4-BE49-F238E27FC236}">
+                <a16:creationId xmlns:a16="http://schemas.microsoft.com/office/drawing/2014/main" id="{77D77A9E-DAA8-760B-2A88-A9D7CC028F0A}"/>
+              </a:ext>
+            </a:extLst>
+          </p:cNvPr>
+          <p:cNvPicPr>
+            <a:picLocks noChangeAspect="1"/>
+          </p:cNvPicPr>
+          <p:nvPr/>
+        </p:nvPicPr>
+        <p:blipFill>
+          <a:blip r:embed="rId3"/>
+          <a:stretch>
+            <a:fillRect/>
+          </a:stretch>
+        </p:blipFill>
+        <p:spPr>
+          <a:xfrm flipH="1">
+            <a:off x="714320" y="3736994"/>
+            <a:ext cx="725406" cy="474697"/>
+          </a:xfrm>
+          <a:prstGeom prst="rect">
+            <a:avLst/>
+          </a:prstGeom>
+        </p:spPr>
+      </p:pic>
+      <p:pic>
+        <p:nvPicPr>
+          <p:cNvPr id="15" name="図 14">
+            <a:extLst>
+              <a:ext uri="{FF2B5EF4-FFF2-40B4-BE49-F238E27FC236}">
+                <a16:creationId xmlns:a16="http://schemas.microsoft.com/office/drawing/2014/main" id="{41B1C469-B416-B765-AE4B-63C3B025455A}"/>
+              </a:ext>
+            </a:extLst>
+          </p:cNvPr>
+          <p:cNvPicPr>
+            <a:picLocks noChangeAspect="1"/>
+          </p:cNvPicPr>
+          <p:nvPr/>
+        </p:nvPicPr>
+        <p:blipFill>
+          <a:blip r:embed="rId4"/>
+          <a:stretch>
+            <a:fillRect/>
+          </a:stretch>
+        </p:blipFill>
+        <p:spPr>
+          <a:xfrm flipH="1">
+            <a:off x="2880330" y="3681194"/>
+            <a:ext cx="725405" cy="530497"/>
+          </a:xfrm>
+          <a:prstGeom prst="rect">
+            <a:avLst/>
+          </a:prstGeom>
+        </p:spPr>
+      </p:pic>
+      <p:pic>
+        <p:nvPicPr>
+          <p:cNvPr id="16" name="図 15">
+            <a:extLst>
+              <a:ext uri="{FF2B5EF4-FFF2-40B4-BE49-F238E27FC236}">
+                <a16:creationId xmlns:a16="http://schemas.microsoft.com/office/drawing/2014/main" id="{BFD002E4-92A6-6004-E956-2A7E24662D6D}"/>
+              </a:ext>
+            </a:extLst>
+          </p:cNvPr>
+          <p:cNvPicPr>
+            <a:picLocks noChangeAspect="1"/>
+          </p:cNvPicPr>
+          <p:nvPr/>
+        </p:nvPicPr>
+        <p:blipFill>
+          <a:blip r:embed="rId5"/>
+          <a:stretch>
+            <a:fillRect/>
+          </a:stretch>
+        </p:blipFill>
+        <p:spPr>
+          <a:xfrm flipH="1">
+            <a:off x="5025021" y="3612033"/>
+            <a:ext cx="738767" cy="599658"/>
+          </a:xfrm>
+          <a:prstGeom prst="rect">
+            <a:avLst/>
+          </a:prstGeom>
+        </p:spPr>
+      </p:pic>
+      <p:pic>
+        <p:nvPicPr>
+          <p:cNvPr id="17" name="図 16">
+            <a:extLst>
+              <a:ext uri="{FF2B5EF4-FFF2-40B4-BE49-F238E27FC236}">
+                <a16:creationId xmlns:a16="http://schemas.microsoft.com/office/drawing/2014/main" id="{1A65DDCB-CB23-CDEC-D14A-D11A237BBE53}"/>
+              </a:ext>
+            </a:extLst>
+          </p:cNvPr>
+          <p:cNvPicPr>
+            <a:picLocks noChangeAspect="1"/>
+          </p:cNvPicPr>
+          <p:nvPr/>
+        </p:nvPicPr>
+        <p:blipFill>
+          <a:blip r:embed="rId6"/>
+          <a:stretch>
+            <a:fillRect/>
+          </a:stretch>
+        </p:blipFill>
+        <p:spPr>
+          <a:xfrm flipH="1">
+            <a:off x="7192663" y="3590027"/>
+            <a:ext cx="763916" cy="621664"/>
+          </a:xfrm>
+          <a:prstGeom prst="rect">
+            <a:avLst/>
+          </a:prstGeom>
+        </p:spPr>
+      </p:pic>
+      <p:pic>
+        <p:nvPicPr>
+          <p:cNvPr id="19" name="図 18">
+            <a:extLst>
+              <a:ext uri="{FF2B5EF4-FFF2-40B4-BE49-F238E27FC236}">
+                <a16:creationId xmlns:a16="http://schemas.microsoft.com/office/drawing/2014/main" id="{79F76476-763D-2BC2-1550-70FC42D7D083}"/>
+              </a:ext>
+            </a:extLst>
+          </p:cNvPr>
+          <p:cNvPicPr>
+            <a:picLocks noChangeAspect="1"/>
+          </p:cNvPicPr>
+          <p:nvPr/>
+        </p:nvPicPr>
+        <p:blipFill>
+          <a:blip r:embed="rId7"/>
+          <a:stretch>
+            <a:fillRect/>
+          </a:stretch>
+        </p:blipFill>
+        <p:spPr>
+          <a:xfrm>
+            <a:off x="9375481" y="5781134"/>
+            <a:ext cx="1017555" cy="622800"/>
+          </a:xfrm>
+          <a:prstGeom prst="rect">
+            <a:avLst/>
+          </a:prstGeom>
+        </p:spPr>
+      </p:pic>
+      <p:pic>
+        <p:nvPicPr>
+          <p:cNvPr id="20" name="図 19">
+            <a:extLst>
+              <a:ext uri="{FF2B5EF4-FFF2-40B4-BE49-F238E27FC236}">
+                <a16:creationId xmlns:a16="http://schemas.microsoft.com/office/drawing/2014/main" id="{DFA87864-6011-E253-EEB9-9215DBEC1FEF}"/>
+              </a:ext>
+            </a:extLst>
+          </p:cNvPr>
+          <p:cNvPicPr>
+            <a:picLocks noChangeAspect="1"/>
+          </p:cNvPicPr>
+          <p:nvPr/>
+        </p:nvPicPr>
+        <p:blipFill>
+          <a:blip r:embed="rId7"/>
+          <a:stretch>
+            <a:fillRect/>
+          </a:stretch>
+        </p:blipFill>
+        <p:spPr>
+          <a:xfrm flipH="1">
+            <a:off x="9208173" y="3588891"/>
+            <a:ext cx="1017555" cy="622800"/>
+          </a:xfrm>
+          <a:prstGeom prst="rect">
+            <a:avLst/>
+          </a:prstGeom>
+        </p:spPr>
+      </p:pic>
+      <p:pic>
+        <p:nvPicPr>
+          <p:cNvPr id="21" name="図 20">
+            <a:extLst>
+              <a:ext uri="{FF2B5EF4-FFF2-40B4-BE49-F238E27FC236}">
+                <a16:creationId xmlns:a16="http://schemas.microsoft.com/office/drawing/2014/main" id="{142A1014-5198-1F35-626F-8793A7466110}"/>
               </a:ext>
             </a:extLst>
           </p:cNvPr>
@@ -9570,8 +14685,8 @@
         </p:blipFill>
         <p:spPr>
           <a:xfrm>
-            <a:off x="9695426" y="5585285"/>
-            <a:ext cx="725339" cy="725339"/>
+            <a:off x="5378705" y="1451285"/>
+            <a:ext cx="704186" cy="412609"/>
           </a:xfrm>
           <a:prstGeom prst="rect">
             <a:avLst/>
@@ -9580,10 +14695,10 @@
       </p:pic>
       <p:pic>
         <p:nvPicPr>
-          <p:cNvPr id="38" name="図 37">
-            <a:extLst>
-              <a:ext uri="{FF2B5EF4-FFF2-40B4-BE49-F238E27FC236}">
-                <a16:creationId xmlns:a16="http://schemas.microsoft.com/office/drawing/2014/main" id="{807AF7CF-24C8-F268-7939-DE9013C84BDB}"/>
+          <p:cNvPr id="22" name="図 21">
+            <a:extLst>
+              <a:ext uri="{FF2B5EF4-FFF2-40B4-BE49-F238E27FC236}">
+                <a16:creationId xmlns:a16="http://schemas.microsoft.com/office/drawing/2014/main" id="{BA6A1AAD-17E5-060B-F47B-6E28303E058D}"/>
               </a:ext>
             </a:extLst>
           </p:cNvPr>
@@ -9593,15 +14708,15 @@
           <p:nvPr/>
         </p:nvPicPr>
         <p:blipFill>
-          <a:blip r:embed="rId2"/>
+          <a:blip r:embed="rId8"/>
           <a:stretch>
             <a:fillRect/>
           </a:stretch>
         </p:blipFill>
         <p:spPr>
           <a:xfrm>
-            <a:off x="3216477" y="5585285"/>
-            <a:ext cx="725339" cy="725339"/>
+            <a:off x="8295443" y="1275545"/>
+            <a:ext cx="249595" cy="343107"/>
           </a:xfrm>
           <a:prstGeom prst="rect">
             <a:avLst/>
@@ -9610,10 +14725,10 @@
       </p:pic>
       <p:pic>
         <p:nvPicPr>
-          <p:cNvPr id="39" name="図 38">
-            <a:extLst>
-              <a:ext uri="{FF2B5EF4-FFF2-40B4-BE49-F238E27FC236}">
-                <a16:creationId xmlns:a16="http://schemas.microsoft.com/office/drawing/2014/main" id="{F37C8F70-0B16-A1D5-3DE6-8020E2246AB6}"/>
+          <p:cNvPr id="24" name="図 23">
+            <a:extLst>
+              <a:ext uri="{FF2B5EF4-FFF2-40B4-BE49-F238E27FC236}">
+                <a16:creationId xmlns:a16="http://schemas.microsoft.com/office/drawing/2014/main" id="{75691BE3-7746-379B-2B72-B01FD682553C}"/>
               </a:ext>
             </a:extLst>
           </p:cNvPr>
@@ -9623,15 +14738,15 @@
           <p:nvPr/>
         </p:nvPicPr>
         <p:blipFill>
-          <a:blip r:embed="rId2"/>
+          <a:blip r:embed="rId8"/>
           <a:stretch>
             <a:fillRect/>
           </a:stretch>
         </p:blipFill>
         <p:spPr>
           <a:xfrm>
-            <a:off x="5376126" y="5585285"/>
-            <a:ext cx="725339" cy="725339"/>
+            <a:off x="8556541" y="1488877"/>
+            <a:ext cx="249595" cy="343107"/>
           </a:xfrm>
           <a:prstGeom prst="rect">
             <a:avLst/>
@@ -9640,10 +14755,10 @@
       </p:pic>
       <p:pic>
         <p:nvPicPr>
-          <p:cNvPr id="26" name="図 25">
-            <a:extLst>
-              <a:ext uri="{FF2B5EF4-FFF2-40B4-BE49-F238E27FC236}">
-                <a16:creationId xmlns:a16="http://schemas.microsoft.com/office/drawing/2014/main" id="{CC9FFE2F-6B60-FAC9-D9C6-211920DBB91D}"/>
+          <p:cNvPr id="25" name="図 24">
+            <a:extLst>
+              <a:ext uri="{FF2B5EF4-FFF2-40B4-BE49-F238E27FC236}">
+                <a16:creationId xmlns:a16="http://schemas.microsoft.com/office/drawing/2014/main" id="{28AE3F21-6A62-BA4D-68AF-AB61C91CAF3E}"/>
               </a:ext>
             </a:extLst>
           </p:cNvPr>
@@ -9653,15 +14768,15 @@
           <p:nvPr/>
         </p:nvPicPr>
         <p:blipFill>
-          <a:blip r:embed="rId2"/>
+          <a:blip r:embed="rId8"/>
           <a:stretch>
             <a:fillRect/>
           </a:stretch>
         </p:blipFill>
         <p:spPr>
           <a:xfrm>
-            <a:off x="3216477" y="1268773"/>
-            <a:ext cx="725339" cy="725339"/>
+            <a:off x="8267293" y="1679125"/>
+            <a:ext cx="249595" cy="343107"/>
           </a:xfrm>
           <a:prstGeom prst="rect">
             <a:avLst/>
@@ -9670,10 +14785,10 @@
       </p:pic>
       <p:pic>
         <p:nvPicPr>
-          <p:cNvPr id="28" name="図 27">
-            <a:extLst>
-              <a:ext uri="{FF2B5EF4-FFF2-40B4-BE49-F238E27FC236}">
-                <a16:creationId xmlns:a16="http://schemas.microsoft.com/office/drawing/2014/main" id="{46FF5D6C-7F50-63D8-8BC7-1B09B24D45A8}"/>
+          <p:cNvPr id="29" name="図 28">
+            <a:extLst>
+              <a:ext uri="{FF2B5EF4-FFF2-40B4-BE49-F238E27FC236}">
+                <a16:creationId xmlns:a16="http://schemas.microsoft.com/office/drawing/2014/main" id="{63626DDE-9A4C-4189-620E-0E1601CE6767}"/>
               </a:ext>
             </a:extLst>
           </p:cNvPr>
@@ -9683,15 +14798,15 @@
           <p:nvPr/>
         </p:nvPicPr>
         <p:blipFill>
-          <a:blip r:embed="rId2"/>
+          <a:blip r:embed="rId8"/>
           <a:stretch>
             <a:fillRect/>
           </a:stretch>
         </p:blipFill>
         <p:spPr>
           <a:xfrm>
-            <a:off x="1056828" y="3432780"/>
-            <a:ext cx="725339" cy="725339"/>
+            <a:off x="8681338" y="1195846"/>
+            <a:ext cx="249595" cy="343107"/>
           </a:xfrm>
           <a:prstGeom prst="rect">
             <a:avLst/>
@@ -9700,10 +14815,10 @@
       </p:pic>
       <p:pic>
         <p:nvPicPr>
-          <p:cNvPr id="31" name="図 30">
-            <a:extLst>
-              <a:ext uri="{FF2B5EF4-FFF2-40B4-BE49-F238E27FC236}">
-                <a16:creationId xmlns:a16="http://schemas.microsoft.com/office/drawing/2014/main" id="{0F8BC0CC-641E-2336-E696-FBA91D58244C}"/>
+          <p:cNvPr id="30" name="図 29">
+            <a:extLst>
+              <a:ext uri="{FF2B5EF4-FFF2-40B4-BE49-F238E27FC236}">
+                <a16:creationId xmlns:a16="http://schemas.microsoft.com/office/drawing/2014/main" id="{4CD92754-3D4D-6CF5-9693-15E6818FB644}"/>
               </a:ext>
             </a:extLst>
           </p:cNvPr>
@@ -9713,15 +14828,15 @@
           <p:nvPr/>
         </p:nvPicPr>
         <p:blipFill>
-          <a:blip r:embed="rId2"/>
+          <a:blip r:embed="rId8"/>
           <a:stretch>
             <a:fillRect/>
           </a:stretch>
         </p:blipFill>
         <p:spPr>
           <a:xfrm>
-            <a:off x="7535775" y="3432780"/>
-            <a:ext cx="725339" cy="725339"/>
+            <a:off x="8808511" y="1775794"/>
+            <a:ext cx="249595" cy="343107"/>
           </a:xfrm>
           <a:prstGeom prst="rect">
             <a:avLst/>
@@ -9730,10 +14845,10 @@
       </p:pic>
       <p:pic>
         <p:nvPicPr>
-          <p:cNvPr id="32" name="図 31">
-            <a:extLst>
-              <a:ext uri="{FF2B5EF4-FFF2-40B4-BE49-F238E27FC236}">
-                <a16:creationId xmlns:a16="http://schemas.microsoft.com/office/drawing/2014/main" id="{80885748-88AB-E974-41C2-EA9108BA6904}"/>
+          <p:cNvPr id="45" name="図 44">
+            <a:extLst>
+              <a:ext uri="{FF2B5EF4-FFF2-40B4-BE49-F238E27FC236}">
+                <a16:creationId xmlns:a16="http://schemas.microsoft.com/office/drawing/2014/main" id="{D921C1B8-3212-70EB-5733-1736ECA4E03B}"/>
               </a:ext>
             </a:extLst>
           </p:cNvPr>
@@ -9743,15 +14858,15 @@
           <p:nvPr/>
         </p:nvPicPr>
         <p:blipFill>
-          <a:blip r:embed="rId2"/>
+          <a:blip r:embed="rId8"/>
           <a:stretch>
             <a:fillRect/>
           </a:stretch>
         </p:blipFill>
         <p:spPr>
           <a:xfrm>
-            <a:off x="9695426" y="3432780"/>
-            <a:ext cx="725339" cy="725339"/>
+            <a:off x="9344288" y="1275544"/>
+            <a:ext cx="249595" cy="343107"/>
           </a:xfrm>
           <a:prstGeom prst="rect">
             <a:avLst/>
@@ -9760,10 +14875,10 @@
       </p:pic>
       <p:pic>
         <p:nvPicPr>
-          <p:cNvPr id="33" name="図 32">
-            <a:extLst>
-              <a:ext uri="{FF2B5EF4-FFF2-40B4-BE49-F238E27FC236}">
-                <a16:creationId xmlns:a16="http://schemas.microsoft.com/office/drawing/2014/main" id="{DFAD4664-EC4D-1FCE-FB6C-457EDDAC96BC}"/>
+          <p:cNvPr id="46" name="図 45">
+            <a:extLst>
+              <a:ext uri="{FF2B5EF4-FFF2-40B4-BE49-F238E27FC236}">
+                <a16:creationId xmlns:a16="http://schemas.microsoft.com/office/drawing/2014/main" id="{41C1F0FD-2046-3608-CFC1-A4CABBDB3310}"/>
               </a:ext>
             </a:extLst>
           </p:cNvPr>
@@ -9773,15 +14888,15 @@
           <p:nvPr/>
         </p:nvPicPr>
         <p:blipFill>
-          <a:blip r:embed="rId2"/>
+          <a:blip r:embed="rId8"/>
           <a:stretch>
             <a:fillRect/>
           </a:stretch>
         </p:blipFill>
         <p:spPr>
           <a:xfrm>
-            <a:off x="3216477" y="3432780"/>
-            <a:ext cx="725339" cy="725339"/>
+            <a:off x="9525477" y="1439337"/>
+            <a:ext cx="249595" cy="343107"/>
           </a:xfrm>
           <a:prstGeom prst="rect">
             <a:avLst/>
@@ -9790,10 +14905,10 @@
       </p:pic>
       <p:pic>
         <p:nvPicPr>
-          <p:cNvPr id="34" name="図 33">
-            <a:extLst>
-              <a:ext uri="{FF2B5EF4-FFF2-40B4-BE49-F238E27FC236}">
-                <a16:creationId xmlns:a16="http://schemas.microsoft.com/office/drawing/2014/main" id="{2F0BC8CC-892F-BB72-49AD-4FFEF8DDB062}"/>
+          <p:cNvPr id="49" name="図 48">
+            <a:extLst>
+              <a:ext uri="{FF2B5EF4-FFF2-40B4-BE49-F238E27FC236}">
+                <a16:creationId xmlns:a16="http://schemas.microsoft.com/office/drawing/2014/main" id="{5B633E94-F9C9-41E7-DC7A-2B2C2299BD77}"/>
               </a:ext>
             </a:extLst>
           </p:cNvPr>
@@ -9803,15 +14918,15 @@
           <p:nvPr/>
         </p:nvPicPr>
         <p:blipFill>
-          <a:blip r:embed="rId2"/>
+          <a:blip r:embed="rId8"/>
           <a:stretch>
             <a:fillRect/>
           </a:stretch>
         </p:blipFill>
         <p:spPr>
           <a:xfrm>
-            <a:off x="5376126" y="3432780"/>
-            <a:ext cx="725339" cy="725339"/>
+            <a:off x="9454858" y="1782444"/>
+            <a:ext cx="249595" cy="343107"/>
           </a:xfrm>
           <a:prstGeom prst="rect">
             <a:avLst/>
@@ -9820,10 +14935,10 @@
       </p:pic>
       <p:pic>
         <p:nvPicPr>
-          <p:cNvPr id="23" name="図 22">
-            <a:extLst>
-              <a:ext uri="{FF2B5EF4-FFF2-40B4-BE49-F238E27FC236}">
-                <a16:creationId xmlns:a16="http://schemas.microsoft.com/office/drawing/2014/main" id="{80F2CD32-982F-63AC-1B84-472A306A3363}"/>
+          <p:cNvPr id="50" name="図 49">
+            <a:extLst>
+              <a:ext uri="{FF2B5EF4-FFF2-40B4-BE49-F238E27FC236}">
+                <a16:creationId xmlns:a16="http://schemas.microsoft.com/office/drawing/2014/main" id="{F8768D49-2A36-907B-FBE6-5887EFC868B3}"/>
               </a:ext>
             </a:extLst>
           </p:cNvPr>
@@ -9833,291 +14948,291 @@
           <p:nvPr/>
         </p:nvPicPr>
         <p:blipFill>
-          <a:blip r:embed="rId2"/>
+          <a:blip r:embed="rId8"/>
           <a:stretch>
             <a:fillRect/>
           </a:stretch>
         </p:blipFill>
         <p:spPr>
           <a:xfrm>
-            <a:off x="1056828" y="1268773"/>
-            <a:ext cx="725339" cy="725339"/>
+            <a:off x="9837937" y="1194049"/>
+            <a:ext cx="249595" cy="343107"/>
           </a:xfrm>
           <a:prstGeom prst="rect">
             <a:avLst/>
           </a:prstGeom>
         </p:spPr>
       </p:pic>
-      <p:sp>
-        <p:nvSpPr>
-          <p:cNvPr id="2" name="正方形/長方形 1">
-            <a:extLst>
-              <a:ext uri="{FF2B5EF4-FFF2-40B4-BE49-F238E27FC236}">
-                <a16:creationId xmlns:a16="http://schemas.microsoft.com/office/drawing/2014/main" id="{B07F1DE8-07A2-9690-2E40-F6CF7AF07A6B}"/>
-              </a:ext>
-            </a:extLst>
-          </p:cNvPr>
-          <p:cNvSpPr/>
-          <p:nvPr/>
-        </p:nvSpPr>
-        <p:spPr>
-          <a:xfrm>
-            <a:off x="5196168" y="1122960"/>
-            <a:ext cx="1069260" cy="1069260"/>
-          </a:xfrm>
-          <a:prstGeom prst="rect">
-            <a:avLst/>
-          </a:prstGeom>
-          <a:solidFill>
-            <a:schemeClr val="bg1"/>
-          </a:solidFill>
-          <a:ln>
-            <a:solidFill>
-              <a:schemeClr val="tx1"/>
-            </a:solidFill>
-          </a:ln>
-        </p:spPr>
-        <p:style>
-          <a:lnRef idx="2">
-            <a:schemeClr val="accent1">
-              <a:shade val="50000"/>
-            </a:schemeClr>
-          </a:lnRef>
-          <a:fillRef idx="1">
-            <a:schemeClr val="accent1"/>
-          </a:fillRef>
-          <a:effectRef idx="0">
-            <a:schemeClr val="accent1"/>
-          </a:effectRef>
-          <a:fontRef idx="minor">
-            <a:schemeClr val="lt1"/>
-          </a:fontRef>
-        </p:style>
-        <p:txBody>
-          <a:bodyPr rtlCol="0" anchor="ctr"/>
-          <a:lstStyle/>
-          <a:p>
-            <a:pPr algn="ctr"/>
-            <a:endParaRPr kumimoji="1" lang="ja-JP" altLang="en-US"/>
-          </a:p>
-        </p:txBody>
-      </p:sp>
-      <p:sp>
-        <p:nvSpPr>
-          <p:cNvPr id="3" name="正方形/長方形 2">
-            <a:extLst>
-              <a:ext uri="{FF2B5EF4-FFF2-40B4-BE49-F238E27FC236}">
-                <a16:creationId xmlns:a16="http://schemas.microsoft.com/office/drawing/2014/main" id="{19D9CF8B-B4A9-7F5F-FD39-224B29C0AE83}"/>
-              </a:ext>
-            </a:extLst>
-          </p:cNvPr>
-          <p:cNvSpPr/>
-          <p:nvPr/>
-        </p:nvSpPr>
-        <p:spPr>
-          <a:xfrm>
-            <a:off x="6645353" y="1122960"/>
-            <a:ext cx="1069260" cy="1069260"/>
-          </a:xfrm>
-          <a:prstGeom prst="rect">
-            <a:avLst/>
-          </a:prstGeom>
-          <a:solidFill>
-            <a:schemeClr val="bg1"/>
-          </a:solidFill>
-          <a:ln>
-            <a:solidFill>
-              <a:schemeClr val="tx1"/>
-            </a:solidFill>
-          </a:ln>
-        </p:spPr>
-        <p:style>
-          <a:lnRef idx="2">
-            <a:schemeClr val="accent1">
-              <a:shade val="50000"/>
-            </a:schemeClr>
-          </a:lnRef>
-          <a:fillRef idx="1">
-            <a:schemeClr val="accent1"/>
-          </a:fillRef>
-          <a:effectRef idx="0">
-            <a:schemeClr val="accent1"/>
-          </a:effectRef>
-          <a:fontRef idx="minor">
-            <a:schemeClr val="lt1"/>
-          </a:fontRef>
-        </p:style>
-        <p:txBody>
-          <a:bodyPr rtlCol="0" anchor="ctr"/>
-          <a:lstStyle/>
-          <a:p>
-            <a:pPr algn="ctr"/>
-            <a:endParaRPr kumimoji="1" lang="ja-JP" altLang="en-US"/>
-          </a:p>
-        </p:txBody>
-      </p:sp>
-      <p:sp>
-        <p:nvSpPr>
-          <p:cNvPr id="4" name="正方形/長方形 3">
-            <a:extLst>
-              <a:ext uri="{FF2B5EF4-FFF2-40B4-BE49-F238E27FC236}">
-                <a16:creationId xmlns:a16="http://schemas.microsoft.com/office/drawing/2014/main" id="{1746BB52-42D5-E27C-269C-342C16BA71EC}"/>
-              </a:ext>
-            </a:extLst>
-          </p:cNvPr>
-          <p:cNvSpPr/>
-          <p:nvPr/>
-        </p:nvSpPr>
-        <p:spPr>
-          <a:xfrm>
-            <a:off x="8075194" y="1122960"/>
-            <a:ext cx="1069260" cy="1069260"/>
-          </a:xfrm>
-          <a:prstGeom prst="rect">
-            <a:avLst/>
-          </a:prstGeom>
-          <a:solidFill>
-            <a:schemeClr val="bg1"/>
-          </a:solidFill>
-          <a:ln>
-            <a:solidFill>
-              <a:schemeClr val="tx1"/>
-            </a:solidFill>
-          </a:ln>
-        </p:spPr>
-        <p:style>
-          <a:lnRef idx="2">
-            <a:schemeClr val="accent1">
-              <a:shade val="50000"/>
-            </a:schemeClr>
-          </a:lnRef>
-          <a:fillRef idx="1">
-            <a:schemeClr val="accent1"/>
-          </a:fillRef>
-          <a:effectRef idx="0">
-            <a:schemeClr val="accent1"/>
-          </a:effectRef>
-          <a:fontRef idx="minor">
-            <a:schemeClr val="lt1"/>
-          </a:fontRef>
-        </p:style>
-        <p:txBody>
-          <a:bodyPr rtlCol="0" anchor="ctr"/>
-          <a:lstStyle/>
-          <a:p>
-            <a:pPr algn="ctr"/>
-            <a:endParaRPr kumimoji="1" lang="ja-JP" altLang="en-US"/>
-          </a:p>
-        </p:txBody>
-      </p:sp>
-      <p:sp>
-        <p:nvSpPr>
-          <p:cNvPr id="5" name="正方形/長方形 4">
-            <a:extLst>
-              <a:ext uri="{FF2B5EF4-FFF2-40B4-BE49-F238E27FC236}">
-                <a16:creationId xmlns:a16="http://schemas.microsoft.com/office/drawing/2014/main" id="{6E47CB9E-FB60-4D24-2A05-F390FEADEA74}"/>
-              </a:ext>
-            </a:extLst>
-          </p:cNvPr>
-          <p:cNvSpPr/>
-          <p:nvPr/>
-        </p:nvSpPr>
-        <p:spPr>
-          <a:xfrm>
-            <a:off x="9155958" y="1122960"/>
-            <a:ext cx="1069260" cy="1069260"/>
-          </a:xfrm>
-          <a:prstGeom prst="rect">
-            <a:avLst/>
-          </a:prstGeom>
-          <a:solidFill>
-            <a:schemeClr val="bg1"/>
-          </a:solidFill>
-          <a:ln>
-            <a:solidFill>
-              <a:schemeClr val="tx1"/>
-            </a:solidFill>
-          </a:ln>
-        </p:spPr>
-        <p:style>
-          <a:lnRef idx="2">
-            <a:schemeClr val="accent1">
-              <a:shade val="50000"/>
-            </a:schemeClr>
-          </a:lnRef>
-          <a:fillRef idx="1">
-            <a:schemeClr val="accent1"/>
-          </a:fillRef>
-          <a:effectRef idx="0">
-            <a:schemeClr val="accent1"/>
-          </a:effectRef>
-          <a:fontRef idx="minor">
-            <a:schemeClr val="lt1"/>
-          </a:fontRef>
-        </p:style>
-        <p:txBody>
-          <a:bodyPr rtlCol="0" anchor="ctr"/>
-          <a:lstStyle/>
-          <a:p>
-            <a:pPr algn="ctr"/>
-            <a:endParaRPr kumimoji="1" lang="ja-JP" altLang="en-US"/>
-          </a:p>
-        </p:txBody>
-      </p:sp>
-      <p:sp>
-        <p:nvSpPr>
-          <p:cNvPr id="6" name="正方形/長方形 5">
-            <a:extLst>
-              <a:ext uri="{FF2B5EF4-FFF2-40B4-BE49-F238E27FC236}">
-                <a16:creationId xmlns:a16="http://schemas.microsoft.com/office/drawing/2014/main" id="{AB8D9B2B-1628-649F-7934-3F39F02DA3E9}"/>
-              </a:ext>
-            </a:extLst>
-          </p:cNvPr>
-          <p:cNvSpPr/>
-          <p:nvPr/>
-        </p:nvSpPr>
-        <p:spPr>
-          <a:xfrm>
-            <a:off x="10236721" y="1122960"/>
-            <a:ext cx="1069260" cy="1069260"/>
-          </a:xfrm>
-          <a:prstGeom prst="rect">
-            <a:avLst/>
-          </a:prstGeom>
-          <a:solidFill>
-            <a:schemeClr val="bg1"/>
-          </a:solidFill>
-          <a:ln>
-            <a:solidFill>
-              <a:schemeClr val="tx1"/>
-            </a:solidFill>
-          </a:ln>
-        </p:spPr>
-        <p:style>
-          <a:lnRef idx="2">
-            <a:schemeClr val="accent1">
-              <a:shade val="50000"/>
-            </a:schemeClr>
-          </a:lnRef>
-          <a:fillRef idx="1">
-            <a:schemeClr val="accent1"/>
-          </a:fillRef>
-          <a:effectRef idx="0">
-            <a:schemeClr val="accent1"/>
-          </a:effectRef>
-          <a:fontRef idx="minor">
-            <a:schemeClr val="lt1"/>
-          </a:fontRef>
-        </p:style>
-        <p:txBody>
-          <a:bodyPr rtlCol="0" anchor="ctr"/>
-          <a:lstStyle/>
-          <a:p>
-            <a:pPr algn="ctr"/>
-            <a:endParaRPr kumimoji="1" lang="ja-JP" altLang="en-US"/>
-          </a:p>
-        </p:txBody>
-      </p:sp>
+      <p:pic>
+        <p:nvPicPr>
+          <p:cNvPr id="51" name="図 50">
+            <a:extLst>
+              <a:ext uri="{FF2B5EF4-FFF2-40B4-BE49-F238E27FC236}">
+                <a16:creationId xmlns:a16="http://schemas.microsoft.com/office/drawing/2014/main" id="{E9904629-7DA1-5986-A159-5401DE6A9F44}"/>
+              </a:ext>
+            </a:extLst>
+          </p:cNvPr>
+          <p:cNvPicPr>
+            <a:picLocks noChangeAspect="1"/>
+          </p:cNvPicPr>
+          <p:nvPr/>
+        </p:nvPicPr>
+        <p:blipFill>
+          <a:blip r:embed="rId8"/>
+          <a:stretch>
+            <a:fillRect/>
+          </a:stretch>
+        </p:blipFill>
+        <p:spPr>
+          <a:xfrm>
+            <a:off x="9695849" y="1647662"/>
+            <a:ext cx="249595" cy="343107"/>
+          </a:xfrm>
+          <a:prstGeom prst="rect">
+            <a:avLst/>
+          </a:prstGeom>
+        </p:spPr>
+      </p:pic>
+      <p:pic>
+        <p:nvPicPr>
+          <p:cNvPr id="61" name="図 60">
+            <a:extLst>
+              <a:ext uri="{FF2B5EF4-FFF2-40B4-BE49-F238E27FC236}">
+                <a16:creationId xmlns:a16="http://schemas.microsoft.com/office/drawing/2014/main" id="{D688FB69-1D27-CB9B-7027-0328B29FA093}"/>
+              </a:ext>
+            </a:extLst>
+          </p:cNvPr>
+          <p:cNvPicPr>
+            <a:picLocks noChangeAspect="1"/>
+          </p:cNvPicPr>
+          <p:nvPr/>
+        </p:nvPicPr>
+        <p:blipFill>
+          <a:blip r:embed="rId8"/>
+          <a:stretch>
+            <a:fillRect/>
+          </a:stretch>
+        </p:blipFill>
+        <p:spPr>
+          <a:xfrm>
+            <a:off x="10349505" y="1284674"/>
+            <a:ext cx="249595" cy="343107"/>
+          </a:xfrm>
+          <a:prstGeom prst="rect">
+            <a:avLst/>
+          </a:prstGeom>
+        </p:spPr>
+      </p:pic>
+      <p:pic>
+        <p:nvPicPr>
+          <p:cNvPr id="62" name="図 61">
+            <a:extLst>
+              <a:ext uri="{FF2B5EF4-FFF2-40B4-BE49-F238E27FC236}">
+                <a16:creationId xmlns:a16="http://schemas.microsoft.com/office/drawing/2014/main" id="{4CD2E288-6563-6ADC-D803-92105C3B7584}"/>
+              </a:ext>
+            </a:extLst>
+          </p:cNvPr>
+          <p:cNvPicPr>
+            <a:picLocks noChangeAspect="1"/>
+          </p:cNvPicPr>
+          <p:nvPr/>
+        </p:nvPicPr>
+        <p:blipFill>
+          <a:blip r:embed="rId8"/>
+          <a:stretch>
+            <a:fillRect/>
+          </a:stretch>
+        </p:blipFill>
+        <p:spPr>
+          <a:xfrm>
+            <a:off x="10574530" y="1384820"/>
+            <a:ext cx="249595" cy="343107"/>
+          </a:xfrm>
+          <a:prstGeom prst="rect">
+            <a:avLst/>
+          </a:prstGeom>
+        </p:spPr>
+      </p:pic>
+      <p:pic>
+        <p:nvPicPr>
+          <p:cNvPr id="63" name="図 62">
+            <a:extLst>
+              <a:ext uri="{FF2B5EF4-FFF2-40B4-BE49-F238E27FC236}">
+                <a16:creationId xmlns:a16="http://schemas.microsoft.com/office/drawing/2014/main" id="{DFEB5DA7-FC1B-7505-AEF4-51E2DA9C9B33}"/>
+              </a:ext>
+            </a:extLst>
+          </p:cNvPr>
+          <p:cNvPicPr>
+            <a:picLocks noChangeAspect="1"/>
+          </p:cNvPicPr>
+          <p:nvPr/>
+        </p:nvPicPr>
+        <p:blipFill>
+          <a:blip r:embed="rId8"/>
+          <a:stretch>
+            <a:fillRect/>
+          </a:stretch>
+        </p:blipFill>
+        <p:spPr>
+          <a:xfrm>
+            <a:off x="10486681" y="1723045"/>
+            <a:ext cx="249595" cy="343107"/>
+          </a:xfrm>
+          <a:prstGeom prst="rect">
+            <a:avLst/>
+          </a:prstGeom>
+        </p:spPr>
+      </p:pic>
+      <p:pic>
+        <p:nvPicPr>
+          <p:cNvPr id="64" name="図 63">
+            <a:extLst>
+              <a:ext uri="{FF2B5EF4-FFF2-40B4-BE49-F238E27FC236}">
+                <a16:creationId xmlns:a16="http://schemas.microsoft.com/office/drawing/2014/main" id="{28FCF27D-4798-80F2-0804-630322DCCEBE}"/>
+              </a:ext>
+            </a:extLst>
+          </p:cNvPr>
+          <p:cNvPicPr>
+            <a:picLocks noChangeAspect="1"/>
+          </p:cNvPicPr>
+          <p:nvPr/>
+        </p:nvPicPr>
+        <p:blipFill>
+          <a:blip r:embed="rId8"/>
+          <a:stretch>
+            <a:fillRect/>
+          </a:stretch>
+        </p:blipFill>
+        <p:spPr>
+          <a:xfrm>
+            <a:off x="10948412" y="1203178"/>
+            <a:ext cx="249595" cy="343107"/>
+          </a:xfrm>
+          <a:prstGeom prst="rect">
+            <a:avLst/>
+          </a:prstGeom>
+        </p:spPr>
+      </p:pic>
+      <p:pic>
+        <p:nvPicPr>
+          <p:cNvPr id="65" name="図 64">
+            <a:extLst>
+              <a:ext uri="{FF2B5EF4-FFF2-40B4-BE49-F238E27FC236}">
+                <a16:creationId xmlns:a16="http://schemas.microsoft.com/office/drawing/2014/main" id="{D0879CF2-2264-2982-A18D-156A18404F7E}"/>
+              </a:ext>
+            </a:extLst>
+          </p:cNvPr>
+          <p:cNvPicPr>
+            <a:picLocks noChangeAspect="1"/>
+          </p:cNvPicPr>
+          <p:nvPr/>
+        </p:nvPicPr>
+        <p:blipFill>
+          <a:blip r:embed="rId8"/>
+          <a:stretch>
+            <a:fillRect/>
+          </a:stretch>
+        </p:blipFill>
+        <p:spPr>
+          <a:xfrm>
+            <a:off x="10827425" y="1602624"/>
+            <a:ext cx="249595" cy="343107"/>
+          </a:xfrm>
+          <a:prstGeom prst="rect">
+            <a:avLst/>
+          </a:prstGeom>
+        </p:spPr>
+      </p:pic>
+      <p:pic>
+        <p:nvPicPr>
+          <p:cNvPr id="66" name="図 65">
+            <a:extLst>
+              <a:ext uri="{FF2B5EF4-FFF2-40B4-BE49-F238E27FC236}">
+                <a16:creationId xmlns:a16="http://schemas.microsoft.com/office/drawing/2014/main" id="{B67E44DC-EFAD-9ED4-964D-D18310C5ACFE}"/>
+              </a:ext>
+            </a:extLst>
+          </p:cNvPr>
+          <p:cNvPicPr>
+            <a:picLocks noChangeAspect="1"/>
+          </p:cNvPicPr>
+          <p:nvPr/>
+        </p:nvPicPr>
+        <p:blipFill>
+          <a:blip r:embed="rId8"/>
+          <a:stretch>
+            <a:fillRect/>
+          </a:stretch>
+        </p:blipFill>
+        <p:spPr>
+          <a:xfrm>
+            <a:off x="9943019" y="1597594"/>
+            <a:ext cx="249595" cy="343107"/>
+          </a:xfrm>
+          <a:prstGeom prst="rect">
+            <a:avLst/>
+          </a:prstGeom>
+        </p:spPr>
+      </p:pic>
+      <p:pic>
+        <p:nvPicPr>
+          <p:cNvPr id="67" name="図 66">
+            <a:extLst>
+              <a:ext uri="{FF2B5EF4-FFF2-40B4-BE49-F238E27FC236}">
+                <a16:creationId xmlns:a16="http://schemas.microsoft.com/office/drawing/2014/main" id="{22E3170C-5B84-DBFA-5A47-FF6C5200D2FC}"/>
+              </a:ext>
+            </a:extLst>
+          </p:cNvPr>
+          <p:cNvPicPr>
+            <a:picLocks noChangeAspect="1"/>
+          </p:cNvPicPr>
+          <p:nvPr/>
+        </p:nvPicPr>
+        <p:blipFill>
+          <a:blip r:embed="rId8"/>
+          <a:stretch>
+            <a:fillRect/>
+          </a:stretch>
+        </p:blipFill>
+        <p:spPr>
+          <a:xfrm>
+            <a:off x="9614630" y="1145770"/>
+            <a:ext cx="249595" cy="343107"/>
+          </a:xfrm>
+          <a:prstGeom prst="rect">
+            <a:avLst/>
+          </a:prstGeom>
+        </p:spPr>
+      </p:pic>
+      <p:pic>
+        <p:nvPicPr>
+          <p:cNvPr id="68" name="図 67">
+            <a:extLst>
+              <a:ext uri="{FF2B5EF4-FFF2-40B4-BE49-F238E27FC236}">
+                <a16:creationId xmlns:a16="http://schemas.microsoft.com/office/drawing/2014/main" id="{9A43DEAE-95B1-839B-9D07-0982EC2F9A4F}"/>
+              </a:ext>
+            </a:extLst>
+          </p:cNvPr>
+          <p:cNvPicPr>
+            <a:picLocks noChangeAspect="1"/>
+          </p:cNvPicPr>
+          <p:nvPr/>
+        </p:nvPicPr>
+        <p:blipFill>
+          <a:blip r:embed="rId8"/>
+          <a:stretch>
+            <a:fillRect/>
+          </a:stretch>
+        </p:blipFill>
+        <p:spPr>
+          <a:xfrm>
+            <a:off x="9214348" y="1597594"/>
+            <a:ext cx="249595" cy="343107"/>
+          </a:xfrm>
+          <a:prstGeom prst="rect">
+            <a:avLst/>
+          </a:prstGeom>
+        </p:spPr>
+      </p:pic>
     </p:spTree>
     <p:extLst>
       <p:ext uri="{BB962C8B-B14F-4D97-AF65-F5344CB8AC3E}">
